--- a/public/slides/hvac-precooling-slides.pptx
+++ b/public/slides/hvac-precooling-slides.pptx
@@ -14,6 +14,8 @@
     <p:sldId id="262" r:id="rId13"/>
     <p:sldId id="263" r:id="rId14"/>
     <p:sldId id="264" r:id="rId15"/>
+    <p:sldId id="265" r:id="rId16"/>
+    <p:sldId id="266" r:id="rId17"/>
   </p:sldIdLst>
   <p:sldSz cx="12191695" cy="6858000" type="screen4x3"/>
   <p:notesSz cx="6858000" cy="9144000"/>
@@ -3105,18 +3107,16 @@
         <p:spPr>
           <a:xfrm>
             <a:off x="0" y="0"/>
-            <a:ext cx="12191695" cy="1005840"/>
+            <a:ext cx="1901952" cy="6858000"/>
           </a:xfrm>
           <a:prstGeom prst="rect">
             <a:avLst/>
           </a:prstGeom>
           <a:solidFill>
-            <a:srgbClr val="092B4C"/>
+            <a:srgbClr val="0B3968"/>
           </a:solidFill>
           <a:ln>
-            <a:solidFill>
-              <a:srgbClr val="092B4C"/>
-            </a:solidFill>
+            <a:noFill/>
           </a:ln>
         </p:spPr>
         <p:style>
@@ -3143,25 +3143,292 @@
       </p:sp>
       <p:sp>
         <p:nvSpPr>
-          <p:cNvPr id="3" name="Rounded Rectangle 2"/>
+          <p:cNvPr id="3" name="TextBox 2"/>
+          <p:cNvSpPr txBox="1"/>
+          <p:nvPr/>
+        </p:nvSpPr>
+        <p:spPr>
+          <a:xfrm>
+            <a:off x="320040" y="1645920"/>
+            <a:ext cx="1371600" cy="1097280"/>
+          </a:xfrm>
+          <a:prstGeom prst="rect">
+            <a:avLst/>
+          </a:prstGeom>
+          <a:noFill/>
+        </p:spPr>
+        <p:txBody>
+          <a:bodyPr wrap="none">
+            <a:spAutoFit/>
+          </a:bodyPr>
+          <a:lstStyle/>
+          <a:p>
+            <a:pPr>
+              <a:defRPr sz="1400" b="1">
+                <a:solidFill>
+                  <a:srgbClr val="FFFFFF"/>
+                </a:solidFill>
+                <a:latin typeface="BIZ UDPGothic"/>
+              </a:defRPr>
+            </a:pPr>
+            <a:r>
+              <a:t>Electric</a:t>
+            </a:r>
+            <a:br/>
+            <a:r>
+              <a:t>Works</a:t>
+            </a:r>
+            <a:br/>
+            <a:r>
+              <a:t>Company</a:t>
+            </a:r>
+          </a:p>
+        </p:txBody>
+      </p:sp>
+      <p:sp>
+        <p:nvSpPr>
+          <p:cNvPr id="4" name="TextBox 3"/>
+          <p:cNvSpPr txBox="1"/>
+          <p:nvPr/>
+        </p:nvSpPr>
+        <p:spPr>
+          <a:xfrm>
+            <a:off x="320040" y="6035040"/>
+            <a:ext cx="1371600" cy="457200"/>
+          </a:xfrm>
+          <a:prstGeom prst="rect">
+            <a:avLst/>
+          </a:prstGeom>
+          <a:noFill/>
+        </p:spPr>
+        <p:txBody>
+          <a:bodyPr wrap="none">
+            <a:spAutoFit/>
+          </a:bodyPr>
+          <a:lstStyle/>
+          <a:p>
+            <a:pPr>
+              <a:defRPr sz="1800" b="1">
+                <a:solidFill>
+                  <a:srgbClr val="FFFFFF"/>
+                </a:solidFill>
+                <a:latin typeface="BIZ UDPGothic"/>
+              </a:defRPr>
+            </a:pPr>
+            <a:r>
+              <a:t>Panasonic</a:t>
+            </a:r>
+          </a:p>
+        </p:txBody>
+      </p:sp>
+      <p:sp>
+        <p:nvSpPr>
+          <p:cNvPr id="5" name="TextBox 4"/>
+          <p:cNvSpPr txBox="1"/>
+          <p:nvPr/>
+        </p:nvSpPr>
+        <p:spPr>
+          <a:xfrm>
+            <a:off x="2560320" y="2011680"/>
+            <a:ext cx="8686800" cy="1645920"/>
+          </a:xfrm>
+          <a:prstGeom prst="rect">
+            <a:avLst/>
+          </a:prstGeom>
+          <a:noFill/>
+        </p:spPr>
+        <p:txBody>
+          <a:bodyPr wrap="none">
+            <a:spAutoFit/>
+          </a:bodyPr>
+          <a:lstStyle/>
+          <a:p>
+            <a:pPr>
+              <a:defRPr sz="2500" b="1">
+                <a:solidFill>
+                  <a:srgbClr val="111111"/>
+                </a:solidFill>
+                <a:latin typeface="BIZ UDPGothic"/>
+              </a:defRPr>
+            </a:pPr>
+            <a:r>
+              <a:t>2026年度夏季インターンシップ成果報告会</a:t>
+            </a:r>
+          </a:p>
+          <a:p>
+            <a:pPr>
+              <a:spcBef>
+                <a:spcPts val="2000"/>
+              </a:spcBef>
+              <a:defRPr sz="2200" b="1">
+                <a:solidFill>
+                  <a:srgbClr val="111111"/>
+                </a:solidFill>
+                <a:latin typeface="BIZ UDPGothic"/>
+              </a:defRPr>
+            </a:pPr>
+            <a:r>
+              <a:t>非住宅省エネ効果可視化アプリの開発</a:t>
+            </a:r>
+          </a:p>
+        </p:txBody>
+      </p:sp>
+      <p:sp>
+        <p:nvSpPr>
+          <p:cNvPr id="6" name="TextBox 5"/>
+          <p:cNvSpPr txBox="1"/>
+          <p:nvPr/>
+        </p:nvSpPr>
+        <p:spPr>
+          <a:xfrm>
+            <a:off x="5486400" y="3474720"/>
+            <a:ext cx="4572000" cy="2560320"/>
+          </a:xfrm>
+          <a:prstGeom prst="rect">
+            <a:avLst/>
+          </a:prstGeom>
+          <a:noFill/>
+        </p:spPr>
+        <p:txBody>
+          <a:bodyPr wrap="none">
+            <a:spAutoFit/>
+          </a:bodyPr>
+          <a:lstStyle/>
+          <a:p>
+            <a:pPr algn="r">
+              <a:spcBef>
+                <a:spcPts val="0"/>
+              </a:spcBef>
+              <a:defRPr sz="1200" b="0">
+                <a:solidFill>
+                  <a:srgbClr val="333333"/>
+                </a:solidFill>
+                <a:latin typeface="BIZ UDPGothic"/>
+              </a:defRPr>
+            </a:pPr>
+            <a:r>
+              <a:t>実習部署：システムソリューション開発センター</a:t>
+            </a:r>
+          </a:p>
+          <a:p>
+            <a:pPr algn="r">
+              <a:spcBef>
+                <a:spcPts val="200"/>
+              </a:spcBef>
+              <a:defRPr sz="1200" b="0">
+                <a:solidFill>
+                  <a:srgbClr val="333333"/>
+                </a:solidFill>
+                <a:latin typeface="BIZ UDPGothic"/>
+              </a:defRPr>
+            </a:pPr>
+            <a:r>
+              <a:t>エンジニアリングアプリケーション開発部</a:t>
+            </a:r>
+          </a:p>
+          <a:p>
+            <a:pPr algn="r">
+              <a:spcBef>
+                <a:spcPts val="1600"/>
+              </a:spcBef>
+              <a:defRPr sz="1300" b="0">
+                <a:solidFill>
+                  <a:srgbClr val="333333"/>
+                </a:solidFill>
+                <a:latin typeface="BIZ UDPGothic"/>
+              </a:defRPr>
+            </a:pPr>
+            <a:r>
+              <a:t>2026/9/4</a:t>
+            </a:r>
+          </a:p>
+          <a:p>
+            <a:pPr algn="r">
+              <a:spcBef>
+                <a:spcPts val="600"/>
+              </a:spcBef>
+              <a:defRPr sz="1300" b="0">
+                <a:solidFill>
+                  <a:srgbClr val="333333"/>
+                </a:solidFill>
+                <a:latin typeface="BIZ UDPGothic"/>
+              </a:defRPr>
+            </a:pPr>
+            <a:r>
+              <a:t>北海道大学大学院1年</a:t>
+            </a:r>
+          </a:p>
+          <a:p>
+            <a:pPr algn="r">
+              <a:spcBef>
+                <a:spcPts val="200"/>
+              </a:spcBef>
+              <a:defRPr sz="1300" b="0">
+                <a:solidFill>
+                  <a:srgbClr val="333333"/>
+                </a:solidFill>
+                <a:latin typeface="BIZ UDPGothic"/>
+              </a:defRPr>
+            </a:pPr>
+            <a:r>
+              <a:t>情報科学専攻</a:t>
+            </a:r>
+          </a:p>
+          <a:p>
+            <a:pPr algn="r">
+              <a:spcBef>
+                <a:spcPts val="600"/>
+              </a:spcBef>
+              <a:defRPr sz="1600" b="1">
+                <a:solidFill>
+                  <a:srgbClr val="333333"/>
+                </a:solidFill>
+                <a:latin typeface="BIZ UDPGothic"/>
+              </a:defRPr>
+            </a:pPr>
+            <a:r>
+              <a:t>越海斗</a:t>
+            </a:r>
+          </a:p>
+        </p:txBody>
+      </p:sp>
+    </p:spTree>
+  </p:cSld>
+  <p:clrMapOvr>
+    <a:masterClrMapping/>
+  </p:clrMapOvr>
+</p:sld>
+</file>
+
+<file path=ppt/slides/slide10.xml><?xml version="1.0" encoding="utf-8"?>
+<p:sld xmlns:a="http://schemas.openxmlformats.org/drawingml/2006/main" xmlns:p="http://schemas.openxmlformats.org/presentationml/2006/main" xmlns:r="http://schemas.openxmlformats.org/officeDocument/2006/relationships">
+  <p:cSld>
+    <p:spTree>
+      <p:nvGrpSpPr>
+        <p:cNvPr id="1" name=""/>
+        <p:cNvGrpSpPr/>
+        <p:nvPr/>
+      </p:nvGrpSpPr>
+      <p:grpSpPr/>
+      <p:sp>
+        <p:nvSpPr>
+          <p:cNvPr id="2" name="Rectangle 1"/>
           <p:cNvSpPr/>
           <p:nvPr/>
         </p:nvSpPr>
         <p:spPr>
           <a:xfrm>
-            <a:off x="457200" y="109728"/>
-            <a:ext cx="2377440" cy="329184"/>
-          </a:xfrm>
-          <a:prstGeom prst="roundRect">
+            <a:off x="0" y="0"/>
+            <a:ext cx="12191695" cy="530352"/>
+          </a:xfrm>
+          <a:prstGeom prst="rect">
             <a:avLst/>
           </a:prstGeom>
           <a:solidFill>
-            <a:srgbClr val="0B5AA6"/>
+            <a:srgbClr val="0B3968"/>
           </a:solidFill>
           <a:ln>
-            <a:solidFill>
-              <a:srgbClr val="0B5AA6"/>
-            </a:solidFill>
+            <a:noFill/>
           </a:ln>
         </p:spPr>
         <p:style>
@@ -3179,33 +3446,23 @@
           </a:fontRef>
         </p:style>
         <p:txBody>
-          <a:bodyPr rtlCol="0" anchor="ctr" wrap="square"/>
-          <a:lstStyle/>
-          <a:p>
-            <a:pPr algn="ctr">
-              <a:defRPr sz="1400" b="1">
-                <a:solidFill>
-                  <a:srgbClr val="FFFFFF"/>
-                </a:solidFill>
-                <a:latin typeface="BIZ UDPGothic"/>
-              </a:defRPr>
-            </a:pPr>
-            <a:r>
-              <a:t>研究開発実習 成果報告</a:t>
-            </a:r>
-          </a:p>
-        </p:txBody>
-      </p:sp>
-      <p:sp>
-        <p:nvSpPr>
-          <p:cNvPr id="4" name="TextBox 3"/>
+          <a:bodyPr rtlCol="0" anchor="ctr"/>
+          <a:lstStyle/>
+          <a:p>
+            <a:pPr algn="ctr"/>
+          </a:p>
+        </p:txBody>
+      </p:sp>
+      <p:sp>
+        <p:nvSpPr>
+          <p:cNvPr id="3" name="TextBox 2"/>
           <p:cNvSpPr txBox="1"/>
           <p:nvPr/>
         </p:nvSpPr>
         <p:spPr>
           <a:xfrm>
-            <a:off x="457200" y="457200"/>
-            <a:ext cx="10058400" cy="502920"/>
+            <a:off x="301752" y="73152"/>
+            <a:ext cx="9144000" cy="411480"/>
           </a:xfrm>
           <a:prstGeom prst="rect">
             <a:avLst/>
@@ -3219,7 +3476,7 @@
           <a:lstStyle/>
           <a:p>
             <a:pPr>
-              <a:defRPr sz="2200" b="1">
+              <a:defRPr sz="1800" b="1">
                 <a:solidFill>
                   <a:srgbClr val="FFFFFF"/>
                 </a:solidFill>
@@ -3227,67 +3484,31 @@
               </a:defRPr>
             </a:pPr>
             <a:r>
-              <a:t>自己紹介 ＆ 本日の発表アジェンダ</a:t>
-            </a:r>
-          </a:p>
-        </p:txBody>
-      </p:sp>
-      <p:sp>
-        <p:nvSpPr>
-          <p:cNvPr id="5" name="TextBox 4"/>
-          <p:cNvSpPr txBox="1"/>
-          <p:nvPr/>
-        </p:nvSpPr>
-        <p:spPr>
-          <a:xfrm>
-            <a:off x="10789920" y="457200"/>
-            <a:ext cx="1005840" cy="411480"/>
-          </a:xfrm>
-          <a:prstGeom prst="rect">
-            <a:avLst/>
-          </a:prstGeom>
-          <a:noFill/>
-        </p:spPr>
-        <p:txBody>
-          <a:bodyPr wrap="none">
-            <a:spAutoFit/>
-          </a:bodyPr>
-          <a:lstStyle/>
-          <a:p>
-            <a:pPr algn="r">
-              <a:defRPr sz="1800" b="1">
-                <a:solidFill>
-                  <a:srgbClr val="EBF2F8"/>
-                </a:solidFill>
-                <a:latin typeface="BIZ UDPGothic"/>
-              </a:defRPr>
-            </a:pPr>
-            <a:r>
-              <a:t>01 / 08</a:t>
-            </a:r>
-          </a:p>
-        </p:txBody>
-      </p:sp>
-      <p:sp>
-        <p:nvSpPr>
-          <p:cNvPr id="6" name="Rectangle 5"/>
+              <a:t>9. 課題と今後の展望</a:t>
+            </a:r>
+          </a:p>
+        </p:txBody>
+      </p:sp>
+      <p:sp>
+        <p:nvSpPr>
+          <p:cNvPr id="4" name="Rounded Rectangle 3"/>
           <p:cNvSpPr/>
           <p:nvPr/>
         </p:nvSpPr>
         <p:spPr>
           <a:xfrm>
-            <a:off x="0" y="6537960"/>
-            <a:ext cx="12191695" cy="320040"/>
-          </a:xfrm>
-          <a:prstGeom prst="rect">
+            <a:off x="10789920" y="128016"/>
+            <a:ext cx="484632" cy="274320"/>
+          </a:xfrm>
+          <a:prstGeom prst="roundRect">
             <a:avLst/>
           </a:prstGeom>
           <a:solidFill>
-            <a:srgbClr val="F5F6F8"/>
+            <a:srgbClr val="24588E"/>
           </a:solidFill>
           <a:ln>
             <a:solidFill>
-              <a:srgbClr val="D2D7DE"/>
+              <a:srgbClr val="5E8DBE"/>
             </a:solidFill>
           </a:ln>
         </p:spPr>
@@ -3309,31 +3530,312 @@
           <a:bodyPr rtlCol="0" anchor="ctr"/>
           <a:lstStyle/>
           <a:p>
-            <a:pPr algn="ctr"/>
-          </a:p>
-        </p:txBody>
-      </p:sp>
-      <p:sp>
-        <p:nvSpPr>
-          <p:cNvPr id="7" name="Rounded Rectangle 6"/>
+            <a:pPr algn="ctr">
+              <a:defRPr sz="1100" i="1">
+                <a:solidFill>
+                  <a:srgbClr val="E8F1F8"/>
+                </a:solidFill>
+                <a:latin typeface="BIZ UDPGothic"/>
+              </a:defRPr>
+            </a:pPr>
+            <a:r>
+              <a:t>IUO</a:t>
+            </a:r>
+          </a:p>
+        </p:txBody>
+      </p:sp>
+      <p:sp>
+        <p:nvSpPr>
+          <p:cNvPr id="5" name="TextBox 4"/>
+          <p:cNvSpPr txBox="1"/>
+          <p:nvPr/>
+        </p:nvSpPr>
+        <p:spPr>
+          <a:xfrm>
+            <a:off x="11430000" y="73152"/>
+            <a:ext cx="548640" cy="411480"/>
+          </a:xfrm>
+          <a:prstGeom prst="rect">
+            <a:avLst/>
+          </a:prstGeom>
+          <a:noFill/>
+        </p:spPr>
+        <p:txBody>
+          <a:bodyPr wrap="none">
+            <a:spAutoFit/>
+          </a:bodyPr>
+          <a:lstStyle/>
+          <a:p>
+            <a:pPr algn="ctr">
+              <a:defRPr sz="1800" b="1">
+                <a:solidFill>
+                  <a:srgbClr val="FFFFFF"/>
+                </a:solidFill>
+                <a:latin typeface="BIZ UDPGothic"/>
+              </a:defRPr>
+            </a:pPr>
+            <a:r>
+              <a:t>10</a:t>
+            </a:r>
+          </a:p>
+        </p:txBody>
+      </p:sp>
+      <p:sp>
+        <p:nvSpPr>
+          <p:cNvPr id="6" name="TextBox 5"/>
+          <p:cNvSpPr txBox="1"/>
+          <p:nvPr/>
+        </p:nvSpPr>
+        <p:spPr>
+          <a:xfrm>
+            <a:off x="9144000" y="6537960"/>
+            <a:ext cx="2743200" cy="228600"/>
+          </a:xfrm>
+          <a:prstGeom prst="rect">
+            <a:avLst/>
+          </a:prstGeom>
+          <a:noFill/>
+        </p:spPr>
+        <p:txBody>
+          <a:bodyPr wrap="none">
+            <a:spAutoFit/>
+          </a:bodyPr>
+          <a:lstStyle/>
+          <a:p>
+            <a:pPr algn="r">
+              <a:defRPr sz="800">
+                <a:solidFill>
+                  <a:srgbClr val="666666"/>
+                </a:solidFill>
+                <a:latin typeface="BIZ UDPGothic"/>
+              </a:defRPr>
+            </a:pPr>
+            <a:r>
+              <a:t>© Panasonic Corporation</a:t>
+            </a:r>
+          </a:p>
+        </p:txBody>
+      </p:sp>
+      <p:sp>
+        <p:nvSpPr>
+          <p:cNvPr id="7" name="TextBox 6"/>
+          <p:cNvSpPr txBox="1"/>
+          <p:nvPr/>
+        </p:nvSpPr>
+        <p:spPr>
+          <a:xfrm>
+            <a:off x="822960" y="914400"/>
+            <a:ext cx="10515600" cy="5029200"/>
+          </a:xfrm>
+          <a:prstGeom prst="rect">
+            <a:avLst/>
+          </a:prstGeom>
+          <a:noFill/>
+        </p:spPr>
+        <p:txBody>
+          <a:bodyPr wrap="none">
+            <a:spAutoFit/>
+          </a:bodyPr>
+          <a:lstStyle/>
+          <a:p>
+            <a:pPr>
+              <a:spcBef>
+                <a:spcPts val="0"/>
+              </a:spcBef>
+              <a:defRPr sz="1400" b="1">
+                <a:solidFill>
+                  <a:srgbClr val="111111"/>
+                </a:solidFill>
+                <a:latin typeface="BIZ UDPGothic"/>
+              </a:defRPr>
+            </a:pPr>
+            <a:r>
+              <a:t>■ 課題</a:t>
+            </a:r>
+          </a:p>
+          <a:p>
+            <a:pPr>
+              <a:spcBef>
+                <a:spcPts val="600"/>
+              </a:spcBef>
+              <a:defRPr sz="1300" b="1">
+                <a:solidFill>
+                  <a:srgbClr val="111111"/>
+                </a:solidFill>
+                <a:latin typeface="BIZ UDPGothic"/>
+              </a:defRPr>
+            </a:pPr>
+            <a:r>
+              <a:t>1. 休み明けの予測の正確性</a:t>
+            </a:r>
+          </a:p>
+          <a:p>
+            <a:pPr>
+              <a:spcBef>
+                <a:spcPts val="200"/>
+              </a:spcBef>
+              <a:defRPr sz="1250" b="0">
+                <a:solidFill>
+                  <a:srgbClr val="333333"/>
+                </a:solidFill>
+                <a:latin typeface="BIZ UDPGothic"/>
+              </a:defRPr>
+            </a:pPr>
+            <a:r>
+              <a:t>・現状は平日運用とほぼ同じモデルを利用しているため、モデルとして適していない可能性</a:t>
+            </a:r>
+          </a:p>
+          <a:p>
+            <a:pPr>
+              <a:spcBef>
+                <a:spcPts val="1000"/>
+              </a:spcBef>
+              <a:defRPr sz="1300" b="1">
+                <a:solidFill>
+                  <a:srgbClr val="111111"/>
+                </a:solidFill>
+                <a:latin typeface="BIZ UDPGothic"/>
+              </a:defRPr>
+            </a:pPr>
+            <a:r>
+              <a:t>2. データ期間が短い</a:t>
+            </a:r>
+          </a:p>
+          <a:p>
+            <a:pPr>
+              <a:spcBef>
+                <a:spcPts val="200"/>
+              </a:spcBef>
+              <a:defRPr sz="1250" b="0">
+                <a:solidFill>
+                  <a:srgbClr val="333333"/>
+                </a:solidFill>
+                <a:latin typeface="BIZ UDPGothic"/>
+              </a:defRPr>
+            </a:pPr>
+            <a:r>
+              <a:t>・詳細なデータは2週間分であったため、より一般的な傾向をとらえきれていない可能性がある</a:t>
+            </a:r>
+          </a:p>
+          <a:p>
+            <a:pPr>
+              <a:spcBef>
+                <a:spcPts val="2000"/>
+              </a:spcBef>
+              <a:defRPr sz="1400" b="1">
+                <a:solidFill>
+                  <a:srgbClr val="111111"/>
+                </a:solidFill>
+                <a:latin typeface="BIZ UDPGothic"/>
+              </a:defRPr>
+            </a:pPr>
+            <a:r>
+              <a:t>■ 今後の展望</a:t>
+            </a:r>
+          </a:p>
+          <a:p>
+            <a:pPr>
+              <a:spcBef>
+                <a:spcPts val="600"/>
+              </a:spcBef>
+              <a:defRPr sz="1300" b="1">
+                <a:solidFill>
+                  <a:srgbClr val="111111"/>
+                </a:solidFill>
+                <a:latin typeface="BIZ UDPGothic"/>
+              </a:defRPr>
+            </a:pPr>
+            <a:r>
+              <a:t>1. 暖房期への対応</a:t>
+            </a:r>
+          </a:p>
+          <a:p>
+            <a:pPr>
+              <a:spcBef>
+                <a:spcPts val="600"/>
+              </a:spcBef>
+              <a:defRPr sz="1300" b="1">
+                <a:solidFill>
+                  <a:srgbClr val="111111"/>
+                </a:solidFill>
+                <a:latin typeface="BIZ UDPGothic"/>
+              </a:defRPr>
+            </a:pPr>
+            <a:r>
+              <a:t>2. 第二別館内の他フロア、または他棟への展開</a:t>
+            </a:r>
+          </a:p>
+          <a:p>
+            <a:pPr>
+              <a:spcBef>
+                <a:spcPts val="600"/>
+              </a:spcBef>
+              <a:defRPr sz="1300" b="1">
+                <a:solidFill>
+                  <a:srgbClr val="111111"/>
+                </a:solidFill>
+                <a:latin typeface="BIZ UDPGothic"/>
+              </a:defRPr>
+            </a:pPr>
+            <a:r>
+              <a:t>3. 外気温度、設定温度以外の変数の考慮（外気湿度など）</a:t>
+            </a:r>
+          </a:p>
+          <a:p>
+            <a:pPr>
+              <a:spcBef>
+                <a:spcPts val="600"/>
+              </a:spcBef>
+              <a:defRPr sz="1300" b="1">
+                <a:solidFill>
+                  <a:srgbClr val="111111"/>
+                </a:solidFill>
+                <a:latin typeface="BIZ UDPGothic"/>
+              </a:defRPr>
+            </a:pPr>
+            <a:r>
+              <a:t>4. データ読み取り→モデル再学習</a:t>
+            </a:r>
+          </a:p>
+        </p:txBody>
+      </p:sp>
+    </p:spTree>
+  </p:cSld>
+  <p:clrMapOvr>
+    <a:masterClrMapping/>
+  </p:clrMapOvr>
+</p:sld>
+</file>
+
+<file path=ppt/slides/slide11.xml><?xml version="1.0" encoding="utf-8"?>
+<p:sld xmlns:a="http://schemas.openxmlformats.org/drawingml/2006/main" xmlns:p="http://schemas.openxmlformats.org/presentationml/2006/main" xmlns:r="http://schemas.openxmlformats.org/officeDocument/2006/relationships">
+  <p:cSld>
+    <p:spTree>
+      <p:nvGrpSpPr>
+        <p:cNvPr id="1" name=""/>
+        <p:cNvGrpSpPr/>
+        <p:nvPr/>
+      </p:nvGrpSpPr>
+      <p:grpSpPr/>
+      <p:sp>
+        <p:nvSpPr>
+          <p:cNvPr id="2" name="Rectangle 1"/>
           <p:cNvSpPr/>
           <p:nvPr/>
         </p:nvSpPr>
         <p:spPr>
           <a:xfrm>
-            <a:off x="548640" y="1188720"/>
-            <a:ext cx="5486400" cy="5120640"/>
-          </a:xfrm>
-          <a:prstGeom prst="roundRect">
+            <a:off x="0" y="0"/>
+            <a:ext cx="12191695" cy="530352"/>
+          </a:xfrm>
+          <a:prstGeom prst="rect">
             <a:avLst/>
           </a:prstGeom>
           <a:solidFill>
-            <a:srgbClr val="EBF2F8"/>
+            <a:srgbClr val="0B3968"/>
           </a:solidFill>
-          <a:ln w="19050">
-            <a:solidFill>
-              <a:srgbClr val="0B5AA6"/>
-            </a:solidFill>
+          <a:ln>
+            <a:noFill/>
           </a:ln>
         </p:spPr>
         <p:style>
@@ -3360,24 +3862,60 @@
       </p:sp>
       <p:sp>
         <p:nvSpPr>
-          <p:cNvPr id="8" name="Rectangle 7"/>
+          <p:cNvPr id="3" name="TextBox 2"/>
+          <p:cNvSpPr txBox="1"/>
+          <p:nvPr/>
+        </p:nvSpPr>
+        <p:spPr>
+          <a:xfrm>
+            <a:off x="301752" y="73152"/>
+            <a:ext cx="9144000" cy="411480"/>
+          </a:xfrm>
+          <a:prstGeom prst="rect">
+            <a:avLst/>
+          </a:prstGeom>
+          <a:noFill/>
+        </p:spPr>
+        <p:txBody>
+          <a:bodyPr wrap="square">
+            <a:spAutoFit/>
+          </a:bodyPr>
+          <a:lstStyle/>
+          <a:p>
+            <a:pPr>
+              <a:defRPr sz="1800" b="1">
+                <a:solidFill>
+                  <a:srgbClr val="FFFFFF"/>
+                </a:solidFill>
+                <a:latin typeface="BIZ UDPGothic"/>
+              </a:defRPr>
+            </a:pPr>
+            <a:r>
+              <a:t>10. 所感</a:t>
+            </a:r>
+          </a:p>
+        </p:txBody>
+      </p:sp>
+      <p:sp>
+        <p:nvSpPr>
+          <p:cNvPr id="4" name="Rounded Rectangle 3"/>
           <p:cNvSpPr/>
           <p:nvPr/>
         </p:nvSpPr>
         <p:spPr>
           <a:xfrm>
-            <a:off x="731520" y="1371600"/>
-            <a:ext cx="2377440" cy="411480"/>
-          </a:xfrm>
-          <a:prstGeom prst="rect">
+            <a:off x="10789920" y="128016"/>
+            <a:ext cx="484632" cy="274320"/>
+          </a:xfrm>
+          <a:prstGeom prst="roundRect">
             <a:avLst/>
           </a:prstGeom>
           <a:solidFill>
-            <a:srgbClr val="0B5AA6"/>
+            <a:srgbClr val="24588E"/>
           </a:solidFill>
           <a:ln>
             <a:solidFill>
-              <a:srgbClr val="0B5AA6"/>
+              <a:srgbClr val="5E8DBE"/>
             </a:solidFill>
           </a:ln>
         </p:spPr>
@@ -3400,399 +3938,29 @@
           <a:lstStyle/>
           <a:p>
             <a:pPr algn="ctr">
-              <a:defRPr sz="1800" b="1">
-                <a:solidFill>
-                  <a:srgbClr val="FFFFFF"/>
-                </a:solidFill>
-                <a:latin typeface="BIZ UDPGothic"/>
-              </a:defRPr>
-            </a:pPr>
-            <a:r>
-              <a:t>実習生プロフィール</a:t>
-            </a:r>
-          </a:p>
-        </p:txBody>
-      </p:sp>
-      <p:sp>
-        <p:nvSpPr>
-          <p:cNvPr id="9" name="TextBox 8"/>
+              <a:defRPr sz="1100" i="1">
+                <a:solidFill>
+                  <a:srgbClr val="E8F1F8"/>
+                </a:solidFill>
+                <a:latin typeface="BIZ UDPGothic"/>
+              </a:defRPr>
+            </a:pPr>
+            <a:r>
+              <a:t>IUO</a:t>
+            </a:r>
+          </a:p>
+        </p:txBody>
+      </p:sp>
+      <p:sp>
+        <p:nvSpPr>
+          <p:cNvPr id="5" name="TextBox 4"/>
           <p:cNvSpPr txBox="1"/>
           <p:nvPr/>
         </p:nvSpPr>
         <p:spPr>
           <a:xfrm>
-            <a:off x="731520" y="1920240"/>
-            <a:ext cx="5120640" cy="4206240"/>
-          </a:xfrm>
-          <a:prstGeom prst="rect">
-            <a:avLst/>
-          </a:prstGeom>
-          <a:noFill/>
-        </p:spPr>
-        <p:txBody>
-          <a:bodyPr wrap="square">
-            <a:spAutoFit/>
-          </a:bodyPr>
-          <a:lstStyle/>
-          <a:p>
-            <a:pPr>
-              <a:spcAft>
-                <a:spcPts val="1000"/>
-              </a:spcAft>
-              <a:defRPr sz="1800">
-                <a:solidFill>
-                  <a:srgbClr val="141414"/>
-                </a:solidFill>
-                <a:latin typeface="BIZ UDPGothic"/>
-              </a:defRPr>
-            </a:pPr>
-            <a:r>
-              <a:t>■ 氏名・所属: 【大学名・専攻】 / 【氏名】</a:t>
-            </a:r>
-          </a:p>
-          <a:p>
-            <a:pPr>
-              <a:spcAft>
-                <a:spcPts val="1000"/>
-              </a:spcAft>
-              <a:defRPr sz="1800">
-                <a:solidFill>
-                  <a:srgbClr val="141414"/>
-                </a:solidFill>
-                <a:latin typeface="BIZ UDPGothic"/>
-              </a:defRPr>
-            </a:pPr>
-            <a:r>
-              <a:t>■ 実習先: システムソリューション開発センター</a:t>
-            </a:r>
-          </a:p>
-          <a:p>
-            <a:pPr>
-              <a:spcAft>
-                <a:spcPts val="1000"/>
-              </a:spcAft>
-              <a:defRPr sz="1800">
-                <a:solidFill>
-                  <a:srgbClr val="141414"/>
-                </a:solidFill>
-                <a:latin typeface="BIZ UDPGothic"/>
-              </a:defRPr>
-            </a:pPr>
-            <a:r>
-              <a:t>■ 参加理由: 実建物のBEMSデータを用いたAI省エネ開発</a:t>
-            </a:r>
-          </a:p>
-          <a:p>
-            <a:pPr>
-              <a:spcAft>
-                <a:spcPts val="1000"/>
-              </a:spcAft>
-              <a:defRPr sz="1800">
-                <a:solidFill>
-                  <a:srgbClr val="141414"/>
-                </a:solidFill>
-                <a:latin typeface="BIZ UDPGothic"/>
-              </a:defRPr>
-            </a:pPr>
-            <a:r>
-              <a:t>■ 研究テーマ: 【大学での専攻・研究内容をご記入ください】</a:t>
-            </a:r>
-          </a:p>
-          <a:p>
-            <a:pPr>
-              <a:spcAft>
-                <a:spcPts val="1000"/>
-              </a:spcAft>
-              <a:defRPr sz="1800">
-                <a:solidFill>
-                  <a:srgbClr val="141414"/>
-                </a:solidFill>
-                <a:latin typeface="BIZ UDPGothic"/>
-              </a:defRPr>
-            </a:pPr>
-            <a:r>
-              <a:t>■ 趣味・特技: 【ご自身の趣味・特技をご記入ください】</a:t>
-            </a:r>
-          </a:p>
-          <a:p>
-            <a:pPr>
-              <a:spcAft>
-                <a:spcPts val="1000"/>
-              </a:spcAft>
-              <a:defRPr sz="1800">
-                <a:solidFill>
-                  <a:srgbClr val="141414"/>
-                </a:solidFill>
-                <a:latin typeface="BIZ UDPGothic"/>
-              </a:defRPr>
-            </a:pPr>
-            <a:r>
-              <a:t>■ 将来の目標: 【目指すエンジニア像をご記入ください】</a:t>
-            </a:r>
-          </a:p>
-        </p:txBody>
-      </p:sp>
-      <p:sp>
-        <p:nvSpPr>
-          <p:cNvPr id="10" name="Rounded Rectangle 9"/>
-          <p:cNvSpPr/>
-          <p:nvPr/>
-        </p:nvSpPr>
-        <p:spPr>
-          <a:xfrm>
-            <a:off x="6309360" y="1188720"/>
-            <a:ext cx="5303520" cy="5120640"/>
-          </a:xfrm>
-          <a:prstGeom prst="roundRect">
-            <a:avLst/>
-          </a:prstGeom>
-          <a:solidFill>
-            <a:srgbClr val="FFFFFF"/>
-          </a:solidFill>
-          <a:ln w="19050">
-            <a:solidFill>
-              <a:srgbClr val="D2D7DE"/>
-            </a:solidFill>
-          </a:ln>
-        </p:spPr>
-        <p:style>
-          <a:lnRef idx="1">
-            <a:schemeClr val="accent1"/>
-          </a:lnRef>
-          <a:fillRef idx="3">
-            <a:schemeClr val="accent1"/>
-          </a:fillRef>
-          <a:effectRef idx="2">
-            <a:schemeClr val="accent1"/>
-          </a:effectRef>
-          <a:fontRef idx="minor">
-            <a:schemeClr val="lt1"/>
-          </a:fontRef>
-        </p:style>
-        <p:txBody>
-          <a:bodyPr rtlCol="0" anchor="ctr"/>
-          <a:lstStyle/>
-          <a:p>
-            <a:pPr algn="ctr"/>
-          </a:p>
-        </p:txBody>
-      </p:sp>
-      <p:sp>
-        <p:nvSpPr>
-          <p:cNvPr id="11" name="Rectangle 10"/>
-          <p:cNvSpPr/>
-          <p:nvPr/>
-        </p:nvSpPr>
-        <p:spPr>
-          <a:xfrm>
-            <a:off x="6492240" y="1371600"/>
-            <a:ext cx="2194560" cy="411480"/>
-          </a:xfrm>
-          <a:prstGeom prst="rect">
-            <a:avLst/>
-          </a:prstGeom>
-          <a:solidFill>
-            <a:srgbClr val="092B4C"/>
-          </a:solidFill>
-          <a:ln>
-            <a:solidFill>
-              <a:srgbClr val="092B4C"/>
-            </a:solidFill>
-          </a:ln>
-        </p:spPr>
-        <p:style>
-          <a:lnRef idx="1">
-            <a:schemeClr val="accent1"/>
-          </a:lnRef>
-          <a:fillRef idx="3">
-            <a:schemeClr val="accent1"/>
-          </a:fillRef>
-          <a:effectRef idx="2">
-            <a:schemeClr val="accent1"/>
-          </a:effectRef>
-          <a:fontRef idx="minor">
-            <a:schemeClr val="lt1"/>
-          </a:fontRef>
-        </p:style>
-        <p:txBody>
-          <a:bodyPr rtlCol="0" anchor="ctr"/>
-          <a:lstStyle/>
-          <a:p>
-            <a:pPr algn="ctr">
-              <a:defRPr sz="1800" b="1">
-                <a:solidFill>
-                  <a:srgbClr val="FFFFFF"/>
-                </a:solidFill>
-                <a:latin typeface="BIZ UDPGothic"/>
-              </a:defRPr>
-            </a:pPr>
-            <a:r>
-              <a:t>本日のアジェンダ</a:t>
-            </a:r>
-          </a:p>
-        </p:txBody>
-      </p:sp>
-      <p:sp>
-        <p:nvSpPr>
-          <p:cNvPr id="12" name="TextBox 11"/>
-          <p:cNvSpPr txBox="1"/>
-          <p:nvPr/>
-        </p:nvSpPr>
-        <p:spPr>
-          <a:xfrm>
-            <a:off x="6492240" y="1920240"/>
-            <a:ext cx="4937760" cy="4206240"/>
-          </a:xfrm>
-          <a:prstGeom prst="rect">
-            <a:avLst/>
-          </a:prstGeom>
-          <a:noFill/>
-        </p:spPr>
-        <p:txBody>
-          <a:bodyPr wrap="square">
-            <a:spAutoFit/>
-          </a:bodyPr>
-          <a:lstStyle/>
-          <a:p>
-            <a:pPr>
-              <a:spcAft>
-                <a:spcPts val="700"/>
-              </a:spcAft>
-              <a:defRPr sz="1800" b="0">
-                <a:solidFill>
-                  <a:srgbClr val="141414"/>
-                </a:solidFill>
-                <a:latin typeface="BIZ UDPGothic"/>
-              </a:defRPr>
-            </a:pPr>
-            <a:r>
-              <a:t>01. 自己紹介・実習の背景と目的</a:t>
-            </a:r>
-          </a:p>
-          <a:p>
-            <a:pPr>
-              <a:spcAft>
-                <a:spcPts val="700"/>
-              </a:spcAft>
-              <a:defRPr sz="1800" b="0">
-                <a:solidFill>
-                  <a:srgbClr val="141414"/>
-                </a:solidFill>
-                <a:latin typeface="BIZ UDPGothic"/>
-              </a:defRPr>
-            </a:pPr>
-            <a:r>
-              <a:t>02. 実証対象と使用データ（BEMSログ）</a:t>
-            </a:r>
-          </a:p>
-          <a:p>
-            <a:pPr>
-              <a:spcAft>
-                <a:spcPts val="700"/>
-              </a:spcAft>
-              <a:defRPr sz="1800" b="1">
-                <a:solidFill>
-                  <a:srgbClr val="0B5AA6"/>
-                </a:solidFill>
-                <a:latin typeface="BIZ UDPGothic"/>
-              </a:defRPr>
-            </a:pPr>
-            <a:r>
-              <a:t>03. 現場の課題（早朝固定起動と過剰予冷）</a:t>
-            </a:r>
-          </a:p>
-          <a:p>
-            <a:pPr>
-              <a:spcAft>
-                <a:spcPts val="700"/>
-              </a:spcAft>
-              <a:defRPr sz="1800" b="1">
-                <a:solidFill>
-                  <a:srgbClr val="0B5AA6"/>
-                </a:solidFill>
-                <a:latin typeface="BIZ UDPGothic"/>
-              </a:defRPr>
-            </a:pPr>
-            <a:r>
-              <a:t>04. システム設計の制約とアプローチ</a:t>
-            </a:r>
-          </a:p>
-          <a:p>
-            <a:pPr>
-              <a:spcAft>
-                <a:spcPts val="700"/>
-              </a:spcAft>
-              <a:defRPr sz="1800" b="0">
-                <a:solidFill>
-                  <a:srgbClr val="141414"/>
-                </a:solidFill>
-                <a:latin typeface="BIZ UDPGothic"/>
-              </a:defRPr>
-            </a:pPr>
-            <a:r>
-              <a:t>05. 予冷時間推計モデルと技術的工夫</a:t>
-            </a:r>
-          </a:p>
-          <a:p>
-            <a:pPr>
-              <a:spcAft>
-                <a:spcPts val="700"/>
-              </a:spcAft>
-              <a:defRPr sz="1800" b="1">
-                <a:solidFill>
-                  <a:srgbClr val="0B5AA6"/>
-                </a:solidFill>
-                <a:latin typeface="BIZ UDPGothic"/>
-              </a:defRPr>
-            </a:pPr>
-            <a:r>
-              <a:t>06. 最適起動による削減効果の検証</a:t>
-            </a:r>
-          </a:p>
-          <a:p>
-            <a:pPr>
-              <a:spcAft>
-                <a:spcPts val="700"/>
-              </a:spcAft>
-              <a:defRPr sz="1800" b="1">
-                <a:solidFill>
-                  <a:srgbClr val="0B5AA6"/>
-                </a:solidFill>
-                <a:latin typeface="BIZ UDPGothic"/>
-              </a:defRPr>
-            </a:pPr>
-            <a:r>
-              <a:t>07. 運用支援アプリの開発と現場価値</a:t>
-            </a:r>
-          </a:p>
-          <a:p>
-            <a:pPr>
-              <a:spcAft>
-                <a:spcPts val="700"/>
-              </a:spcAft>
-              <a:defRPr sz="1800" b="0">
-                <a:solidFill>
-                  <a:srgbClr val="141414"/>
-                </a:solidFill>
-                <a:latin typeface="BIZ UDPGothic"/>
-              </a:defRPr>
-            </a:pPr>
-            <a:r>
-              <a:t>08. まとめ・実習の所感と学び</a:t>
-            </a:r>
-          </a:p>
-        </p:txBody>
-      </p:sp>
-      <p:sp>
-        <p:nvSpPr>
-          <p:cNvPr id="13" name="TextBox 12"/>
-          <p:cNvSpPr txBox="1"/>
-          <p:nvPr/>
-        </p:nvSpPr>
-        <p:spPr>
-          <a:xfrm>
-            <a:off x="457200" y="6556248"/>
-            <a:ext cx="11274552" cy="274320"/>
+            <a:off x="11430000" y="73152"/>
+            <a:ext cx="548640" cy="411480"/>
           </a:xfrm>
           <a:prstGeom prst="rect">
             <a:avLst/>
@@ -3805,16 +3973,143 @@
           </a:bodyPr>
           <a:lstStyle/>
           <a:p>
+            <a:pPr algn="ctr">
+              <a:defRPr sz="1800" b="1">
+                <a:solidFill>
+                  <a:srgbClr val="FFFFFF"/>
+                </a:solidFill>
+                <a:latin typeface="BIZ UDPGothic"/>
+              </a:defRPr>
+            </a:pPr>
+            <a:r>
+              <a:t>11</a:t>
+            </a:r>
+          </a:p>
+        </p:txBody>
+      </p:sp>
+      <p:sp>
+        <p:nvSpPr>
+          <p:cNvPr id="6" name="TextBox 5"/>
+          <p:cNvSpPr txBox="1"/>
+          <p:nvPr/>
+        </p:nvSpPr>
+        <p:spPr>
+          <a:xfrm>
+            <a:off x="9144000" y="6537960"/>
+            <a:ext cx="2743200" cy="228600"/>
+          </a:xfrm>
+          <a:prstGeom prst="rect">
+            <a:avLst/>
+          </a:prstGeom>
+          <a:noFill/>
+        </p:spPr>
+        <p:txBody>
+          <a:bodyPr wrap="none">
+            <a:spAutoFit/>
+          </a:bodyPr>
+          <a:lstStyle/>
+          <a:p>
+            <a:pPr algn="r">
+              <a:defRPr sz="800">
+                <a:solidFill>
+                  <a:srgbClr val="666666"/>
+                </a:solidFill>
+                <a:latin typeface="BIZ UDPGothic"/>
+              </a:defRPr>
+            </a:pPr>
+            <a:r>
+              <a:t>© Panasonic Corporation</a:t>
+            </a:r>
+          </a:p>
+        </p:txBody>
+      </p:sp>
+      <p:sp>
+        <p:nvSpPr>
+          <p:cNvPr id="7" name="TextBox 6"/>
+          <p:cNvSpPr txBox="1"/>
+          <p:nvPr/>
+        </p:nvSpPr>
+        <p:spPr>
+          <a:xfrm>
+            <a:off x="822960" y="1097280"/>
+            <a:ext cx="10515600" cy="4572000"/>
+          </a:xfrm>
+          <a:prstGeom prst="rect">
+            <a:avLst/>
+          </a:prstGeom>
+          <a:noFill/>
+        </p:spPr>
+        <p:txBody>
+          <a:bodyPr wrap="none">
+            <a:spAutoFit/>
+          </a:bodyPr>
+          <a:lstStyle/>
+          <a:p>
             <a:pPr>
-              <a:defRPr sz="1200">
-                <a:solidFill>
-                  <a:srgbClr val="505050"/>
-                </a:solidFill>
-                <a:latin typeface="BIZ UDPGothic"/>
-              </a:defRPr>
-            </a:pPr>
-            <a:r>
-              <a:t>※ 出所・注記: パナソニック オペレーショナルエクセレンス / 研究開発実習</a:t>
+              <a:spcBef>
+                <a:spcPts val="0"/>
+              </a:spcBef>
+              <a:defRPr sz="1400" b="1">
+                <a:solidFill>
+                  <a:srgbClr val="111111"/>
+                </a:solidFill>
+                <a:latin typeface="BIZ UDPGothic"/>
+              </a:defRPr>
+            </a:pPr>
+            <a:r>
+              <a:t>■ 実習を通して</a:t>
+            </a:r>
+          </a:p>
+          <a:p>
+            <a:pPr>
+              <a:spcBef>
+                <a:spcPts val="600"/>
+              </a:spcBef>
+              <a:defRPr sz="1300" b="0">
+                <a:solidFill>
+                  <a:srgbClr val="333333"/>
+                </a:solidFill>
+                <a:latin typeface="BIZ UDPGothic"/>
+              </a:defRPr>
+            </a:pPr>
+            <a:r>
+              <a:t>・お客様目線でのアプリケーション開発は相手の要望を想像しながらしなければいけない部分もあり、難しかった。</a:t>
+            </a:r>
+          </a:p>
+          <a:p>
+            <a:pPr>
+              <a:spcBef>
+                <a:spcPts val="2400"/>
+              </a:spcBef>
+              <a:defRPr sz="1400" b="1">
+                <a:solidFill>
+                  <a:srgbClr val="111111"/>
+                </a:solidFill>
+                <a:latin typeface="BIZ UDPGothic"/>
+              </a:defRPr>
+            </a:pPr>
+            <a:r>
+              <a:t>■ インターンシップを通して</a:t>
+            </a:r>
+          </a:p>
+          <a:p>
+            <a:pPr>
+              <a:spcBef>
+                <a:spcPts val="600"/>
+              </a:spcBef>
+              <a:defRPr sz="1300" b="0">
+                <a:solidFill>
+                  <a:srgbClr val="333333"/>
+                </a:solidFill>
+                <a:latin typeface="BIZ UDPGothic"/>
+              </a:defRPr>
+            </a:pPr>
+            <a:r>
+              <a:t>・ずっとデスクワークというわけではなく、実験住宅の見学やセキュリティ関連の紹介をしていただくなど</a:t>
+            </a:r>
+            <a:br/>
+            <a:r>
+              <a:t>  様々なものに触れられて、とても実りある2週間でした</a:t>
             </a:r>
           </a:p>
         </p:txBody>
@@ -3846,18 +4141,16 @@
         <p:spPr>
           <a:xfrm>
             <a:off x="0" y="0"/>
-            <a:ext cx="12191695" cy="1005840"/>
+            <a:ext cx="12191695" cy="530352"/>
           </a:xfrm>
           <a:prstGeom prst="rect">
             <a:avLst/>
           </a:prstGeom>
           <a:solidFill>
-            <a:srgbClr val="092B4C"/>
+            <a:srgbClr val="0B3968"/>
           </a:solidFill>
           <a:ln>
-            <a:solidFill>
-              <a:srgbClr val="092B4C"/>
-            </a:solidFill>
+            <a:noFill/>
           </a:ln>
         </p:spPr>
         <p:style>
@@ -3884,24 +4177,60 @@
       </p:sp>
       <p:sp>
         <p:nvSpPr>
-          <p:cNvPr id="3" name="Rounded Rectangle 2"/>
+          <p:cNvPr id="3" name="TextBox 2"/>
+          <p:cNvSpPr txBox="1"/>
+          <p:nvPr/>
+        </p:nvSpPr>
+        <p:spPr>
+          <a:xfrm>
+            <a:off x="301752" y="73152"/>
+            <a:ext cx="9144000" cy="411480"/>
+          </a:xfrm>
+          <a:prstGeom prst="rect">
+            <a:avLst/>
+          </a:prstGeom>
+          <a:noFill/>
+        </p:spPr>
+        <p:txBody>
+          <a:bodyPr wrap="square">
+            <a:spAutoFit/>
+          </a:bodyPr>
+          <a:lstStyle/>
+          <a:p>
+            <a:pPr>
+              <a:defRPr sz="1800" b="1">
+                <a:solidFill>
+                  <a:srgbClr val="FFFFFF"/>
+                </a:solidFill>
+                <a:latin typeface="BIZ UDPGothic"/>
+              </a:defRPr>
+            </a:pPr>
+            <a:r>
+              <a:t>1. 自己紹介</a:t>
+            </a:r>
+          </a:p>
+        </p:txBody>
+      </p:sp>
+      <p:sp>
+        <p:nvSpPr>
+          <p:cNvPr id="4" name="Rounded Rectangle 3"/>
           <p:cNvSpPr/>
           <p:nvPr/>
         </p:nvSpPr>
         <p:spPr>
           <a:xfrm>
-            <a:off x="457200" y="109728"/>
-            <a:ext cx="2377440" cy="329184"/>
+            <a:off x="10789920" y="128016"/>
+            <a:ext cx="484632" cy="274320"/>
           </a:xfrm>
           <a:prstGeom prst="roundRect">
             <a:avLst/>
           </a:prstGeom>
           <a:solidFill>
-            <a:srgbClr val="0B5AA6"/>
+            <a:srgbClr val="24588E"/>
           </a:solidFill>
           <a:ln>
             <a:solidFill>
-              <a:srgbClr val="0B5AA6"/>
+              <a:srgbClr val="5E8DBE"/>
             </a:solidFill>
           </a:ln>
         </p:spPr>
@@ -3920,55 +4249,19 @@
           </a:fontRef>
         </p:style>
         <p:txBody>
-          <a:bodyPr rtlCol="0" anchor="ctr" wrap="square"/>
+          <a:bodyPr rtlCol="0" anchor="ctr"/>
           <a:lstStyle/>
           <a:p>
             <a:pPr algn="ctr">
-              <a:defRPr sz="1400" b="1">
-                <a:solidFill>
-                  <a:srgbClr val="FFFFFF"/>
-                </a:solidFill>
-                <a:latin typeface="BIZ UDPGothic"/>
-              </a:defRPr>
-            </a:pPr>
-            <a:r>
-              <a:t>研究開発実習 成果報告</a:t>
-            </a:r>
-          </a:p>
-        </p:txBody>
-      </p:sp>
-      <p:sp>
-        <p:nvSpPr>
-          <p:cNvPr id="4" name="TextBox 3"/>
-          <p:cNvSpPr txBox="1"/>
-          <p:nvPr/>
-        </p:nvSpPr>
-        <p:spPr>
-          <a:xfrm>
-            <a:off x="457200" y="457200"/>
-            <a:ext cx="10058400" cy="502920"/>
-          </a:xfrm>
-          <a:prstGeom prst="rect">
-            <a:avLst/>
-          </a:prstGeom>
-          <a:noFill/>
-        </p:spPr>
-        <p:txBody>
-          <a:bodyPr wrap="square">
-            <a:spAutoFit/>
-          </a:bodyPr>
-          <a:lstStyle/>
-          <a:p>
-            <a:pPr>
-              <a:defRPr sz="2200" b="1">
-                <a:solidFill>
-                  <a:srgbClr val="FFFFFF"/>
-                </a:solidFill>
-                <a:latin typeface="BIZ UDPGothic"/>
-              </a:defRPr>
-            </a:pPr>
-            <a:r>
-              <a:t>背景と目的：省エネ（ESG・脱炭素）と快適性の両立</a:t>
+              <a:defRPr sz="1100" i="1">
+                <a:solidFill>
+                  <a:srgbClr val="E8F1F8"/>
+                </a:solidFill>
+                <a:latin typeface="BIZ UDPGothic"/>
+              </a:defRPr>
+            </a:pPr>
+            <a:r>
+              <a:t>IUO</a:t>
             </a:r>
           </a:p>
         </p:txBody>
@@ -3981,8 +4274,8 @@
         </p:nvSpPr>
         <p:spPr>
           <a:xfrm>
-            <a:off x="10789920" y="457200"/>
-            <a:ext cx="1005840" cy="411480"/>
+            <a:off x="11430000" y="73152"/>
+            <a:ext cx="548640" cy="411480"/>
           </a:xfrm>
           <a:prstGeom prst="rect">
             <a:avLst/>
@@ -3995,151 +4288,6 @@
           </a:bodyPr>
           <a:lstStyle/>
           <a:p>
-            <a:pPr algn="r">
-              <a:defRPr sz="1800" b="1">
-                <a:solidFill>
-                  <a:srgbClr val="EBF2F8"/>
-                </a:solidFill>
-                <a:latin typeface="BIZ UDPGothic"/>
-              </a:defRPr>
-            </a:pPr>
-            <a:r>
-              <a:t>02 / 08</a:t>
-            </a:r>
-          </a:p>
-        </p:txBody>
-      </p:sp>
-      <p:sp>
-        <p:nvSpPr>
-          <p:cNvPr id="6" name="Rectangle 5"/>
-          <p:cNvSpPr/>
-          <p:nvPr/>
-        </p:nvSpPr>
-        <p:spPr>
-          <a:xfrm>
-            <a:off x="0" y="6537960"/>
-            <a:ext cx="12191695" cy="320040"/>
-          </a:xfrm>
-          <a:prstGeom prst="rect">
-            <a:avLst/>
-          </a:prstGeom>
-          <a:solidFill>
-            <a:srgbClr val="F5F6F8"/>
-          </a:solidFill>
-          <a:ln>
-            <a:solidFill>
-              <a:srgbClr val="D2D7DE"/>
-            </a:solidFill>
-          </a:ln>
-        </p:spPr>
-        <p:style>
-          <a:lnRef idx="1">
-            <a:schemeClr val="accent1"/>
-          </a:lnRef>
-          <a:fillRef idx="3">
-            <a:schemeClr val="accent1"/>
-          </a:fillRef>
-          <a:effectRef idx="2">
-            <a:schemeClr val="accent1"/>
-          </a:effectRef>
-          <a:fontRef idx="minor">
-            <a:schemeClr val="lt1"/>
-          </a:fontRef>
-        </p:style>
-        <p:txBody>
-          <a:bodyPr rtlCol="0" anchor="ctr"/>
-          <a:lstStyle/>
-          <a:p>
-            <a:pPr algn="ctr"/>
-          </a:p>
-        </p:txBody>
-      </p:sp>
-      <p:sp>
-        <p:nvSpPr>
-          <p:cNvPr id="7" name="Rounded Rectangle 6"/>
-          <p:cNvSpPr/>
-          <p:nvPr/>
-        </p:nvSpPr>
-        <p:spPr>
-          <a:xfrm>
-            <a:off x="548640" y="1188720"/>
-            <a:ext cx="3566160" cy="5120640"/>
-          </a:xfrm>
-          <a:prstGeom prst="roundRect">
-            <a:avLst/>
-          </a:prstGeom>
-          <a:solidFill>
-            <a:srgbClr val="FFFFFF"/>
-          </a:solidFill>
-          <a:ln w="19050">
-            <a:solidFill>
-              <a:srgbClr val="C00000"/>
-            </a:solidFill>
-          </a:ln>
-        </p:spPr>
-        <p:style>
-          <a:lnRef idx="1">
-            <a:schemeClr val="accent1"/>
-          </a:lnRef>
-          <a:fillRef idx="3">
-            <a:schemeClr val="accent1"/>
-          </a:fillRef>
-          <a:effectRef idx="2">
-            <a:schemeClr val="accent1"/>
-          </a:effectRef>
-          <a:fontRef idx="minor">
-            <a:schemeClr val="lt1"/>
-          </a:fontRef>
-        </p:style>
-        <p:txBody>
-          <a:bodyPr rtlCol="0" anchor="ctr"/>
-          <a:lstStyle/>
-          <a:p>
-            <a:pPr algn="ctr"/>
-          </a:p>
-        </p:txBody>
-      </p:sp>
-      <p:sp>
-        <p:nvSpPr>
-          <p:cNvPr id="8" name="Rectangle 7"/>
-          <p:cNvSpPr/>
-          <p:nvPr/>
-        </p:nvSpPr>
-        <p:spPr>
-          <a:xfrm>
-            <a:off x="548640" y="1188720"/>
-            <a:ext cx="3566160" cy="548640"/>
-          </a:xfrm>
-          <a:prstGeom prst="rect">
-            <a:avLst/>
-          </a:prstGeom>
-          <a:solidFill>
-            <a:srgbClr val="C00000"/>
-          </a:solidFill>
-          <a:ln>
-            <a:solidFill>
-              <a:srgbClr val="C00000"/>
-            </a:solidFill>
-          </a:ln>
-        </p:spPr>
-        <p:style>
-          <a:lnRef idx="1">
-            <a:schemeClr val="accent1"/>
-          </a:lnRef>
-          <a:fillRef idx="3">
-            <a:schemeClr val="accent1"/>
-          </a:fillRef>
-          <a:effectRef idx="2">
-            <a:schemeClr val="accent1"/>
-          </a:effectRef>
-          <a:fontRef idx="minor">
-            <a:schemeClr val="lt1"/>
-          </a:fontRef>
-        </p:style>
-        <p:txBody>
-          <a:bodyPr rtlCol="0" anchor="ctr"/>
-          <a:lstStyle/>
-          <a:p>
             <a:pPr algn="ctr">
               <a:defRPr sz="1800" b="1">
                 <a:solidFill>
@@ -4149,482 +4297,21 @@
               </a:defRPr>
             </a:pPr>
             <a:r>
-              <a:t>現状の課題（無人運転）</a:t>
-            </a:r>
-          </a:p>
-        </p:txBody>
-      </p:sp>
-      <p:sp>
-        <p:nvSpPr>
-          <p:cNvPr id="9" name="TextBox 8"/>
+              <a:t>2</a:t>
+            </a:r>
+          </a:p>
+        </p:txBody>
+      </p:sp>
+      <p:sp>
+        <p:nvSpPr>
+          <p:cNvPr id="6" name="TextBox 5"/>
           <p:cNvSpPr txBox="1"/>
           <p:nvPr/>
         </p:nvSpPr>
         <p:spPr>
           <a:xfrm>
-            <a:off x="685800" y="1828800"/>
-            <a:ext cx="3291840" cy="4297680"/>
-          </a:xfrm>
-          <a:prstGeom prst="rect">
-            <a:avLst/>
-          </a:prstGeom>
-          <a:noFill/>
-        </p:spPr>
-        <p:txBody>
-          <a:bodyPr wrap="square">
-            <a:spAutoFit/>
-          </a:bodyPr>
-          <a:lstStyle/>
-          <a:p>
-            <a:pPr>
-              <a:spcAft>
-                <a:spcPts val="1600"/>
-              </a:spcAft>
-              <a:defRPr sz="1800">
-                <a:solidFill>
-                  <a:srgbClr val="141414"/>
-                </a:solidFill>
-                <a:latin typeface="BIZ UDPGothic"/>
-              </a:defRPr>
-            </a:pPr>
-            <a:r>
-              <a:t>• 空調がビル電力の約半数を消費</a:t>
-            </a:r>
-          </a:p>
-          <a:p>
-            <a:pPr>
-              <a:spcAft>
-                <a:spcPts val="1600"/>
-              </a:spcAft>
-              <a:defRPr sz="1800">
-                <a:solidFill>
-                  <a:srgbClr val="141414"/>
-                </a:solidFill>
-                <a:latin typeface="BIZ UDPGothic"/>
-              </a:defRPr>
-            </a:pPr>
-            <a:r>
-              <a:t>• 電気代高騰と脱炭素から削減急務</a:t>
-            </a:r>
-          </a:p>
-          <a:p>
-            <a:pPr>
-              <a:spcAft>
-                <a:spcPts val="1600"/>
-              </a:spcAft>
-              <a:defRPr sz="1800">
-                <a:solidFill>
-                  <a:srgbClr val="141414"/>
-                </a:solidFill>
-                <a:latin typeface="BIZ UDPGothic"/>
-              </a:defRPr>
-            </a:pPr>
-            <a:r>
-              <a:t>• 未達クレームを恐れ早朝5:05固定</a:t>
-            </a:r>
-          </a:p>
-          <a:p>
-            <a:pPr>
-              <a:spcAft>
-                <a:spcPts val="1600"/>
-              </a:spcAft>
-              <a:defRPr sz="1800">
-                <a:solidFill>
-                  <a:srgbClr val="141414"/>
-                </a:solidFill>
-                <a:latin typeface="BIZ UDPGothic"/>
-              </a:defRPr>
-            </a:pPr>
-            <a:r>
-              <a:t>• 誰もいない早朝に過剰予冷が発生</a:t>
-            </a:r>
-          </a:p>
-        </p:txBody>
-      </p:sp>
-      <p:sp>
-        <p:nvSpPr>
-          <p:cNvPr id="10" name="Rounded Rectangle 9"/>
-          <p:cNvSpPr/>
-          <p:nvPr/>
-        </p:nvSpPr>
-        <p:spPr>
-          <a:xfrm>
-            <a:off x="4297679" y="1188720"/>
-            <a:ext cx="3566160" cy="5120640"/>
-          </a:xfrm>
-          <a:prstGeom prst="roundRect">
-            <a:avLst/>
-          </a:prstGeom>
-          <a:solidFill>
-            <a:srgbClr val="FFFFFF"/>
-          </a:solidFill>
-          <a:ln w="19050">
-            <a:solidFill>
-              <a:srgbClr val="0B5AA6"/>
-            </a:solidFill>
-          </a:ln>
-        </p:spPr>
-        <p:style>
-          <a:lnRef idx="1">
-            <a:schemeClr val="accent1"/>
-          </a:lnRef>
-          <a:fillRef idx="3">
-            <a:schemeClr val="accent1"/>
-          </a:fillRef>
-          <a:effectRef idx="2">
-            <a:schemeClr val="accent1"/>
-          </a:effectRef>
-          <a:fontRef idx="minor">
-            <a:schemeClr val="lt1"/>
-          </a:fontRef>
-        </p:style>
-        <p:txBody>
-          <a:bodyPr rtlCol="0" anchor="ctr"/>
-          <a:lstStyle/>
-          <a:p>
-            <a:pPr algn="ctr"/>
-          </a:p>
-        </p:txBody>
-      </p:sp>
-      <p:sp>
-        <p:nvSpPr>
-          <p:cNvPr id="11" name="Rectangle 10"/>
-          <p:cNvSpPr/>
-          <p:nvPr/>
-        </p:nvSpPr>
-        <p:spPr>
-          <a:xfrm>
-            <a:off x="4297679" y="1188720"/>
-            <a:ext cx="3566160" cy="548640"/>
-          </a:xfrm>
-          <a:prstGeom prst="rect">
-            <a:avLst/>
-          </a:prstGeom>
-          <a:solidFill>
-            <a:srgbClr val="0B5AA6"/>
-          </a:solidFill>
-          <a:ln>
-            <a:solidFill>
-              <a:srgbClr val="0B5AA6"/>
-            </a:solidFill>
-          </a:ln>
-        </p:spPr>
-        <p:style>
-          <a:lnRef idx="1">
-            <a:schemeClr val="accent1"/>
-          </a:lnRef>
-          <a:fillRef idx="3">
-            <a:schemeClr val="accent1"/>
-          </a:fillRef>
-          <a:effectRef idx="2">
-            <a:schemeClr val="accent1"/>
-          </a:effectRef>
-          <a:fontRef idx="minor">
-            <a:schemeClr val="lt1"/>
-          </a:fontRef>
-        </p:style>
-        <p:txBody>
-          <a:bodyPr rtlCol="0" anchor="ctr"/>
-          <a:lstStyle/>
-          <a:p>
-            <a:pPr algn="ctr">
-              <a:defRPr sz="1800" b="1">
-                <a:solidFill>
-                  <a:srgbClr val="FFFFFF"/>
-                </a:solidFill>
-                <a:latin typeface="BIZ UDPGothic"/>
-              </a:defRPr>
-            </a:pPr>
-            <a:r>
-              <a:t>変革（データ推計）</a:t>
-            </a:r>
-          </a:p>
-        </p:txBody>
-      </p:sp>
-      <p:sp>
-        <p:nvSpPr>
-          <p:cNvPr id="12" name="TextBox 11"/>
-          <p:cNvSpPr txBox="1"/>
-          <p:nvPr/>
-        </p:nvSpPr>
-        <p:spPr>
-          <a:xfrm>
-            <a:off x="4434839" y="1828800"/>
-            <a:ext cx="3291840" cy="4297680"/>
-          </a:xfrm>
-          <a:prstGeom prst="rect">
-            <a:avLst/>
-          </a:prstGeom>
-          <a:noFill/>
-        </p:spPr>
-        <p:txBody>
-          <a:bodyPr wrap="square">
-            <a:spAutoFit/>
-          </a:bodyPr>
-          <a:lstStyle/>
-          <a:p>
-            <a:pPr>
-              <a:spcAft>
-                <a:spcPts val="1600"/>
-              </a:spcAft>
-              <a:defRPr sz="1800">
-                <a:solidFill>
-                  <a:srgbClr val="141414"/>
-                </a:solidFill>
-                <a:latin typeface="BIZ UDPGothic"/>
-              </a:defRPr>
-            </a:pPr>
-            <a:r>
-              <a:t>• 気温予報から予冷時間を直接予測</a:t>
-            </a:r>
-          </a:p>
-          <a:p>
-            <a:pPr>
-              <a:spcAft>
-                <a:spcPts val="1600"/>
-              </a:spcAft>
-              <a:defRPr sz="1800">
-                <a:solidFill>
-                  <a:srgbClr val="141414"/>
-                </a:solidFill>
-                <a:latin typeface="BIZ UDPGothic"/>
-              </a:defRPr>
-            </a:pPr>
-            <a:r>
-              <a:t>• 前日夕方の設定業務制約に適合</a:t>
-            </a:r>
-          </a:p>
-          <a:p>
-            <a:pPr>
-              <a:spcAft>
-                <a:spcPts val="1600"/>
-              </a:spcAft>
-              <a:defRPr sz="1800">
-                <a:solidFill>
-                  <a:srgbClr val="141414"/>
-                </a:solidFill>
-                <a:latin typeface="BIZ UDPGothic"/>
-              </a:defRPr>
-            </a:pPr>
-            <a:r>
-              <a:t>• 未達を防ぐ安全余裕（95%信頼限界）</a:t>
-            </a:r>
-          </a:p>
-          <a:p>
-            <a:pPr>
-              <a:spcAft>
-                <a:spcPts val="1600"/>
-              </a:spcAft>
-              <a:defRPr sz="1800">
-                <a:solidFill>
-                  <a:srgbClr val="141414"/>
-                </a:solidFill>
-                <a:latin typeface="BIZ UDPGothic"/>
-              </a:defRPr>
-            </a:pPr>
-            <a:r>
-              <a:t>• 休日明け蓄熱負荷を温度上乗せ</a:t>
-            </a:r>
-          </a:p>
-        </p:txBody>
-      </p:sp>
-      <p:sp>
-        <p:nvSpPr>
-          <p:cNvPr id="13" name="Rounded Rectangle 12"/>
-          <p:cNvSpPr/>
-          <p:nvPr/>
-        </p:nvSpPr>
-        <p:spPr>
-          <a:xfrm>
-            <a:off x="8046719" y="1188720"/>
-            <a:ext cx="3566160" cy="5120640"/>
-          </a:xfrm>
-          <a:prstGeom prst="roundRect">
-            <a:avLst/>
-          </a:prstGeom>
-          <a:solidFill>
-            <a:srgbClr val="FFFFFF"/>
-          </a:solidFill>
-          <a:ln w="19050">
-            <a:solidFill>
-              <a:srgbClr val="75B843"/>
-            </a:solidFill>
-          </a:ln>
-        </p:spPr>
-        <p:style>
-          <a:lnRef idx="1">
-            <a:schemeClr val="accent1"/>
-          </a:lnRef>
-          <a:fillRef idx="3">
-            <a:schemeClr val="accent1"/>
-          </a:fillRef>
-          <a:effectRef idx="2">
-            <a:schemeClr val="accent1"/>
-          </a:effectRef>
-          <a:fontRef idx="minor">
-            <a:schemeClr val="lt1"/>
-          </a:fontRef>
-        </p:style>
-        <p:txBody>
-          <a:bodyPr rtlCol="0" anchor="ctr"/>
-          <a:lstStyle/>
-          <a:p>
-            <a:pPr algn="ctr"/>
-          </a:p>
-        </p:txBody>
-      </p:sp>
-      <p:sp>
-        <p:nvSpPr>
-          <p:cNvPr id="14" name="Rectangle 13"/>
-          <p:cNvSpPr/>
-          <p:nvPr/>
-        </p:nvSpPr>
-        <p:spPr>
-          <a:xfrm>
-            <a:off x="8046719" y="1188720"/>
-            <a:ext cx="3566160" cy="548640"/>
-          </a:xfrm>
-          <a:prstGeom prst="rect">
-            <a:avLst/>
-          </a:prstGeom>
-          <a:solidFill>
-            <a:srgbClr val="75B843"/>
-          </a:solidFill>
-          <a:ln>
-            <a:solidFill>
-              <a:srgbClr val="75B843"/>
-            </a:solidFill>
-          </a:ln>
-        </p:spPr>
-        <p:style>
-          <a:lnRef idx="1">
-            <a:schemeClr val="accent1"/>
-          </a:lnRef>
-          <a:fillRef idx="3">
-            <a:schemeClr val="accent1"/>
-          </a:fillRef>
-          <a:effectRef idx="2">
-            <a:schemeClr val="accent1"/>
-          </a:effectRef>
-          <a:fontRef idx="minor">
-            <a:schemeClr val="lt1"/>
-          </a:fontRef>
-        </p:style>
-        <p:txBody>
-          <a:bodyPr rtlCol="0" anchor="ctr"/>
-          <a:lstStyle/>
-          <a:p>
-            <a:pPr algn="ctr">
-              <a:defRPr sz="1800" b="1">
-                <a:solidFill>
-                  <a:srgbClr val="FFFFFF"/>
-                </a:solidFill>
-                <a:latin typeface="BIZ UDPGothic"/>
-              </a:defRPr>
-            </a:pPr>
-            <a:r>
-              <a:t>目指す姿（意思決定支援）</a:t>
-            </a:r>
-          </a:p>
-        </p:txBody>
-      </p:sp>
-      <p:sp>
-        <p:nvSpPr>
-          <p:cNvPr id="15" name="TextBox 14"/>
-          <p:cNvSpPr txBox="1"/>
-          <p:nvPr/>
-        </p:nvSpPr>
-        <p:spPr>
-          <a:xfrm>
-            <a:off x="8183879" y="1828800"/>
-            <a:ext cx="3291840" cy="4297680"/>
-          </a:xfrm>
-          <a:prstGeom prst="rect">
-            <a:avLst/>
-          </a:prstGeom>
-          <a:noFill/>
-        </p:spPr>
-        <p:txBody>
-          <a:bodyPr wrap="square">
-            <a:spAutoFit/>
-          </a:bodyPr>
-          <a:lstStyle/>
-          <a:p>
-            <a:pPr>
-              <a:spcAft>
-                <a:spcPts val="1600"/>
-              </a:spcAft>
-              <a:defRPr sz="1800">
-                <a:solidFill>
-                  <a:srgbClr val="141414"/>
-                </a:solidFill>
-                <a:latin typeface="BIZ UDPGothic"/>
-              </a:defRPr>
-            </a:pPr>
-            <a:r>
-              <a:t>• 8:00始業時の適温到達率100%</a:t>
-            </a:r>
-          </a:p>
-          <a:p>
-            <a:pPr>
-              <a:spcAft>
-                <a:spcPts val="1600"/>
-              </a:spcAft>
-              <a:defRPr sz="1800">
-                <a:solidFill>
-                  <a:srgbClr val="141414"/>
-                </a:solidFill>
-                <a:latin typeface="BIZ UDPGothic"/>
-              </a:defRPr>
-            </a:pPr>
-            <a:r>
-              <a:t>• 過剰な無人運転を削り省エネ実現</a:t>
-            </a:r>
-          </a:p>
-          <a:p>
-            <a:pPr>
-              <a:spcAft>
-                <a:spcPts val="1600"/>
-              </a:spcAft>
-              <a:defRPr sz="1800">
-                <a:solidFill>
-                  <a:srgbClr val="141414"/>
-                </a:solidFill>
-                <a:latin typeface="BIZ UDPGothic"/>
-              </a:defRPr>
-            </a:pPr>
-            <a:r>
-              <a:t>• 勘や前任者設定の流用から脱却</a:t>
-            </a:r>
-          </a:p>
-          <a:p>
-            <a:pPr>
-              <a:spcAft>
-                <a:spcPts val="1600"/>
-              </a:spcAft>
-              <a:defRPr sz="1800">
-                <a:solidFill>
-                  <a:srgbClr val="141414"/>
-                </a:solidFill>
-                <a:latin typeface="BIZ UDPGothic"/>
-              </a:defRPr>
-            </a:pPr>
-            <a:r>
-              <a:t>• BM担当者が迷わず運用できるUI</a:t>
-            </a:r>
-          </a:p>
-        </p:txBody>
-      </p:sp>
-      <p:sp>
-        <p:nvSpPr>
-          <p:cNvPr id="16" name="TextBox 15"/>
-          <p:cNvSpPr txBox="1"/>
-          <p:nvPr/>
-        </p:nvSpPr>
-        <p:spPr>
-          <a:xfrm>
-            <a:off x="457200" y="6556248"/>
-            <a:ext cx="11274552" cy="274320"/>
+            <a:off x="9144000" y="6537960"/>
+            <a:ext cx="2743200" cy="228600"/>
           </a:xfrm>
           <a:prstGeom prst="rect">
             <a:avLst/>
@@ -4637,16 +4324,231 @@
           </a:bodyPr>
           <a:lstStyle/>
           <a:p>
+            <a:pPr algn="r">
+              <a:defRPr sz="800">
+                <a:solidFill>
+                  <a:srgbClr val="666666"/>
+                </a:solidFill>
+                <a:latin typeface="BIZ UDPGothic"/>
+              </a:defRPr>
+            </a:pPr>
+            <a:r>
+              <a:t>© Panasonic Corporation</a:t>
+            </a:r>
+          </a:p>
+        </p:txBody>
+      </p:sp>
+      <p:pic>
+        <p:nvPicPr>
+          <p:cNvPr id="7" name="Picture 6" descr="profile_person.png"/>
+          <p:cNvPicPr>
+            <a:picLocks noChangeAspect="1"/>
+          </p:cNvPicPr>
+          <p:nvPr/>
+        </p:nvPicPr>
+        <p:blipFill>
+          <a:blip r:embed="rId2"/>
+          <a:stretch>
+            <a:fillRect/>
+          </a:stretch>
+        </p:blipFill>
+        <p:spPr>
+          <a:xfrm>
+            <a:off x="1005840" y="1143000"/>
+            <a:ext cx="2286000" cy="2926080"/>
+          </a:xfrm>
+          <a:prstGeom prst="rect">
+            <a:avLst/>
+          </a:prstGeom>
+        </p:spPr>
+      </p:pic>
+      <p:pic>
+        <p:nvPicPr>
+          <p:cNvPr id="8" name="Picture 7" descr="profile_train.png"/>
+          <p:cNvPicPr>
+            <a:picLocks noChangeAspect="1"/>
+          </p:cNvPicPr>
+          <p:nvPr/>
+        </p:nvPicPr>
+        <p:blipFill>
+          <a:blip r:embed="rId3"/>
+          <a:stretch>
+            <a:fillRect/>
+          </a:stretch>
+        </p:blipFill>
+        <p:spPr>
+          <a:xfrm>
+            <a:off x="2926080" y="3291840"/>
+            <a:ext cx="1828800" cy="1371600"/>
+          </a:xfrm>
+          <a:prstGeom prst="rect">
+            <a:avLst/>
+          </a:prstGeom>
+        </p:spPr>
+      </p:pic>
+      <p:sp>
+        <p:nvSpPr>
+          <p:cNvPr id="9" name="TextBox 8"/>
+          <p:cNvSpPr txBox="1"/>
+          <p:nvPr/>
+        </p:nvSpPr>
+        <p:spPr>
+          <a:xfrm>
+            <a:off x="5486400" y="1280160"/>
+            <a:ext cx="6217920" cy="4754880"/>
+          </a:xfrm>
+          <a:prstGeom prst="rect">
+            <a:avLst/>
+          </a:prstGeom>
+          <a:noFill/>
+        </p:spPr>
+        <p:txBody>
+          <a:bodyPr wrap="none">
+            <a:spAutoFit/>
+          </a:bodyPr>
+          <a:lstStyle/>
+          <a:p>
             <a:pPr>
-              <a:defRPr sz="1200">
-                <a:solidFill>
-                  <a:srgbClr val="505050"/>
-                </a:solidFill>
-                <a:latin typeface="BIZ UDPGothic"/>
-              </a:defRPr>
-            </a:pPr>
-            <a:r>
-              <a:t>※ 出所・注記: オフィスビルのエネルギー消費構造および現場BMヒアリング結果に基づく</a:t>
+              <a:spcBef>
+                <a:spcPts val="0"/>
+              </a:spcBef>
+              <a:defRPr sz="1400" b="1">
+                <a:solidFill>
+                  <a:srgbClr val="111111"/>
+                </a:solidFill>
+                <a:latin typeface="BIZ UDPGothic"/>
+              </a:defRPr>
+            </a:pPr>
+            <a:r>
+              <a:t>■ インターンシップに参加した理由：</a:t>
+            </a:r>
+          </a:p>
+          <a:p>
+            <a:pPr>
+              <a:spcBef>
+                <a:spcPts val="600"/>
+              </a:spcBef>
+              <a:defRPr sz="1300" b="0">
+                <a:solidFill>
+                  <a:srgbClr val="333333"/>
+                </a:solidFill>
+                <a:latin typeface="BIZ UDPGothic"/>
+              </a:defRPr>
+            </a:pPr>
+            <a:r>
+              <a:t>①大学では扱えない実データに触れる</a:t>
+            </a:r>
+          </a:p>
+          <a:p>
+            <a:pPr>
+              <a:spcBef>
+                <a:spcPts val="400"/>
+              </a:spcBef>
+              <a:defRPr sz="1300" b="0">
+                <a:solidFill>
+                  <a:srgbClr val="333333"/>
+                </a:solidFill>
+                <a:latin typeface="BIZ UDPGothic"/>
+              </a:defRPr>
+            </a:pPr>
+            <a:r>
+              <a:t>②お客様目線での開発</a:t>
+            </a:r>
+          </a:p>
+          <a:p>
+            <a:pPr>
+              <a:spcBef>
+                <a:spcPts val="400"/>
+              </a:spcBef>
+              <a:defRPr sz="1300" b="0">
+                <a:solidFill>
+                  <a:srgbClr val="333333"/>
+                </a:solidFill>
+                <a:latin typeface="BIZ UDPGothic"/>
+              </a:defRPr>
+            </a:pPr>
+            <a:r>
+              <a:t>③関西の雰囲気を知る</a:t>
+            </a:r>
+          </a:p>
+          <a:p>
+            <a:pPr>
+              <a:spcBef>
+                <a:spcPts val="2200"/>
+              </a:spcBef>
+              <a:defRPr sz="1400" b="1">
+                <a:solidFill>
+                  <a:srgbClr val="111111"/>
+                </a:solidFill>
+                <a:latin typeface="BIZ UDPGothic"/>
+              </a:defRPr>
+            </a:pPr>
+            <a:r>
+              <a:t>■ 大学での研究：</a:t>
+            </a:r>
+          </a:p>
+          <a:p>
+            <a:pPr>
+              <a:spcBef>
+                <a:spcPts val="600"/>
+              </a:spcBef>
+              <a:defRPr sz="1300" b="0">
+                <a:solidFill>
+                  <a:srgbClr val="333333"/>
+                </a:solidFill>
+                <a:latin typeface="BIZ UDPGothic"/>
+              </a:defRPr>
+            </a:pPr>
+            <a:r>
+              <a:t>遺伝子ネットワークモデルの制御</a:t>
+            </a:r>
+          </a:p>
+          <a:p>
+            <a:pPr>
+              <a:spcBef>
+                <a:spcPts val="400"/>
+              </a:spcBef>
+              <a:defRPr sz="1300" b="0">
+                <a:solidFill>
+                  <a:srgbClr val="333333"/>
+                </a:solidFill>
+                <a:latin typeface="BIZ UDPGothic"/>
+              </a:defRPr>
+            </a:pPr>
+            <a:r>
+              <a:t>病気を治すための投薬順序の最適化</a:t>
+            </a:r>
+          </a:p>
+          <a:p>
+            <a:pPr>
+              <a:spcBef>
+                <a:spcPts val="2200"/>
+              </a:spcBef>
+              <a:defRPr sz="1400" b="1">
+                <a:solidFill>
+                  <a:srgbClr val="111111"/>
+                </a:solidFill>
+                <a:latin typeface="BIZ UDPGothic"/>
+              </a:defRPr>
+            </a:pPr>
+            <a:r>
+              <a:t>■ 趣味：</a:t>
+            </a:r>
+          </a:p>
+          <a:p>
+            <a:pPr>
+              <a:spcBef>
+                <a:spcPts val="600"/>
+              </a:spcBef>
+              <a:defRPr sz="1300" b="0">
+                <a:solidFill>
+                  <a:srgbClr val="333333"/>
+                </a:solidFill>
+                <a:latin typeface="BIZ UDPGothic"/>
+              </a:defRPr>
+            </a:pPr>
+            <a:r>
+              <a:t>鉄道旅行（乗り鉄）</a:t>
             </a:r>
           </a:p>
         </p:txBody>
@@ -4678,18 +4580,16 @@
         <p:spPr>
           <a:xfrm>
             <a:off x="0" y="0"/>
-            <a:ext cx="12191695" cy="1005840"/>
+            <a:ext cx="12191695" cy="530352"/>
           </a:xfrm>
           <a:prstGeom prst="rect">
             <a:avLst/>
           </a:prstGeom>
           <a:solidFill>
-            <a:srgbClr val="092B4C"/>
+            <a:srgbClr val="0B3968"/>
           </a:solidFill>
           <a:ln>
-            <a:solidFill>
-              <a:srgbClr val="092B4C"/>
-            </a:solidFill>
+            <a:noFill/>
           </a:ln>
         </p:spPr>
         <p:style>
@@ -4716,24 +4616,60 @@
       </p:sp>
       <p:sp>
         <p:nvSpPr>
-          <p:cNvPr id="3" name="Rounded Rectangle 2"/>
+          <p:cNvPr id="3" name="TextBox 2"/>
+          <p:cNvSpPr txBox="1"/>
+          <p:nvPr/>
+        </p:nvSpPr>
+        <p:spPr>
+          <a:xfrm>
+            <a:off x="301752" y="73152"/>
+            <a:ext cx="9144000" cy="411480"/>
+          </a:xfrm>
+          <a:prstGeom prst="rect">
+            <a:avLst/>
+          </a:prstGeom>
+          <a:noFill/>
+        </p:spPr>
+        <p:txBody>
+          <a:bodyPr wrap="square">
+            <a:spAutoFit/>
+          </a:bodyPr>
+          <a:lstStyle/>
+          <a:p>
+            <a:pPr>
+              <a:defRPr sz="1800" b="1">
+                <a:solidFill>
+                  <a:srgbClr val="FFFFFF"/>
+                </a:solidFill>
+                <a:latin typeface="BIZ UDPGothic"/>
+              </a:defRPr>
+            </a:pPr>
+            <a:r>
+              <a:t>2. 背景・目的</a:t>
+            </a:r>
+          </a:p>
+        </p:txBody>
+      </p:sp>
+      <p:sp>
+        <p:nvSpPr>
+          <p:cNvPr id="4" name="Rounded Rectangle 3"/>
           <p:cNvSpPr/>
           <p:nvPr/>
         </p:nvSpPr>
         <p:spPr>
           <a:xfrm>
-            <a:off x="457200" y="109728"/>
-            <a:ext cx="2377440" cy="329184"/>
+            <a:off x="10789920" y="128016"/>
+            <a:ext cx="484632" cy="274320"/>
           </a:xfrm>
           <a:prstGeom prst="roundRect">
             <a:avLst/>
           </a:prstGeom>
           <a:solidFill>
-            <a:srgbClr val="0B5AA6"/>
+            <a:srgbClr val="24588E"/>
           </a:solidFill>
           <a:ln>
             <a:solidFill>
-              <a:srgbClr val="0B5AA6"/>
+              <a:srgbClr val="5E8DBE"/>
             </a:solidFill>
           </a:ln>
         </p:spPr>
@@ -4752,55 +4688,19 @@
           </a:fontRef>
         </p:style>
         <p:txBody>
-          <a:bodyPr rtlCol="0" anchor="ctr" wrap="square"/>
+          <a:bodyPr rtlCol="0" anchor="ctr"/>
           <a:lstStyle/>
           <a:p>
             <a:pPr algn="ctr">
-              <a:defRPr sz="1400" b="1">
-                <a:solidFill>
-                  <a:srgbClr val="FFFFFF"/>
-                </a:solidFill>
-                <a:latin typeface="BIZ UDPGothic"/>
-              </a:defRPr>
-            </a:pPr>
-            <a:r>
-              <a:t>研究開発実習 成果報告</a:t>
-            </a:r>
-          </a:p>
-        </p:txBody>
-      </p:sp>
-      <p:sp>
-        <p:nvSpPr>
-          <p:cNvPr id="4" name="TextBox 3"/>
-          <p:cNvSpPr txBox="1"/>
-          <p:nvPr/>
-        </p:nvSpPr>
-        <p:spPr>
-          <a:xfrm>
-            <a:off x="457200" y="457200"/>
-            <a:ext cx="10058400" cy="502920"/>
-          </a:xfrm>
-          <a:prstGeom prst="rect">
-            <a:avLst/>
-          </a:prstGeom>
-          <a:noFill/>
-        </p:spPr>
-        <p:txBody>
-          <a:bodyPr wrap="square">
-            <a:spAutoFit/>
-          </a:bodyPr>
-          <a:lstStyle/>
-          <a:p>
-            <a:pPr>
-              <a:defRPr sz="2200" b="1">
-                <a:solidFill>
-                  <a:srgbClr val="FFFFFF"/>
-                </a:solidFill>
-                <a:latin typeface="BIZ UDPGothic"/>
-              </a:defRPr>
-            </a:pPr>
-            <a:r>
-              <a:t>実証対象と使用データ：第二別館7階 BEMSデータ</a:t>
+              <a:defRPr sz="1100" i="1">
+                <a:solidFill>
+                  <a:srgbClr val="E8F1F8"/>
+                </a:solidFill>
+                <a:latin typeface="BIZ UDPGothic"/>
+              </a:defRPr>
+            </a:pPr>
+            <a:r>
+              <a:t>IUO</a:t>
             </a:r>
           </a:p>
         </p:txBody>
@@ -4813,8 +4713,8 @@
         </p:nvSpPr>
         <p:spPr>
           <a:xfrm>
-            <a:off x="10789920" y="457200"/>
-            <a:ext cx="1005840" cy="411480"/>
+            <a:off x="11430000" y="73152"/>
+            <a:ext cx="548640" cy="411480"/>
           </a:xfrm>
           <a:prstGeom prst="rect">
             <a:avLst/>
@@ -4827,41 +4727,193 @@
           </a:bodyPr>
           <a:lstStyle/>
           <a:p>
+            <a:pPr algn="ctr">
+              <a:defRPr sz="1800" b="1">
+                <a:solidFill>
+                  <a:srgbClr val="FFFFFF"/>
+                </a:solidFill>
+                <a:latin typeface="BIZ UDPGothic"/>
+              </a:defRPr>
+            </a:pPr>
+            <a:r>
+              <a:t>3</a:t>
+            </a:r>
+          </a:p>
+        </p:txBody>
+      </p:sp>
+      <p:sp>
+        <p:nvSpPr>
+          <p:cNvPr id="6" name="TextBox 5"/>
+          <p:cNvSpPr txBox="1"/>
+          <p:nvPr/>
+        </p:nvSpPr>
+        <p:spPr>
+          <a:xfrm>
+            <a:off x="9144000" y="6537960"/>
+            <a:ext cx="2743200" cy="228600"/>
+          </a:xfrm>
+          <a:prstGeom prst="rect">
+            <a:avLst/>
+          </a:prstGeom>
+          <a:noFill/>
+        </p:spPr>
+        <p:txBody>
+          <a:bodyPr wrap="none">
+            <a:spAutoFit/>
+          </a:bodyPr>
+          <a:lstStyle/>
+          <a:p>
             <a:pPr algn="r">
-              <a:defRPr sz="1800" b="1">
-                <a:solidFill>
-                  <a:srgbClr val="EBF2F8"/>
-                </a:solidFill>
-                <a:latin typeface="BIZ UDPGothic"/>
-              </a:defRPr>
-            </a:pPr>
-            <a:r>
-              <a:t>03 / 08</a:t>
-            </a:r>
-          </a:p>
-        </p:txBody>
-      </p:sp>
-      <p:sp>
-        <p:nvSpPr>
-          <p:cNvPr id="6" name="Rectangle 5"/>
+              <a:defRPr sz="800">
+                <a:solidFill>
+                  <a:srgbClr val="666666"/>
+                </a:solidFill>
+                <a:latin typeface="BIZ UDPGothic"/>
+              </a:defRPr>
+            </a:pPr>
+            <a:r>
+              <a:t>© Panasonic Corporation</a:t>
+            </a:r>
+          </a:p>
+        </p:txBody>
+      </p:sp>
+      <p:sp>
+        <p:nvSpPr>
+          <p:cNvPr id="7" name="TextBox 6"/>
+          <p:cNvSpPr txBox="1"/>
+          <p:nvPr/>
+        </p:nvSpPr>
+        <p:spPr>
+          <a:xfrm>
+            <a:off x="731520" y="868680"/>
+            <a:ext cx="10698480" cy="2011680"/>
+          </a:xfrm>
+          <a:prstGeom prst="rect">
+            <a:avLst/>
+          </a:prstGeom>
+          <a:noFill/>
+        </p:spPr>
+        <p:txBody>
+          <a:bodyPr wrap="none">
+            <a:spAutoFit/>
+          </a:bodyPr>
+          <a:lstStyle/>
+          <a:p>
+            <a:pPr>
+              <a:spcBef>
+                <a:spcPts val="0"/>
+              </a:spcBef>
+              <a:defRPr sz="1400" b="1">
+                <a:solidFill>
+                  <a:srgbClr val="111111"/>
+                </a:solidFill>
+                <a:latin typeface="BIZ UDPGothic"/>
+              </a:defRPr>
+            </a:pPr>
+            <a:r>
+              <a:t>■ 背景</a:t>
+            </a:r>
+          </a:p>
+          <a:p>
+            <a:pPr>
+              <a:spcBef>
+                <a:spcPts val="600"/>
+              </a:spcBef>
+              <a:defRPr sz="1250" b="0">
+                <a:solidFill>
+                  <a:srgbClr val="333333"/>
+                </a:solidFill>
+                <a:latin typeface="BIZ UDPGothic"/>
+              </a:defRPr>
+            </a:pPr>
+            <a:r>
+              <a:t>・近年、気候変動への対応やカーボンニュートラルの実現に向け、ESG※1投資が世界的に拡大している</a:t>
+            </a:r>
+          </a:p>
+          <a:p>
+            <a:pPr>
+              <a:spcBef>
+                <a:spcPts val="400"/>
+              </a:spcBef>
+              <a:defRPr sz="1250" b="0">
+                <a:solidFill>
+                  <a:srgbClr val="333333"/>
+                </a:solidFill>
+                <a:latin typeface="BIZ UDPGothic"/>
+              </a:defRPr>
+            </a:pPr>
+            <a:r>
+              <a:t>・企業価値や資本市場での評価に影響する重要な要素となっている</a:t>
+            </a:r>
+          </a:p>
+        </p:txBody>
+      </p:sp>
+      <p:sp>
+        <p:nvSpPr>
+          <p:cNvPr id="8" name="TextBox 7"/>
+          <p:cNvSpPr txBox="1"/>
+          <p:nvPr/>
+        </p:nvSpPr>
+        <p:spPr>
+          <a:xfrm>
+            <a:off x="9144000" y="1280160"/>
+            <a:ext cx="2560320" cy="914400"/>
+          </a:xfrm>
+          <a:prstGeom prst="rect">
+            <a:avLst/>
+          </a:prstGeom>
+          <a:noFill/>
+        </p:spPr>
+        <p:txBody>
+          <a:bodyPr wrap="none">
+            <a:spAutoFit/>
+          </a:bodyPr>
+          <a:lstStyle/>
+          <a:p>
+            <a:pPr>
+              <a:spcBef>
+                <a:spcPts val="0"/>
+              </a:spcBef>
+              <a:defRPr sz="800" b="0">
+                <a:solidFill>
+                  <a:srgbClr val="666666"/>
+                </a:solidFill>
+                <a:latin typeface="BIZ UDPGothic"/>
+              </a:defRPr>
+            </a:pPr>
+            <a:r>
+              <a:t>※1 E(nvironment)：環境…気候変動など</a:t>
+            </a:r>
+            <a:br/>
+            <a:r>
+              <a:t>   S(ocial)：社会…働き方の改善など</a:t>
+            </a:r>
+            <a:br/>
+            <a:r>
+              <a:t>   G(overnance)：ガバナンス…法令遵守など</a:t>
+            </a:r>
+          </a:p>
+        </p:txBody>
+      </p:sp>
+      <p:sp>
+        <p:nvSpPr>
+          <p:cNvPr id="9" name="Down Arrow 8"/>
           <p:cNvSpPr/>
           <p:nvPr/>
         </p:nvSpPr>
         <p:spPr>
           <a:xfrm>
-            <a:off x="0" y="6537960"/>
-            <a:ext cx="12191695" cy="320040"/>
-          </a:xfrm>
-          <a:prstGeom prst="rect">
+            <a:off x="5852160" y="1828800"/>
+            <a:ext cx="320040" cy="320040"/>
+          </a:xfrm>
+          <a:prstGeom prst="downArrow">
             <a:avLst/>
           </a:prstGeom>
           <a:solidFill>
-            <a:srgbClr val="F5F6F8"/>
+            <a:srgbClr val="1E64A8"/>
           </a:solidFill>
           <a:ln>
-            <a:solidFill>
-              <a:srgbClr val="D2D7DE"/>
-            </a:solidFill>
+            <a:noFill/>
           </a:ln>
         </p:spPr>
         <p:style>
@@ -4888,24 +4940,24 @@
       </p:sp>
       <p:sp>
         <p:nvSpPr>
-          <p:cNvPr id="7" name="Rounded Rectangle 6"/>
+          <p:cNvPr id="10" name="Rounded Rectangle 9"/>
           <p:cNvSpPr/>
           <p:nvPr/>
         </p:nvSpPr>
         <p:spPr>
           <a:xfrm>
-            <a:off x="548640" y="1188720"/>
-            <a:ext cx="11091672" cy="914400"/>
+            <a:off x="2103120" y="2240280"/>
+            <a:ext cx="7955279" cy="502920"/>
           </a:xfrm>
           <a:prstGeom prst="roundRect">
             <a:avLst/>
           </a:prstGeom>
           <a:solidFill>
-            <a:srgbClr val="EBF2F8"/>
+            <a:srgbClr val="EDF5FB"/>
           </a:solidFill>
-          <a:ln w="19050">
+          <a:ln>
             <a:solidFill>
-              <a:srgbClr val="0B5AA6"/>
+              <a:srgbClr val="7BA4C7"/>
             </a:solidFill>
           </a:ln>
         </p:spPr>
@@ -4927,20 +4979,30 @@
           <a:bodyPr rtlCol="0" anchor="ctr"/>
           <a:lstStyle/>
           <a:p>
-            <a:pPr algn="ctr"/>
-          </a:p>
-        </p:txBody>
-      </p:sp>
-      <p:sp>
-        <p:nvSpPr>
-          <p:cNvPr id="8" name="TextBox 7"/>
+            <a:pPr algn="ctr">
+              <a:defRPr sz="1300" b="1">
+                <a:solidFill>
+                  <a:srgbClr val="113355"/>
+                </a:solidFill>
+                <a:latin typeface="BIZ UDPGothic"/>
+              </a:defRPr>
+            </a:pPr>
+            <a:r>
+              <a:t>省エネ施策の一つとして、熱源の起動時刻をどこまで後ろ倒しできるか検討</a:t>
+            </a:r>
+          </a:p>
+        </p:txBody>
+      </p:sp>
+      <p:sp>
+        <p:nvSpPr>
+          <p:cNvPr id="11" name="TextBox 10"/>
           <p:cNvSpPr txBox="1"/>
           <p:nvPr/>
         </p:nvSpPr>
         <p:spPr>
           <a:xfrm>
-            <a:off x="731520" y="1234440"/>
-            <a:ext cx="10698480" cy="822960"/>
+            <a:off x="731520" y="3017520"/>
+            <a:ext cx="10698480" cy="1371600"/>
           </a:xfrm>
           <a:prstGeom prst="rect">
             <a:avLst/>
@@ -4948,61 +5010,80 @@
           <a:noFill/>
         </p:spPr>
         <p:txBody>
-          <a:bodyPr wrap="square">
+          <a:bodyPr wrap="none">
             <a:spAutoFit/>
           </a:bodyPr>
           <a:lstStyle/>
           <a:p>
             <a:pPr>
-              <a:spcAft>
-                <a:spcPts val="200"/>
-              </a:spcAft>
-              <a:defRPr sz="1800" b="1">
-                <a:solidFill>
-                  <a:srgbClr val="092B4C"/>
-                </a:solidFill>
-                <a:latin typeface="BIZ UDPGothic"/>
-              </a:defRPr>
-            </a:pPr>
-            <a:r>
-              <a:t>【実証対象】第二別館 7階オフィスフロア（冷房期・BEMS 1分値ログ）</a:t>
+              <a:spcBef>
+                <a:spcPts val="0"/>
+              </a:spcBef>
+              <a:defRPr sz="1400" b="1">
+                <a:solidFill>
+                  <a:srgbClr val="111111"/>
+                </a:solidFill>
+                <a:latin typeface="BIZ UDPGothic"/>
+              </a:defRPr>
+            </a:pPr>
+            <a:r>
+              <a:t>■ 目的</a:t>
             </a:r>
           </a:p>
           <a:p>
             <a:pPr>
-              <a:defRPr sz="1800">
-                <a:solidFill>
-                  <a:srgbClr val="141414"/>
-                </a:solidFill>
-                <a:latin typeface="BIZ UDPGothic"/>
-              </a:defRPr>
-            </a:pPr>
-            <a:r>
-              <a:t>2025年8月中旬〜下旬の実動データ（通常平日、土日、お盆休み明けを含む全日）</a:t>
-            </a:r>
-          </a:p>
-        </p:txBody>
-      </p:sp>
-      <p:sp>
-        <p:nvSpPr>
-          <p:cNvPr id="9" name="Rounded Rectangle 8"/>
+              <a:spcBef>
+                <a:spcPts val="600"/>
+              </a:spcBef>
+              <a:defRPr sz="1250" b="0">
+                <a:solidFill>
+                  <a:srgbClr val="333333"/>
+                </a:solidFill>
+                <a:latin typeface="BIZ UDPGothic"/>
+              </a:defRPr>
+            </a:pPr>
+            <a:r>
+              <a:t>・熱源起動時刻をデータに基づいて最適化し、「確実な温度到達」と「早朝予冷の無駄削減」を両立する</a:t>
+            </a:r>
+          </a:p>
+          <a:p>
+            <a:pPr>
+              <a:spcBef>
+                <a:spcPts val="400"/>
+              </a:spcBef>
+              <a:defRPr sz="1250" b="0">
+                <a:solidFill>
+                  <a:srgbClr val="333333"/>
+                </a:solidFill>
+                <a:latin typeface="BIZ UDPGothic"/>
+              </a:defRPr>
+            </a:pPr>
+            <a:r>
+              <a:t>・それらの情報をわかりやすく可視化することで、ビルメンテナンス(BM)が根拠を持って安全に判断できる意思決定支援システムを構築する</a:t>
+            </a:r>
+          </a:p>
+        </p:txBody>
+      </p:sp>
+      <p:sp>
+        <p:nvSpPr>
+          <p:cNvPr id="12" name="Rounded Rectangle 11"/>
           <p:cNvSpPr/>
           <p:nvPr/>
         </p:nvSpPr>
         <p:spPr>
           <a:xfrm>
-            <a:off x="548640" y="2286000"/>
-            <a:ext cx="11091672" cy="1234440"/>
+            <a:off x="2377440" y="4297680"/>
+            <a:ext cx="1828800" cy="822960"/>
           </a:xfrm>
           <a:prstGeom prst="roundRect">
             <a:avLst/>
           </a:prstGeom>
           <a:solidFill>
-            <a:srgbClr val="FFFFFF"/>
+            <a:srgbClr val="D9EBF7"/>
           </a:solidFill>
           <a:ln w="19050">
             <a:solidFill>
-              <a:srgbClr val="0B5AA6"/>
+              <a:srgbClr val="4A90E2"/>
             </a:solidFill>
           </a:ln>
         </p:spPr>
@@ -5024,31 +5105,43 @@
           <a:bodyPr rtlCol="0" anchor="ctr"/>
           <a:lstStyle/>
           <a:p>
-            <a:pPr algn="ctr"/>
-          </a:p>
-        </p:txBody>
-      </p:sp>
-      <p:sp>
-        <p:nvSpPr>
-          <p:cNvPr id="10" name="Rectangle 9"/>
+            <a:pPr algn="ctr">
+              <a:defRPr sz="1250" b="1">
+                <a:solidFill>
+                  <a:srgbClr val="0B3968"/>
+                </a:solidFill>
+                <a:latin typeface="BIZ UDPGothic"/>
+              </a:defRPr>
+            </a:pPr>
+            <a:r>
+              <a:t>必要な</a:t>
+            </a:r>
+            <a:br/>
+            <a:r>
+              <a:t>予冷時間の予測</a:t>
+            </a:r>
+          </a:p>
+        </p:txBody>
+      </p:sp>
+      <p:sp>
+        <p:nvSpPr>
+          <p:cNvPr id="13" name="Right Arrow 12"/>
           <p:cNvSpPr/>
           <p:nvPr/>
         </p:nvSpPr>
         <p:spPr>
           <a:xfrm>
-            <a:off x="731520" y="2468880"/>
-            <a:ext cx="2926080" cy="457200"/>
-          </a:xfrm>
-          <a:prstGeom prst="rect">
+            <a:off x="4480560" y="4572000"/>
+            <a:ext cx="457200" cy="274320"/>
+          </a:xfrm>
+          <a:prstGeom prst="rightArrow">
             <a:avLst/>
           </a:prstGeom>
           <a:solidFill>
-            <a:srgbClr val="0B5AA6"/>
+            <a:srgbClr val="0B3968"/>
           </a:solidFill>
           <a:ln>
-            <a:solidFill>
-              <a:srgbClr val="0B5AA6"/>
-            </a:solidFill>
+            <a:noFill/>
           </a:ln>
         </p:spPr>
         <p:style>
@@ -5069,92 +5162,30 @@
           <a:bodyPr rtlCol="0" anchor="ctr"/>
           <a:lstStyle/>
           <a:p>
-            <a:pPr algn="ctr">
-              <a:defRPr sz="1800" b="1">
-                <a:solidFill>
-                  <a:srgbClr val="FFFFFF"/>
-                </a:solidFill>
-                <a:latin typeface="BIZ UDPGothic"/>
-              </a:defRPr>
-            </a:pPr>
-            <a:r>
-              <a:t>① 熱源消費電力</a:t>
-            </a:r>
-          </a:p>
-        </p:txBody>
-      </p:sp>
-      <p:sp>
-        <p:nvSpPr>
-          <p:cNvPr id="11" name="TextBox 10"/>
-          <p:cNvSpPr txBox="1"/>
-          <p:nvPr/>
-        </p:nvSpPr>
-        <p:spPr>
-          <a:xfrm>
-            <a:off x="3840480" y="2423160"/>
-            <a:ext cx="7589520" cy="1005840"/>
-          </a:xfrm>
-          <a:prstGeom prst="rect">
-            <a:avLst/>
-          </a:prstGeom>
-          <a:noFill/>
-        </p:spPr>
-        <p:txBody>
-          <a:bodyPr wrap="square">
-            <a:spAutoFit/>
-          </a:bodyPr>
-          <a:lstStyle/>
-          <a:p>
-            <a:pPr>
-              <a:spcAft>
-                <a:spcPts val="200"/>
-              </a:spcAft>
-              <a:defRPr sz="1800" b="1">
-                <a:solidFill>
-                  <a:srgbClr val="141414"/>
-                </a:solidFill>
-                <a:latin typeface="BIZ UDPGothic"/>
-              </a:defRPr>
-            </a:pPr>
-            <a:r>
-              <a:t>対象: 冷温水チラー（R-2-2A / 2B）電力ログ</a:t>
-            </a:r>
-          </a:p>
-          <a:p>
-            <a:pPr>
-              <a:defRPr sz="1800">
-                <a:solidFill>
-                  <a:srgbClr val="505050"/>
-                </a:solidFill>
-                <a:latin typeface="BIZ UDPGothic"/>
-              </a:defRPr>
-            </a:pPr>
-            <a:r>
-              <a:t>• 立ち上がり電力から熱源起動時刻・2台追従を同定</a:t>
-            </a:r>
-          </a:p>
-        </p:txBody>
-      </p:sp>
-      <p:sp>
-        <p:nvSpPr>
-          <p:cNvPr id="12" name="Rounded Rectangle 11"/>
+            <a:pPr algn="ctr"/>
+          </a:p>
+        </p:txBody>
+      </p:sp>
+      <p:sp>
+        <p:nvSpPr>
+          <p:cNvPr id="14" name="Rounded Rectangle 13"/>
           <p:cNvSpPr/>
           <p:nvPr/>
         </p:nvSpPr>
         <p:spPr>
           <a:xfrm>
-            <a:off x="548640" y="3657600"/>
-            <a:ext cx="11091672" cy="1234440"/>
+            <a:off x="5212080" y="4297680"/>
+            <a:ext cx="1828800" cy="822960"/>
           </a:xfrm>
           <a:prstGeom prst="roundRect">
             <a:avLst/>
           </a:prstGeom>
           <a:solidFill>
-            <a:srgbClr val="FFFFFF"/>
+            <a:srgbClr val="D9EBF7"/>
           </a:solidFill>
           <a:ln w="19050">
             <a:solidFill>
-              <a:srgbClr val="2474B5"/>
+              <a:srgbClr val="4A90E2"/>
             </a:solidFill>
           </a:ln>
         </p:spPr>
@@ -5176,31 +5207,43 @@
           <a:bodyPr rtlCol="0" anchor="ctr"/>
           <a:lstStyle/>
           <a:p>
-            <a:pPr algn="ctr"/>
-          </a:p>
-        </p:txBody>
-      </p:sp>
-      <p:sp>
-        <p:nvSpPr>
-          <p:cNvPr id="13" name="Rectangle 12"/>
+            <a:pPr algn="ctr">
+              <a:defRPr sz="1250" b="1">
+                <a:solidFill>
+                  <a:srgbClr val="0B3968"/>
+                </a:solidFill>
+                <a:latin typeface="BIZ UDPGothic"/>
+              </a:defRPr>
+            </a:pPr>
+            <a:r>
+              <a:t>削減効果の</a:t>
+            </a:r>
+            <a:br/>
+            <a:r>
+              <a:t>可視化</a:t>
+            </a:r>
+          </a:p>
+        </p:txBody>
+      </p:sp>
+      <p:sp>
+        <p:nvSpPr>
+          <p:cNvPr id="15" name="Right Arrow 14"/>
           <p:cNvSpPr/>
           <p:nvPr/>
         </p:nvSpPr>
         <p:spPr>
           <a:xfrm>
-            <a:off x="731520" y="3840480"/>
-            <a:ext cx="2926080" cy="457200"/>
-          </a:xfrm>
-          <a:prstGeom prst="rect">
+            <a:off x="7315200" y="4572000"/>
+            <a:ext cx="457200" cy="274320"/>
+          </a:xfrm>
+          <a:prstGeom prst="rightArrow">
             <a:avLst/>
           </a:prstGeom>
           <a:solidFill>
-            <a:srgbClr val="2474B5"/>
+            <a:srgbClr val="0B3968"/>
           </a:solidFill>
           <a:ln>
-            <a:solidFill>
-              <a:srgbClr val="2474B5"/>
-            </a:solidFill>
+            <a:noFill/>
           </a:ln>
         </p:spPr>
         <p:style>
@@ -5221,92 +5264,30 @@
           <a:bodyPr rtlCol="0" anchor="ctr"/>
           <a:lstStyle/>
           <a:p>
-            <a:pPr algn="ctr">
-              <a:defRPr sz="1800" b="1">
-                <a:solidFill>
-                  <a:srgbClr val="FFFFFF"/>
-                </a:solidFill>
-                <a:latin typeface="BIZ UDPGothic"/>
-              </a:defRPr>
-            </a:pPr>
-            <a:r>
-              <a:t>② 室内温度・設定温度</a:t>
-            </a:r>
-          </a:p>
-        </p:txBody>
-      </p:sp>
-      <p:sp>
-        <p:nvSpPr>
-          <p:cNvPr id="14" name="TextBox 13"/>
-          <p:cNvSpPr txBox="1"/>
-          <p:nvPr/>
-        </p:nvSpPr>
-        <p:spPr>
-          <a:xfrm>
-            <a:off x="3840480" y="3794760"/>
-            <a:ext cx="7589520" cy="1005840"/>
-          </a:xfrm>
-          <a:prstGeom prst="rect">
-            <a:avLst/>
-          </a:prstGeom>
-          <a:noFill/>
-        </p:spPr>
-        <p:txBody>
-          <a:bodyPr wrap="square">
-            <a:spAutoFit/>
-          </a:bodyPr>
-          <a:lstStyle/>
-          <a:p>
-            <a:pPr>
-              <a:spcAft>
-                <a:spcPts val="200"/>
-              </a:spcAft>
-              <a:defRPr sz="1800" b="1">
-                <a:solidFill>
-                  <a:srgbClr val="141414"/>
-                </a:solidFill>
-                <a:latin typeface="BIZ UDPGothic"/>
-              </a:defRPr>
-            </a:pPr>
-            <a:r>
-              <a:t>対象: 7階 FCU室内温度・設定温度（0.5℃刻み）</a:t>
-            </a:r>
-          </a:p>
-          <a:p>
-            <a:pPr>
-              <a:defRPr sz="1800">
-                <a:solidFill>
-                  <a:srgbClr val="505050"/>
-                </a:solidFill>
-                <a:latin typeface="BIZ UDPGothic"/>
-              </a:defRPr>
-            </a:pPr>
-            <a:r>
-              <a:t>• 起動から目標設定温度までの降温時間を正確に追跡</a:t>
-            </a:r>
-          </a:p>
-        </p:txBody>
-      </p:sp>
-      <p:sp>
-        <p:nvSpPr>
-          <p:cNvPr id="15" name="Rounded Rectangle 14"/>
+            <a:pPr algn="ctr"/>
+          </a:p>
+        </p:txBody>
+      </p:sp>
+      <p:sp>
+        <p:nvSpPr>
+          <p:cNvPr id="16" name="Rounded Rectangle 15"/>
           <p:cNvSpPr/>
           <p:nvPr/>
         </p:nvSpPr>
         <p:spPr>
           <a:xfrm>
-            <a:off x="548640" y="5029200"/>
-            <a:ext cx="11091672" cy="1234440"/>
+            <a:off x="8046720" y="4297680"/>
+            <a:ext cx="1828800" cy="822960"/>
           </a:xfrm>
           <a:prstGeom prst="roundRect">
             <a:avLst/>
           </a:prstGeom>
           <a:solidFill>
-            <a:srgbClr val="FFFFFF"/>
+            <a:srgbClr val="D9EBF7"/>
           </a:solidFill>
           <a:ln w="19050">
             <a:solidFill>
-              <a:srgbClr val="092B4C"/>
+              <a:srgbClr val="4A90E2"/>
             </a:solidFill>
           </a:ln>
         </p:spPr>
@@ -5328,149 +5309,20 @@
           <a:bodyPr rtlCol="0" anchor="ctr"/>
           <a:lstStyle/>
           <a:p>
-            <a:pPr algn="ctr"/>
-          </a:p>
-        </p:txBody>
-      </p:sp>
-      <p:sp>
-        <p:nvSpPr>
-          <p:cNvPr id="16" name="Rectangle 15"/>
-          <p:cNvSpPr/>
-          <p:nvPr/>
-        </p:nvSpPr>
-        <p:spPr>
-          <a:xfrm>
-            <a:off x="731520" y="5212080"/>
-            <a:ext cx="2926080" cy="457200"/>
-          </a:xfrm>
-          <a:prstGeom prst="rect">
-            <a:avLst/>
-          </a:prstGeom>
-          <a:solidFill>
-            <a:srgbClr val="092B4C"/>
-          </a:solidFill>
-          <a:ln>
-            <a:solidFill>
-              <a:srgbClr val="092B4C"/>
-            </a:solidFill>
-          </a:ln>
-        </p:spPr>
-        <p:style>
-          <a:lnRef idx="1">
-            <a:schemeClr val="accent1"/>
-          </a:lnRef>
-          <a:fillRef idx="3">
-            <a:schemeClr val="accent1"/>
-          </a:fillRef>
-          <a:effectRef idx="2">
-            <a:schemeClr val="accent1"/>
-          </a:effectRef>
-          <a:fontRef idx="minor">
-            <a:schemeClr val="lt1"/>
-          </a:fontRef>
-        </p:style>
-        <p:txBody>
-          <a:bodyPr rtlCol="0" anchor="ctr"/>
-          <a:lstStyle/>
-          <a:p>
             <a:pPr algn="ctr">
-              <a:defRPr sz="1800" b="1">
-                <a:solidFill>
-                  <a:srgbClr val="FFFFFF"/>
-                </a:solidFill>
-                <a:latin typeface="BIZ UDPGothic"/>
-              </a:defRPr>
-            </a:pPr>
-            <a:r>
-              <a:t>③ 外気温度・湿度</a:t>
-            </a:r>
-          </a:p>
-        </p:txBody>
-      </p:sp>
-      <p:sp>
-        <p:nvSpPr>
-          <p:cNvPr id="17" name="TextBox 16"/>
-          <p:cNvSpPr txBox="1"/>
-          <p:nvPr/>
-        </p:nvSpPr>
-        <p:spPr>
-          <a:xfrm>
-            <a:off x="3840480" y="5166360"/>
-            <a:ext cx="7589520" cy="1005840"/>
-          </a:xfrm>
-          <a:prstGeom prst="rect">
-            <a:avLst/>
-          </a:prstGeom>
-          <a:noFill/>
-        </p:spPr>
-        <p:txBody>
-          <a:bodyPr wrap="square">
-            <a:spAutoFit/>
-          </a:bodyPr>
-          <a:lstStyle/>
-          <a:p>
-            <a:pPr>
-              <a:spcAft>
-                <a:spcPts val="200"/>
-              </a:spcAft>
-              <a:defRPr sz="1800" b="1">
-                <a:solidFill>
-                  <a:srgbClr val="141414"/>
-                </a:solidFill>
-                <a:latin typeface="BIZ UDPGothic"/>
-              </a:defRPr>
-            </a:pPr>
-            <a:r>
-              <a:t>対象: 屋外空調機（AC-4機）気象計測値</a:t>
-            </a:r>
-          </a:p>
-          <a:p>
-            <a:pPr>
-              <a:defRPr sz="1800">
-                <a:solidFill>
-                  <a:srgbClr val="505050"/>
-                </a:solidFill>
-                <a:latin typeface="BIZ UDPGothic"/>
-              </a:defRPr>
-            </a:pPr>
-            <a:r>
-              <a:t>• 起動時点の外気負荷および気象予報値と突き合わせ</a:t>
-            </a:r>
-          </a:p>
-        </p:txBody>
-      </p:sp>
-      <p:sp>
-        <p:nvSpPr>
-          <p:cNvPr id="18" name="TextBox 17"/>
-          <p:cNvSpPr txBox="1"/>
-          <p:nvPr/>
-        </p:nvSpPr>
-        <p:spPr>
-          <a:xfrm>
-            <a:off x="457200" y="6556248"/>
-            <a:ext cx="11274552" cy="274320"/>
-          </a:xfrm>
-          <a:prstGeom prst="rect">
-            <a:avLst/>
-          </a:prstGeom>
-          <a:noFill/>
-        </p:spPr>
-        <p:txBody>
-          <a:bodyPr wrap="none">
-            <a:spAutoFit/>
-          </a:bodyPr>
-          <a:lstStyle/>
-          <a:p>
-            <a:pPr>
-              <a:defRPr sz="1200">
-                <a:solidFill>
-                  <a:srgbClr val="505050"/>
-                </a:solidFill>
-                <a:latin typeface="BIZ UDPGothic"/>
-              </a:defRPr>
-            </a:pPr>
-            <a:r>
-              <a:t>※ 出所・注記: 第二別館 BEMS中央監視装置ログ（2025年8月17日〜8月30日）</a:t>
+              <a:defRPr sz="1250" b="1">
+                <a:solidFill>
+                  <a:srgbClr val="0B3968"/>
+                </a:solidFill>
+                <a:latin typeface="BIZ UDPGothic"/>
+              </a:defRPr>
+            </a:pPr>
+            <a:r>
+              <a:t>BM</a:t>
+            </a:r>
+            <a:br/>
+            <a:r>
+              <a:t>意思決定</a:t>
             </a:r>
           </a:p>
         </p:txBody>
@@ -5502,18 +5354,16 @@
         <p:spPr>
           <a:xfrm>
             <a:off x="0" y="0"/>
-            <a:ext cx="12191695" cy="1005840"/>
+            <a:ext cx="12191695" cy="530352"/>
           </a:xfrm>
           <a:prstGeom prst="rect">
             <a:avLst/>
           </a:prstGeom>
           <a:solidFill>
-            <a:srgbClr val="092B4C"/>
+            <a:srgbClr val="0B3968"/>
           </a:solidFill>
           <a:ln>
-            <a:solidFill>
-              <a:srgbClr val="092B4C"/>
-            </a:solidFill>
+            <a:noFill/>
           </a:ln>
         </p:spPr>
         <p:style>
@@ -5540,24 +5390,60 @@
       </p:sp>
       <p:sp>
         <p:nvSpPr>
-          <p:cNvPr id="3" name="Rounded Rectangle 2"/>
+          <p:cNvPr id="3" name="TextBox 2"/>
+          <p:cNvSpPr txBox="1"/>
+          <p:nvPr/>
+        </p:nvSpPr>
+        <p:spPr>
+          <a:xfrm>
+            <a:off x="301752" y="73152"/>
+            <a:ext cx="9144000" cy="411480"/>
+          </a:xfrm>
+          <a:prstGeom prst="rect">
+            <a:avLst/>
+          </a:prstGeom>
+          <a:noFill/>
+        </p:spPr>
+        <p:txBody>
+          <a:bodyPr wrap="square">
+            <a:spAutoFit/>
+          </a:bodyPr>
+          <a:lstStyle/>
+          <a:p>
+            <a:pPr>
+              <a:defRPr sz="1800" b="1">
+                <a:solidFill>
+                  <a:srgbClr val="FFFFFF"/>
+                </a:solidFill>
+                <a:latin typeface="BIZ UDPGothic"/>
+              </a:defRPr>
+            </a:pPr>
+            <a:r>
+              <a:t>3. データ説明</a:t>
+            </a:r>
+          </a:p>
+        </p:txBody>
+      </p:sp>
+      <p:sp>
+        <p:nvSpPr>
+          <p:cNvPr id="4" name="Rounded Rectangle 3"/>
           <p:cNvSpPr/>
           <p:nvPr/>
         </p:nvSpPr>
         <p:spPr>
           <a:xfrm>
-            <a:off x="457200" y="109728"/>
-            <a:ext cx="2377440" cy="329184"/>
+            <a:off x="10789920" y="128016"/>
+            <a:ext cx="484632" cy="274320"/>
           </a:xfrm>
           <a:prstGeom prst="roundRect">
             <a:avLst/>
           </a:prstGeom>
           <a:solidFill>
-            <a:srgbClr val="0B5AA6"/>
+            <a:srgbClr val="24588E"/>
           </a:solidFill>
           <a:ln>
             <a:solidFill>
-              <a:srgbClr val="0B5AA6"/>
+              <a:srgbClr val="5E8DBE"/>
             </a:solidFill>
           </a:ln>
         </p:spPr>
@@ -5576,55 +5462,19 @@
           </a:fontRef>
         </p:style>
         <p:txBody>
-          <a:bodyPr rtlCol="0" anchor="ctr" wrap="square"/>
+          <a:bodyPr rtlCol="0" anchor="ctr"/>
           <a:lstStyle/>
           <a:p>
             <a:pPr algn="ctr">
-              <a:defRPr sz="1400" b="1">
-                <a:solidFill>
-                  <a:srgbClr val="FFFFFF"/>
-                </a:solidFill>
-                <a:latin typeface="BIZ UDPGothic"/>
-              </a:defRPr>
-            </a:pPr>
-            <a:r>
-              <a:t>研究開発実習 成果報告</a:t>
-            </a:r>
-          </a:p>
-        </p:txBody>
-      </p:sp>
-      <p:sp>
-        <p:nvSpPr>
-          <p:cNvPr id="4" name="TextBox 3"/>
-          <p:cNvSpPr txBox="1"/>
-          <p:nvPr/>
-        </p:nvSpPr>
-        <p:spPr>
-          <a:xfrm>
-            <a:off x="457200" y="457200"/>
-            <a:ext cx="10058400" cy="502920"/>
-          </a:xfrm>
-          <a:prstGeom prst="rect">
-            <a:avLst/>
-          </a:prstGeom>
-          <a:noFill/>
-        </p:spPr>
-        <p:txBody>
-          <a:bodyPr wrap="square">
-            <a:spAutoFit/>
-          </a:bodyPr>
-          <a:lstStyle/>
-          <a:p>
-            <a:pPr>
-              <a:defRPr sz="2200" b="1">
-                <a:solidFill>
-                  <a:srgbClr val="FFFFFF"/>
-                </a:solidFill>
-                <a:latin typeface="BIZ UDPGothic"/>
-              </a:defRPr>
-            </a:pPr>
-            <a:r>
-              <a:t>現場の課題と現状運用：早朝一律起動による『過剰予冷』の実態</a:t>
+              <a:defRPr sz="1100" i="1">
+                <a:solidFill>
+                  <a:srgbClr val="E8F1F8"/>
+                </a:solidFill>
+                <a:latin typeface="BIZ UDPGothic"/>
+              </a:defRPr>
+            </a:pPr>
+            <a:r>
+              <a:t>IUO</a:t>
             </a:r>
           </a:p>
         </p:txBody>
@@ -5637,8 +5487,8 @@
         </p:nvSpPr>
         <p:spPr>
           <a:xfrm>
-            <a:off x="10789920" y="457200"/>
-            <a:ext cx="1005840" cy="411480"/>
+            <a:off x="11430000" y="73152"/>
+            <a:ext cx="548640" cy="411480"/>
           </a:xfrm>
           <a:prstGeom prst="rect">
             <a:avLst/>
@@ -5651,113 +5501,254 @@
           </a:bodyPr>
           <a:lstStyle/>
           <a:p>
+            <a:pPr algn="ctr">
+              <a:defRPr sz="1800" b="1">
+                <a:solidFill>
+                  <a:srgbClr val="FFFFFF"/>
+                </a:solidFill>
+                <a:latin typeface="BIZ UDPGothic"/>
+              </a:defRPr>
+            </a:pPr>
+            <a:r>
+              <a:t>4</a:t>
+            </a:r>
+          </a:p>
+        </p:txBody>
+      </p:sp>
+      <p:sp>
+        <p:nvSpPr>
+          <p:cNvPr id="6" name="TextBox 5"/>
+          <p:cNvSpPr txBox="1"/>
+          <p:nvPr/>
+        </p:nvSpPr>
+        <p:spPr>
+          <a:xfrm>
+            <a:off x="9144000" y="6537960"/>
+            <a:ext cx="2743200" cy="228600"/>
+          </a:xfrm>
+          <a:prstGeom prst="rect">
+            <a:avLst/>
+          </a:prstGeom>
+          <a:noFill/>
+        </p:spPr>
+        <p:txBody>
+          <a:bodyPr wrap="none">
+            <a:spAutoFit/>
+          </a:bodyPr>
+          <a:lstStyle/>
+          <a:p>
             <a:pPr algn="r">
-              <a:defRPr sz="1800" b="1">
-                <a:solidFill>
-                  <a:srgbClr val="EBF2F8"/>
-                </a:solidFill>
-                <a:latin typeface="BIZ UDPGothic"/>
-              </a:defRPr>
-            </a:pPr>
-            <a:r>
-              <a:t>04 / 08</a:t>
-            </a:r>
-          </a:p>
-        </p:txBody>
-      </p:sp>
-      <p:sp>
-        <p:nvSpPr>
-          <p:cNvPr id="6" name="Rectangle 5"/>
-          <p:cNvSpPr/>
-          <p:nvPr/>
-        </p:nvSpPr>
-        <p:spPr>
-          <a:xfrm>
-            <a:off x="0" y="6537960"/>
-            <a:ext cx="12191695" cy="320040"/>
+              <a:defRPr sz="800">
+                <a:solidFill>
+                  <a:srgbClr val="666666"/>
+                </a:solidFill>
+                <a:latin typeface="BIZ UDPGothic"/>
+              </a:defRPr>
+            </a:pPr>
+            <a:r>
+              <a:t>© Panasonic Corporation</a:t>
+            </a:r>
+          </a:p>
+        </p:txBody>
+      </p:sp>
+      <p:sp>
+        <p:nvSpPr>
+          <p:cNvPr id="7" name="TextBox 6"/>
+          <p:cNvSpPr txBox="1"/>
+          <p:nvPr/>
+        </p:nvSpPr>
+        <p:spPr>
+          <a:xfrm>
+            <a:off x="640080" y="868680"/>
+            <a:ext cx="4389120" cy="4389120"/>
           </a:xfrm>
           <a:prstGeom prst="rect">
             <a:avLst/>
           </a:prstGeom>
-          <a:solidFill>
-            <a:srgbClr val="F5F6F8"/>
-          </a:solidFill>
-          <a:ln>
-            <a:solidFill>
-              <a:srgbClr val="D2D7DE"/>
-            </a:solidFill>
-          </a:ln>
-        </p:spPr>
-        <p:style>
-          <a:lnRef idx="1">
-            <a:schemeClr val="accent1"/>
-          </a:lnRef>
-          <a:fillRef idx="3">
-            <a:schemeClr val="accent1"/>
-          </a:fillRef>
-          <a:effectRef idx="2">
-            <a:schemeClr val="accent1"/>
-          </a:effectRef>
-          <a:fontRef idx="minor">
-            <a:schemeClr val="lt1"/>
-          </a:fontRef>
-        </p:style>
-        <p:txBody>
-          <a:bodyPr rtlCol="0" anchor="ctr"/>
-          <a:lstStyle/>
-          <a:p>
-            <a:pPr algn="ctr"/>
-          </a:p>
-        </p:txBody>
-      </p:sp>
-      <p:sp>
-        <p:nvSpPr>
-          <p:cNvPr id="7" name="Rounded Rectangle 6"/>
-          <p:cNvSpPr/>
-          <p:nvPr/>
-        </p:nvSpPr>
-        <p:spPr>
-          <a:xfrm>
-            <a:off x="548640" y="1188720"/>
-            <a:ext cx="5943600" cy="5120640"/>
-          </a:xfrm>
-          <a:prstGeom prst="roundRect">
-            <a:avLst/>
-          </a:prstGeom>
-          <a:solidFill>
-            <a:srgbClr val="FFFFFF"/>
-          </a:solidFill>
-          <a:ln w="19050">
-            <a:solidFill>
-              <a:srgbClr val="D2D7DE"/>
-            </a:solidFill>
-          </a:ln>
-        </p:spPr>
-        <p:style>
-          <a:lnRef idx="1">
-            <a:schemeClr val="accent1"/>
-          </a:lnRef>
-          <a:fillRef idx="3">
-            <a:schemeClr val="accent1"/>
-          </a:fillRef>
-          <a:effectRef idx="2">
-            <a:schemeClr val="accent1"/>
-          </a:effectRef>
-          <a:fontRef idx="minor">
-            <a:schemeClr val="lt1"/>
-          </a:fontRef>
-        </p:style>
-        <p:txBody>
-          <a:bodyPr rtlCol="0" anchor="ctr"/>
-          <a:lstStyle/>
-          <a:p>
-            <a:pPr algn="ctr"/>
+          <a:noFill/>
+        </p:spPr>
+        <p:txBody>
+          <a:bodyPr wrap="none">
+            <a:spAutoFit/>
+          </a:bodyPr>
+          <a:lstStyle/>
+          <a:p>
+            <a:pPr>
+              <a:spcBef>
+                <a:spcPts val="0"/>
+              </a:spcBef>
+              <a:defRPr sz="1350" b="1">
+                <a:solidFill>
+                  <a:srgbClr val="111111"/>
+                </a:solidFill>
+                <a:latin typeface="BIZ UDPGothic"/>
+              </a:defRPr>
+            </a:pPr>
+            <a:r>
+              <a:t>■ 使用データ</a:t>
+            </a:r>
+          </a:p>
+          <a:p>
+            <a:pPr>
+              <a:spcBef>
+                <a:spcPts val="400"/>
+              </a:spcBef>
+              <a:defRPr sz="1200" b="0">
+                <a:solidFill>
+                  <a:srgbClr val="333333"/>
+                </a:solidFill>
+                <a:latin typeface="BIZ UDPGothic"/>
+              </a:defRPr>
+            </a:pPr>
+            <a:r>
+              <a:t>・第二別館7Fの冷房期の各種値</a:t>
+            </a:r>
+            <a:br/>
+            <a:r>
+              <a:t>  (2025/8/17〜2025/8/30)</a:t>
+            </a:r>
+          </a:p>
+          <a:p>
+            <a:pPr>
+              <a:spcBef>
+                <a:spcPts val="1000"/>
+              </a:spcBef>
+              <a:defRPr sz="1250" b="1">
+                <a:solidFill>
+                  <a:srgbClr val="111111"/>
+                </a:solidFill>
+                <a:latin typeface="BIZ UDPGothic"/>
+              </a:defRPr>
+            </a:pPr>
+            <a:r>
+              <a:t>① 外気温</a:t>
+            </a:r>
+          </a:p>
+          <a:p>
+            <a:pPr>
+              <a:spcBef>
+                <a:spcPts val="200"/>
+              </a:spcBef>
+              <a:defRPr sz="1200" b="0">
+                <a:solidFill>
+                  <a:srgbClr val="333333"/>
+                </a:solidFill>
+                <a:latin typeface="BIZ UDPGothic"/>
+              </a:defRPr>
+            </a:pPr>
+            <a:r>
+              <a:t>   ＞ 起動時刻の外気条件の取得</a:t>
+            </a:r>
+          </a:p>
+          <a:p>
+            <a:pPr>
+              <a:spcBef>
+                <a:spcPts val="1000"/>
+              </a:spcBef>
+              <a:defRPr sz="1250" b="1">
+                <a:solidFill>
+                  <a:srgbClr val="111111"/>
+                </a:solidFill>
+                <a:latin typeface="BIZ UDPGothic"/>
+              </a:defRPr>
+            </a:pPr>
+            <a:r>
+              <a:t>② 室温・設定温度</a:t>
+            </a:r>
+          </a:p>
+          <a:p>
+            <a:pPr>
+              <a:spcBef>
+                <a:spcPts val="200"/>
+              </a:spcBef>
+              <a:defRPr sz="1200" b="0">
+                <a:solidFill>
+                  <a:srgbClr val="333333"/>
+                </a:solidFill>
+                <a:latin typeface="BIZ UDPGothic"/>
+              </a:defRPr>
+            </a:pPr>
+            <a:r>
+              <a:t>   ＞ 設定温度到達時刻の抽出</a:t>
+            </a:r>
+          </a:p>
+          <a:p>
+            <a:pPr>
+              <a:spcBef>
+                <a:spcPts val="1000"/>
+              </a:spcBef>
+              <a:defRPr sz="1250" b="1">
+                <a:solidFill>
+                  <a:srgbClr val="111111"/>
+                </a:solidFill>
+                <a:latin typeface="BIZ UDPGothic"/>
+              </a:defRPr>
+            </a:pPr>
+            <a:r>
+              <a:t>③ 消費電力</a:t>
+            </a:r>
+          </a:p>
+          <a:p>
+            <a:pPr>
+              <a:spcBef>
+                <a:spcPts val="200"/>
+              </a:spcBef>
+              <a:defRPr sz="1200" b="0">
+                <a:solidFill>
+                  <a:srgbClr val="333333"/>
+                </a:solidFill>
+                <a:latin typeface="BIZ UDPGothic"/>
+              </a:defRPr>
+            </a:pPr>
+            <a:r>
+              <a:t>   ＞ 起動時刻の推定</a:t>
+            </a:r>
+            <a:br/>
+            <a:r>
+              <a:t>   ＞ 消費電力量の計算</a:t>
+            </a:r>
+          </a:p>
+        </p:txBody>
+      </p:sp>
+      <p:sp>
+        <p:nvSpPr>
+          <p:cNvPr id="8" name="TextBox 7"/>
+          <p:cNvSpPr txBox="1"/>
+          <p:nvPr/>
+        </p:nvSpPr>
+        <p:spPr>
+          <a:xfrm>
+            <a:off x="640080" y="5486400"/>
+            <a:ext cx="10789920" cy="731520"/>
+          </a:xfrm>
+          <a:prstGeom prst="rect">
+            <a:avLst/>
+          </a:prstGeom>
+          <a:noFill/>
+        </p:spPr>
+        <p:txBody>
+          <a:bodyPr wrap="none">
+            <a:spAutoFit/>
+          </a:bodyPr>
+          <a:lstStyle/>
+          <a:p>
+            <a:pPr>
+              <a:defRPr sz="1200" b="1">
+                <a:solidFill>
+                  <a:srgbClr val="111111"/>
+                </a:solidFill>
+                <a:latin typeface="BIZ UDPGothic"/>
+              </a:defRPr>
+            </a:pPr>
+            <a:r>
+              <a:t>・これらのデータを用いて、予冷に必要な時間の予測、削減できる電力量を算出できるようなモデルを考える</a:t>
+            </a:r>
           </a:p>
         </p:txBody>
       </p:sp>
       <p:pic>
         <p:nvPicPr>
-          <p:cNvPr id="8" name="Picture 7" descr="slide03_waveform.png"/>
+          <p:cNvPr id="9" name="Picture 8" descr="deck_slide03_concept.png"/>
           <p:cNvPicPr>
             <a:picLocks noChangeAspect="1"/>
           </p:cNvPicPr>
@@ -5771,257 +5762,14 @@
         </p:blipFill>
         <p:spPr>
           <a:xfrm>
-            <a:off x="731520" y="1371600"/>
-            <a:ext cx="5577840" cy="2623132"/>
+            <a:off x="4846320" y="731520"/>
+            <a:ext cx="6858000" cy="4480560"/>
           </a:xfrm>
           <a:prstGeom prst="rect">
             <a:avLst/>
           </a:prstGeom>
         </p:spPr>
       </p:pic>
-      <p:sp>
-        <p:nvSpPr>
-          <p:cNvPr id="9" name="Rounded Rectangle 8"/>
-          <p:cNvSpPr/>
-          <p:nvPr/>
-        </p:nvSpPr>
-        <p:spPr>
-          <a:xfrm>
-            <a:off x="6675120" y="1188720"/>
-            <a:ext cx="4937760" cy="5120640"/>
-          </a:xfrm>
-          <a:prstGeom prst="roundRect">
-            <a:avLst/>
-          </a:prstGeom>
-          <a:solidFill>
-            <a:srgbClr val="EBF2F8"/>
-          </a:solidFill>
-          <a:ln w="19050">
-            <a:solidFill>
-              <a:srgbClr val="0B5AA6"/>
-            </a:solidFill>
-          </a:ln>
-        </p:spPr>
-        <p:style>
-          <a:lnRef idx="1">
-            <a:schemeClr val="accent1"/>
-          </a:lnRef>
-          <a:fillRef idx="3">
-            <a:schemeClr val="accent1"/>
-          </a:fillRef>
-          <a:effectRef idx="2">
-            <a:schemeClr val="accent1"/>
-          </a:effectRef>
-          <a:fontRef idx="minor">
-            <a:schemeClr val="lt1"/>
-          </a:fontRef>
-        </p:style>
-        <p:txBody>
-          <a:bodyPr rtlCol="0" anchor="ctr"/>
-          <a:lstStyle/>
-          <a:p>
-            <a:pPr algn="ctr"/>
-          </a:p>
-        </p:txBody>
-      </p:sp>
-      <p:sp>
-        <p:nvSpPr>
-          <p:cNvPr id="10" name="TextBox 9"/>
-          <p:cNvSpPr txBox="1"/>
-          <p:nvPr/>
-        </p:nvSpPr>
-        <p:spPr>
-          <a:xfrm>
-            <a:off x="6858000" y="1371600"/>
-            <a:ext cx="4572000" cy="4754880"/>
-          </a:xfrm>
-          <a:prstGeom prst="rect">
-            <a:avLst/>
-          </a:prstGeom>
-          <a:noFill/>
-        </p:spPr>
-        <p:txBody>
-          <a:bodyPr wrap="square">
-            <a:spAutoFit/>
-          </a:bodyPr>
-          <a:lstStyle/>
-          <a:p>
-            <a:pPr>
-              <a:spcAft>
-                <a:spcPts val="800"/>
-              </a:spcAft>
-              <a:defRPr sz="1800" b="1">
-                <a:solidFill>
-                  <a:srgbClr val="092B4C"/>
-                </a:solidFill>
-                <a:latin typeface="BIZ UDPGothic"/>
-              </a:defRPr>
-            </a:pPr>
-            <a:r>
-              <a:t>■ データから見えた運用の実態</a:t>
-            </a:r>
-          </a:p>
-          <a:p>
-            <a:pPr>
-              <a:spcAft>
-                <a:spcPts val="1200"/>
-              </a:spcAft>
-              <a:defRPr sz="1800">
-                <a:solidFill>
-                  <a:srgbClr val="141414"/>
-                </a:solidFill>
-                <a:latin typeface="BIZ UDPGothic"/>
-              </a:defRPr>
-            </a:pPr>
-            <a:r>
-              <a:t>• 平日は一律 05:05 に熱源を固定起動。</a:t>
-            </a:r>
-          </a:p>
-          <a:p>
-            <a:pPr>
-              <a:spcAft>
-                <a:spcPts val="1200"/>
-              </a:spcAft>
-              <a:defRPr sz="1800">
-                <a:solidFill>
-                  <a:srgbClr val="141414"/>
-                </a:solidFill>
-                <a:latin typeface="BIZ UDPGothic"/>
-              </a:defRPr>
-            </a:pPr>
-            <a:r>
-              <a:t>• 通常平日は 6:30〜7:00 前に設定温度へ到達。</a:t>
-            </a:r>
-          </a:p>
-          <a:p>
-            <a:pPr>
-              <a:spcAft>
-                <a:spcPts val="1200"/>
-              </a:spcAft>
-              <a:defRPr sz="1800">
-                <a:solidFill>
-                  <a:srgbClr val="141414"/>
-                </a:solidFill>
-                <a:latin typeface="BIZ UDPGothic"/>
-              </a:defRPr>
-            </a:pPr>
-            <a:r>
-              <a:t>• 始業8:00までの約1時間、無人オフィスを冷やし続ける『過剰予冷』が発生。</a:t>
-            </a:r>
-          </a:p>
-        </p:txBody>
-      </p:sp>
-      <p:sp>
-        <p:nvSpPr>
-          <p:cNvPr id="11" name="Rounded Rectangle 10"/>
-          <p:cNvSpPr/>
-          <p:nvPr/>
-        </p:nvSpPr>
-        <p:spPr>
-          <a:xfrm>
-            <a:off x="6858000" y="4297680"/>
-            <a:ext cx="4572000" cy="1737360"/>
-          </a:xfrm>
-          <a:prstGeom prst="roundRect">
-            <a:avLst/>
-          </a:prstGeom>
-          <a:solidFill>
-            <a:srgbClr val="FFFFFF"/>
-          </a:solidFill>
-          <a:ln w="25400">
-            <a:solidFill>
-              <a:srgbClr val="C00000"/>
-            </a:solidFill>
-          </a:ln>
-        </p:spPr>
-        <p:style>
-          <a:lnRef idx="1">
-            <a:schemeClr val="accent1"/>
-          </a:lnRef>
-          <a:fillRef idx="3">
-            <a:schemeClr val="accent1"/>
-          </a:fillRef>
-          <a:effectRef idx="2">
-            <a:schemeClr val="accent1"/>
-          </a:effectRef>
-          <a:fontRef idx="minor">
-            <a:schemeClr val="lt1"/>
-          </a:fontRef>
-        </p:style>
-        <p:txBody>
-          <a:bodyPr rtlCol="0" anchor="ctr" wrap="square"/>
-          <a:lstStyle/>
-          <a:p>
-            <a:pPr algn="ctr">
-              <a:spcAft>
-                <a:spcPts val="200"/>
-              </a:spcAft>
-              <a:defRPr sz="1800" b="1">
-                <a:solidFill>
-                  <a:srgbClr val="C00000"/>
-                </a:solidFill>
-                <a:latin typeface="BIZ UDPGothic"/>
-              </a:defRPr>
-            </a:pPr>
-            <a:r>
-              <a:t>【核心の課題】</a:t>
-            </a:r>
-          </a:p>
-          <a:p>
-            <a:pPr>
-              <a:defRPr sz="1800" b="1">
-                <a:solidFill>
-                  <a:srgbClr val="141414"/>
-                </a:solidFill>
-                <a:latin typeface="BIZ UDPGothic"/>
-              </a:defRPr>
-            </a:pPr>
-            <a:r>
-              <a:t>「起動を遅らせる余地はあるが、</a:t>
-            </a:r>
-            <a:br/>
-            <a:r>
-              <a:t>どこまで遅らせてよいか判断根拠がない」</a:t>
-            </a:r>
-          </a:p>
-        </p:txBody>
-      </p:sp>
-      <p:sp>
-        <p:nvSpPr>
-          <p:cNvPr id="12" name="TextBox 11"/>
-          <p:cNvSpPr txBox="1"/>
-          <p:nvPr/>
-        </p:nvSpPr>
-        <p:spPr>
-          <a:xfrm>
-            <a:off x="457200" y="6556248"/>
-            <a:ext cx="11274552" cy="274320"/>
-          </a:xfrm>
-          <a:prstGeom prst="rect">
-            <a:avLst/>
-          </a:prstGeom>
-          <a:noFill/>
-        </p:spPr>
-        <p:txBody>
-          <a:bodyPr wrap="none">
-            <a:spAutoFit/>
-          </a:bodyPr>
-          <a:lstStyle/>
-          <a:p>
-            <a:pPr>
-              <a:defRPr sz="1200">
-                <a:solidFill>
-                  <a:srgbClr val="505050"/>
-                </a:solidFill>
-                <a:latin typeface="BIZ UDPGothic"/>
-              </a:defRPr>
-            </a:pPr>
-            <a:r>
-              <a:t>※ 出所・注記: 第二別館7階実機ログに基づく室温降温プロファイル分析</a:t>
-            </a:r>
-          </a:p>
-        </p:txBody>
-      </p:sp>
     </p:spTree>
   </p:cSld>
   <p:clrMapOvr>
@@ -6049,18 +5797,16 @@
         <p:spPr>
           <a:xfrm>
             <a:off x="0" y="0"/>
-            <a:ext cx="12191695" cy="1005840"/>
+            <a:ext cx="12191695" cy="530352"/>
           </a:xfrm>
           <a:prstGeom prst="rect">
             <a:avLst/>
           </a:prstGeom>
           <a:solidFill>
-            <a:srgbClr val="092B4C"/>
+            <a:srgbClr val="0B3968"/>
           </a:solidFill>
           <a:ln>
-            <a:solidFill>
-              <a:srgbClr val="092B4C"/>
-            </a:solidFill>
+            <a:noFill/>
           </a:ln>
         </p:spPr>
         <p:style>
@@ -6087,24 +5833,60 @@
       </p:sp>
       <p:sp>
         <p:nvSpPr>
-          <p:cNvPr id="3" name="Rounded Rectangle 2"/>
+          <p:cNvPr id="3" name="TextBox 2"/>
+          <p:cNvSpPr txBox="1"/>
+          <p:nvPr/>
+        </p:nvSpPr>
+        <p:spPr>
+          <a:xfrm>
+            <a:off x="301752" y="73152"/>
+            <a:ext cx="9144000" cy="411480"/>
+          </a:xfrm>
+          <a:prstGeom prst="rect">
+            <a:avLst/>
+          </a:prstGeom>
+          <a:noFill/>
+        </p:spPr>
+        <p:txBody>
+          <a:bodyPr wrap="square">
+            <a:spAutoFit/>
+          </a:bodyPr>
+          <a:lstStyle/>
+          <a:p>
+            <a:pPr>
+              <a:defRPr sz="1800" b="1">
+                <a:solidFill>
+                  <a:srgbClr val="FFFFFF"/>
+                </a:solidFill>
+                <a:latin typeface="BIZ UDPGothic"/>
+              </a:defRPr>
+            </a:pPr>
+            <a:r>
+              <a:t>4. 現場の現状と課題</a:t>
+            </a:r>
+          </a:p>
+        </p:txBody>
+      </p:sp>
+      <p:sp>
+        <p:nvSpPr>
+          <p:cNvPr id="4" name="Rounded Rectangle 3"/>
           <p:cNvSpPr/>
           <p:nvPr/>
         </p:nvSpPr>
         <p:spPr>
           <a:xfrm>
-            <a:off x="457200" y="109728"/>
-            <a:ext cx="2377440" cy="329184"/>
+            <a:off x="10789920" y="128016"/>
+            <a:ext cx="484632" cy="274320"/>
           </a:xfrm>
           <a:prstGeom prst="roundRect">
             <a:avLst/>
           </a:prstGeom>
           <a:solidFill>
-            <a:srgbClr val="0B5AA6"/>
+            <a:srgbClr val="24588E"/>
           </a:solidFill>
           <a:ln>
             <a:solidFill>
-              <a:srgbClr val="0B5AA6"/>
+              <a:srgbClr val="5E8DBE"/>
             </a:solidFill>
           </a:ln>
         </p:spPr>
@@ -6123,55 +5905,19 @@
           </a:fontRef>
         </p:style>
         <p:txBody>
-          <a:bodyPr rtlCol="0" anchor="ctr" wrap="square"/>
+          <a:bodyPr rtlCol="0" anchor="ctr"/>
           <a:lstStyle/>
           <a:p>
             <a:pPr algn="ctr">
-              <a:defRPr sz="1400" b="1">
-                <a:solidFill>
-                  <a:srgbClr val="FFFFFF"/>
-                </a:solidFill>
-                <a:latin typeface="BIZ UDPGothic"/>
-              </a:defRPr>
-            </a:pPr>
-            <a:r>
-              <a:t>研究開発実習 成果報告</a:t>
-            </a:r>
-          </a:p>
-        </p:txBody>
-      </p:sp>
-      <p:sp>
-        <p:nvSpPr>
-          <p:cNvPr id="4" name="TextBox 3"/>
-          <p:cNvSpPr txBox="1"/>
-          <p:nvPr/>
-        </p:nvSpPr>
-        <p:spPr>
-          <a:xfrm>
-            <a:off x="457200" y="457200"/>
-            <a:ext cx="10058400" cy="502920"/>
-          </a:xfrm>
-          <a:prstGeom prst="rect">
-            <a:avLst/>
-          </a:prstGeom>
-          <a:noFill/>
-        </p:spPr>
-        <p:txBody>
-          <a:bodyPr wrap="square">
-            <a:spAutoFit/>
-          </a:bodyPr>
-          <a:lstStyle/>
-          <a:p>
-            <a:pPr>
-              <a:defRPr sz="2200" b="1">
-                <a:solidFill>
-                  <a:srgbClr val="FFFFFF"/>
-                </a:solidFill>
-                <a:latin typeface="BIZ UDPGothic"/>
-              </a:defRPr>
-            </a:pPr>
-            <a:r>
-              <a:t>システム設計における2つの現場制約とアプローチ</a:t>
+              <a:defRPr sz="1100" i="1">
+                <a:solidFill>
+                  <a:srgbClr val="E8F1F8"/>
+                </a:solidFill>
+                <a:latin typeface="BIZ UDPGothic"/>
+              </a:defRPr>
+            </a:pPr>
+            <a:r>
+              <a:t>IUO</a:t>
             </a:r>
           </a:p>
         </p:txBody>
@@ -6184,8 +5930,8 @@
         </p:nvSpPr>
         <p:spPr>
           <a:xfrm>
-            <a:off x="10789920" y="457200"/>
-            <a:ext cx="1005840" cy="411480"/>
+            <a:off x="11430000" y="73152"/>
+            <a:ext cx="548640" cy="411480"/>
           </a:xfrm>
           <a:prstGeom prst="rect">
             <a:avLst/>
@@ -6198,40 +5944,191 @@
           </a:bodyPr>
           <a:lstStyle/>
           <a:p>
+            <a:pPr algn="ctr">
+              <a:defRPr sz="1800" b="1">
+                <a:solidFill>
+                  <a:srgbClr val="FFFFFF"/>
+                </a:solidFill>
+                <a:latin typeface="BIZ UDPGothic"/>
+              </a:defRPr>
+            </a:pPr>
+            <a:r>
+              <a:t>5</a:t>
+            </a:r>
+          </a:p>
+        </p:txBody>
+      </p:sp>
+      <p:sp>
+        <p:nvSpPr>
+          <p:cNvPr id="6" name="TextBox 5"/>
+          <p:cNvSpPr txBox="1"/>
+          <p:nvPr/>
+        </p:nvSpPr>
+        <p:spPr>
+          <a:xfrm>
+            <a:off x="9144000" y="6537960"/>
+            <a:ext cx="2743200" cy="228600"/>
+          </a:xfrm>
+          <a:prstGeom prst="rect">
+            <a:avLst/>
+          </a:prstGeom>
+          <a:noFill/>
+        </p:spPr>
+        <p:txBody>
+          <a:bodyPr wrap="none">
+            <a:spAutoFit/>
+          </a:bodyPr>
+          <a:lstStyle/>
+          <a:p>
             <a:pPr algn="r">
-              <a:defRPr sz="1800" b="1">
-                <a:solidFill>
-                  <a:srgbClr val="EBF2F8"/>
-                </a:solidFill>
-                <a:latin typeface="BIZ UDPGothic"/>
-              </a:defRPr>
-            </a:pPr>
-            <a:r>
-              <a:t>05 / 08</a:t>
-            </a:r>
-          </a:p>
-        </p:txBody>
-      </p:sp>
-      <p:sp>
-        <p:nvSpPr>
-          <p:cNvPr id="6" name="Rectangle 5"/>
+              <a:defRPr sz="800">
+                <a:solidFill>
+                  <a:srgbClr val="666666"/>
+                </a:solidFill>
+                <a:latin typeface="BIZ UDPGothic"/>
+              </a:defRPr>
+            </a:pPr>
+            <a:r>
+              <a:t>© Panasonic Corporation</a:t>
+            </a:r>
+          </a:p>
+        </p:txBody>
+      </p:sp>
+      <p:sp>
+        <p:nvSpPr>
+          <p:cNvPr id="7" name="TextBox 6"/>
+          <p:cNvSpPr txBox="1"/>
+          <p:nvPr/>
+        </p:nvSpPr>
+        <p:spPr>
+          <a:xfrm>
+            <a:off x="640080" y="868680"/>
+            <a:ext cx="4572000" cy="3474720"/>
+          </a:xfrm>
+          <a:prstGeom prst="rect">
+            <a:avLst/>
+          </a:prstGeom>
+          <a:noFill/>
+        </p:spPr>
+        <p:txBody>
+          <a:bodyPr wrap="none">
+            <a:spAutoFit/>
+          </a:bodyPr>
+          <a:lstStyle/>
+          <a:p>
+            <a:pPr>
+              <a:spcBef>
+                <a:spcPts val="0"/>
+              </a:spcBef>
+              <a:defRPr sz="1350" b="1">
+                <a:solidFill>
+                  <a:srgbClr val="111111"/>
+                </a:solidFill>
+                <a:latin typeface="BIZ UDPGothic"/>
+              </a:defRPr>
+            </a:pPr>
+            <a:r>
+              <a:t>■ 現状運用</a:t>
+            </a:r>
+          </a:p>
+          <a:p>
+            <a:pPr>
+              <a:spcBef>
+                <a:spcPts val="400"/>
+              </a:spcBef>
+              <a:defRPr sz="1200" b="0">
+                <a:solidFill>
+                  <a:srgbClr val="333333"/>
+                </a:solidFill>
+                <a:latin typeface="BIZ UDPGothic"/>
+              </a:defRPr>
+            </a:pPr>
+            <a:r>
+              <a:t>・対象期間:2025/8/19〜8/30</a:t>
+            </a:r>
+            <a:br/>
+            <a:r>
+              <a:t>・熱源2台は30分の固定インターバルで起動</a:t>
+            </a:r>
+            <a:br/>
+            <a:r>
+              <a:t>・早朝一律(通常5:00 / 休み明け3:00)に起動</a:t>
+            </a:r>
+            <a:br/>
+            <a:r>
+              <a:t>・6:30〜7:00に設定温度へ到達</a:t>
+            </a:r>
+          </a:p>
+          <a:p>
+            <a:pPr>
+              <a:spcBef>
+                <a:spcPts val="1200"/>
+              </a:spcBef>
+              <a:defRPr sz="1350" b="1">
+                <a:solidFill>
+                  <a:srgbClr val="111111"/>
+                </a:solidFill>
+                <a:latin typeface="BIZ UDPGothic"/>
+              </a:defRPr>
+            </a:pPr>
+            <a:r>
+              <a:t>■ データから見えた課題</a:t>
+            </a:r>
+          </a:p>
+          <a:p>
+            <a:pPr>
+              <a:spcBef>
+                <a:spcPts val="400"/>
+              </a:spcBef>
+              <a:defRPr sz="1200" b="0">
+                <a:solidFill>
+                  <a:srgbClr val="333333"/>
+                </a:solidFill>
+                <a:latin typeface="BIZ UDPGothic"/>
+              </a:defRPr>
+            </a:pPr>
+            <a:r>
+              <a:t>・始業(8:00)までの毎朝1時間以上が過剰予冷</a:t>
+            </a:r>
+            <a:br/>
+            <a:r>
+              <a:t>  となり、電力を浪費している</a:t>
+            </a:r>
+            <a:br/>
+            <a:r>
+              <a:t>・8:00 の始業時に冷え切っていないとクレーム</a:t>
+            </a:r>
+            <a:br/>
+            <a:r>
+              <a:t>  になる</a:t>
+            </a:r>
+            <a:br/>
+            <a:r>
+              <a:t>  →かなり余裕のある起動時間設定</a:t>
+            </a:r>
+          </a:p>
+        </p:txBody>
+      </p:sp>
+      <p:sp>
+        <p:nvSpPr>
+          <p:cNvPr id="8" name="Rounded Rectangle 7"/>
           <p:cNvSpPr/>
           <p:nvPr/>
         </p:nvSpPr>
         <p:spPr>
           <a:xfrm>
-            <a:off x="0" y="6537960"/>
-            <a:ext cx="12191695" cy="320040"/>
-          </a:xfrm>
-          <a:prstGeom prst="rect">
+            <a:off x="914400" y="4297680"/>
+            <a:ext cx="3657600" cy="1188720"/>
+          </a:xfrm>
+          <a:prstGeom prst="roundRect">
             <a:avLst/>
           </a:prstGeom>
           <a:solidFill>
-            <a:srgbClr val="F5F6F8"/>
+            <a:srgbClr val="EDF5FB"/>
           </a:solidFill>
-          <a:ln>
+          <a:ln w="19050">
             <a:solidFill>
-              <a:srgbClr val="D2D7DE"/>
+              <a:srgbClr val="7BA4C7"/>
             </a:solidFill>
           </a:ln>
         </p:spPr>
@@ -6253,290 +6150,43 @@
           <a:bodyPr rtlCol="0" anchor="ctr"/>
           <a:lstStyle/>
           <a:p>
-            <a:pPr algn="ctr"/>
-          </a:p>
-        </p:txBody>
-      </p:sp>
-      <p:sp>
-        <p:nvSpPr>
-          <p:cNvPr id="7" name="Rounded Rectangle 6"/>
-          <p:cNvSpPr/>
-          <p:nvPr/>
-        </p:nvSpPr>
-        <p:spPr>
-          <a:xfrm>
-            <a:off x="548640" y="1188720"/>
-            <a:ext cx="5303520" cy="2194560"/>
-          </a:xfrm>
-          <a:prstGeom prst="roundRect">
-            <a:avLst/>
-          </a:prstGeom>
-          <a:solidFill>
-            <a:srgbClr val="FFFFFF"/>
-          </a:solidFill>
-          <a:ln w="19050">
-            <a:solidFill>
-              <a:srgbClr val="0B5AA6"/>
-            </a:solidFill>
-          </a:ln>
-        </p:spPr>
-        <p:style>
-          <a:lnRef idx="1">
-            <a:schemeClr val="accent1"/>
-          </a:lnRef>
-          <a:fillRef idx="3">
-            <a:schemeClr val="accent1"/>
-          </a:fillRef>
-          <a:effectRef idx="2">
-            <a:schemeClr val="accent1"/>
-          </a:effectRef>
-          <a:fontRef idx="minor">
-            <a:schemeClr val="lt1"/>
-          </a:fontRef>
-        </p:style>
-        <p:txBody>
-          <a:bodyPr rtlCol="0" anchor="ctr"/>
-          <a:lstStyle/>
-          <a:p>
-            <a:pPr algn="ctr"/>
-          </a:p>
-        </p:txBody>
-      </p:sp>
-      <p:sp>
-        <p:nvSpPr>
-          <p:cNvPr id="8" name="TextBox 7"/>
-          <p:cNvSpPr txBox="1"/>
-          <p:nvPr/>
-        </p:nvSpPr>
-        <p:spPr>
-          <a:xfrm>
-            <a:off x="731520" y="1234440"/>
-            <a:ext cx="4937760" cy="2011680"/>
-          </a:xfrm>
-          <a:prstGeom prst="rect">
-            <a:avLst/>
-          </a:prstGeom>
-          <a:noFill/>
-        </p:spPr>
-        <p:txBody>
-          <a:bodyPr wrap="square">
-            <a:spAutoFit/>
-          </a:bodyPr>
-          <a:lstStyle/>
-          <a:p>
-            <a:pPr>
-              <a:spcAft>
+            <a:pPr algn="ctr">
+              <a:defRPr sz="1250" b="1">
+                <a:solidFill>
+                  <a:srgbClr val="111111"/>
+                </a:solidFill>
+                <a:latin typeface="BIZ UDPGothic"/>
+              </a:defRPr>
+            </a:pPr>
+            <a:r>
+              <a:t>遅らせる余地はあるが、</a:t>
+            </a:r>
+            <a:br/>
+            <a:r>
+              <a:t>どこまで遅らせられるか</a:t>
+            </a:r>
+          </a:p>
+          <a:p>
+            <a:pPr algn="ctr">
+              <a:spcBef>
                 <a:spcPts val="400"/>
-              </a:spcAft>
-              <a:defRPr sz="1800" b="1">
-                <a:solidFill>
-                  <a:srgbClr val="0B5AA6"/>
-                </a:solidFill>
-                <a:latin typeface="BIZ UDPGothic"/>
-              </a:defRPr>
-            </a:pPr>
-            <a:r>
-              <a:t>制約①: 決定のタイミング（前日夕方）</a:t>
-            </a:r>
-          </a:p>
-          <a:p>
-            <a:pPr>
-              <a:spcAft>
-                <a:spcPts val="400"/>
-              </a:spcAft>
-              <a:defRPr sz="1800">
-                <a:solidFill>
-                  <a:srgbClr val="141414"/>
-                </a:solidFill>
-                <a:latin typeface="BIZ UDPGothic"/>
-              </a:defRPr>
-            </a:pPr>
-            <a:r>
-              <a:t>• 翌朝の室温は前日夕方には分からない。</a:t>
-            </a:r>
-          </a:p>
-          <a:p>
-            <a:pPr>
-              <a:spcAft>
-                <a:spcPts val="400"/>
-              </a:spcAft>
-              <a:defRPr sz="1800">
-                <a:solidFill>
-                  <a:srgbClr val="141414"/>
-                </a:solidFill>
-                <a:latin typeface="BIZ UDPGothic"/>
-              </a:defRPr>
-            </a:pPr>
-            <a:r>
-              <a:t>• 【解決策】気温予報から直接予冷時間を推計。</a:t>
-            </a:r>
-          </a:p>
-        </p:txBody>
-      </p:sp>
-      <p:sp>
-        <p:nvSpPr>
-          <p:cNvPr id="9" name="Rounded Rectangle 8"/>
-          <p:cNvSpPr/>
-          <p:nvPr/>
-        </p:nvSpPr>
-        <p:spPr>
-          <a:xfrm>
-            <a:off x="6126480" y="1188720"/>
-            <a:ext cx="5486400" cy="2194560"/>
-          </a:xfrm>
-          <a:prstGeom prst="roundRect">
-            <a:avLst/>
-          </a:prstGeom>
-          <a:solidFill>
-            <a:srgbClr val="FFFFFF"/>
-          </a:solidFill>
-          <a:ln w="19050">
-            <a:solidFill>
-              <a:srgbClr val="C00000"/>
-            </a:solidFill>
-          </a:ln>
-        </p:spPr>
-        <p:style>
-          <a:lnRef idx="1">
-            <a:schemeClr val="accent1"/>
-          </a:lnRef>
-          <a:fillRef idx="3">
-            <a:schemeClr val="accent1"/>
-          </a:fillRef>
-          <a:effectRef idx="2">
-            <a:schemeClr val="accent1"/>
-          </a:effectRef>
-          <a:fontRef idx="minor">
-            <a:schemeClr val="lt1"/>
-          </a:fontRef>
-        </p:style>
-        <p:txBody>
-          <a:bodyPr rtlCol="0" anchor="ctr"/>
-          <a:lstStyle/>
-          <a:p>
-            <a:pPr algn="ctr"/>
-          </a:p>
-        </p:txBody>
-      </p:sp>
-      <p:sp>
-        <p:nvSpPr>
-          <p:cNvPr id="10" name="TextBox 9"/>
-          <p:cNvSpPr txBox="1"/>
-          <p:nvPr/>
-        </p:nvSpPr>
-        <p:spPr>
-          <a:xfrm>
-            <a:off x="6263640" y="1234440"/>
-            <a:ext cx="5257800" cy="2011680"/>
-          </a:xfrm>
-          <a:prstGeom prst="rect">
-            <a:avLst/>
-          </a:prstGeom>
-          <a:noFill/>
-        </p:spPr>
-        <p:txBody>
-          <a:bodyPr wrap="square">
-            <a:spAutoFit/>
-          </a:bodyPr>
-          <a:lstStyle/>
-          <a:p>
-            <a:pPr>
-              <a:spcAft>
-                <a:spcPts val="400"/>
-              </a:spcAft>
-              <a:defRPr sz="1800" b="1">
-                <a:solidFill>
-                  <a:srgbClr val="C00000"/>
-                </a:solidFill>
-                <a:latin typeface="BIZ UDPGothic"/>
-              </a:defRPr>
-            </a:pPr>
-            <a:r>
-              <a:t>制約②: 未達クレームの絶対回避</a:t>
-            </a:r>
-          </a:p>
-          <a:p>
-            <a:pPr>
-              <a:spcAft>
-                <a:spcPts val="400"/>
-              </a:spcAft>
-              <a:defRPr sz="1800">
-                <a:solidFill>
-                  <a:srgbClr val="141414"/>
-                </a:solidFill>
-                <a:latin typeface="BIZ UDPGothic"/>
-              </a:defRPr>
-            </a:pPr>
-            <a:r>
-              <a:t>• 始業時未達は許されず、多少の早めは許容。</a:t>
-            </a:r>
-          </a:p>
-          <a:p>
-            <a:pPr>
-              <a:spcAft>
-                <a:spcPts val="400"/>
-              </a:spcAft>
-              <a:defRPr sz="1800">
-                <a:solidFill>
-                  <a:srgbClr val="141414"/>
-                </a:solidFill>
-                <a:latin typeface="BIZ UDPGothic"/>
-              </a:defRPr>
-            </a:pPr>
-            <a:r>
-              <a:t>• 【解決策】残差95%信頼限界＋予報誤差を安全マージンとして加算。</a:t>
-            </a:r>
-          </a:p>
-        </p:txBody>
-      </p:sp>
-      <p:sp>
-        <p:nvSpPr>
-          <p:cNvPr id="11" name="Rounded Rectangle 10"/>
-          <p:cNvSpPr/>
-          <p:nvPr/>
-        </p:nvSpPr>
-        <p:spPr>
-          <a:xfrm>
-            <a:off x="548640" y="3520440"/>
-            <a:ext cx="5303520" cy="2880360"/>
-          </a:xfrm>
-          <a:prstGeom prst="roundRect">
-            <a:avLst/>
-          </a:prstGeom>
-          <a:solidFill>
-            <a:srgbClr val="FFFFFF"/>
-          </a:solidFill>
-          <a:ln w="19050">
-            <a:solidFill>
-              <a:srgbClr val="D2D7DE"/>
-            </a:solidFill>
-          </a:ln>
-        </p:spPr>
-        <p:style>
-          <a:lnRef idx="1">
-            <a:schemeClr val="accent1"/>
-          </a:lnRef>
-          <a:fillRef idx="3">
-            <a:schemeClr val="accent1"/>
-          </a:fillRef>
-          <a:effectRef idx="2">
-            <a:schemeClr val="accent1"/>
-          </a:effectRef>
-          <a:fontRef idx="minor">
-            <a:schemeClr val="lt1"/>
-          </a:fontRef>
-        </p:style>
-        <p:txBody>
-          <a:bodyPr rtlCol="0" anchor="ctr"/>
-          <a:lstStyle/>
-          <a:p>
-            <a:pPr algn="ctr"/>
+              </a:spcBef>
+              <a:defRPr sz="1400" b="1">
+                <a:solidFill>
+                  <a:srgbClr val="C8102E"/>
+                </a:solidFill>
+                <a:latin typeface="BIZ UDPGothic"/>
+              </a:defRPr>
+            </a:pPr>
+            <a:r>
+              <a:t>判断材料がないことが問題</a:t>
+            </a:r>
           </a:p>
         </p:txBody>
       </p:sp>
       <p:pic>
         <p:nvPicPr>
-          <p:cNvPr id="12" name="Picture 11" descr="slide04_precool_breakdown.png"/>
+          <p:cNvPr id="9" name="Picture 8" descr="deck_slide04_waveform.png"/>
           <p:cNvPicPr>
             <a:picLocks noChangeAspect="1"/>
           </p:cNvPicPr>
@@ -6550,211 +6200,14 @@
         </p:blipFill>
         <p:spPr>
           <a:xfrm>
-            <a:off x="731520" y="3611880"/>
-            <a:ext cx="4937760" cy="2320965"/>
+            <a:off x="5212080" y="777240"/>
+            <a:ext cx="6583680" cy="5303520"/>
           </a:xfrm>
           <a:prstGeom prst="rect">
             <a:avLst/>
           </a:prstGeom>
         </p:spPr>
       </p:pic>
-      <p:sp>
-        <p:nvSpPr>
-          <p:cNvPr id="13" name="Rounded Rectangle 12"/>
-          <p:cNvSpPr/>
-          <p:nvPr/>
-        </p:nvSpPr>
-        <p:spPr>
-          <a:xfrm>
-            <a:off x="6126480" y="3520440"/>
-            <a:ext cx="5486400" cy="2880360"/>
-          </a:xfrm>
-          <a:prstGeom prst="roundRect">
-            <a:avLst/>
-          </a:prstGeom>
-          <a:solidFill>
-            <a:srgbClr val="EBF2F8"/>
-          </a:solidFill>
-          <a:ln w="19050">
-            <a:solidFill>
-              <a:srgbClr val="092B4C"/>
-            </a:solidFill>
-          </a:ln>
-        </p:spPr>
-        <p:style>
-          <a:lnRef idx="1">
-            <a:schemeClr val="accent1"/>
-          </a:lnRef>
-          <a:fillRef idx="3">
-            <a:schemeClr val="accent1"/>
-          </a:fillRef>
-          <a:effectRef idx="2">
-            <a:schemeClr val="accent1"/>
-          </a:effectRef>
-          <a:fontRef idx="minor">
-            <a:schemeClr val="lt1"/>
-          </a:fontRef>
-        </p:style>
-        <p:txBody>
-          <a:bodyPr rtlCol="0" anchor="ctr"/>
-          <a:lstStyle/>
-          <a:p>
-            <a:pPr algn="ctr"/>
-          </a:p>
-        </p:txBody>
-      </p:sp>
-      <p:sp>
-        <p:nvSpPr>
-          <p:cNvPr id="14" name="TextBox 13"/>
-          <p:cNvSpPr txBox="1"/>
-          <p:nvPr/>
-        </p:nvSpPr>
-        <p:spPr>
-          <a:xfrm>
-            <a:off x="6309360" y="3611880"/>
-            <a:ext cx="5120640" cy="2651760"/>
-          </a:xfrm>
-          <a:prstGeom prst="rect">
-            <a:avLst/>
-          </a:prstGeom>
-          <a:noFill/>
-        </p:spPr>
-        <p:txBody>
-          <a:bodyPr wrap="square">
-            <a:spAutoFit/>
-          </a:bodyPr>
-          <a:lstStyle/>
-          <a:p>
-            <a:pPr>
-              <a:spcAft>
-                <a:spcPts val="400"/>
-              </a:spcAft>
-              <a:defRPr sz="1800" b="1">
-                <a:solidFill>
-                  <a:srgbClr val="092B4C"/>
-                </a:solidFill>
-                <a:latin typeface="BIZ UDPGothic"/>
-              </a:defRPr>
-            </a:pPr>
-            <a:r>
-              <a:t>■ 予冷時間の4要素 ＆ 起動式</a:t>
-            </a:r>
-          </a:p>
-          <a:p>
-            <a:pPr>
-              <a:spcAft>
-                <a:spcPts val="200"/>
-              </a:spcAft>
-              <a:defRPr sz="1800">
-                <a:solidFill>
-                  <a:srgbClr val="141414"/>
-                </a:solidFill>
-                <a:latin typeface="BIZ UDPGothic"/>
-              </a:defRPr>
-            </a:pPr>
-            <a:r>
-              <a:t>• ① 基本推計: 予報気温と設定温度差から算出</a:t>
-            </a:r>
-          </a:p>
-          <a:p>
-            <a:pPr>
-              <a:spcAft>
-                <a:spcPts val="200"/>
-              </a:spcAft>
-              <a:defRPr sz="1800">
-                <a:solidFill>
-                  <a:srgbClr val="141414"/>
-                </a:solidFill>
-                <a:latin typeface="BIZ UDPGothic"/>
-              </a:defRPr>
-            </a:pPr>
-            <a:r>
-              <a:t>• ② 安全余裕: 残差の上側95%分位（未達防止）</a:t>
-            </a:r>
-          </a:p>
-          <a:p>
-            <a:pPr>
-              <a:spcAft>
-                <a:spcPts val="200"/>
-              </a:spcAft>
-              <a:defRPr sz="1800">
-                <a:solidFill>
-                  <a:srgbClr val="141414"/>
-                </a:solidFill>
-                <a:latin typeface="BIZ UDPGothic"/>
-              </a:defRPr>
-            </a:pPr>
-            <a:r>
-              <a:t>• ③ 予報外れ: 気象庁予報誤差（1.7℃）を上乗せ</a:t>
-            </a:r>
-          </a:p>
-          <a:p>
-            <a:pPr>
-              <a:spcAft>
-                <a:spcPts val="200"/>
-              </a:spcAft>
-              <a:defRPr sz="1800">
-                <a:solidFill>
-                  <a:srgbClr val="141414"/>
-                </a:solidFill>
-                <a:latin typeface="BIZ UDPGothic"/>
-              </a:defRPr>
-            </a:pPr>
-            <a:r>
-              <a:t>• ④ 休日上乗せ: 週末蓄熱負荷（+2.0℃ 換算）</a:t>
-            </a:r>
-          </a:p>
-          <a:p>
-            <a:pPr>
-              <a:defRPr sz="1800" b="1">
-                <a:solidFill>
-                  <a:srgbClr val="0B5AA6"/>
-                </a:solidFill>
-                <a:latin typeface="BIZ UDPGothic"/>
-              </a:defRPr>
-            </a:pPr>
-            <a:r>
-              <a:t>起動時刻 ＝ 08:00 − 予冷時間（①＋②＋③＋④）</a:t>
-            </a:r>
-          </a:p>
-        </p:txBody>
-      </p:sp>
-      <p:sp>
-        <p:nvSpPr>
-          <p:cNvPr id="15" name="TextBox 14"/>
-          <p:cNvSpPr txBox="1"/>
-          <p:nvPr/>
-        </p:nvSpPr>
-        <p:spPr>
-          <a:xfrm>
-            <a:off x="457200" y="6556248"/>
-            <a:ext cx="11274552" cy="274320"/>
-          </a:xfrm>
-          <a:prstGeom prst="rect">
-            <a:avLst/>
-          </a:prstGeom>
-          <a:noFill/>
-        </p:spPr>
-        <p:txBody>
-          <a:bodyPr wrap="none">
-            <a:spAutoFit/>
-          </a:bodyPr>
-          <a:lstStyle/>
-          <a:p>
-            <a:pPr>
-              <a:defRPr sz="1200">
-                <a:solidFill>
-                  <a:srgbClr val="505050"/>
-                </a:solidFill>
-                <a:latin typeface="BIZ UDPGothic"/>
-              </a:defRPr>
-            </a:pPr>
-            <a:r>
-              <a:t>※ 出所・注記: BM業務制約（前日夕方決定）およびクレームリスク回避の設計思想</a:t>
-            </a:r>
-          </a:p>
-        </p:txBody>
-      </p:sp>
     </p:spTree>
   </p:cSld>
   <p:clrMapOvr>
@@ -6782,18 +6235,16 @@
         <p:spPr>
           <a:xfrm>
             <a:off x="0" y="0"/>
-            <a:ext cx="12191695" cy="1005840"/>
+            <a:ext cx="12191695" cy="530352"/>
           </a:xfrm>
           <a:prstGeom prst="rect">
             <a:avLst/>
           </a:prstGeom>
           <a:solidFill>
-            <a:srgbClr val="092B4C"/>
+            <a:srgbClr val="0B3968"/>
           </a:solidFill>
           <a:ln>
-            <a:solidFill>
-              <a:srgbClr val="092B4C"/>
-            </a:solidFill>
+            <a:noFill/>
           </a:ln>
         </p:spPr>
         <p:style>
@@ -6820,24 +6271,60 @@
       </p:sp>
       <p:sp>
         <p:nvSpPr>
-          <p:cNvPr id="3" name="Rounded Rectangle 2"/>
+          <p:cNvPr id="3" name="TextBox 2"/>
+          <p:cNvSpPr txBox="1"/>
+          <p:nvPr/>
+        </p:nvSpPr>
+        <p:spPr>
+          <a:xfrm>
+            <a:off x="301752" y="73152"/>
+            <a:ext cx="9144000" cy="411480"/>
+          </a:xfrm>
+          <a:prstGeom prst="rect">
+            <a:avLst/>
+          </a:prstGeom>
+          <a:noFill/>
+        </p:spPr>
+        <p:txBody>
+          <a:bodyPr wrap="square">
+            <a:spAutoFit/>
+          </a:bodyPr>
+          <a:lstStyle/>
+          <a:p>
+            <a:pPr>
+              <a:defRPr sz="1800" b="1">
+                <a:solidFill>
+                  <a:srgbClr val="FFFFFF"/>
+                </a:solidFill>
+                <a:latin typeface="BIZ UDPGothic"/>
+              </a:defRPr>
+            </a:pPr>
+            <a:r>
+              <a:t>5. モデルの開発</a:t>
+            </a:r>
+          </a:p>
+        </p:txBody>
+      </p:sp>
+      <p:sp>
+        <p:nvSpPr>
+          <p:cNvPr id="4" name="Rounded Rectangle 3"/>
           <p:cNvSpPr/>
           <p:nvPr/>
         </p:nvSpPr>
         <p:spPr>
           <a:xfrm>
-            <a:off x="457200" y="109728"/>
-            <a:ext cx="2377440" cy="329184"/>
+            <a:off x="10789920" y="128016"/>
+            <a:ext cx="484632" cy="274320"/>
           </a:xfrm>
           <a:prstGeom prst="roundRect">
             <a:avLst/>
           </a:prstGeom>
           <a:solidFill>
-            <a:srgbClr val="0B5AA6"/>
+            <a:srgbClr val="24588E"/>
           </a:solidFill>
           <a:ln>
             <a:solidFill>
-              <a:srgbClr val="0B5AA6"/>
+              <a:srgbClr val="5E8DBE"/>
             </a:solidFill>
           </a:ln>
         </p:spPr>
@@ -6856,55 +6343,19 @@
           </a:fontRef>
         </p:style>
         <p:txBody>
-          <a:bodyPr rtlCol="0" anchor="ctr" wrap="square"/>
+          <a:bodyPr rtlCol="0" anchor="ctr"/>
           <a:lstStyle/>
           <a:p>
             <a:pPr algn="ctr">
-              <a:defRPr sz="1400" b="1">
-                <a:solidFill>
-                  <a:srgbClr val="FFFFFF"/>
-                </a:solidFill>
-                <a:latin typeface="BIZ UDPGothic"/>
-              </a:defRPr>
-            </a:pPr>
-            <a:r>
-              <a:t>研究開発実習 成果報告</a:t>
-            </a:r>
-          </a:p>
-        </p:txBody>
-      </p:sp>
-      <p:sp>
-        <p:nvSpPr>
-          <p:cNvPr id="4" name="TextBox 3"/>
-          <p:cNvSpPr txBox="1"/>
-          <p:nvPr/>
-        </p:nvSpPr>
-        <p:spPr>
-          <a:xfrm>
-            <a:off x="457200" y="457200"/>
-            <a:ext cx="10058400" cy="502920"/>
-          </a:xfrm>
-          <a:prstGeom prst="rect">
-            <a:avLst/>
-          </a:prstGeom>
-          <a:noFill/>
-        </p:spPr>
-        <p:txBody>
-          <a:bodyPr wrap="square">
-            <a:spAutoFit/>
-          </a:bodyPr>
-          <a:lstStyle/>
-          <a:p>
-            <a:pPr>
-              <a:defRPr sz="2200" b="1">
-                <a:solidFill>
-                  <a:srgbClr val="FFFFFF"/>
-                </a:solidFill>
-                <a:latin typeface="BIZ UDPGothic"/>
-              </a:defRPr>
-            </a:pPr>
-            <a:r>
-              <a:t>予冷時間推計モデルの構築と技術的工夫（休日蓄熱）</a:t>
+              <a:defRPr sz="1100" i="1">
+                <a:solidFill>
+                  <a:srgbClr val="E8F1F8"/>
+                </a:solidFill>
+                <a:latin typeface="BIZ UDPGothic"/>
+              </a:defRPr>
+            </a:pPr>
+            <a:r>
+              <a:t>IUO</a:t>
             </a:r>
           </a:p>
         </p:txBody>
@@ -6917,8 +6368,8 @@
         </p:nvSpPr>
         <p:spPr>
           <a:xfrm>
-            <a:off x="10789920" y="457200"/>
-            <a:ext cx="1005840" cy="411480"/>
+            <a:off x="11430000" y="73152"/>
+            <a:ext cx="548640" cy="411480"/>
           </a:xfrm>
           <a:prstGeom prst="rect">
             <a:avLst/>
@@ -6931,40 +6382,247 @@
           </a:bodyPr>
           <a:lstStyle/>
           <a:p>
+            <a:pPr algn="ctr">
+              <a:defRPr sz="1800" b="1">
+                <a:solidFill>
+                  <a:srgbClr val="FFFFFF"/>
+                </a:solidFill>
+                <a:latin typeface="BIZ UDPGothic"/>
+              </a:defRPr>
+            </a:pPr>
+            <a:r>
+              <a:t>6</a:t>
+            </a:r>
+          </a:p>
+        </p:txBody>
+      </p:sp>
+      <p:sp>
+        <p:nvSpPr>
+          <p:cNvPr id="6" name="TextBox 5"/>
+          <p:cNvSpPr txBox="1"/>
+          <p:nvPr/>
+        </p:nvSpPr>
+        <p:spPr>
+          <a:xfrm>
+            <a:off x="9144000" y="6537960"/>
+            <a:ext cx="2743200" cy="228600"/>
+          </a:xfrm>
+          <a:prstGeom prst="rect">
+            <a:avLst/>
+          </a:prstGeom>
+          <a:noFill/>
+        </p:spPr>
+        <p:txBody>
+          <a:bodyPr wrap="none">
+            <a:spAutoFit/>
+          </a:bodyPr>
+          <a:lstStyle/>
+          <a:p>
             <a:pPr algn="r">
-              <a:defRPr sz="1800" b="1">
-                <a:solidFill>
-                  <a:srgbClr val="EBF2F8"/>
-                </a:solidFill>
-                <a:latin typeface="BIZ UDPGothic"/>
-              </a:defRPr>
-            </a:pPr>
-            <a:r>
-              <a:t>06 / 08</a:t>
-            </a:r>
-          </a:p>
-        </p:txBody>
-      </p:sp>
-      <p:sp>
-        <p:nvSpPr>
-          <p:cNvPr id="6" name="Rectangle 5"/>
+              <a:defRPr sz="800">
+                <a:solidFill>
+                  <a:srgbClr val="666666"/>
+                </a:solidFill>
+                <a:latin typeface="BIZ UDPGothic"/>
+              </a:defRPr>
+            </a:pPr>
+            <a:r>
+              <a:t>© Panasonic Corporation</a:t>
+            </a:r>
+          </a:p>
+        </p:txBody>
+      </p:sp>
+      <p:sp>
+        <p:nvSpPr>
+          <p:cNvPr id="7" name="TextBox 6"/>
+          <p:cNvSpPr txBox="1"/>
+          <p:nvPr/>
+        </p:nvSpPr>
+        <p:spPr>
+          <a:xfrm>
+            <a:off x="640080" y="868680"/>
+            <a:ext cx="10789920" cy="2926080"/>
+          </a:xfrm>
+          <a:prstGeom prst="rect">
+            <a:avLst/>
+          </a:prstGeom>
+          <a:noFill/>
+        </p:spPr>
+        <p:txBody>
+          <a:bodyPr wrap="none">
+            <a:spAutoFit/>
+          </a:bodyPr>
+          <a:lstStyle/>
+          <a:p>
+            <a:pPr>
+              <a:spcBef>
+                <a:spcPts val="0"/>
+              </a:spcBef>
+              <a:defRPr sz="1350" b="1">
+                <a:solidFill>
+                  <a:srgbClr val="111111"/>
+                </a:solidFill>
+                <a:latin typeface="BIZ UDPGothic"/>
+              </a:defRPr>
+            </a:pPr>
+            <a:r>
+              <a:t>■ 制約</a:t>
+            </a:r>
+          </a:p>
+          <a:p>
+            <a:pPr>
+              <a:spcBef>
+                <a:spcPts val="400"/>
+              </a:spcBef>
+              <a:defRPr sz="1250" b="1">
+                <a:solidFill>
+                  <a:srgbClr val="111111"/>
+                </a:solidFill>
+                <a:latin typeface="BIZ UDPGothic"/>
+              </a:defRPr>
+            </a:pPr>
+            <a:r>
+              <a:t>1. 決定のタイミング</a:t>
+            </a:r>
+          </a:p>
+          <a:p>
+            <a:pPr>
+              <a:spcBef>
+                <a:spcPts val="200"/>
+              </a:spcBef>
+              <a:defRPr sz="1200" b="0">
+                <a:solidFill>
+                  <a:srgbClr val="333333"/>
+                </a:solidFill>
+                <a:latin typeface="BIZ UDPGothic"/>
+              </a:defRPr>
+            </a:pPr>
+            <a:r>
+              <a:t>・起動時刻は前日の夕方に決定するため、翌日の室温は存在しない</a:t>
+            </a:r>
+            <a:br/>
+            <a:r>
+              <a:t>→室温を経由する制御は難しいため、前日に得られる翌日の気温予報から、予冷時間を直接推測する</a:t>
+            </a:r>
+          </a:p>
+          <a:p>
+            <a:pPr>
+              <a:spcBef>
+                <a:spcPts val="1000"/>
+              </a:spcBef>
+              <a:defRPr sz="1250" b="1">
+                <a:solidFill>
+                  <a:srgbClr val="111111"/>
+                </a:solidFill>
+                <a:latin typeface="BIZ UDPGothic"/>
+              </a:defRPr>
+            </a:pPr>
+            <a:r>
+              <a:t>2. 快適性</a:t>
+            </a:r>
+          </a:p>
+          <a:p>
+            <a:pPr>
+              <a:spcBef>
+                <a:spcPts val="200"/>
+              </a:spcBef>
+              <a:defRPr sz="1200" b="0">
+                <a:solidFill>
+                  <a:srgbClr val="333333"/>
+                </a:solidFill>
+                <a:latin typeface="BIZ UDPGothic"/>
+              </a:defRPr>
+            </a:pPr>
+            <a:r>
+              <a:t>・始業時に設定温度未達→快適性を損なう(高コスト)</a:t>
+            </a:r>
+            <a:br/>
+            <a:r>
+              <a:t>・過剰予冷→電力の無駄にはなるが、快適性は担保される(低コスト)</a:t>
+            </a:r>
+            <a:br/>
+            <a:r>
+              <a:t>→予冷時間は中央値ではなく、予測範囲の上限付近で見積る</a:t>
+            </a:r>
+            <a:br/>
+            <a:r>
+              <a:t>→さらに、気温予報の不確実性として予報誤差1.5℃を安全側に上乗せ</a:t>
+            </a:r>
+          </a:p>
+          <a:p>
+            <a:pPr>
+              <a:spcBef>
+                <a:spcPts val="1600"/>
+              </a:spcBef>
+              <a:defRPr sz="1350" b="1">
+                <a:solidFill>
+                  <a:srgbClr val="111111"/>
+                </a:solidFill>
+                <a:latin typeface="BIZ UDPGothic"/>
+              </a:defRPr>
+            </a:pPr>
+            <a:r>
+              <a:t>■ 推計モデルの基本構造</a:t>
+            </a:r>
+          </a:p>
+        </p:txBody>
+      </p:sp>
+      <p:sp>
+        <p:nvSpPr>
+          <p:cNvPr id="8" name="TextBox 7"/>
+          <p:cNvSpPr txBox="1"/>
+          <p:nvPr/>
+        </p:nvSpPr>
+        <p:spPr>
+          <a:xfrm>
+            <a:off x="1371600" y="4572000"/>
+            <a:ext cx="9418320" cy="731520"/>
+          </a:xfrm>
+          <a:prstGeom prst="rect">
+            <a:avLst/>
+          </a:prstGeom>
+          <a:noFill/>
+        </p:spPr>
+        <p:txBody>
+          <a:bodyPr wrap="none">
+            <a:spAutoFit/>
+          </a:bodyPr>
+          <a:lstStyle/>
+          <a:p>
+            <a:pPr algn="ctr">
+              <a:defRPr sz="1600" b="1">
+                <a:solidFill>
+                  <a:srgbClr val="113355"/>
+                </a:solidFill>
+                <a:latin typeface="BIZ UDPGothic"/>
+              </a:defRPr>
+            </a:pPr>
+            <a:r>
+              <a:t>必要な予冷時間 [min] = f(起動時刻の外気温, 設定温度) + 安全マージン</a:t>
+            </a:r>
+          </a:p>
+        </p:txBody>
+      </p:sp>
+      <p:sp>
+        <p:nvSpPr>
+          <p:cNvPr id="9" name="Rounded Rectangle 8"/>
           <p:cNvSpPr/>
           <p:nvPr/>
         </p:nvSpPr>
         <p:spPr>
           <a:xfrm>
-            <a:off x="0" y="6537960"/>
-            <a:ext cx="12191695" cy="320040"/>
-          </a:xfrm>
-          <a:prstGeom prst="rect">
+            <a:off x="3017520" y="3931920"/>
+            <a:ext cx="2011680" cy="411480"/>
+          </a:xfrm>
+          <a:prstGeom prst="roundRect">
             <a:avLst/>
           </a:prstGeom>
           <a:solidFill>
-            <a:srgbClr val="F5F6F8"/>
+            <a:srgbClr val="FFFFFF"/>
           </a:solidFill>
-          <a:ln>
+          <a:ln w="15240">
             <a:solidFill>
-              <a:srgbClr val="D2D7DE"/>
+              <a:srgbClr val="7BA4C7"/>
             </a:solidFill>
           </a:ln>
         </p:spPr>
@@ -6986,20 +6644,30 @@
           <a:bodyPr rtlCol="0" anchor="ctr"/>
           <a:lstStyle/>
           <a:p>
-            <a:pPr algn="ctr"/>
-          </a:p>
-        </p:txBody>
-      </p:sp>
-      <p:sp>
-        <p:nvSpPr>
-          <p:cNvPr id="7" name="Rounded Rectangle 6"/>
+            <a:pPr algn="ctr">
+              <a:defRPr sz="1100">
+                <a:solidFill>
+                  <a:srgbClr val="111111"/>
+                </a:solidFill>
+                <a:latin typeface="BIZ UDPGothic"/>
+              </a:defRPr>
+            </a:pPr>
+            <a:r>
+              <a:t>天気予報から取得</a:t>
+            </a:r>
+          </a:p>
+        </p:txBody>
+      </p:sp>
+      <p:sp>
+        <p:nvSpPr>
+          <p:cNvPr id="10" name="Rounded Rectangle 9"/>
           <p:cNvSpPr/>
           <p:nvPr/>
         </p:nvSpPr>
         <p:spPr>
           <a:xfrm>
-            <a:off x="548640" y="1188720"/>
-            <a:ext cx="5486400" cy="5120640"/>
+            <a:off x="5303520" y="5303520"/>
+            <a:ext cx="1828800" cy="411480"/>
           </a:xfrm>
           <a:prstGeom prst="roundRect">
             <a:avLst/>
@@ -7007,9 +6675,9 @@
           <a:solidFill>
             <a:srgbClr val="FFFFFF"/>
           </a:solidFill>
-          <a:ln w="19050">
+          <a:ln w="15240">
             <a:solidFill>
-              <a:srgbClr val="D2D7DE"/>
+              <a:srgbClr val="7BA4C7"/>
             </a:solidFill>
           </a:ln>
         </p:spPr>
@@ -7031,54 +6699,40 @@
           <a:bodyPr rtlCol="0" anchor="ctr"/>
           <a:lstStyle/>
           <a:p>
-            <a:pPr algn="ctr"/>
-          </a:p>
-        </p:txBody>
-      </p:sp>
-      <p:pic>
-        <p:nvPicPr>
-          <p:cNvPr id="8" name="Picture 7" descr="slide05_model_curve.png"/>
-          <p:cNvPicPr>
-            <a:picLocks noChangeAspect="1"/>
-          </p:cNvPicPr>
-          <p:nvPr/>
-        </p:nvPicPr>
-        <p:blipFill>
-          <a:blip r:embed="rId2"/>
-          <a:stretch>
-            <a:fillRect/>
-          </a:stretch>
-        </p:blipFill>
-        <p:spPr>
-          <a:xfrm>
-            <a:off x="731520" y="1371600"/>
-            <a:ext cx="5120640" cy="2405867"/>
-          </a:xfrm>
-          <a:prstGeom prst="rect">
-            <a:avLst/>
-          </a:prstGeom>
-        </p:spPr>
-      </p:pic>
-      <p:sp>
-        <p:nvSpPr>
-          <p:cNvPr id="9" name="Rounded Rectangle 8"/>
+            <a:pPr algn="ctr">
+              <a:defRPr sz="1100">
+                <a:solidFill>
+                  <a:srgbClr val="111111"/>
+                </a:solidFill>
+                <a:latin typeface="BIZ UDPGothic"/>
+              </a:defRPr>
+            </a:pPr>
+            <a:r>
+              <a:t>BM側が設定</a:t>
+            </a:r>
+          </a:p>
+        </p:txBody>
+      </p:sp>
+      <p:sp>
+        <p:nvSpPr>
+          <p:cNvPr id="11" name="Rounded Rectangle 10"/>
           <p:cNvSpPr/>
           <p:nvPr/>
         </p:nvSpPr>
         <p:spPr>
           <a:xfrm>
-            <a:off x="6217920" y="1188720"/>
-            <a:ext cx="5394960" cy="5120640"/>
+            <a:off x="8046720" y="3840480"/>
+            <a:ext cx="2011680" cy="502920"/>
           </a:xfrm>
           <a:prstGeom prst="roundRect">
             <a:avLst/>
           </a:prstGeom>
           <a:solidFill>
-            <a:srgbClr val="EBF2F8"/>
+            <a:srgbClr val="FFFFFF"/>
           </a:solidFill>
-          <a:ln w="19050">
+          <a:ln w="15240">
             <a:solidFill>
-              <a:srgbClr val="0B5AA6"/>
+              <a:srgbClr val="7BA4C7"/>
             </a:solidFill>
           </a:ln>
         </p:spPr>
@@ -7100,145 +6754,20 @@
           <a:bodyPr rtlCol="0" anchor="ctr"/>
           <a:lstStyle/>
           <a:p>
-            <a:pPr algn="ctr"/>
-          </a:p>
-        </p:txBody>
-      </p:sp>
-      <p:sp>
-        <p:nvSpPr>
-          <p:cNvPr id="10" name="TextBox 9"/>
-          <p:cNvSpPr txBox="1"/>
-          <p:nvPr/>
-        </p:nvSpPr>
-        <p:spPr>
-          <a:xfrm>
-            <a:off x="6400800" y="1371600"/>
-            <a:ext cx="5029200" cy="4754880"/>
-          </a:xfrm>
-          <a:prstGeom prst="rect">
-            <a:avLst/>
-          </a:prstGeom>
-          <a:noFill/>
-        </p:spPr>
-        <p:txBody>
-          <a:bodyPr wrap="square">
-            <a:spAutoFit/>
-          </a:bodyPr>
-          <a:lstStyle/>
-          <a:p>
-            <a:pPr>
-              <a:spcAft>
-                <a:spcPts val="800"/>
-              </a:spcAft>
-              <a:defRPr sz="1800" b="1">
-                <a:solidFill>
-                  <a:srgbClr val="092B4C"/>
-                </a:solidFill>
-                <a:latin typeface="BIZ UDPGothic"/>
-              </a:defRPr>
-            </a:pPr>
-            <a:r>
-              <a:t>■ 技術的工夫: 休日蓄熱への対処</a:t>
-            </a:r>
-          </a:p>
-          <a:p>
-            <a:pPr>
-              <a:spcAft>
-                <a:spcPts val="1400"/>
-              </a:spcAft>
-              <a:defRPr sz="1800">
-                <a:solidFill>
-                  <a:srgbClr val="141414"/>
-                </a:solidFill>
-                <a:latin typeface="BIZ UDPGothic"/>
-              </a:defRPr>
-            </a:pPr>
-            <a:r>
-              <a:t>【躯体蓄熱の課題】 週末停止で躯体に熱がこもり月曜朝の予冷が長期化。</a:t>
-            </a:r>
-          </a:p>
-          <a:p>
-            <a:pPr>
-              <a:spcAft>
-                <a:spcPts val="1400"/>
-              </a:spcAft>
-              <a:defRPr sz="1800">
-                <a:solidFill>
-                  <a:srgbClr val="141414"/>
-                </a:solidFill>
-                <a:latin typeface="BIZ UDPGothic"/>
-              </a:defRPr>
-            </a:pPr>
-            <a:r>
-              <a:t>【分離学習の徹底】 平日データのみで学習し通常時の過大見積もりを防止。</a:t>
-            </a:r>
-          </a:p>
-          <a:p>
-            <a:pPr>
-              <a:spcAft>
-                <a:spcPts val="1400"/>
-              </a:spcAft>
-              <a:defRPr sz="1800">
-                <a:solidFill>
-                  <a:srgbClr val="141414"/>
-                </a:solidFill>
-                <a:latin typeface="BIZ UDPGothic"/>
-              </a:defRPr>
-            </a:pPr>
-            <a:r>
-              <a:t>【温度上乗せ処理】 休日明けは予報気温に+2.0℃上乗せして同一モデルへ。</a:t>
-            </a:r>
-          </a:p>
-          <a:p>
-            <a:pPr>
-              <a:spcAft>
-                <a:spcPts val="1400"/>
-              </a:spcAft>
-              <a:defRPr sz="1800">
-                <a:solidFill>
-                  <a:srgbClr val="141414"/>
-                </a:solidFill>
-                <a:latin typeface="BIZ UDPGothic"/>
-              </a:defRPr>
-            </a:pPr>
-            <a:r>
-              <a:t>【汎化性能評価】 1件抜き交差検証（LOO-MAE）で過学習を防止。</a:t>
-            </a:r>
-          </a:p>
-        </p:txBody>
-      </p:sp>
-      <p:sp>
-        <p:nvSpPr>
-          <p:cNvPr id="11" name="TextBox 10"/>
-          <p:cNvSpPr txBox="1"/>
-          <p:nvPr/>
-        </p:nvSpPr>
-        <p:spPr>
-          <a:xfrm>
-            <a:off x="457200" y="6556248"/>
-            <a:ext cx="11274552" cy="274320"/>
-          </a:xfrm>
-          <a:prstGeom prst="rect">
-            <a:avLst/>
-          </a:prstGeom>
-          <a:noFill/>
-        </p:spPr>
-        <p:txBody>
-          <a:bodyPr wrap="none">
-            <a:spAutoFit/>
-          </a:bodyPr>
-          <a:lstStyle/>
-          <a:p>
-            <a:pPr>
-              <a:defRPr sz="1200">
-                <a:solidFill>
-                  <a:srgbClr val="505050"/>
-                </a:solidFill>
-                <a:latin typeface="BIZ UDPGothic"/>
-              </a:defRPr>
-            </a:pPr>
-            <a:r>
-              <a:t>※ 出所・注記: モデル学習評価（LOO-MAE交差検証）および蓄熱補正ロジック</a:t>
+            <a:pPr algn="ctr">
+              <a:defRPr sz="1100">
+                <a:solidFill>
+                  <a:srgbClr val="111111"/>
+                </a:solidFill>
+                <a:latin typeface="BIZ UDPGothic"/>
+              </a:defRPr>
+            </a:pPr>
+            <a:r>
+              <a:t>天気予報などの</a:t>
+            </a:r>
+            <a:br/>
+            <a:r>
+              <a:t>誤差を考慮</a:t>
             </a:r>
           </a:p>
         </p:txBody>
@@ -7270,18 +6799,16 @@
         <p:spPr>
           <a:xfrm>
             <a:off x="0" y="0"/>
-            <a:ext cx="12191695" cy="1005840"/>
+            <a:ext cx="12191695" cy="530352"/>
           </a:xfrm>
           <a:prstGeom prst="rect">
             <a:avLst/>
           </a:prstGeom>
           <a:solidFill>
-            <a:srgbClr val="092B4C"/>
+            <a:srgbClr val="0B3968"/>
           </a:solidFill>
           <a:ln>
-            <a:solidFill>
-              <a:srgbClr val="092B4C"/>
-            </a:solidFill>
+            <a:noFill/>
           </a:ln>
         </p:spPr>
         <p:style>
@@ -7308,24 +6835,60 @@
       </p:sp>
       <p:sp>
         <p:nvSpPr>
-          <p:cNvPr id="3" name="Rounded Rectangle 2"/>
+          <p:cNvPr id="3" name="TextBox 2"/>
+          <p:cNvSpPr txBox="1"/>
+          <p:nvPr/>
+        </p:nvSpPr>
+        <p:spPr>
+          <a:xfrm>
+            <a:off x="301752" y="73152"/>
+            <a:ext cx="9144000" cy="411480"/>
+          </a:xfrm>
+          <a:prstGeom prst="rect">
+            <a:avLst/>
+          </a:prstGeom>
+          <a:noFill/>
+        </p:spPr>
+        <p:txBody>
+          <a:bodyPr wrap="square">
+            <a:spAutoFit/>
+          </a:bodyPr>
+          <a:lstStyle/>
+          <a:p>
+            <a:pPr>
+              <a:defRPr sz="1800" b="1">
+                <a:solidFill>
+                  <a:srgbClr val="FFFFFF"/>
+                </a:solidFill>
+                <a:latin typeface="BIZ UDPGothic"/>
+              </a:defRPr>
+            </a:pPr>
+            <a:r>
+              <a:t>6. アプリ開発</a:t>
+            </a:r>
+          </a:p>
+        </p:txBody>
+      </p:sp>
+      <p:sp>
+        <p:nvSpPr>
+          <p:cNvPr id="4" name="Rounded Rectangle 3"/>
           <p:cNvSpPr/>
           <p:nvPr/>
         </p:nvSpPr>
         <p:spPr>
           <a:xfrm>
-            <a:off x="457200" y="109728"/>
-            <a:ext cx="2377440" cy="329184"/>
+            <a:off x="10789920" y="128016"/>
+            <a:ext cx="484632" cy="274320"/>
           </a:xfrm>
           <a:prstGeom prst="roundRect">
             <a:avLst/>
           </a:prstGeom>
           <a:solidFill>
-            <a:srgbClr val="0B5AA6"/>
+            <a:srgbClr val="24588E"/>
           </a:solidFill>
           <a:ln>
             <a:solidFill>
-              <a:srgbClr val="0B5AA6"/>
+              <a:srgbClr val="5E8DBE"/>
             </a:solidFill>
           </a:ln>
         </p:spPr>
@@ -7344,55 +6907,19 @@
           </a:fontRef>
         </p:style>
         <p:txBody>
-          <a:bodyPr rtlCol="0" anchor="ctr" wrap="square"/>
+          <a:bodyPr rtlCol="0" anchor="ctr"/>
           <a:lstStyle/>
           <a:p>
             <a:pPr algn="ctr">
-              <a:defRPr sz="1400" b="1">
-                <a:solidFill>
-                  <a:srgbClr val="FFFFFF"/>
-                </a:solidFill>
-                <a:latin typeface="BIZ UDPGothic"/>
-              </a:defRPr>
-            </a:pPr>
-            <a:r>
-              <a:t>研究開発実習 成果報告</a:t>
-            </a:r>
-          </a:p>
-        </p:txBody>
-      </p:sp>
-      <p:sp>
-        <p:nvSpPr>
-          <p:cNvPr id="4" name="TextBox 3"/>
-          <p:cNvSpPr txBox="1"/>
-          <p:nvPr/>
-        </p:nvSpPr>
-        <p:spPr>
-          <a:xfrm>
-            <a:off x="457200" y="457200"/>
-            <a:ext cx="10058400" cy="502920"/>
-          </a:xfrm>
-          <a:prstGeom prst="rect">
-            <a:avLst/>
-          </a:prstGeom>
-          <a:noFill/>
-        </p:spPr>
-        <p:txBody>
-          <a:bodyPr wrap="square">
-            <a:spAutoFit/>
-          </a:bodyPr>
-          <a:lstStyle/>
-          <a:p>
-            <a:pPr>
-              <a:defRPr sz="2200" b="1">
-                <a:solidFill>
-                  <a:srgbClr val="FFFFFF"/>
-                </a:solidFill>
-                <a:latin typeface="BIZ UDPGothic"/>
-              </a:defRPr>
-            </a:pPr>
-            <a:r>
-              <a:t>最適起動シミュレーションによる削減効果の検証</a:t>
+              <a:defRPr sz="1100" i="1">
+                <a:solidFill>
+                  <a:srgbClr val="E8F1F8"/>
+                </a:solidFill>
+                <a:latin typeface="BIZ UDPGothic"/>
+              </a:defRPr>
+            </a:pPr>
+            <a:r>
+              <a:t>IUO</a:t>
             </a:r>
           </a:p>
         </p:txBody>
@@ -7405,8 +6932,8 @@
         </p:nvSpPr>
         <p:spPr>
           <a:xfrm>
-            <a:off x="10789920" y="457200"/>
-            <a:ext cx="1005840" cy="411480"/>
+            <a:off x="11430000" y="73152"/>
+            <a:ext cx="548640" cy="411480"/>
           </a:xfrm>
           <a:prstGeom prst="rect">
             <a:avLst/>
@@ -7419,113 +6946,218 @@
           </a:bodyPr>
           <a:lstStyle/>
           <a:p>
+            <a:pPr algn="ctr">
+              <a:defRPr sz="1800" b="1">
+                <a:solidFill>
+                  <a:srgbClr val="FFFFFF"/>
+                </a:solidFill>
+                <a:latin typeface="BIZ UDPGothic"/>
+              </a:defRPr>
+            </a:pPr>
+            <a:r>
+              <a:t>7</a:t>
+            </a:r>
+          </a:p>
+        </p:txBody>
+      </p:sp>
+      <p:sp>
+        <p:nvSpPr>
+          <p:cNvPr id="6" name="TextBox 5"/>
+          <p:cNvSpPr txBox="1"/>
+          <p:nvPr/>
+        </p:nvSpPr>
+        <p:spPr>
+          <a:xfrm>
+            <a:off x="9144000" y="6537960"/>
+            <a:ext cx="2743200" cy="228600"/>
+          </a:xfrm>
+          <a:prstGeom prst="rect">
+            <a:avLst/>
+          </a:prstGeom>
+          <a:noFill/>
+        </p:spPr>
+        <p:txBody>
+          <a:bodyPr wrap="none">
+            <a:spAutoFit/>
+          </a:bodyPr>
+          <a:lstStyle/>
+          <a:p>
             <a:pPr algn="r">
-              <a:defRPr sz="1800" b="1">
-                <a:solidFill>
-                  <a:srgbClr val="EBF2F8"/>
-                </a:solidFill>
-                <a:latin typeface="BIZ UDPGothic"/>
-              </a:defRPr>
-            </a:pPr>
-            <a:r>
-              <a:t>07 / 08</a:t>
-            </a:r>
-          </a:p>
-        </p:txBody>
-      </p:sp>
-      <p:sp>
-        <p:nvSpPr>
-          <p:cNvPr id="6" name="Rectangle 5"/>
-          <p:cNvSpPr/>
-          <p:nvPr/>
-        </p:nvSpPr>
-        <p:spPr>
-          <a:xfrm>
-            <a:off x="0" y="6537960"/>
-            <a:ext cx="12191695" cy="320040"/>
+              <a:defRPr sz="800">
+                <a:solidFill>
+                  <a:srgbClr val="666666"/>
+                </a:solidFill>
+                <a:latin typeface="BIZ UDPGothic"/>
+              </a:defRPr>
+            </a:pPr>
+            <a:r>
+              <a:t>© Panasonic Corporation</a:t>
+            </a:r>
+          </a:p>
+        </p:txBody>
+      </p:sp>
+      <p:sp>
+        <p:nvSpPr>
+          <p:cNvPr id="7" name="TextBox 6"/>
+          <p:cNvSpPr txBox="1"/>
+          <p:nvPr/>
+        </p:nvSpPr>
+        <p:spPr>
+          <a:xfrm>
+            <a:off x="640080" y="868680"/>
+            <a:ext cx="6583680" cy="5029200"/>
           </a:xfrm>
           <a:prstGeom prst="rect">
             <a:avLst/>
           </a:prstGeom>
-          <a:solidFill>
-            <a:srgbClr val="F5F6F8"/>
-          </a:solidFill>
-          <a:ln>
-            <a:solidFill>
-              <a:srgbClr val="D2D7DE"/>
-            </a:solidFill>
-          </a:ln>
-        </p:spPr>
-        <p:style>
-          <a:lnRef idx="1">
-            <a:schemeClr val="accent1"/>
-          </a:lnRef>
-          <a:fillRef idx="3">
-            <a:schemeClr val="accent1"/>
-          </a:fillRef>
-          <a:effectRef idx="2">
-            <a:schemeClr val="accent1"/>
-          </a:effectRef>
-          <a:fontRef idx="minor">
-            <a:schemeClr val="lt1"/>
-          </a:fontRef>
-        </p:style>
-        <p:txBody>
-          <a:bodyPr rtlCol="0" anchor="ctr"/>
-          <a:lstStyle/>
-          <a:p>
-            <a:pPr algn="ctr"/>
-          </a:p>
-        </p:txBody>
-      </p:sp>
-      <p:sp>
-        <p:nvSpPr>
-          <p:cNvPr id="7" name="Rounded Rectangle 6"/>
-          <p:cNvSpPr/>
-          <p:nvPr/>
-        </p:nvSpPr>
-        <p:spPr>
-          <a:xfrm>
-            <a:off x="548640" y="1188720"/>
-            <a:ext cx="6217920" cy="5120640"/>
-          </a:xfrm>
-          <a:prstGeom prst="roundRect">
-            <a:avLst/>
-          </a:prstGeom>
-          <a:solidFill>
-            <a:srgbClr val="FFFFFF"/>
-          </a:solidFill>
-          <a:ln w="19050">
-            <a:solidFill>
-              <a:srgbClr val="D2D7DE"/>
-            </a:solidFill>
-          </a:ln>
-        </p:spPr>
-        <p:style>
-          <a:lnRef idx="1">
-            <a:schemeClr val="accent1"/>
-          </a:lnRef>
-          <a:fillRef idx="3">
-            <a:schemeClr val="accent1"/>
-          </a:fillRef>
-          <a:effectRef idx="2">
-            <a:schemeClr val="accent1"/>
-          </a:effectRef>
-          <a:fontRef idx="minor">
-            <a:schemeClr val="lt1"/>
-          </a:fontRef>
-        </p:style>
-        <p:txBody>
-          <a:bodyPr rtlCol="0" anchor="ctr"/>
-          <a:lstStyle/>
-          <a:p>
-            <a:pPr algn="ctr"/>
+          <a:noFill/>
+        </p:spPr>
+        <p:txBody>
+          <a:bodyPr wrap="none">
+            <a:spAutoFit/>
+          </a:bodyPr>
+          <a:lstStyle/>
+          <a:p>
+            <a:pPr>
+              <a:spcBef>
+                <a:spcPts val="0"/>
+              </a:spcBef>
+              <a:defRPr sz="1350" b="1">
+                <a:solidFill>
+                  <a:srgbClr val="111111"/>
+                </a:solidFill>
+                <a:latin typeface="BIZ UDPGothic"/>
+              </a:defRPr>
+            </a:pPr>
+            <a:r>
+              <a:t>■ 工夫点</a:t>
+            </a:r>
+          </a:p>
+          <a:p>
+            <a:pPr>
+              <a:spcBef>
+                <a:spcPts val="400"/>
+              </a:spcBef>
+              <a:defRPr sz="1250" b="1">
+                <a:solidFill>
+                  <a:srgbClr val="111111"/>
+                </a:solidFill>
+                <a:latin typeface="BIZ UDPGothic"/>
+              </a:defRPr>
+            </a:pPr>
+            <a:r>
+              <a:t>1. モデルの構築</a:t>
+            </a:r>
+          </a:p>
+          <a:p>
+            <a:pPr>
+              <a:spcBef>
+                <a:spcPts val="200"/>
+              </a:spcBef>
+              <a:defRPr sz="1200" b="0">
+                <a:solidFill>
+                  <a:srgbClr val="333333"/>
+                </a:solidFill>
+                <a:latin typeface="BIZ UDPGothic"/>
+              </a:defRPr>
+            </a:pPr>
+            <a:r>
+              <a:t>・線形回帰によって推定</a:t>
+            </a:r>
+            <a:br/>
+            <a:r>
+              <a:t>・説明変数として、外気温のみと、外気温と設定温度の差を用いたものを比較</a:t>
+            </a:r>
+            <a:br/>
+            <a:r>
+              <a:t>・より精度の高い外気温と設定温度の差を採用</a:t>
+            </a:r>
+          </a:p>
+          <a:p>
+            <a:pPr>
+              <a:spcBef>
+                <a:spcPts val="1000"/>
+              </a:spcBef>
+              <a:defRPr sz="1250" b="1">
+                <a:solidFill>
+                  <a:srgbClr val="111111"/>
+                </a:solidFill>
+                <a:latin typeface="BIZ UDPGothic"/>
+              </a:defRPr>
+            </a:pPr>
+            <a:r>
+              <a:t>2. 休み明けの考慮</a:t>
+            </a:r>
+          </a:p>
+          <a:p>
+            <a:pPr>
+              <a:spcBef>
+                <a:spcPts val="200"/>
+              </a:spcBef>
+              <a:defRPr sz="1200" b="0">
+                <a:solidFill>
+                  <a:srgbClr val="333333"/>
+                </a:solidFill>
+                <a:latin typeface="BIZ UDPGothic"/>
+              </a:defRPr>
+            </a:pPr>
+            <a:r>
+              <a:t>・運転を止めた翌日は躯体に熱が残り、予冷時間が大きく延びる</a:t>
+            </a:r>
+            <a:br/>
+            <a:r>
+              <a:t>・通常平日51分(n=8)に対し、休日明けは135分(n=1)かかっている</a:t>
+            </a:r>
+            <a:br/>
+            <a:r>
+              <a:t>  →異なる予測モデルが必要</a:t>
+            </a:r>
+            <a:br/>
+            <a:r>
+              <a:t>・データが少ないため、予想外気温に+2.0℃ することで対応</a:t>
+            </a:r>
+          </a:p>
+          <a:p>
+            <a:pPr>
+              <a:spcBef>
+                <a:spcPts val="1000"/>
+              </a:spcBef>
+              <a:defRPr sz="1250" b="1">
+                <a:solidFill>
+                  <a:srgbClr val="111111"/>
+                </a:solidFill>
+                <a:latin typeface="BIZ UDPGothic"/>
+              </a:defRPr>
+            </a:pPr>
+            <a:r>
+              <a:t>3. 学習データ範囲外の扱い</a:t>
+            </a:r>
+          </a:p>
+          <a:p>
+            <a:pPr>
+              <a:spcBef>
+                <a:spcPts val="200"/>
+              </a:spcBef>
+              <a:defRPr sz="1200" b="0">
+                <a:solidFill>
+                  <a:srgbClr val="333333"/>
+                </a:solidFill>
+                <a:latin typeface="BIZ UDPGothic"/>
+              </a:defRPr>
+            </a:pPr>
+            <a:r>
+              <a:t>・学習したデータに含まれない範囲は予測が正確ではない可能性がある。</a:t>
+            </a:r>
+            <a:br/>
+            <a:r>
+              <a:t>  →外挿範囲を明示</a:t>
+            </a:r>
           </a:p>
         </p:txBody>
       </p:sp>
       <p:pic>
         <p:nvPicPr>
-          <p:cNvPr id="8" name="Picture 7" descr="05_slide6_bar_before_after.png"/>
+          <p:cNvPr id="8" name="Picture 7" descr="deck_slide06_barchart.png"/>
           <p:cNvPicPr>
             <a:picLocks noChangeAspect="1"/>
           </p:cNvPicPr>
@@ -7539,389 +7171,38 @@
         </p:blipFill>
         <p:spPr>
           <a:xfrm>
-            <a:off x="731520" y="1371600"/>
-            <a:ext cx="5852160" cy="2758507"/>
+            <a:off x="7406640" y="731520"/>
+            <a:ext cx="4297680" cy="2286000"/>
           </a:xfrm>
           <a:prstGeom prst="rect">
             <a:avLst/>
           </a:prstGeom>
         </p:spPr>
       </p:pic>
-      <p:sp>
-        <p:nvSpPr>
-          <p:cNvPr id="9" name="Rounded Rectangle 8"/>
-          <p:cNvSpPr/>
-          <p:nvPr/>
-        </p:nvSpPr>
-        <p:spPr>
-          <a:xfrm>
-            <a:off x="6949440" y="1188720"/>
-            <a:ext cx="4663440" cy="1600200"/>
-          </a:xfrm>
-          <a:prstGeom prst="roundRect">
-            <a:avLst/>
-          </a:prstGeom>
-          <a:solidFill>
-            <a:srgbClr val="FFFFFF"/>
-          </a:solidFill>
-          <a:ln w="19050">
-            <a:solidFill>
-              <a:srgbClr val="75B843"/>
-            </a:solidFill>
-          </a:ln>
-        </p:spPr>
-        <p:style>
-          <a:lnRef idx="1">
-            <a:schemeClr val="accent1"/>
-          </a:lnRef>
-          <a:fillRef idx="3">
-            <a:schemeClr val="accent1"/>
-          </a:fillRef>
-          <a:effectRef idx="2">
-            <a:schemeClr val="accent1"/>
-          </a:effectRef>
-          <a:fontRef idx="minor">
-            <a:schemeClr val="lt1"/>
-          </a:fontRef>
-        </p:style>
-        <p:txBody>
-          <a:bodyPr rtlCol="0" anchor="ctr"/>
-          <a:lstStyle/>
-          <a:p>
-            <a:pPr algn="ctr"/>
-          </a:p>
-        </p:txBody>
-      </p:sp>
-      <p:sp>
-        <p:nvSpPr>
-          <p:cNvPr id="10" name="TextBox 9"/>
-          <p:cNvSpPr txBox="1"/>
-          <p:nvPr/>
-        </p:nvSpPr>
-        <p:spPr>
-          <a:xfrm>
-            <a:off x="7132320" y="1280160"/>
-            <a:ext cx="4297680" cy="1417320"/>
+      <p:pic>
+        <p:nvPicPr>
+          <p:cNvPr id="9" name="Picture 8" descr="deck_slide06_scatter.png"/>
+          <p:cNvPicPr>
+            <a:picLocks noChangeAspect="1"/>
+          </p:cNvPicPr>
+          <p:nvPr/>
+        </p:nvPicPr>
+        <p:blipFill>
+          <a:blip r:embed="rId3"/>
+          <a:stretch>
+            <a:fillRect/>
+          </a:stretch>
+        </p:blipFill>
+        <p:spPr>
+          <a:xfrm>
+            <a:off x="7406640" y="3108960"/>
+            <a:ext cx="4297680" cy="3017520"/>
           </a:xfrm>
           <a:prstGeom prst="rect">
             <a:avLst/>
           </a:prstGeom>
-          <a:noFill/>
-        </p:spPr>
-        <p:txBody>
-          <a:bodyPr wrap="square">
-            <a:spAutoFit/>
-          </a:bodyPr>
-          <a:lstStyle/>
-          <a:p>
-            <a:pPr>
-              <a:spcAft>
-                <a:spcPts val="200"/>
-              </a:spcAft>
-              <a:defRPr sz="1800" b="1">
-                <a:solidFill>
-                  <a:srgbClr val="141414"/>
-                </a:solidFill>
-                <a:latin typeface="BIZ UDPGothic"/>
-              </a:defRPr>
-            </a:pPr>
-            <a:r>
-              <a:t>8:00 目標温度到達率</a:t>
-            </a:r>
-          </a:p>
-          <a:p>
-            <a:pPr>
-              <a:spcAft>
-                <a:spcPts val="200"/>
-              </a:spcAft>
-              <a:defRPr sz="2600" b="1">
-                <a:solidFill>
-                  <a:srgbClr val="75B843"/>
-                </a:solidFill>
-                <a:latin typeface="BIZ UDPGothic"/>
-              </a:defRPr>
-            </a:pPr>
-            <a:r>
-              <a:t>100 %</a:t>
-            </a:r>
-          </a:p>
-          <a:p>
-            <a:pPr>
-              <a:defRPr sz="1400">
-                <a:solidFill>
-                  <a:srgbClr val="505050"/>
-                </a:solidFill>
-                <a:latin typeface="BIZ UDPGothic"/>
-              </a:defRPr>
-            </a:pPr>
-            <a:r>
-              <a:t>全平日（実動9日）で未達0件。クレームゼロ達成</a:t>
-            </a:r>
-          </a:p>
-        </p:txBody>
-      </p:sp>
-      <p:sp>
-        <p:nvSpPr>
-          <p:cNvPr id="11" name="Rounded Rectangle 10"/>
-          <p:cNvSpPr/>
-          <p:nvPr/>
-        </p:nvSpPr>
-        <p:spPr>
-          <a:xfrm>
-            <a:off x="6949440" y="2926080"/>
-            <a:ext cx="4663440" cy="1600200"/>
-          </a:xfrm>
-          <a:prstGeom prst="roundRect">
-            <a:avLst/>
-          </a:prstGeom>
-          <a:solidFill>
-            <a:srgbClr val="FFFFFF"/>
-          </a:solidFill>
-          <a:ln w="19050">
-            <a:solidFill>
-              <a:srgbClr val="0B5AA6"/>
-            </a:solidFill>
-          </a:ln>
-        </p:spPr>
-        <p:style>
-          <a:lnRef idx="1">
-            <a:schemeClr val="accent1"/>
-          </a:lnRef>
-          <a:fillRef idx="3">
-            <a:schemeClr val="accent1"/>
-          </a:fillRef>
-          <a:effectRef idx="2">
-            <a:schemeClr val="accent1"/>
-          </a:effectRef>
-          <a:fontRef idx="minor">
-            <a:schemeClr val="lt1"/>
-          </a:fontRef>
-        </p:style>
-        <p:txBody>
-          <a:bodyPr rtlCol="0" anchor="ctr"/>
-          <a:lstStyle/>
-          <a:p>
-            <a:pPr algn="ctr"/>
-          </a:p>
-        </p:txBody>
-      </p:sp>
-      <p:sp>
-        <p:nvSpPr>
-          <p:cNvPr id="12" name="TextBox 11"/>
-          <p:cNvSpPr txBox="1"/>
-          <p:nvPr/>
-        </p:nvSpPr>
-        <p:spPr>
-          <a:xfrm>
-            <a:off x="7132320" y="3017520"/>
-            <a:ext cx="4297680" cy="1417320"/>
-          </a:xfrm>
-          <a:prstGeom prst="rect">
-            <a:avLst/>
-          </a:prstGeom>
-          <a:noFill/>
-        </p:spPr>
-        <p:txBody>
-          <a:bodyPr wrap="square">
-            <a:spAutoFit/>
-          </a:bodyPr>
-          <a:lstStyle/>
-          <a:p>
-            <a:pPr>
-              <a:spcAft>
-                <a:spcPts val="200"/>
-              </a:spcAft>
-              <a:defRPr sz="1800" b="1">
-                <a:solidFill>
-                  <a:srgbClr val="141414"/>
-                </a:solidFill>
-                <a:latin typeface="BIZ UDPGothic"/>
-              </a:defRPr>
-            </a:pPr>
-            <a:r>
-              <a:t>始業前消費電力量 削減率</a:t>
-            </a:r>
-          </a:p>
-          <a:p>
-            <a:pPr>
-              <a:spcAft>
-                <a:spcPts val="200"/>
-              </a:spcAft>
-              <a:defRPr sz="2600" b="1">
-                <a:solidFill>
-                  <a:srgbClr val="0B5AA6"/>
-                </a:solidFill>
-                <a:latin typeface="BIZ UDPGothic"/>
-              </a:defRPr>
-            </a:pPr>
-            <a:r>
-              <a:t>約 【TBD】 %</a:t>
-            </a:r>
-          </a:p>
-          <a:p>
-            <a:pPr>
-              <a:defRPr sz="1400">
-                <a:solidFill>
-                  <a:srgbClr val="505050"/>
-                </a:solidFill>
-                <a:latin typeface="BIZ UDPGothic"/>
-              </a:defRPr>
-            </a:pPr>
-            <a:r>
-              <a:t>起動を最大1時間以上遅延させ無駄を抑制</a:t>
-            </a:r>
-          </a:p>
-        </p:txBody>
-      </p:sp>
-      <p:sp>
-        <p:nvSpPr>
-          <p:cNvPr id="13" name="Rounded Rectangle 12"/>
-          <p:cNvSpPr/>
-          <p:nvPr/>
-        </p:nvSpPr>
-        <p:spPr>
-          <a:xfrm>
-            <a:off x="6949440" y="4663440"/>
-            <a:ext cx="4663440" cy="1600200"/>
-          </a:xfrm>
-          <a:prstGeom prst="roundRect">
-            <a:avLst/>
-          </a:prstGeom>
-          <a:solidFill>
-            <a:srgbClr val="FFFFFF"/>
-          </a:solidFill>
-          <a:ln w="19050">
-            <a:solidFill>
-              <a:srgbClr val="2474B5"/>
-            </a:solidFill>
-          </a:ln>
-        </p:spPr>
-        <p:style>
-          <a:lnRef idx="1">
-            <a:schemeClr val="accent1"/>
-          </a:lnRef>
-          <a:fillRef idx="3">
-            <a:schemeClr val="accent1"/>
-          </a:fillRef>
-          <a:effectRef idx="2">
-            <a:schemeClr val="accent1"/>
-          </a:effectRef>
-          <a:fontRef idx="minor">
-            <a:schemeClr val="lt1"/>
-          </a:fontRef>
-        </p:style>
-        <p:txBody>
-          <a:bodyPr rtlCol="0" anchor="ctr"/>
-          <a:lstStyle/>
-          <a:p>
-            <a:pPr algn="ctr"/>
-          </a:p>
-        </p:txBody>
-      </p:sp>
-      <p:sp>
-        <p:nvSpPr>
-          <p:cNvPr id="14" name="TextBox 13"/>
-          <p:cNvSpPr txBox="1"/>
-          <p:nvPr/>
-        </p:nvSpPr>
-        <p:spPr>
-          <a:xfrm>
-            <a:off x="7132320" y="4754880"/>
-            <a:ext cx="4297680" cy="1417320"/>
-          </a:xfrm>
-          <a:prstGeom prst="rect">
-            <a:avLst/>
-          </a:prstGeom>
-          <a:noFill/>
-        </p:spPr>
-        <p:txBody>
-          <a:bodyPr wrap="square">
-            <a:spAutoFit/>
-          </a:bodyPr>
-          <a:lstStyle/>
-          <a:p>
-            <a:pPr>
-              <a:spcAft>
-                <a:spcPts val="200"/>
-              </a:spcAft>
-              <a:defRPr sz="1800" b="1">
-                <a:solidFill>
-                  <a:srgbClr val="141414"/>
-                </a:solidFill>
-                <a:latin typeface="BIZ UDPGothic"/>
-              </a:defRPr>
-            </a:pPr>
-            <a:r>
-              <a:t>電気代削減見込み（月換算）</a:t>
-            </a:r>
-          </a:p>
-          <a:p>
-            <a:pPr>
-              <a:spcAft>
-                <a:spcPts val="200"/>
-              </a:spcAft>
-              <a:defRPr sz="2600" b="1">
-                <a:solidFill>
-                  <a:srgbClr val="2474B5"/>
-                </a:solidFill>
-                <a:latin typeface="BIZ UDPGothic"/>
-              </a:defRPr>
-            </a:pPr>
-            <a:r>
-              <a:t>約 【TBD】 円</a:t>
-            </a:r>
-          </a:p>
-          <a:p>
-            <a:pPr>
-              <a:defRPr sz="1400">
-                <a:solidFill>
-                  <a:srgbClr val="505050"/>
-                </a:solidFill>
-                <a:latin typeface="BIZ UDPGothic"/>
-              </a:defRPr>
-            </a:pPr>
-            <a:r>
-              <a:t>オフィス1フロアあたり。全館でさらなる効果</a:t>
-            </a:r>
-          </a:p>
-        </p:txBody>
-      </p:sp>
-      <p:sp>
-        <p:nvSpPr>
-          <p:cNvPr id="15" name="TextBox 14"/>
-          <p:cNvSpPr txBox="1"/>
-          <p:nvPr/>
-        </p:nvSpPr>
-        <p:spPr>
-          <a:xfrm>
-            <a:off x="457200" y="6556248"/>
-            <a:ext cx="11274552" cy="274320"/>
-          </a:xfrm>
-          <a:prstGeom prst="rect">
-            <a:avLst/>
-          </a:prstGeom>
-          <a:noFill/>
-        </p:spPr>
-        <p:txBody>
-          <a:bodyPr wrap="none">
-            <a:spAutoFit/>
-          </a:bodyPr>
-          <a:lstStyle/>
-          <a:p>
-            <a:pPr>
-              <a:defRPr sz="1200">
-                <a:solidFill>
-                  <a:srgbClr val="505050"/>
-                </a:solidFill>
-                <a:latin typeface="BIZ UDPGothic"/>
-              </a:defRPr>
-            </a:pPr>
-            <a:r>
-              <a:t>※ 出所・注記: 平日実働9日間のデータによる最適起動バックテスト検証結果</a:t>
-            </a:r>
-          </a:p>
-        </p:txBody>
-      </p:sp>
+        </p:spPr>
+      </p:pic>
     </p:spTree>
   </p:cSld>
   <p:clrMapOvr>
@@ -7949,18 +7230,16 @@
         <p:spPr>
           <a:xfrm>
             <a:off x="0" y="0"/>
-            <a:ext cx="12191695" cy="1005840"/>
+            <a:ext cx="12191695" cy="530352"/>
           </a:xfrm>
           <a:prstGeom prst="rect">
             <a:avLst/>
           </a:prstGeom>
           <a:solidFill>
-            <a:srgbClr val="092B4C"/>
+            <a:srgbClr val="0B3968"/>
           </a:solidFill>
           <a:ln>
-            <a:solidFill>
-              <a:srgbClr val="092B4C"/>
-            </a:solidFill>
+            <a:noFill/>
           </a:ln>
         </p:spPr>
         <p:style>
@@ -7987,24 +7266,60 @@
       </p:sp>
       <p:sp>
         <p:nvSpPr>
-          <p:cNvPr id="3" name="Rounded Rectangle 2"/>
+          <p:cNvPr id="3" name="TextBox 2"/>
+          <p:cNvSpPr txBox="1"/>
+          <p:nvPr/>
+        </p:nvSpPr>
+        <p:spPr>
+          <a:xfrm>
+            <a:off x="301752" y="73152"/>
+            <a:ext cx="9144000" cy="411480"/>
+          </a:xfrm>
+          <a:prstGeom prst="rect">
+            <a:avLst/>
+          </a:prstGeom>
+          <a:noFill/>
+        </p:spPr>
+        <p:txBody>
+          <a:bodyPr wrap="square">
+            <a:spAutoFit/>
+          </a:bodyPr>
+          <a:lstStyle/>
+          <a:p>
+            <a:pPr>
+              <a:defRPr sz="1800" b="1">
+                <a:solidFill>
+                  <a:srgbClr val="FFFFFF"/>
+                </a:solidFill>
+                <a:latin typeface="BIZ UDPGothic"/>
+              </a:defRPr>
+            </a:pPr>
+            <a:r>
+              <a:t>7. 削減効果の検証</a:t>
+            </a:r>
+          </a:p>
+        </p:txBody>
+      </p:sp>
+      <p:sp>
+        <p:nvSpPr>
+          <p:cNvPr id="4" name="Rounded Rectangle 3"/>
           <p:cNvSpPr/>
           <p:nvPr/>
         </p:nvSpPr>
         <p:spPr>
           <a:xfrm>
-            <a:off x="457200" y="109728"/>
-            <a:ext cx="2377440" cy="329184"/>
+            <a:off x="10789920" y="128016"/>
+            <a:ext cx="484632" cy="274320"/>
           </a:xfrm>
           <a:prstGeom prst="roundRect">
             <a:avLst/>
           </a:prstGeom>
           <a:solidFill>
-            <a:srgbClr val="0B5AA6"/>
+            <a:srgbClr val="24588E"/>
           </a:solidFill>
           <a:ln>
             <a:solidFill>
-              <a:srgbClr val="0B5AA6"/>
+              <a:srgbClr val="5E8DBE"/>
             </a:solidFill>
           </a:ln>
         </p:spPr>
@@ -8023,55 +7338,19 @@
           </a:fontRef>
         </p:style>
         <p:txBody>
-          <a:bodyPr rtlCol="0" anchor="ctr" wrap="square"/>
+          <a:bodyPr rtlCol="0" anchor="ctr"/>
           <a:lstStyle/>
           <a:p>
             <a:pPr algn="ctr">
-              <a:defRPr sz="1400" b="1">
-                <a:solidFill>
-                  <a:srgbClr val="FFFFFF"/>
-                </a:solidFill>
-                <a:latin typeface="BIZ UDPGothic"/>
-              </a:defRPr>
-            </a:pPr>
-            <a:r>
-              <a:t>研究開発実習 成果報告</a:t>
-            </a:r>
-          </a:p>
-        </p:txBody>
-      </p:sp>
-      <p:sp>
-        <p:nvSpPr>
-          <p:cNvPr id="4" name="TextBox 3"/>
-          <p:cNvSpPr txBox="1"/>
-          <p:nvPr/>
-        </p:nvSpPr>
-        <p:spPr>
-          <a:xfrm>
-            <a:off x="457200" y="457200"/>
-            <a:ext cx="10058400" cy="502920"/>
-          </a:xfrm>
-          <a:prstGeom prst="rect">
-            <a:avLst/>
-          </a:prstGeom>
-          <a:noFill/>
-        </p:spPr>
-        <p:txBody>
-          <a:bodyPr wrap="square">
-            <a:spAutoFit/>
-          </a:bodyPr>
-          <a:lstStyle/>
-          <a:p>
-            <a:pPr>
-              <a:defRPr sz="2200" b="1">
-                <a:solidFill>
-                  <a:srgbClr val="FFFFFF"/>
-                </a:solidFill>
-                <a:latin typeface="BIZ UDPGothic"/>
-              </a:defRPr>
-            </a:pPr>
-            <a:r>
-              <a:t>運用支援アプリ：BM担当者の意思決定を1画面で完結</a:t>
+              <a:defRPr sz="1100" i="1">
+                <a:solidFill>
+                  <a:srgbClr val="E8F1F8"/>
+                </a:solidFill>
+                <a:latin typeface="BIZ UDPGothic"/>
+              </a:defRPr>
+            </a:pPr>
+            <a:r>
+              <a:t>IUO</a:t>
             </a:r>
           </a:p>
         </p:txBody>
@@ -8084,8 +7363,8 @@
         </p:nvSpPr>
         <p:spPr>
           <a:xfrm>
-            <a:off x="10789920" y="457200"/>
-            <a:ext cx="1005840" cy="411480"/>
+            <a:off x="11430000" y="73152"/>
+            <a:ext cx="548640" cy="411480"/>
           </a:xfrm>
           <a:prstGeom prst="rect">
             <a:avLst/>
@@ -8098,40 +7377,135 @@
           </a:bodyPr>
           <a:lstStyle/>
           <a:p>
+            <a:pPr algn="ctr">
+              <a:defRPr sz="1800" b="1">
+                <a:solidFill>
+                  <a:srgbClr val="FFFFFF"/>
+                </a:solidFill>
+                <a:latin typeface="BIZ UDPGothic"/>
+              </a:defRPr>
+            </a:pPr>
+            <a:r>
+              <a:t>8</a:t>
+            </a:r>
+          </a:p>
+        </p:txBody>
+      </p:sp>
+      <p:sp>
+        <p:nvSpPr>
+          <p:cNvPr id="6" name="TextBox 5"/>
+          <p:cNvSpPr txBox="1"/>
+          <p:nvPr/>
+        </p:nvSpPr>
+        <p:spPr>
+          <a:xfrm>
+            <a:off x="9144000" y="6537960"/>
+            <a:ext cx="2743200" cy="228600"/>
+          </a:xfrm>
+          <a:prstGeom prst="rect">
+            <a:avLst/>
+          </a:prstGeom>
+          <a:noFill/>
+        </p:spPr>
+        <p:txBody>
+          <a:bodyPr wrap="none">
+            <a:spAutoFit/>
+          </a:bodyPr>
+          <a:lstStyle/>
+          <a:p>
             <a:pPr algn="r">
-              <a:defRPr sz="1800" b="1">
-                <a:solidFill>
-                  <a:srgbClr val="EBF2F8"/>
-                </a:solidFill>
-                <a:latin typeface="BIZ UDPGothic"/>
-              </a:defRPr>
-            </a:pPr>
-            <a:r>
-              <a:t>08 / 08</a:t>
-            </a:r>
-          </a:p>
-        </p:txBody>
-      </p:sp>
-      <p:sp>
-        <p:nvSpPr>
-          <p:cNvPr id="6" name="Rectangle 5"/>
+              <a:defRPr sz="800">
+                <a:solidFill>
+                  <a:srgbClr val="666666"/>
+                </a:solidFill>
+                <a:latin typeface="BIZ UDPGothic"/>
+              </a:defRPr>
+            </a:pPr>
+            <a:r>
+              <a:t>© Panasonic Corporation</a:t>
+            </a:r>
+          </a:p>
+        </p:txBody>
+      </p:sp>
+      <p:sp>
+        <p:nvSpPr>
+          <p:cNvPr id="7" name="TextBox 6"/>
+          <p:cNvSpPr txBox="1"/>
+          <p:nvPr/>
+        </p:nvSpPr>
+        <p:spPr>
+          <a:xfrm>
+            <a:off x="640080" y="868680"/>
+            <a:ext cx="4846320" cy="1371600"/>
+          </a:xfrm>
+          <a:prstGeom prst="rect">
+            <a:avLst/>
+          </a:prstGeom>
+          <a:noFill/>
+        </p:spPr>
+        <p:txBody>
+          <a:bodyPr wrap="none">
+            <a:spAutoFit/>
+          </a:bodyPr>
+          <a:lstStyle/>
+          <a:p>
+            <a:pPr>
+              <a:spcBef>
+                <a:spcPts val="0"/>
+              </a:spcBef>
+              <a:defRPr sz="1350" b="1">
+                <a:solidFill>
+                  <a:srgbClr val="111111"/>
+                </a:solidFill>
+                <a:latin typeface="BIZ UDPGothic"/>
+              </a:defRPr>
+            </a:pPr>
+            <a:r>
+              <a:t>■ 実データでの検証</a:t>
+            </a:r>
+          </a:p>
+          <a:p>
+            <a:pPr>
+              <a:spcBef>
+                <a:spcPts val="400"/>
+              </a:spcBef>
+              <a:defRPr sz="1200" b="0">
+                <a:solidFill>
+                  <a:srgbClr val="333333"/>
+                </a:solidFill>
+                <a:latin typeface="BIZ UDPGothic"/>
+              </a:defRPr>
+            </a:pPr>
+            <a:r>
+              <a:t>・作成した予測モデルを、実際の過去データの気温推移</a:t>
+            </a:r>
+            <a:br/>
+            <a:r>
+              <a:t>  から予冷に必要な時間を予測、起動時間の決定を行った。</a:t>
+            </a:r>
+          </a:p>
+        </p:txBody>
+      </p:sp>
+      <p:sp>
+        <p:nvSpPr>
+          <p:cNvPr id="8" name="Rounded Rectangle 7"/>
           <p:cNvSpPr/>
           <p:nvPr/>
         </p:nvSpPr>
         <p:spPr>
           <a:xfrm>
-            <a:off x="0" y="6537960"/>
-            <a:ext cx="12191695" cy="320040"/>
-          </a:xfrm>
-          <a:prstGeom prst="rect">
+            <a:off x="1097280" y="2011680"/>
+            <a:ext cx="3931920" cy="1371600"/>
+          </a:xfrm>
+          <a:prstGeom prst="roundRect">
             <a:avLst/>
           </a:prstGeom>
           <a:solidFill>
-            <a:srgbClr val="F5F6F8"/>
+            <a:srgbClr val="EDF5FB"/>
           </a:solidFill>
-          <a:ln>
+          <a:ln w="19050">
             <a:solidFill>
-              <a:srgbClr val="D2D7DE"/>
+              <a:srgbClr val="7BA4C7"/>
             </a:solidFill>
           </a:ln>
         </p:spPr>
@@ -8153,30 +7527,72 @@
           <a:bodyPr rtlCol="0" anchor="ctr"/>
           <a:lstStyle/>
           <a:p>
-            <a:pPr algn="ctr"/>
-          </a:p>
-        </p:txBody>
-      </p:sp>
-      <p:sp>
-        <p:nvSpPr>
-          <p:cNvPr id="7" name="Rounded Rectangle 6"/>
+            <a:pPr algn="ctr">
+              <a:defRPr sz="1300" b="1">
+                <a:solidFill>
+                  <a:srgbClr val="111111"/>
+                </a:solidFill>
+                <a:latin typeface="BIZ UDPGothic"/>
+              </a:defRPr>
+            </a:pPr>
+            <a:r>
+              <a:t>8:00 目標温度到達率</a:t>
+            </a:r>
+          </a:p>
+          <a:p>
+            <a:pPr>
+              <a:spcBef>
+                <a:spcPts val="400"/>
+              </a:spcBef>
+              <a:defRPr sz="2600" b="1">
+                <a:solidFill>
+                  <a:srgbClr val="00509E"/>
+                </a:solidFill>
+                <a:latin typeface="BIZ UDPGothic"/>
+              </a:defRPr>
+            </a:pPr>
+            <a:r>
+              <a:t>100 %</a:t>
+            </a:r>
+          </a:p>
+          <a:p>
+            <a:pPr>
+              <a:spcBef>
+                <a:spcPts val="200"/>
+              </a:spcBef>
+              <a:defRPr sz="1050">
+                <a:solidFill>
+                  <a:srgbClr val="666666"/>
+                </a:solidFill>
+                <a:latin typeface="BIZ UDPGothic"/>
+              </a:defRPr>
+            </a:pPr>
+            <a:r>
+              <a:t>全平日(実働9日)で快適性を確保</a:t>
+            </a:r>
+          </a:p>
+        </p:txBody>
+      </p:sp>
+      <p:sp>
+        <p:nvSpPr>
+          <p:cNvPr id="9" name="Rounded Rectangle 8"/>
           <p:cNvSpPr/>
           <p:nvPr/>
         </p:nvSpPr>
         <p:spPr>
           <a:xfrm>
-            <a:off x="548640" y="1188720"/>
-            <a:ext cx="5486400" cy="5120640"/>
+            <a:off x="1097280" y="3749039"/>
+            <a:ext cx="3931920" cy="1371600"/>
           </a:xfrm>
           <a:prstGeom prst="roundRect">
             <a:avLst/>
           </a:prstGeom>
           <a:solidFill>
-            <a:srgbClr val="FFFFFF"/>
+            <a:srgbClr val="EDF5FB"/>
           </a:solidFill>
           <a:ln w="19050">
             <a:solidFill>
-              <a:srgbClr val="D2D7DE"/>
+              <a:srgbClr val="7BA4C7"/>
             </a:solidFill>
           </a:ln>
         </p:spPr>
@@ -8198,116 +7614,55 @@
           <a:bodyPr rtlCol="0" anchor="ctr"/>
           <a:lstStyle/>
           <a:p>
-            <a:pPr algn="ctr"/>
-          </a:p>
-        </p:txBody>
-      </p:sp>
-      <p:sp>
-        <p:nvSpPr>
-          <p:cNvPr id="8" name="TextBox 7"/>
-          <p:cNvSpPr txBox="1"/>
-          <p:nvPr/>
-        </p:nvSpPr>
-        <p:spPr>
-          <a:xfrm>
-            <a:off x="731520" y="1280160"/>
-            <a:ext cx="5120640" cy="2926080"/>
-          </a:xfrm>
-          <a:prstGeom prst="rect">
-            <a:avLst/>
-          </a:prstGeom>
-          <a:noFill/>
-        </p:spPr>
-        <p:txBody>
-          <a:bodyPr wrap="square">
-            <a:spAutoFit/>
-          </a:bodyPr>
-          <a:lstStyle/>
+            <a:pPr algn="ctr">
+              <a:defRPr sz="1300" b="1">
+                <a:solidFill>
+                  <a:srgbClr val="111111"/>
+                </a:solidFill>
+                <a:latin typeface="BIZ UDPGothic"/>
+              </a:defRPr>
+            </a:pPr>
+            <a:r>
+              <a:t>始業前消費電力量 削減率</a:t>
+            </a:r>
+          </a:p>
           <a:p>
             <a:pPr>
-              <a:spcAft>
-                <a:spcPts val="600"/>
-              </a:spcAft>
-              <a:defRPr sz="1800" b="1">
-                <a:solidFill>
-                  <a:srgbClr val="092B4C"/>
-                </a:solidFill>
-                <a:latin typeface="BIZ UDPGothic"/>
-              </a:defRPr>
-            </a:pPr>
-            <a:r>
-              <a:t>■ 開発したアプリの機能構成</a:t>
+              <a:spcBef>
+                <a:spcPts val="400"/>
+              </a:spcBef>
+              <a:defRPr sz="2600" b="1">
+                <a:solidFill>
+                  <a:srgbClr val="00509E"/>
+                </a:solidFill>
+                <a:latin typeface="BIZ UDPGothic"/>
+              </a:defRPr>
+            </a:pPr>
+            <a:r>
+              <a:t>平均約 36 %</a:t>
             </a:r>
           </a:p>
           <a:p>
             <a:pPr>
-              <a:spcAft>
-                <a:spcPts val="500"/>
-              </a:spcAft>
-              <a:defRPr sz="1800">
-                <a:solidFill>
-                  <a:srgbClr val="141414"/>
-                </a:solidFill>
-                <a:latin typeface="BIZ UDPGothic"/>
-              </a:defRPr>
-            </a:pPr>
-            <a:r>
-              <a:t>【① 運用日選択】 気象API連携で翌朝気温を自動取得・休日自動判定。</a:t>
-            </a:r>
-          </a:p>
-          <a:p>
-            <a:pPr>
-              <a:spcAft>
-                <a:spcPts val="500"/>
-              </a:spcAft>
-              <a:defRPr sz="1800">
-                <a:solidFill>
-                  <a:srgbClr val="141414"/>
-                </a:solidFill>
-                <a:latin typeface="BIZ UDPGothic"/>
-              </a:defRPr>
-            </a:pPr>
-            <a:r>
-              <a:t>【② 推奨起動時刻】 『推奨: 06:40』『到達予想: 07:59』を一目で提示。</a:t>
-            </a:r>
-          </a:p>
-          <a:p>
-            <a:pPr>
-              <a:spcAft>
-                <a:spcPts val="500"/>
-              </a:spcAft>
-              <a:defRPr sz="1800">
-                <a:solidFill>
-                  <a:srgbClr val="141414"/>
-                </a:solidFill>
-                <a:latin typeface="BIZ UDPGothic"/>
-              </a:defRPr>
-            </a:pPr>
-            <a:r>
-              <a:t>【③ 根拠内訳】 モデル値＋安全余裕＋休日上乗せの内訳を表示。</a:t>
-            </a:r>
-          </a:p>
-          <a:p>
-            <a:pPr>
-              <a:spcAft>
-                <a:spcPts val="500"/>
-              </a:spcAft>
-              <a:defRPr sz="1800">
-                <a:solidFill>
-                  <a:srgbClr val="141414"/>
-                </a:solidFill>
-                <a:latin typeface="BIZ UDPGothic"/>
-              </a:defRPr>
-            </a:pPr>
-            <a:r>
-              <a:t>【④ 降温波形描画】 室温低下と削減電力をリアルタイム描画。</a:t>
+              <a:spcBef>
+                <a:spcPts val="200"/>
+              </a:spcBef>
+              <a:defRPr sz="1050">
+                <a:solidFill>
+                  <a:srgbClr val="666666"/>
+                </a:solidFill>
+                <a:latin typeface="BIZ UDPGothic"/>
+              </a:defRPr>
+            </a:pPr>
+            <a:r>
+              <a:t>起動を最大1時間以上遅延させ無駄を抑制</a:t>
             </a:r>
           </a:p>
         </p:txBody>
       </p:sp>
       <p:pic>
         <p:nvPicPr>
-          <p:cNvPr id="9" name="Picture 8" descr="slide09_timeline_result.png"/>
+          <p:cNvPr id="10" name="Picture 9" descr="deck_slide07_timeline.png"/>
           <p:cNvPicPr>
             <a:picLocks noChangeAspect="1"/>
           </p:cNvPicPr>
@@ -8321,198 +7676,38 @@
         </p:blipFill>
         <p:spPr>
           <a:xfrm>
-            <a:off x="731520" y="4389120"/>
-            <a:ext cx="5120640" cy="1293707"/>
+            <a:off x="5760720" y="731520"/>
+            <a:ext cx="6035040" cy="2651760"/>
           </a:xfrm>
           <a:prstGeom prst="rect">
             <a:avLst/>
           </a:prstGeom>
         </p:spPr>
       </p:pic>
-      <p:sp>
-        <p:nvSpPr>
-          <p:cNvPr id="10" name="Rounded Rectangle 9"/>
-          <p:cNvSpPr/>
-          <p:nvPr/>
-        </p:nvSpPr>
-        <p:spPr>
-          <a:xfrm>
-            <a:off x="6217920" y="1188720"/>
-            <a:ext cx="5394960" cy="5120640"/>
-          </a:xfrm>
-          <a:prstGeom prst="roundRect">
-            <a:avLst/>
-          </a:prstGeom>
-          <a:solidFill>
-            <a:srgbClr val="EBF2F8"/>
-          </a:solidFill>
-          <a:ln w="19050">
-            <a:solidFill>
-              <a:srgbClr val="0B5AA6"/>
-            </a:solidFill>
-          </a:ln>
-        </p:spPr>
-        <p:style>
-          <a:lnRef idx="1">
-            <a:schemeClr val="accent1"/>
-          </a:lnRef>
-          <a:fillRef idx="3">
-            <a:schemeClr val="accent1"/>
-          </a:fillRef>
-          <a:effectRef idx="2">
-            <a:schemeClr val="accent1"/>
-          </a:effectRef>
-          <a:fontRef idx="minor">
-            <a:schemeClr val="lt1"/>
-          </a:fontRef>
-        </p:style>
-        <p:txBody>
-          <a:bodyPr rtlCol="0" anchor="ctr"/>
-          <a:lstStyle/>
-          <a:p>
-            <a:pPr algn="ctr"/>
-          </a:p>
-        </p:txBody>
-      </p:sp>
-      <p:sp>
-        <p:nvSpPr>
-          <p:cNvPr id="11" name="TextBox 10"/>
-          <p:cNvSpPr txBox="1"/>
-          <p:nvPr/>
-        </p:nvSpPr>
-        <p:spPr>
-          <a:xfrm>
-            <a:off x="6400800" y="1371600"/>
-            <a:ext cx="5029200" cy="4754880"/>
+      <p:pic>
+        <p:nvPicPr>
+          <p:cNvPr id="11" name="Picture 10" descr="deck_slide07_energy.png"/>
+          <p:cNvPicPr>
+            <a:picLocks noChangeAspect="1"/>
+          </p:cNvPicPr>
+          <p:nvPr/>
+        </p:nvPicPr>
+        <p:blipFill>
+          <a:blip r:embed="rId3"/>
+          <a:stretch>
+            <a:fillRect/>
+          </a:stretch>
+        </p:blipFill>
+        <p:spPr>
+          <a:xfrm>
+            <a:off x="5760720" y="3474720"/>
+            <a:ext cx="6035040" cy="2926080"/>
           </a:xfrm>
           <a:prstGeom prst="rect">
             <a:avLst/>
           </a:prstGeom>
-          <a:noFill/>
-        </p:spPr>
-        <p:txBody>
-          <a:bodyPr wrap="square">
-            <a:spAutoFit/>
-          </a:bodyPr>
-          <a:lstStyle/>
-          <a:p>
-            <a:pPr>
-              <a:spcAft>
-                <a:spcPts val="1000"/>
-              </a:spcAft>
-              <a:defRPr sz="1800" b="1">
-                <a:solidFill>
-                  <a:srgbClr val="092B4C"/>
-                </a:solidFill>
-                <a:latin typeface="BIZ UDPGothic"/>
-              </a:defRPr>
-            </a:pPr>
-            <a:r>
-              <a:t>■ 現場導入による提供価値</a:t>
-            </a:r>
-          </a:p>
-          <a:p>
-            <a:pPr>
-              <a:spcAft>
-                <a:spcPts val="1800"/>
-              </a:spcAft>
-              <a:defRPr sz="1800">
-                <a:solidFill>
-                  <a:srgbClr val="141414"/>
-                </a:solidFill>
-                <a:latin typeface="BIZ UDPGothic"/>
-              </a:defRPr>
-            </a:pPr>
-            <a:r>
-              <a:t>• 【属人化の解消】前任者設定の流用からデータ根拠へ移行。</a:t>
-            </a:r>
-          </a:p>
-          <a:p>
-            <a:pPr>
-              <a:spcAft>
-                <a:spcPts val="1800"/>
-              </a:spcAft>
-              <a:defRPr sz="1800">
-                <a:solidFill>
-                  <a:srgbClr val="141414"/>
-                </a:solidFill>
-                <a:latin typeface="BIZ UDPGothic"/>
-              </a:defRPr>
-            </a:pPr>
-            <a:r>
-              <a:t>• 【心理的安全確保】安全マージン明示でクレーム不安を解消。</a:t>
-            </a:r>
-          </a:p>
-          <a:p>
-            <a:pPr>
-              <a:spcAft>
-                <a:spcPts val="1800"/>
-              </a:spcAft>
-              <a:defRPr sz="1800">
-                <a:solidFill>
-                  <a:srgbClr val="141414"/>
-                </a:solidFill>
-                <a:latin typeface="BIZ UDPGothic"/>
-              </a:defRPr>
-            </a:pPr>
-            <a:r>
-              <a:t>• 【簡単操作】1画面完結で毎夕の設定を迷わず完了。</a:t>
-            </a:r>
-          </a:p>
-          <a:p>
-            <a:pPr>
-              <a:spcAft>
-                <a:spcPts val="1800"/>
-              </a:spcAft>
-              <a:defRPr sz="1800">
-                <a:solidFill>
-                  <a:srgbClr val="141414"/>
-                </a:solidFill>
-                <a:latin typeface="BIZ UDPGothic"/>
-              </a:defRPr>
-            </a:pPr>
-            <a:r>
-              <a:t>• 【今後の展開】他フロア・他拠点やBEMS直接連動へ発展可能。</a:t>
-            </a:r>
-          </a:p>
-        </p:txBody>
-      </p:sp>
-      <p:sp>
-        <p:nvSpPr>
-          <p:cNvPr id="12" name="TextBox 11"/>
-          <p:cNvSpPr txBox="1"/>
-          <p:nvPr/>
-        </p:nvSpPr>
-        <p:spPr>
-          <a:xfrm>
-            <a:off x="457200" y="6556248"/>
-            <a:ext cx="11274552" cy="274320"/>
-          </a:xfrm>
-          <a:prstGeom prst="rect">
-            <a:avLst/>
-          </a:prstGeom>
-          <a:noFill/>
-        </p:spPr>
-        <p:txBody>
-          <a:bodyPr wrap="none">
-            <a:spAutoFit/>
-          </a:bodyPr>
-          <a:lstStyle/>
-          <a:p>
-            <a:pPr>
-              <a:defRPr sz="1200">
-                <a:solidFill>
-                  <a:srgbClr val="505050"/>
-                </a:solidFill>
-                <a:latin typeface="BIZ UDPGothic"/>
-              </a:defRPr>
-            </a:pPr>
-            <a:r>
-              <a:t>※ 出所・注記: Streamlit製 BM意思決定支援アプリケーション（app.py）の実装仕様</a:t>
-            </a:r>
-          </a:p>
-        </p:txBody>
-      </p:sp>
+        </p:spPr>
+      </p:pic>
     </p:spTree>
   </p:cSld>
   <p:clrMapOvr>
@@ -8540,18 +7735,16 @@
         <p:spPr>
           <a:xfrm>
             <a:off x="0" y="0"/>
-            <a:ext cx="12191695" cy="1005840"/>
+            <a:ext cx="12191695" cy="530352"/>
           </a:xfrm>
           <a:prstGeom prst="rect">
             <a:avLst/>
           </a:prstGeom>
           <a:solidFill>
-            <a:srgbClr val="092B4C"/>
+            <a:srgbClr val="0B3968"/>
           </a:solidFill>
           <a:ln>
-            <a:solidFill>
-              <a:srgbClr val="092B4C"/>
-            </a:solidFill>
+            <a:noFill/>
           </a:ln>
         </p:spPr>
         <p:style>
@@ -8578,24 +7771,60 @@
       </p:sp>
       <p:sp>
         <p:nvSpPr>
-          <p:cNvPr id="3" name="Rounded Rectangle 2"/>
+          <p:cNvPr id="3" name="TextBox 2"/>
+          <p:cNvSpPr txBox="1"/>
+          <p:nvPr/>
+        </p:nvSpPr>
+        <p:spPr>
+          <a:xfrm>
+            <a:off x="301752" y="73152"/>
+            <a:ext cx="9144000" cy="411480"/>
+          </a:xfrm>
+          <a:prstGeom prst="rect">
+            <a:avLst/>
+          </a:prstGeom>
+          <a:noFill/>
+        </p:spPr>
+        <p:txBody>
+          <a:bodyPr wrap="square">
+            <a:spAutoFit/>
+          </a:bodyPr>
+          <a:lstStyle/>
+          <a:p>
+            <a:pPr>
+              <a:defRPr sz="1800" b="1">
+                <a:solidFill>
+                  <a:srgbClr val="FFFFFF"/>
+                </a:solidFill>
+                <a:latin typeface="BIZ UDPGothic"/>
+              </a:defRPr>
+            </a:pPr>
+            <a:r>
+              <a:t>8. 可視化アプリ</a:t>
+            </a:r>
+          </a:p>
+        </p:txBody>
+      </p:sp>
+      <p:sp>
+        <p:nvSpPr>
+          <p:cNvPr id="4" name="Rounded Rectangle 3"/>
           <p:cNvSpPr/>
           <p:nvPr/>
         </p:nvSpPr>
         <p:spPr>
           <a:xfrm>
-            <a:off x="457200" y="109728"/>
-            <a:ext cx="2377440" cy="329184"/>
+            <a:off x="10789920" y="128016"/>
+            <a:ext cx="484632" cy="274320"/>
           </a:xfrm>
           <a:prstGeom prst="roundRect">
             <a:avLst/>
           </a:prstGeom>
           <a:solidFill>
-            <a:srgbClr val="0B5AA6"/>
+            <a:srgbClr val="24588E"/>
           </a:solidFill>
           <a:ln>
             <a:solidFill>
-              <a:srgbClr val="0B5AA6"/>
+              <a:srgbClr val="5E8DBE"/>
             </a:solidFill>
           </a:ln>
         </p:spPr>
@@ -8614,55 +7843,19 @@
           </a:fontRef>
         </p:style>
         <p:txBody>
-          <a:bodyPr rtlCol="0" anchor="ctr" wrap="square"/>
+          <a:bodyPr rtlCol="0" anchor="ctr"/>
           <a:lstStyle/>
           <a:p>
             <a:pPr algn="ctr">
-              <a:defRPr sz="1400" b="1">
-                <a:solidFill>
-                  <a:srgbClr val="FFFFFF"/>
-                </a:solidFill>
-                <a:latin typeface="BIZ UDPGothic"/>
-              </a:defRPr>
-            </a:pPr>
-            <a:r>
-              <a:t>付録 / Appendix</a:t>
-            </a:r>
-          </a:p>
-        </p:txBody>
-      </p:sp>
-      <p:sp>
-        <p:nvSpPr>
-          <p:cNvPr id="4" name="TextBox 3"/>
-          <p:cNvSpPr txBox="1"/>
-          <p:nvPr/>
-        </p:nvSpPr>
-        <p:spPr>
-          <a:xfrm>
-            <a:off x="457200" y="457200"/>
-            <a:ext cx="10058400" cy="502920"/>
-          </a:xfrm>
-          <a:prstGeom prst="rect">
-            <a:avLst/>
-          </a:prstGeom>
-          <a:noFill/>
-        </p:spPr>
-        <p:txBody>
-          <a:bodyPr wrap="square">
-            <a:spAutoFit/>
-          </a:bodyPr>
-          <a:lstStyle/>
-          <a:p>
-            <a:pPr>
-              <a:defRPr sz="2200" b="1">
-                <a:solidFill>
-                  <a:srgbClr val="FFFFFF"/>
-                </a:solidFill>
-                <a:latin typeface="BIZ UDPGothic"/>
-              </a:defRPr>
-            </a:pPr>
-            <a:r>
-              <a:t>【付録】実習の所感・苦労と工夫・個人目標の振り返り</a:t>
+              <a:defRPr sz="1100" i="1">
+                <a:solidFill>
+                  <a:srgbClr val="E8F1F8"/>
+                </a:solidFill>
+                <a:latin typeface="BIZ UDPGothic"/>
+              </a:defRPr>
+            </a:pPr>
+            <a:r>
+              <a:t>IUO</a:t>
             </a:r>
           </a:p>
         </p:txBody>
@@ -8675,8 +7868,8 @@
         </p:nvSpPr>
         <p:spPr>
           <a:xfrm>
-            <a:off x="10789920" y="457200"/>
-            <a:ext cx="1005840" cy="411480"/>
+            <a:off x="11430000" y="73152"/>
+            <a:ext cx="548640" cy="411480"/>
           </a:xfrm>
           <a:prstGeom prst="rect">
             <a:avLst/>
@@ -8689,40 +7882,100 @@
           </a:bodyPr>
           <a:lstStyle/>
           <a:p>
+            <a:pPr algn="ctr">
+              <a:defRPr sz="1800" b="1">
+                <a:solidFill>
+                  <a:srgbClr val="FFFFFF"/>
+                </a:solidFill>
+                <a:latin typeface="BIZ UDPGothic"/>
+              </a:defRPr>
+            </a:pPr>
+            <a:r>
+              <a:t>9</a:t>
+            </a:r>
+          </a:p>
+        </p:txBody>
+      </p:sp>
+      <p:sp>
+        <p:nvSpPr>
+          <p:cNvPr id="6" name="TextBox 5"/>
+          <p:cNvSpPr txBox="1"/>
+          <p:nvPr/>
+        </p:nvSpPr>
+        <p:spPr>
+          <a:xfrm>
+            <a:off x="9144000" y="6537960"/>
+            <a:ext cx="2743200" cy="228600"/>
+          </a:xfrm>
+          <a:prstGeom prst="rect">
+            <a:avLst/>
+          </a:prstGeom>
+          <a:noFill/>
+        </p:spPr>
+        <p:txBody>
+          <a:bodyPr wrap="none">
+            <a:spAutoFit/>
+          </a:bodyPr>
+          <a:lstStyle/>
+          <a:p>
             <a:pPr algn="r">
-              <a:defRPr sz="1800" b="1">
-                <a:solidFill>
-                  <a:srgbClr val="EBF2F8"/>
-                </a:solidFill>
-                <a:latin typeface="BIZ UDPGothic"/>
-              </a:defRPr>
-            </a:pPr>
-            <a:r>
-              <a:t>Appendix</a:t>
-            </a:r>
-          </a:p>
-        </p:txBody>
-      </p:sp>
-      <p:sp>
-        <p:nvSpPr>
-          <p:cNvPr id="6" name="Rectangle 5"/>
+              <a:defRPr sz="800">
+                <a:solidFill>
+                  <a:srgbClr val="666666"/>
+                </a:solidFill>
+                <a:latin typeface="BIZ UDPGothic"/>
+              </a:defRPr>
+            </a:pPr>
+            <a:r>
+              <a:t>© Panasonic Corporation</a:t>
+            </a:r>
+          </a:p>
+        </p:txBody>
+      </p:sp>
+      <p:pic>
+        <p:nvPicPr>
+          <p:cNvPr id="7" name="Picture 6" descr="deck_slide08_app.png"/>
+          <p:cNvPicPr>
+            <a:picLocks noChangeAspect="1"/>
+          </p:cNvPicPr>
+          <p:nvPr/>
+        </p:nvPicPr>
+        <p:blipFill>
+          <a:blip r:embed="rId2"/>
+          <a:stretch>
+            <a:fillRect/>
+          </a:stretch>
+        </p:blipFill>
+        <p:spPr>
+          <a:xfrm>
+            <a:off x="2103120" y="731520"/>
+            <a:ext cx="7863840" cy="5394960"/>
+          </a:xfrm>
+          <a:prstGeom prst="rect">
+            <a:avLst/>
+          </a:prstGeom>
+        </p:spPr>
+      </p:pic>
+      <p:sp>
+        <p:nvSpPr>
+          <p:cNvPr id="8" name="Rounded Rectangle 7"/>
           <p:cNvSpPr/>
           <p:nvPr/>
         </p:nvSpPr>
         <p:spPr>
           <a:xfrm>
-            <a:off x="0" y="6537960"/>
-            <a:ext cx="12191695" cy="320040"/>
-          </a:xfrm>
-          <a:prstGeom prst="rect">
+            <a:off x="320040" y="1280160"/>
+            <a:ext cx="1554480" cy="502920"/>
+          </a:xfrm>
+          <a:prstGeom prst="roundRect">
             <a:avLst/>
           </a:prstGeom>
           <a:solidFill>
-            <a:srgbClr val="F5F6F8"/>
+            <a:srgbClr val="FFFFFF"/>
           </a:solidFill>
-          <a:ln>
+          <a:ln w="15240">
             <a:solidFill>
-              <a:srgbClr val="D2D7DE"/>
+              <a:srgbClr val="7BA4C7"/>
             </a:solidFill>
           </a:ln>
         </p:spPr>
@@ -8744,20 +7997,30 @@
           <a:bodyPr rtlCol="0" anchor="ctr"/>
           <a:lstStyle/>
           <a:p>
-            <a:pPr algn="ctr"/>
-          </a:p>
-        </p:txBody>
-      </p:sp>
-      <p:sp>
-        <p:nvSpPr>
-          <p:cNvPr id="7" name="Rounded Rectangle 6"/>
+            <a:pPr algn="ctr">
+              <a:defRPr sz="1100">
+                <a:solidFill>
+                  <a:srgbClr val="111111"/>
+                </a:solidFill>
+                <a:latin typeface="BIZ UDPGothic"/>
+              </a:defRPr>
+            </a:pPr>
+            <a:r>
+              <a:t>①冷房・暖房切り替え</a:t>
+            </a:r>
+          </a:p>
+        </p:txBody>
+      </p:sp>
+      <p:sp>
+        <p:nvSpPr>
+          <p:cNvPr id="9" name="Rounded Rectangle 8"/>
           <p:cNvSpPr/>
           <p:nvPr/>
         </p:nvSpPr>
         <p:spPr>
           <a:xfrm>
-            <a:off x="548640" y="1188720"/>
-            <a:ext cx="3566160" cy="5120640"/>
+            <a:off x="320040" y="2103120"/>
+            <a:ext cx="1554480" cy="502920"/>
           </a:xfrm>
           <a:prstGeom prst="roundRect">
             <a:avLst/>
@@ -8765,9 +8028,9 @@
           <a:solidFill>
             <a:srgbClr val="FFFFFF"/>
           </a:solidFill>
-          <a:ln w="19050">
+          <a:ln w="15240">
             <a:solidFill>
-              <a:srgbClr val="092B4C"/>
+              <a:srgbClr val="7BA4C7"/>
             </a:solidFill>
           </a:ln>
         </p:spPr>
@@ -8789,30 +8052,40 @@
           <a:bodyPr rtlCol="0" anchor="ctr"/>
           <a:lstStyle/>
           <a:p>
-            <a:pPr algn="ctr"/>
-          </a:p>
-        </p:txBody>
-      </p:sp>
-      <p:sp>
-        <p:nvSpPr>
-          <p:cNvPr id="8" name="Rectangle 7"/>
+            <a:pPr algn="ctr">
+              <a:defRPr sz="1100">
+                <a:solidFill>
+                  <a:srgbClr val="111111"/>
+                </a:solidFill>
+                <a:latin typeface="BIZ UDPGothic"/>
+              </a:defRPr>
+            </a:pPr>
+            <a:r>
+              <a:t>②予報地点の選択</a:t>
+            </a:r>
+          </a:p>
+        </p:txBody>
+      </p:sp>
+      <p:sp>
+        <p:nvSpPr>
+          <p:cNvPr id="10" name="Rounded Rectangle 9"/>
           <p:cNvSpPr/>
           <p:nvPr/>
         </p:nvSpPr>
         <p:spPr>
           <a:xfrm>
-            <a:off x="548640" y="1188720"/>
-            <a:ext cx="3566160" cy="548640"/>
-          </a:xfrm>
-          <a:prstGeom prst="rect">
+            <a:off x="320040" y="2834640"/>
+            <a:ext cx="1554480" cy="502920"/>
+          </a:xfrm>
+          <a:prstGeom prst="roundRect">
             <a:avLst/>
           </a:prstGeom>
           <a:solidFill>
-            <a:srgbClr val="092B4C"/>
+            <a:srgbClr val="FFFFFF"/>
           </a:solidFill>
-          <a:ln>
+          <a:ln w="15240">
             <a:solidFill>
-              <a:srgbClr val="092B4C"/>
+              <a:srgbClr val="7BA4C7"/>
             </a:solidFill>
           </a:ln>
         </p:spPr>
@@ -8835,84 +8108,29 @@
           <a:lstStyle/>
           <a:p>
             <a:pPr algn="ctr">
-              <a:defRPr sz="1800" b="1">
-                <a:solidFill>
-                  <a:srgbClr val="FFFFFF"/>
-                </a:solidFill>
-                <a:latin typeface="BIZ UDPGothic"/>
-              </a:defRPr>
-            </a:pPr>
-            <a:r>
-              <a:t>実習の所感</a:t>
-            </a:r>
-          </a:p>
-        </p:txBody>
-      </p:sp>
-      <p:sp>
-        <p:nvSpPr>
-          <p:cNvPr id="9" name="TextBox 8"/>
-          <p:cNvSpPr txBox="1"/>
-          <p:nvPr/>
-        </p:nvSpPr>
-        <p:spPr>
-          <a:xfrm>
-            <a:off x="685800" y="1920240"/>
-            <a:ext cx="3291840" cy="4206240"/>
-          </a:xfrm>
-          <a:prstGeom prst="rect">
-            <a:avLst/>
-          </a:prstGeom>
-          <a:noFill/>
-        </p:spPr>
-        <p:txBody>
-          <a:bodyPr wrap="square">
-            <a:spAutoFit/>
-          </a:bodyPr>
-          <a:lstStyle/>
-          <a:p>
-            <a:pPr>
-              <a:spcAft>
-                <a:spcPts val="2000"/>
-              </a:spcAft>
-              <a:defRPr sz="1800">
-                <a:solidFill>
-                  <a:srgbClr val="141414"/>
-                </a:solidFill>
-                <a:latin typeface="BIZ UDPGothic"/>
-              </a:defRPr>
-            </a:pPr>
-            <a:r>
-              <a:t>• 実建物のBEMSデータと設備制御という社会課題解決の難しさと面白さを実感。</a:t>
-            </a:r>
-          </a:p>
-          <a:p>
-            <a:pPr>
-              <a:spcAft>
-                <a:spcPts val="2000"/>
-              </a:spcAft>
-              <a:defRPr sz="1800">
-                <a:solidFill>
-                  <a:srgbClr val="141414"/>
-                </a:solidFill>
-                <a:latin typeface="BIZ UDPGothic"/>
-              </a:defRPr>
-            </a:pPr>
-            <a:r>
-              <a:t>• 『前日夕方に人が決める』『未達厳禁』という現場制約に適合した設計を学んだ。</a:t>
-            </a:r>
-          </a:p>
-        </p:txBody>
-      </p:sp>
-      <p:sp>
-        <p:nvSpPr>
-          <p:cNvPr id="10" name="Rounded Rectangle 9"/>
+              <a:defRPr sz="1100">
+                <a:solidFill>
+                  <a:srgbClr val="111111"/>
+                </a:solidFill>
+                <a:latin typeface="BIZ UDPGothic"/>
+              </a:defRPr>
+            </a:pPr>
+            <a:r>
+              <a:t>③運用日の選択</a:t>
+            </a:r>
+          </a:p>
+        </p:txBody>
+      </p:sp>
+      <p:sp>
+        <p:nvSpPr>
+          <p:cNvPr id="11" name="Rounded Rectangle 10"/>
           <p:cNvSpPr/>
           <p:nvPr/>
         </p:nvSpPr>
         <p:spPr>
           <a:xfrm>
-            <a:off x="4297679" y="1188720"/>
-            <a:ext cx="3566160" cy="5120640"/>
+            <a:off x="320040" y="3657600"/>
+            <a:ext cx="1554480" cy="502920"/>
           </a:xfrm>
           <a:prstGeom prst="roundRect">
             <a:avLst/>
@@ -8920,9 +8138,9 @@
           <a:solidFill>
             <a:srgbClr val="FFFFFF"/>
           </a:solidFill>
-          <a:ln w="19050">
+          <a:ln w="15240">
             <a:solidFill>
-              <a:srgbClr val="0B5AA6"/>
+              <a:srgbClr val="7BA4C7"/>
             </a:solidFill>
           </a:ln>
         </p:spPr>
@@ -8944,30 +8162,40 @@
           <a:bodyPr rtlCol="0" anchor="ctr"/>
           <a:lstStyle/>
           <a:p>
-            <a:pPr algn="ctr"/>
-          </a:p>
-        </p:txBody>
-      </p:sp>
-      <p:sp>
-        <p:nvSpPr>
-          <p:cNvPr id="11" name="Rectangle 10"/>
+            <a:pPr algn="ctr">
+              <a:defRPr sz="1100">
+                <a:solidFill>
+                  <a:srgbClr val="111111"/>
+                </a:solidFill>
+                <a:latin typeface="BIZ UDPGothic"/>
+              </a:defRPr>
+            </a:pPr>
+            <a:r>
+              <a:t>④設定温度の変更</a:t>
+            </a:r>
+          </a:p>
+        </p:txBody>
+      </p:sp>
+      <p:sp>
+        <p:nvSpPr>
+          <p:cNvPr id="12" name="Rounded Rectangle 11"/>
           <p:cNvSpPr/>
           <p:nvPr/>
         </p:nvSpPr>
         <p:spPr>
           <a:xfrm>
-            <a:off x="4297679" y="1188720"/>
-            <a:ext cx="3566160" cy="548640"/>
-          </a:xfrm>
-          <a:prstGeom prst="rect">
+            <a:off x="914400" y="5120640"/>
+            <a:ext cx="2103120" cy="731520"/>
+          </a:xfrm>
+          <a:prstGeom prst="roundRect">
             <a:avLst/>
           </a:prstGeom>
           <a:solidFill>
-            <a:srgbClr val="0B5AA6"/>
+            <a:srgbClr val="FFFFFF"/>
           </a:solidFill>
-          <a:ln>
+          <a:ln w="15240">
             <a:solidFill>
-              <a:srgbClr val="0B5AA6"/>
+              <a:srgbClr val="7BA4C7"/>
             </a:solidFill>
           </a:ln>
         </p:spPr>
@@ -8990,239 +8218,33 @@
           <a:lstStyle/>
           <a:p>
             <a:pPr algn="ctr">
-              <a:defRPr sz="1800" b="1">
-                <a:solidFill>
-                  <a:srgbClr val="FFFFFF"/>
-                </a:solidFill>
-                <a:latin typeface="BIZ UDPGothic"/>
-              </a:defRPr>
-            </a:pPr>
-            <a:r>
-              <a:t>苦労と技術的工夫</a:t>
-            </a:r>
-          </a:p>
-        </p:txBody>
-      </p:sp>
-      <p:sp>
-        <p:nvSpPr>
-          <p:cNvPr id="12" name="TextBox 11"/>
+              <a:defRPr sz="1100">
+                <a:solidFill>
+                  <a:srgbClr val="111111"/>
+                </a:solidFill>
+                <a:latin typeface="BIZ UDPGothic"/>
+              </a:defRPr>
+            </a:pPr>
+            <a:r>
+              <a:t>⑤平日・休み明け</a:t>
+            </a:r>
+            <a:br/>
+            <a:r>
+              <a:t>運用の選択</a:t>
+            </a:r>
+          </a:p>
+        </p:txBody>
+      </p:sp>
+      <p:sp>
+        <p:nvSpPr>
+          <p:cNvPr id="13" name="TextBox 12"/>
           <p:cNvSpPr txBox="1"/>
           <p:nvPr/>
         </p:nvSpPr>
         <p:spPr>
           <a:xfrm>
-            <a:off x="4434839" y="1920240"/>
-            <a:ext cx="3291840" cy="4206240"/>
-          </a:xfrm>
-          <a:prstGeom prst="rect">
-            <a:avLst/>
-          </a:prstGeom>
-          <a:noFill/>
-        </p:spPr>
-        <p:txBody>
-          <a:bodyPr wrap="square">
-            <a:spAutoFit/>
-          </a:bodyPr>
-          <a:lstStyle/>
-          <a:p>
-            <a:pPr>
-              <a:spcAft>
-                <a:spcPts val="2000"/>
-              </a:spcAft>
-              <a:defRPr sz="1800">
-                <a:solidFill>
-                  <a:srgbClr val="141414"/>
-                </a:solidFill>
-                <a:latin typeface="BIZ UDPGothic"/>
-              </a:defRPr>
-            </a:pPr>
-            <a:r>
-              <a:t>• 【苦労】センサーの粗さ（0.5℃刻み）やノイズ、休日明けの蓄熱負荷への対応。</a:t>
-            </a:r>
-          </a:p>
-          <a:p>
-            <a:pPr>
-              <a:spcAft>
-                <a:spcPts val="2000"/>
-              </a:spcAft>
-              <a:defRPr sz="1800">
-                <a:solidFill>
-                  <a:srgbClr val="141414"/>
-                </a:solidFill>
-                <a:latin typeface="BIZ UDPGothic"/>
-              </a:defRPr>
-            </a:pPr>
-            <a:r>
-              <a:t>• 【工夫】蓄熱影響を通常日と分離し温度オフセット（+2.0℃）で統一処理。</a:t>
-            </a:r>
-          </a:p>
-        </p:txBody>
-      </p:sp>
-      <p:sp>
-        <p:nvSpPr>
-          <p:cNvPr id="13" name="Rounded Rectangle 12"/>
-          <p:cNvSpPr/>
-          <p:nvPr/>
-        </p:nvSpPr>
-        <p:spPr>
-          <a:xfrm>
-            <a:off x="8046719" y="1188720"/>
-            <a:ext cx="3566160" cy="5120640"/>
-          </a:xfrm>
-          <a:prstGeom prst="roundRect">
-            <a:avLst/>
-          </a:prstGeom>
-          <a:solidFill>
-            <a:srgbClr val="FFFFFF"/>
-          </a:solidFill>
-          <a:ln w="19050">
-            <a:solidFill>
-              <a:srgbClr val="75B843"/>
-            </a:solidFill>
-          </a:ln>
-        </p:spPr>
-        <p:style>
-          <a:lnRef idx="1">
-            <a:schemeClr val="accent1"/>
-          </a:lnRef>
-          <a:fillRef idx="3">
-            <a:schemeClr val="accent1"/>
-          </a:fillRef>
-          <a:effectRef idx="2">
-            <a:schemeClr val="accent1"/>
-          </a:effectRef>
-          <a:fontRef idx="minor">
-            <a:schemeClr val="lt1"/>
-          </a:fontRef>
-        </p:style>
-        <p:txBody>
-          <a:bodyPr rtlCol="0" anchor="ctr"/>
-          <a:lstStyle/>
-          <a:p>
-            <a:pPr algn="ctr"/>
-          </a:p>
-        </p:txBody>
-      </p:sp>
-      <p:sp>
-        <p:nvSpPr>
-          <p:cNvPr id="14" name="Rectangle 13"/>
-          <p:cNvSpPr/>
-          <p:nvPr/>
-        </p:nvSpPr>
-        <p:spPr>
-          <a:xfrm>
-            <a:off x="8046719" y="1188720"/>
-            <a:ext cx="3566160" cy="548640"/>
-          </a:xfrm>
-          <a:prstGeom prst="rect">
-            <a:avLst/>
-          </a:prstGeom>
-          <a:solidFill>
-            <a:srgbClr val="75B843"/>
-          </a:solidFill>
-          <a:ln>
-            <a:solidFill>
-              <a:srgbClr val="75B843"/>
-            </a:solidFill>
-          </a:ln>
-        </p:spPr>
-        <p:style>
-          <a:lnRef idx="1">
-            <a:schemeClr val="accent1"/>
-          </a:lnRef>
-          <a:fillRef idx="3">
-            <a:schemeClr val="accent1"/>
-          </a:fillRef>
-          <a:effectRef idx="2">
-            <a:schemeClr val="accent1"/>
-          </a:effectRef>
-          <a:fontRef idx="minor">
-            <a:schemeClr val="lt1"/>
-          </a:fontRef>
-        </p:style>
-        <p:txBody>
-          <a:bodyPr rtlCol="0" anchor="ctr"/>
-          <a:lstStyle/>
-          <a:p>
-            <a:pPr algn="ctr">
-              <a:defRPr sz="1800" b="1">
-                <a:solidFill>
-                  <a:srgbClr val="FFFFFF"/>
-                </a:solidFill>
-                <a:latin typeface="BIZ UDPGothic"/>
-              </a:defRPr>
-            </a:pPr>
-            <a:r>
-              <a:t>個人目標の学び</a:t>
-            </a:r>
-          </a:p>
-        </p:txBody>
-      </p:sp>
-      <p:sp>
-        <p:nvSpPr>
-          <p:cNvPr id="15" name="TextBox 14"/>
-          <p:cNvSpPr txBox="1"/>
-          <p:nvPr/>
-        </p:nvSpPr>
-        <p:spPr>
-          <a:xfrm>
-            <a:off x="8183879" y="1920240"/>
-            <a:ext cx="3291840" cy="4206240"/>
-          </a:xfrm>
-          <a:prstGeom prst="rect">
-            <a:avLst/>
-          </a:prstGeom>
-          <a:noFill/>
-        </p:spPr>
-        <p:txBody>
-          <a:bodyPr wrap="square">
-            <a:spAutoFit/>
-          </a:bodyPr>
-          <a:lstStyle/>
-          <a:p>
-            <a:pPr>
-              <a:spcAft>
-                <a:spcPts val="2000"/>
-              </a:spcAft>
-              <a:defRPr sz="1800">
-                <a:solidFill>
-                  <a:srgbClr val="141414"/>
-                </a:solidFill>
-                <a:latin typeface="BIZ UDPGothic"/>
-              </a:defRPr>
-            </a:pPr>
-            <a:r>
-              <a:t>• 【初日目標】データ分析からシステム実装・現場UIまで一気通貫でやり切る。</a:t>
-            </a:r>
-          </a:p>
-          <a:p>
-            <a:pPr>
-              <a:spcAft>
-                <a:spcPts val="2000"/>
-              </a:spcAft>
-              <a:defRPr sz="1800">
-                <a:solidFill>
-                  <a:srgbClr val="141414"/>
-                </a:solidFill>
-                <a:latin typeface="BIZ UDPGothic"/>
-              </a:defRPr>
-            </a:pPr>
-            <a:r>
-              <a:t>• 【達成状況】現状分析 → 推計モデル → 効果検証 → アプリ開発まで完遂。</a:t>
-            </a:r>
-          </a:p>
-        </p:txBody>
-      </p:sp>
-      <p:sp>
-        <p:nvSpPr>
-          <p:cNvPr id="16" name="TextBox 15"/>
-          <p:cNvSpPr txBox="1"/>
-          <p:nvPr/>
-        </p:nvSpPr>
-        <p:spPr>
-          <a:xfrm>
-            <a:off x="457200" y="6556248"/>
-            <a:ext cx="11274552" cy="274320"/>
+            <a:off x="10058400" y="2560320"/>
+            <a:ext cx="2011680" cy="3200400"/>
           </a:xfrm>
           <a:prstGeom prst="rect">
             <a:avLst/>
@@ -9236,15 +8258,58 @@
           <a:lstStyle/>
           <a:p>
             <a:pPr>
-              <a:defRPr sz="1200">
-                <a:solidFill>
-                  <a:srgbClr val="505050"/>
-                </a:solidFill>
-                <a:latin typeface="BIZ UDPGothic"/>
-              </a:defRPr>
-            </a:pPr>
-            <a:r>
-              <a:t>※ 出所・注記: 研究開発実習 総合振り返り</a:t>
+              <a:spcBef>
+                <a:spcPts val="0"/>
+              </a:spcBef>
+              <a:defRPr sz="1250" b="1">
+                <a:solidFill>
+                  <a:srgbClr val="111111"/>
+                </a:solidFill>
+                <a:latin typeface="BIZ UDPGothic"/>
+              </a:defRPr>
+            </a:pPr>
+            <a:r>
+              <a:t>外気温度の推移</a:t>
+            </a:r>
+          </a:p>
+          <a:p>
+            <a:pPr>
+              <a:spcBef>
+                <a:spcPts val="3000"/>
+              </a:spcBef>
+              <a:defRPr sz="1250" b="1">
+                <a:solidFill>
+                  <a:srgbClr val="111111"/>
+                </a:solidFill>
+                <a:latin typeface="BIZ UDPGothic"/>
+              </a:defRPr>
+            </a:pPr>
+            <a:r>
+              <a:t>トレードオフの</a:t>
+            </a:r>
+            <a:br/>
+            <a:r>
+              <a:t>可視化</a:t>
+            </a:r>
+          </a:p>
+          <a:p>
+            <a:pPr>
+              <a:spcBef>
+                <a:spcPts val="4000"/>
+              </a:spcBef>
+              <a:defRPr sz="1150" b="1">
+                <a:solidFill>
+                  <a:srgbClr val="0B3968"/>
+                </a:solidFill>
+                <a:latin typeface="BIZ UDPGothic"/>
+              </a:defRPr>
+            </a:pPr>
+            <a:r>
+              <a:t>緑: 始業前消費電力</a:t>
+            </a:r>
+            <a:br/>
+            <a:r>
+              <a:t>青、赤: 設定温度到達時刻</a:t>
             </a:r>
           </a:p>
         </p:txBody>

--- a/public/slides/hvac-precooling-slides.pptx
+++ b/public/slides/hvac-precooling-slides.pptx
@@ -3107,7 +3107,7 @@
         <p:spPr>
           <a:xfrm>
             <a:off x="0" y="0"/>
-            <a:ext cx="1901952" cy="6858000"/>
+            <a:ext cx="2011680" cy="6858000"/>
           </a:xfrm>
           <a:prstGeom prst="rect">
             <a:avLst/>
@@ -3149,8 +3149,8 @@
         </p:nvSpPr>
         <p:spPr>
           <a:xfrm>
-            <a:off x="320040" y="1645920"/>
-            <a:ext cx="1371600" cy="1097280"/>
+            <a:off x="365760" y="1645920"/>
+            <a:ext cx="1463040" cy="1371600"/>
           </a:xfrm>
           <a:prstGeom prst="rect">
             <a:avLst/>
@@ -3164,7 +3164,7 @@
           <a:lstStyle/>
           <a:p>
             <a:pPr>
-              <a:defRPr sz="1400" b="1">
+              <a:defRPr sz="1600" b="1">
                 <a:solidFill>
                   <a:srgbClr val="FFFFFF"/>
                 </a:solidFill>
@@ -3193,8 +3193,8 @@
         </p:nvSpPr>
         <p:spPr>
           <a:xfrm>
-            <a:off x="320040" y="6035040"/>
-            <a:ext cx="1371600" cy="457200"/>
+            <a:off x="365760" y="5943600"/>
+            <a:ext cx="1463040" cy="548640"/>
           </a:xfrm>
           <a:prstGeom prst="rect">
             <a:avLst/>
@@ -3208,7 +3208,7 @@
           <a:lstStyle/>
           <a:p>
             <a:pPr>
-              <a:defRPr sz="1800" b="1">
+              <a:defRPr sz="2200" b="1">
                 <a:solidFill>
                   <a:srgbClr val="FFFFFF"/>
                 </a:solidFill>
@@ -3229,8 +3229,8 @@
         </p:nvSpPr>
         <p:spPr>
           <a:xfrm>
-            <a:off x="2560320" y="2011680"/>
-            <a:ext cx="8686800" cy="1645920"/>
+            <a:off x="2651760" y="1920240"/>
+            <a:ext cx="8686800" cy="1828800"/>
           </a:xfrm>
           <a:prstGeom prst="rect">
             <a:avLst/>
@@ -3244,7 +3244,7 @@
           <a:lstStyle/>
           <a:p>
             <a:pPr>
-              <a:defRPr sz="2500" b="1">
+              <a:defRPr sz="2800" b="1">
                 <a:solidFill>
                   <a:srgbClr val="111111"/>
                 </a:solidFill>
@@ -3258,9 +3258,9 @@
           <a:p>
             <a:pPr>
               <a:spcBef>
-                <a:spcPts val="2000"/>
+                <a:spcPts val="2200"/>
               </a:spcBef>
-              <a:defRPr sz="2200" b="1">
+              <a:defRPr sz="2400" b="1">
                 <a:solidFill>
                   <a:srgbClr val="111111"/>
                 </a:solidFill>
@@ -3281,8 +3281,8 @@
         </p:nvSpPr>
         <p:spPr>
           <a:xfrm>
-            <a:off x="5486400" y="3474720"/>
-            <a:ext cx="4572000" cy="2560320"/>
+            <a:off x="5486400" y="3383280"/>
+            <a:ext cx="4754880" cy="2743200"/>
           </a:xfrm>
           <a:prstGeom prst="rect">
             <a:avLst/>
@@ -3299,9 +3299,9 @@
               <a:spcBef>
                 <a:spcPts val="0"/>
               </a:spcBef>
-              <a:defRPr sz="1200" b="0">
-                <a:solidFill>
-                  <a:srgbClr val="333333"/>
+              <a:defRPr sz="1500" b="1">
+                <a:solidFill>
+                  <a:srgbClr val="222222"/>
                 </a:solidFill>
                 <a:latin typeface="BIZ UDPGothic"/>
               </a:defRPr>
@@ -3315,9 +3315,9 @@
               <a:spcBef>
                 <a:spcPts val="200"/>
               </a:spcBef>
-              <a:defRPr sz="1200" b="0">
-                <a:solidFill>
-                  <a:srgbClr val="333333"/>
+              <a:defRPr sz="1500" b="1">
+                <a:solidFill>
+                  <a:srgbClr val="222222"/>
                 </a:solidFill>
                 <a:latin typeface="BIZ UDPGothic"/>
               </a:defRPr>
@@ -3329,11 +3329,11 @@
           <a:p>
             <a:pPr algn="r">
               <a:spcBef>
-                <a:spcPts val="1600"/>
+                <a:spcPts val="1800"/>
               </a:spcBef>
-              <a:defRPr sz="1300" b="0">
-                <a:solidFill>
-                  <a:srgbClr val="333333"/>
+              <a:defRPr sz="1500" b="0">
+                <a:solidFill>
+                  <a:srgbClr val="222222"/>
                 </a:solidFill>
                 <a:latin typeface="BIZ UDPGothic"/>
               </a:defRPr>
@@ -3347,9 +3347,9 @@
               <a:spcBef>
                 <a:spcPts val="600"/>
               </a:spcBef>
-              <a:defRPr sz="1300" b="0">
-                <a:solidFill>
-                  <a:srgbClr val="333333"/>
+              <a:defRPr sz="1500" b="0">
+                <a:solidFill>
+                  <a:srgbClr val="222222"/>
                 </a:solidFill>
                 <a:latin typeface="BIZ UDPGothic"/>
               </a:defRPr>
@@ -3363,9 +3363,9 @@
               <a:spcBef>
                 <a:spcPts val="200"/>
               </a:spcBef>
-              <a:defRPr sz="1300" b="0">
-                <a:solidFill>
-                  <a:srgbClr val="333333"/>
+              <a:defRPr sz="1500" b="0">
+                <a:solidFill>
+                  <a:srgbClr val="222222"/>
                 </a:solidFill>
                 <a:latin typeface="BIZ UDPGothic"/>
               </a:defRPr>
@@ -3377,11 +3377,11 @@
           <a:p>
             <a:pPr algn="r">
               <a:spcBef>
-                <a:spcPts val="600"/>
+                <a:spcPts val="800"/>
               </a:spcBef>
-              <a:defRPr sz="1600" b="1">
-                <a:solidFill>
-                  <a:srgbClr val="333333"/>
+              <a:defRPr sz="2000" b="1">
+                <a:solidFill>
+                  <a:srgbClr val="222222"/>
                 </a:solidFill>
                 <a:latin typeface="BIZ UDPGothic"/>
               </a:defRPr>
@@ -3419,7 +3419,7 @@
         <p:spPr>
           <a:xfrm>
             <a:off x="0" y="0"/>
-            <a:ext cx="12191695" cy="530352"/>
+            <a:ext cx="12191695" cy="585216"/>
           </a:xfrm>
           <a:prstGeom prst="rect">
             <a:avLst/>
@@ -3462,7 +3462,7 @@
         <p:spPr>
           <a:xfrm>
             <a:off x="301752" y="73152"/>
-            <a:ext cx="9144000" cy="411480"/>
+            <a:ext cx="9144000" cy="457200"/>
           </a:xfrm>
           <a:prstGeom prst="rect">
             <a:avLst/>
@@ -3476,7 +3476,7 @@
           <a:lstStyle/>
           <a:p>
             <a:pPr>
-              <a:defRPr sz="1800" b="1">
+              <a:defRPr sz="2000" b="1">
                 <a:solidFill>
                   <a:srgbClr val="FFFFFF"/>
                 </a:solidFill>
@@ -3497,8 +3497,8 @@
         </p:nvSpPr>
         <p:spPr>
           <a:xfrm>
-            <a:off x="10789920" y="128016"/>
-            <a:ext cx="484632" cy="274320"/>
+            <a:off x="10698480" y="137160"/>
+            <a:ext cx="530352" cy="301752"/>
           </a:xfrm>
           <a:prstGeom prst="roundRect">
             <a:avLst/>
@@ -3531,7 +3531,7 @@
           <a:lstStyle/>
           <a:p>
             <a:pPr algn="ctr">
-              <a:defRPr sz="1100" i="1">
+              <a:defRPr sz="1200" i="1" b="1">
                 <a:solidFill>
                   <a:srgbClr val="E8F1F8"/>
                 </a:solidFill>
@@ -3553,7 +3553,7 @@
         <p:spPr>
           <a:xfrm>
             <a:off x="11430000" y="73152"/>
-            <a:ext cx="548640" cy="411480"/>
+            <a:ext cx="548640" cy="457200"/>
           </a:xfrm>
           <a:prstGeom prst="rect">
             <a:avLst/>
@@ -3567,7 +3567,7 @@
           <a:lstStyle/>
           <a:p>
             <a:pPr algn="ctr">
-              <a:defRPr sz="1800" b="1">
+              <a:defRPr sz="2000" b="1">
                 <a:solidFill>
                   <a:srgbClr val="FFFFFF"/>
                 </a:solidFill>
@@ -3603,7 +3603,7 @@
           <a:lstStyle/>
           <a:p>
             <a:pPr algn="r">
-              <a:defRPr sz="800">
+              <a:defRPr sz="900">
                 <a:solidFill>
                   <a:srgbClr val="666666"/>
                 </a:solidFill>
@@ -3624,8 +3624,8 @@
         </p:nvSpPr>
         <p:spPr>
           <a:xfrm>
-            <a:off x="822960" y="914400"/>
-            <a:ext cx="10515600" cy="5029200"/>
+            <a:off x="731520" y="914400"/>
+            <a:ext cx="10698480" cy="5120640"/>
           </a:xfrm>
           <a:prstGeom prst="rect">
             <a:avLst/>
@@ -3642,7 +3642,7 @@
               <a:spcBef>
                 <a:spcPts val="0"/>
               </a:spcBef>
-              <a:defRPr sz="1400" b="1">
+              <a:defRPr sz="2000" b="1">
                 <a:solidFill>
                   <a:srgbClr val="111111"/>
                 </a:solidFill>
@@ -3656,9 +3656,9 @@
           <a:p>
             <a:pPr>
               <a:spcBef>
-                <a:spcPts val="600"/>
+                <a:spcPts val="800"/>
               </a:spcBef>
-              <a:defRPr sz="1300" b="1">
+              <a:defRPr sz="1800" b="1">
                 <a:solidFill>
                   <a:srgbClr val="111111"/>
                 </a:solidFill>
@@ -3672,11 +3672,11 @@
           <a:p>
             <a:pPr>
               <a:spcBef>
-                <a:spcPts val="200"/>
+                <a:spcPts val="400"/>
               </a:spcBef>
-              <a:defRPr sz="1250" b="0">
-                <a:solidFill>
-                  <a:srgbClr val="333333"/>
+              <a:defRPr sz="1700" b="0">
+                <a:solidFill>
+                  <a:srgbClr val="222222"/>
                 </a:solidFill>
                 <a:latin typeface="BIZ UDPGothic"/>
               </a:defRPr>
@@ -3688,9 +3688,9 @@
           <a:p>
             <a:pPr>
               <a:spcBef>
-                <a:spcPts val="1000"/>
+                <a:spcPts val="1400"/>
               </a:spcBef>
-              <a:defRPr sz="1300" b="1">
+              <a:defRPr sz="1800" b="1">
                 <a:solidFill>
                   <a:srgbClr val="111111"/>
                 </a:solidFill>
@@ -3704,11 +3704,11 @@
           <a:p>
             <a:pPr>
               <a:spcBef>
-                <a:spcPts val="200"/>
+                <a:spcPts val="400"/>
               </a:spcBef>
-              <a:defRPr sz="1250" b="0">
-                <a:solidFill>
-                  <a:srgbClr val="333333"/>
+              <a:defRPr sz="1700" b="0">
+                <a:solidFill>
+                  <a:srgbClr val="222222"/>
                 </a:solidFill>
                 <a:latin typeface="BIZ UDPGothic"/>
               </a:defRPr>
@@ -3720,9 +3720,9 @@
           <a:p>
             <a:pPr>
               <a:spcBef>
-                <a:spcPts val="2000"/>
+                <a:spcPts val="2600"/>
               </a:spcBef>
-              <a:defRPr sz="1400" b="1">
+              <a:defRPr sz="2000" b="1">
                 <a:solidFill>
                   <a:srgbClr val="111111"/>
                 </a:solidFill>
@@ -3736,9 +3736,9 @@
           <a:p>
             <a:pPr>
               <a:spcBef>
-                <a:spcPts val="600"/>
+                <a:spcPts val="800"/>
               </a:spcBef>
-              <a:defRPr sz="1300" b="1">
+              <a:defRPr sz="1800" b="1">
                 <a:solidFill>
                   <a:srgbClr val="111111"/>
                 </a:solidFill>
@@ -3752,9 +3752,9 @@
           <a:p>
             <a:pPr>
               <a:spcBef>
-                <a:spcPts val="600"/>
+                <a:spcPts val="800"/>
               </a:spcBef>
-              <a:defRPr sz="1300" b="1">
+              <a:defRPr sz="1800" b="1">
                 <a:solidFill>
                   <a:srgbClr val="111111"/>
                 </a:solidFill>
@@ -3768,9 +3768,9 @@
           <a:p>
             <a:pPr>
               <a:spcBef>
-                <a:spcPts val="600"/>
+                <a:spcPts val="800"/>
               </a:spcBef>
-              <a:defRPr sz="1300" b="1">
+              <a:defRPr sz="1800" b="1">
                 <a:solidFill>
                   <a:srgbClr val="111111"/>
                 </a:solidFill>
@@ -3784,9 +3784,9 @@
           <a:p>
             <a:pPr>
               <a:spcBef>
-                <a:spcPts val="600"/>
+                <a:spcPts val="800"/>
               </a:spcBef>
-              <a:defRPr sz="1300" b="1">
+              <a:defRPr sz="1800" b="1">
                 <a:solidFill>
                   <a:srgbClr val="111111"/>
                 </a:solidFill>
@@ -3794,7 +3794,7 @@
               </a:defRPr>
             </a:pPr>
             <a:r>
-              <a:t>4. データ読み取り→モデル再学習</a:t>
+              <a:t>4. データ読み取り → モデル再学習</a:t>
             </a:r>
           </a:p>
         </p:txBody>
@@ -3826,7 +3826,7 @@
         <p:spPr>
           <a:xfrm>
             <a:off x="0" y="0"/>
-            <a:ext cx="12191695" cy="530352"/>
+            <a:ext cx="12191695" cy="585216"/>
           </a:xfrm>
           <a:prstGeom prst="rect">
             <a:avLst/>
@@ -3869,7 +3869,7 @@
         <p:spPr>
           <a:xfrm>
             <a:off x="301752" y="73152"/>
-            <a:ext cx="9144000" cy="411480"/>
+            <a:ext cx="9144000" cy="457200"/>
           </a:xfrm>
           <a:prstGeom prst="rect">
             <a:avLst/>
@@ -3883,7 +3883,7 @@
           <a:lstStyle/>
           <a:p>
             <a:pPr>
-              <a:defRPr sz="1800" b="1">
+              <a:defRPr sz="2000" b="1">
                 <a:solidFill>
                   <a:srgbClr val="FFFFFF"/>
                 </a:solidFill>
@@ -3904,8 +3904,8 @@
         </p:nvSpPr>
         <p:spPr>
           <a:xfrm>
-            <a:off x="10789920" y="128016"/>
-            <a:ext cx="484632" cy="274320"/>
+            <a:off x="10698480" y="137160"/>
+            <a:ext cx="530352" cy="301752"/>
           </a:xfrm>
           <a:prstGeom prst="roundRect">
             <a:avLst/>
@@ -3938,7 +3938,7 @@
           <a:lstStyle/>
           <a:p>
             <a:pPr algn="ctr">
-              <a:defRPr sz="1100" i="1">
+              <a:defRPr sz="1200" i="1" b="1">
                 <a:solidFill>
                   <a:srgbClr val="E8F1F8"/>
                 </a:solidFill>
@@ -3960,7 +3960,7 @@
         <p:spPr>
           <a:xfrm>
             <a:off x="11430000" y="73152"/>
-            <a:ext cx="548640" cy="411480"/>
+            <a:ext cx="548640" cy="457200"/>
           </a:xfrm>
           <a:prstGeom prst="rect">
             <a:avLst/>
@@ -3974,7 +3974,7 @@
           <a:lstStyle/>
           <a:p>
             <a:pPr algn="ctr">
-              <a:defRPr sz="1800" b="1">
+              <a:defRPr sz="2000" b="1">
                 <a:solidFill>
                   <a:srgbClr val="FFFFFF"/>
                 </a:solidFill>
@@ -4010,7 +4010,7 @@
           <a:lstStyle/>
           <a:p>
             <a:pPr algn="r">
-              <a:defRPr sz="800">
+              <a:defRPr sz="900">
                 <a:solidFill>
                   <a:srgbClr val="666666"/>
                 </a:solidFill>
@@ -4031,8 +4031,8 @@
         </p:nvSpPr>
         <p:spPr>
           <a:xfrm>
-            <a:off x="822960" y="1097280"/>
-            <a:ext cx="10515600" cy="4572000"/>
+            <a:off x="731520" y="1097280"/>
+            <a:ext cx="10698480" cy="4754880"/>
           </a:xfrm>
           <a:prstGeom prst="rect">
             <a:avLst/>
@@ -4049,7 +4049,7 @@
               <a:spcBef>
                 <a:spcPts val="0"/>
               </a:spcBef>
-              <a:defRPr sz="1400" b="1">
+              <a:defRPr sz="2000" b="1">
                 <a:solidFill>
                   <a:srgbClr val="111111"/>
                 </a:solidFill>
@@ -4063,25 +4063,29 @@
           <a:p>
             <a:pPr>
               <a:spcBef>
-                <a:spcPts val="600"/>
+                <a:spcPts val="800"/>
               </a:spcBef>
-              <a:defRPr sz="1300" b="0">
-                <a:solidFill>
-                  <a:srgbClr val="333333"/>
-                </a:solidFill>
-                <a:latin typeface="BIZ UDPGothic"/>
-              </a:defRPr>
-            </a:pPr>
-            <a:r>
-              <a:t>・お客様目線でのアプリケーション開発は相手の要望を想像しながらしなければいけない部分もあり、難しかった。</a:t>
+              <a:defRPr sz="1750" b="0">
+                <a:solidFill>
+                  <a:srgbClr val="222222"/>
+                </a:solidFill>
+                <a:latin typeface="BIZ UDPGothic"/>
+              </a:defRPr>
+            </a:pPr>
+            <a:r>
+              <a:t>・お客様目線でのアプリケーション開発は相手の要望を想像しながらしなければいけない部分もあり、</a:t>
+            </a:r>
+            <a:br/>
+            <a:r>
+              <a:t>  難しかった。</a:t>
             </a:r>
           </a:p>
           <a:p>
             <a:pPr>
               <a:spcBef>
-                <a:spcPts val="2400"/>
+                <a:spcPts val="3000"/>
               </a:spcBef>
-              <a:defRPr sz="1400" b="1">
+              <a:defRPr sz="2000" b="1">
                 <a:solidFill>
                   <a:srgbClr val="111111"/>
                 </a:solidFill>
@@ -4095,11 +4099,11 @@
           <a:p>
             <a:pPr>
               <a:spcBef>
-                <a:spcPts val="600"/>
+                <a:spcPts val="800"/>
               </a:spcBef>
-              <a:defRPr sz="1300" b="0">
-                <a:solidFill>
-                  <a:srgbClr val="333333"/>
+              <a:defRPr sz="1750" b="0">
+                <a:solidFill>
+                  <a:srgbClr val="222222"/>
                 </a:solidFill>
                 <a:latin typeface="BIZ UDPGothic"/>
               </a:defRPr>
@@ -4141,7 +4145,7 @@
         <p:spPr>
           <a:xfrm>
             <a:off x="0" y="0"/>
-            <a:ext cx="12191695" cy="530352"/>
+            <a:ext cx="12191695" cy="585216"/>
           </a:xfrm>
           <a:prstGeom prst="rect">
             <a:avLst/>
@@ -4184,7 +4188,7 @@
         <p:spPr>
           <a:xfrm>
             <a:off x="301752" y="73152"/>
-            <a:ext cx="9144000" cy="411480"/>
+            <a:ext cx="9144000" cy="457200"/>
           </a:xfrm>
           <a:prstGeom prst="rect">
             <a:avLst/>
@@ -4198,7 +4202,7 @@
           <a:lstStyle/>
           <a:p>
             <a:pPr>
-              <a:defRPr sz="1800" b="1">
+              <a:defRPr sz="2000" b="1">
                 <a:solidFill>
                   <a:srgbClr val="FFFFFF"/>
                 </a:solidFill>
@@ -4219,8 +4223,8 @@
         </p:nvSpPr>
         <p:spPr>
           <a:xfrm>
-            <a:off x="10789920" y="128016"/>
-            <a:ext cx="484632" cy="274320"/>
+            <a:off x="10698480" y="137160"/>
+            <a:ext cx="530352" cy="301752"/>
           </a:xfrm>
           <a:prstGeom prst="roundRect">
             <a:avLst/>
@@ -4253,7 +4257,7 @@
           <a:lstStyle/>
           <a:p>
             <a:pPr algn="ctr">
-              <a:defRPr sz="1100" i="1">
+              <a:defRPr sz="1200" i="1" b="1">
                 <a:solidFill>
                   <a:srgbClr val="E8F1F8"/>
                 </a:solidFill>
@@ -4275,7 +4279,7 @@
         <p:spPr>
           <a:xfrm>
             <a:off x="11430000" y="73152"/>
-            <a:ext cx="548640" cy="411480"/>
+            <a:ext cx="548640" cy="457200"/>
           </a:xfrm>
           <a:prstGeom prst="rect">
             <a:avLst/>
@@ -4289,7 +4293,7 @@
           <a:lstStyle/>
           <a:p>
             <a:pPr algn="ctr">
-              <a:defRPr sz="1800" b="1">
+              <a:defRPr sz="2000" b="1">
                 <a:solidFill>
                   <a:srgbClr val="FFFFFF"/>
                 </a:solidFill>
@@ -4325,7 +4329,7 @@
           <a:lstStyle/>
           <a:p>
             <a:pPr algn="r">
-              <a:defRPr sz="800">
+              <a:defRPr sz="900">
                 <a:solidFill>
                   <a:srgbClr val="666666"/>
                 </a:solidFill>
@@ -4354,8 +4358,8 @@
         </p:blipFill>
         <p:spPr>
           <a:xfrm>
-            <a:off x="1005840" y="1143000"/>
-            <a:ext cx="2286000" cy="2926080"/>
+            <a:off x="914400" y="1097280"/>
+            <a:ext cx="2377440" cy="3017520"/>
           </a:xfrm>
           <a:prstGeom prst="rect">
             <a:avLst/>
@@ -4378,8 +4382,8 @@
         </p:blipFill>
         <p:spPr>
           <a:xfrm>
-            <a:off x="2926080" y="3291840"/>
-            <a:ext cx="1828800" cy="1371600"/>
+            <a:off x="2926080" y="3383280"/>
+            <a:ext cx="1920240" cy="1463040"/>
           </a:xfrm>
           <a:prstGeom prst="rect">
             <a:avLst/>
@@ -4394,8 +4398,8 @@
         </p:nvSpPr>
         <p:spPr>
           <a:xfrm>
-            <a:off x="5486400" y="1280160"/>
-            <a:ext cx="6217920" cy="4754880"/>
+            <a:off x="5394960" y="1188720"/>
+            <a:ext cx="6400800" cy="5029200"/>
           </a:xfrm>
           <a:prstGeom prst="rect">
             <a:avLst/>
@@ -4412,7 +4416,7 @@
               <a:spcBef>
                 <a:spcPts val="0"/>
               </a:spcBef>
-              <a:defRPr sz="1400" b="1">
+              <a:defRPr sz="2000" b="1">
                 <a:solidFill>
                   <a:srgbClr val="111111"/>
                 </a:solidFill>
@@ -4421,6 +4425,22 @@
             </a:pPr>
             <a:r>
               <a:t>■ インターンシップに参加した理由：</a:t>
+            </a:r>
+          </a:p>
+          <a:p>
+            <a:pPr>
+              <a:spcBef>
+                <a:spcPts val="800"/>
+              </a:spcBef>
+              <a:defRPr sz="1800" b="0">
+                <a:solidFill>
+                  <a:srgbClr val="222222"/>
+                </a:solidFill>
+                <a:latin typeface="BIZ UDPGothic"/>
+              </a:defRPr>
+            </a:pPr>
+            <a:r>
+              <a:t>①大学では扱えない実データに触れる</a:t>
             </a:r>
           </a:p>
           <a:p>
@@ -4428,63 +4448,15 @@
               <a:spcBef>
                 <a:spcPts val="600"/>
               </a:spcBef>
-              <a:defRPr sz="1300" b="0">
-                <a:solidFill>
-                  <a:srgbClr val="333333"/>
-                </a:solidFill>
-                <a:latin typeface="BIZ UDPGothic"/>
-              </a:defRPr>
-            </a:pPr>
-            <a:r>
-              <a:t>①大学では扱えない実データに触れる</a:t>
-            </a:r>
-          </a:p>
-          <a:p>
-            <a:pPr>
-              <a:spcBef>
-                <a:spcPts val="400"/>
-              </a:spcBef>
-              <a:defRPr sz="1300" b="0">
-                <a:solidFill>
-                  <a:srgbClr val="333333"/>
+              <a:defRPr sz="1800" b="0">
+                <a:solidFill>
+                  <a:srgbClr val="222222"/>
                 </a:solidFill>
                 <a:latin typeface="BIZ UDPGothic"/>
               </a:defRPr>
             </a:pPr>
             <a:r>
               <a:t>②お客様目線での開発</a:t>
-            </a:r>
-          </a:p>
-          <a:p>
-            <a:pPr>
-              <a:spcBef>
-                <a:spcPts val="400"/>
-              </a:spcBef>
-              <a:defRPr sz="1300" b="0">
-                <a:solidFill>
-                  <a:srgbClr val="333333"/>
-                </a:solidFill>
-                <a:latin typeface="BIZ UDPGothic"/>
-              </a:defRPr>
-            </a:pPr>
-            <a:r>
-              <a:t>③関西の雰囲気を知る</a:t>
-            </a:r>
-          </a:p>
-          <a:p>
-            <a:pPr>
-              <a:spcBef>
-                <a:spcPts val="2200"/>
-              </a:spcBef>
-              <a:defRPr sz="1400" b="1">
-                <a:solidFill>
-                  <a:srgbClr val="111111"/>
-                </a:solidFill>
-                <a:latin typeface="BIZ UDPGothic"/>
-              </a:defRPr>
-            </a:pPr>
-            <a:r>
-              <a:t>■ 大学での研究：</a:t>
             </a:r>
           </a:p>
           <a:p>
@@ -4492,47 +4464,47 @@
               <a:spcBef>
                 <a:spcPts val="600"/>
               </a:spcBef>
-              <a:defRPr sz="1300" b="0">
-                <a:solidFill>
-                  <a:srgbClr val="333333"/>
-                </a:solidFill>
-                <a:latin typeface="BIZ UDPGothic"/>
-              </a:defRPr>
-            </a:pPr>
-            <a:r>
-              <a:t>遺伝子ネットワークモデルの制御</a:t>
+              <a:defRPr sz="1800" b="0">
+                <a:solidFill>
+                  <a:srgbClr val="222222"/>
+                </a:solidFill>
+                <a:latin typeface="BIZ UDPGothic"/>
+              </a:defRPr>
+            </a:pPr>
+            <a:r>
+              <a:t>③関西の雰囲気を知る</a:t>
             </a:r>
           </a:p>
           <a:p>
             <a:pPr>
               <a:spcBef>
-                <a:spcPts val="400"/>
+                <a:spcPts val="2600"/>
               </a:spcBef>
-              <a:defRPr sz="1300" b="0">
-                <a:solidFill>
-                  <a:srgbClr val="333333"/>
-                </a:solidFill>
-                <a:latin typeface="BIZ UDPGothic"/>
-              </a:defRPr>
-            </a:pPr>
-            <a:r>
-              <a:t>病気を治すための投薬順序の最適化</a:t>
+              <a:defRPr sz="2000" b="1">
+                <a:solidFill>
+                  <a:srgbClr val="111111"/>
+                </a:solidFill>
+                <a:latin typeface="BIZ UDPGothic"/>
+              </a:defRPr>
+            </a:pPr>
+            <a:r>
+              <a:t>■ 大学での研究：</a:t>
             </a:r>
           </a:p>
           <a:p>
             <a:pPr>
               <a:spcBef>
-                <a:spcPts val="2200"/>
+                <a:spcPts val="800"/>
               </a:spcBef>
-              <a:defRPr sz="1400" b="1">
-                <a:solidFill>
-                  <a:srgbClr val="111111"/>
-                </a:solidFill>
-                <a:latin typeface="BIZ UDPGothic"/>
-              </a:defRPr>
-            </a:pPr>
-            <a:r>
-              <a:t>■ 趣味：</a:t>
+              <a:defRPr sz="1800" b="0">
+                <a:solidFill>
+                  <a:srgbClr val="222222"/>
+                </a:solidFill>
+                <a:latin typeface="BIZ UDPGothic"/>
+              </a:defRPr>
+            </a:pPr>
+            <a:r>
+              <a:t>遺伝子ネットワークモデルの制御</a:t>
             </a:r>
           </a:p>
           <a:p>
@@ -4540,9 +4512,41 @@
               <a:spcBef>
                 <a:spcPts val="600"/>
               </a:spcBef>
-              <a:defRPr sz="1300" b="0">
-                <a:solidFill>
-                  <a:srgbClr val="333333"/>
+              <a:defRPr sz="1800" b="0">
+                <a:solidFill>
+                  <a:srgbClr val="222222"/>
+                </a:solidFill>
+                <a:latin typeface="BIZ UDPGothic"/>
+              </a:defRPr>
+            </a:pPr>
+            <a:r>
+              <a:t>病気を治すための投薬順序の最適化</a:t>
+            </a:r>
+          </a:p>
+          <a:p>
+            <a:pPr>
+              <a:spcBef>
+                <a:spcPts val="2600"/>
+              </a:spcBef>
+              <a:defRPr sz="2000" b="1">
+                <a:solidFill>
+                  <a:srgbClr val="111111"/>
+                </a:solidFill>
+                <a:latin typeface="BIZ UDPGothic"/>
+              </a:defRPr>
+            </a:pPr>
+            <a:r>
+              <a:t>■ 趣味：</a:t>
+            </a:r>
+          </a:p>
+          <a:p>
+            <a:pPr>
+              <a:spcBef>
+                <a:spcPts val="800"/>
+              </a:spcBef>
+              <a:defRPr sz="1800" b="0">
+                <a:solidFill>
+                  <a:srgbClr val="222222"/>
                 </a:solidFill>
                 <a:latin typeface="BIZ UDPGothic"/>
               </a:defRPr>
@@ -4580,7 +4584,7 @@
         <p:spPr>
           <a:xfrm>
             <a:off x="0" y="0"/>
-            <a:ext cx="12191695" cy="530352"/>
+            <a:ext cx="12191695" cy="585216"/>
           </a:xfrm>
           <a:prstGeom prst="rect">
             <a:avLst/>
@@ -4623,7 +4627,7 @@
         <p:spPr>
           <a:xfrm>
             <a:off x="301752" y="73152"/>
-            <a:ext cx="9144000" cy="411480"/>
+            <a:ext cx="9144000" cy="457200"/>
           </a:xfrm>
           <a:prstGeom prst="rect">
             <a:avLst/>
@@ -4637,7 +4641,7 @@
           <a:lstStyle/>
           <a:p>
             <a:pPr>
-              <a:defRPr sz="1800" b="1">
+              <a:defRPr sz="2000" b="1">
                 <a:solidFill>
                   <a:srgbClr val="FFFFFF"/>
                 </a:solidFill>
@@ -4658,8 +4662,8 @@
         </p:nvSpPr>
         <p:spPr>
           <a:xfrm>
-            <a:off x="10789920" y="128016"/>
-            <a:ext cx="484632" cy="274320"/>
+            <a:off x="10698480" y="137160"/>
+            <a:ext cx="530352" cy="301752"/>
           </a:xfrm>
           <a:prstGeom prst="roundRect">
             <a:avLst/>
@@ -4692,7 +4696,7 @@
           <a:lstStyle/>
           <a:p>
             <a:pPr algn="ctr">
-              <a:defRPr sz="1100" i="1">
+              <a:defRPr sz="1200" i="1" b="1">
                 <a:solidFill>
                   <a:srgbClr val="E8F1F8"/>
                 </a:solidFill>
@@ -4714,7 +4718,7 @@
         <p:spPr>
           <a:xfrm>
             <a:off x="11430000" y="73152"/>
-            <a:ext cx="548640" cy="411480"/>
+            <a:ext cx="548640" cy="457200"/>
           </a:xfrm>
           <a:prstGeom prst="rect">
             <a:avLst/>
@@ -4728,7 +4732,7 @@
           <a:lstStyle/>
           <a:p>
             <a:pPr algn="ctr">
-              <a:defRPr sz="1800" b="1">
+              <a:defRPr sz="2000" b="1">
                 <a:solidFill>
                   <a:srgbClr val="FFFFFF"/>
                 </a:solidFill>
@@ -4764,7 +4768,7 @@
           <a:lstStyle/>
           <a:p>
             <a:pPr algn="r">
-              <a:defRPr sz="800">
+              <a:defRPr sz="900">
                 <a:solidFill>
                   <a:srgbClr val="666666"/>
                 </a:solidFill>
@@ -4785,8 +4789,8 @@
         </p:nvSpPr>
         <p:spPr>
           <a:xfrm>
-            <a:off x="731520" y="868680"/>
-            <a:ext cx="10698480" cy="2011680"/>
+            <a:off x="640080" y="822960"/>
+            <a:ext cx="10789920" cy="2103120"/>
           </a:xfrm>
           <a:prstGeom prst="rect">
             <a:avLst/>
@@ -4803,7 +4807,7 @@
               <a:spcBef>
                 <a:spcPts val="0"/>
               </a:spcBef>
-              <a:defRPr sz="1400" b="1">
+              <a:defRPr sz="2000" b="1">
                 <a:solidFill>
                   <a:srgbClr val="111111"/>
                 </a:solidFill>
@@ -4819,15 +4823,15 @@
               <a:spcBef>
                 <a:spcPts val="600"/>
               </a:spcBef>
-              <a:defRPr sz="1250" b="0">
-                <a:solidFill>
-                  <a:srgbClr val="333333"/>
-                </a:solidFill>
-                <a:latin typeface="BIZ UDPGothic"/>
-              </a:defRPr>
-            </a:pPr>
-            <a:r>
-              <a:t>・近年、気候変動への対応やカーボンニュートラルの実現に向け、ESG※1投資が世界的に拡大している</a:t>
+              <a:defRPr sz="1700" b="0">
+                <a:solidFill>
+                  <a:srgbClr val="222222"/>
+                </a:solidFill>
+                <a:latin typeface="BIZ UDPGothic"/>
+              </a:defRPr>
+            </a:pPr>
+            <a:r>
+              <a:t>・近年、気候変動への対応やカーボンニュートラル実現に向け、ESG※1投資が世界的に拡大している</a:t>
             </a:r>
           </a:p>
           <a:p>
@@ -4835,9 +4839,9 @@
               <a:spcBef>
                 <a:spcPts val="400"/>
               </a:spcBef>
-              <a:defRPr sz="1250" b="0">
-                <a:solidFill>
-                  <a:srgbClr val="333333"/>
+              <a:defRPr sz="1700" b="0">
+                <a:solidFill>
+                  <a:srgbClr val="222222"/>
                 </a:solidFill>
                 <a:latin typeface="BIZ UDPGothic"/>
               </a:defRPr>
@@ -4857,7 +4861,7 @@
         <p:spPr>
           <a:xfrm>
             <a:off x="9144000" y="1280160"/>
-            <a:ext cx="2560320" cy="914400"/>
+            <a:ext cx="2560320" cy="1005840"/>
           </a:xfrm>
           <a:prstGeom prst="rect">
             <a:avLst/>
@@ -4874,7 +4878,7 @@
               <a:spcBef>
                 <a:spcPts val="0"/>
               </a:spcBef>
-              <a:defRPr sz="800" b="0">
+              <a:defRPr sz="950" b="0">
                 <a:solidFill>
                   <a:srgbClr val="666666"/>
                 </a:solidFill>
@@ -4903,8 +4907,8 @@
         </p:nvSpPr>
         <p:spPr>
           <a:xfrm>
-            <a:off x="5852160" y="1828800"/>
-            <a:ext cx="320040" cy="320040"/>
+            <a:off x="5852160" y="1874519"/>
+            <a:ext cx="347472" cy="347472"/>
           </a:xfrm>
           <a:prstGeom prst="downArrow">
             <a:avLst/>
@@ -4946,8 +4950,8 @@
         </p:nvSpPr>
         <p:spPr>
           <a:xfrm>
-            <a:off x="2103120" y="2240280"/>
-            <a:ext cx="7955279" cy="502920"/>
+            <a:off x="1645920" y="2304288"/>
+            <a:ext cx="8869680" cy="566928"/>
           </a:xfrm>
           <a:prstGeom prst="roundRect">
             <a:avLst/>
@@ -4955,7 +4959,7 @@
           <a:solidFill>
             <a:srgbClr val="EDF5FB"/>
           </a:solidFill>
-          <a:ln>
+          <a:ln w="19050">
             <a:solidFill>
               <a:srgbClr val="7BA4C7"/>
             </a:solidFill>
@@ -4980,7 +4984,7 @@
           <a:lstStyle/>
           <a:p>
             <a:pPr algn="ctr">
-              <a:defRPr sz="1300" b="1">
+              <a:defRPr sz="1800" b="1">
                 <a:solidFill>
                   <a:srgbClr val="113355"/>
                 </a:solidFill>
@@ -5001,8 +5005,8 @@
         </p:nvSpPr>
         <p:spPr>
           <a:xfrm>
-            <a:off x="731520" y="3017520"/>
-            <a:ext cx="10698480" cy="1371600"/>
+            <a:off x="640080" y="3063240"/>
+            <a:ext cx="10789920" cy="1463040"/>
           </a:xfrm>
           <a:prstGeom prst="rect">
             <a:avLst/>
@@ -5019,7 +5023,7 @@
               <a:spcBef>
                 <a:spcPts val="0"/>
               </a:spcBef>
-              <a:defRPr sz="1400" b="1">
+              <a:defRPr sz="2000" b="1">
                 <a:solidFill>
                   <a:srgbClr val="111111"/>
                 </a:solidFill>
@@ -5035,9 +5039,9 @@
               <a:spcBef>
                 <a:spcPts val="600"/>
               </a:spcBef>
-              <a:defRPr sz="1250" b="0">
-                <a:solidFill>
-                  <a:srgbClr val="333333"/>
+              <a:defRPr sz="1700" b="0">
+                <a:solidFill>
+                  <a:srgbClr val="222222"/>
                 </a:solidFill>
                 <a:latin typeface="BIZ UDPGothic"/>
               </a:defRPr>
@@ -5051,9 +5055,9 @@
               <a:spcBef>
                 <a:spcPts val="400"/>
               </a:spcBef>
-              <a:defRPr sz="1250" b="0">
-                <a:solidFill>
-                  <a:srgbClr val="333333"/>
+              <a:defRPr sz="1700" b="0">
+                <a:solidFill>
+                  <a:srgbClr val="222222"/>
                 </a:solidFill>
                 <a:latin typeface="BIZ UDPGothic"/>
               </a:defRPr>
@@ -5072,8 +5076,8 @@
         </p:nvSpPr>
         <p:spPr>
           <a:xfrm>
-            <a:off x="2377440" y="4297680"/>
-            <a:ext cx="1828800" cy="822960"/>
+            <a:off x="2011680" y="4434840"/>
+            <a:ext cx="2103120" cy="868680"/>
           </a:xfrm>
           <a:prstGeom prst="roundRect">
             <a:avLst/>
@@ -5081,7 +5085,7 @@
           <a:solidFill>
             <a:srgbClr val="D9EBF7"/>
           </a:solidFill>
-          <a:ln w="19050">
+          <a:ln w="22860">
             <a:solidFill>
               <a:srgbClr val="4A90E2"/>
             </a:solidFill>
@@ -5106,7 +5110,7 @@
           <a:lstStyle/>
           <a:p>
             <a:pPr algn="ctr">
-              <a:defRPr sz="1250" b="1">
+              <a:defRPr sz="1650" b="1">
                 <a:solidFill>
                   <a:srgbClr val="0B3968"/>
                 </a:solidFill>
@@ -5131,8 +5135,8 @@
         </p:nvSpPr>
         <p:spPr>
           <a:xfrm>
-            <a:off x="4480560" y="4572000"/>
-            <a:ext cx="457200" cy="274320"/>
+            <a:off x="4389120" y="4709160"/>
+            <a:ext cx="502920" cy="320040"/>
           </a:xfrm>
           <a:prstGeom prst="rightArrow">
             <a:avLst/>
@@ -5174,8 +5178,8 @@
         </p:nvSpPr>
         <p:spPr>
           <a:xfrm>
-            <a:off x="5212080" y="4297680"/>
-            <a:ext cx="1828800" cy="822960"/>
+            <a:off x="5120640" y="4434840"/>
+            <a:ext cx="2103120" cy="868680"/>
           </a:xfrm>
           <a:prstGeom prst="roundRect">
             <a:avLst/>
@@ -5183,7 +5187,7 @@
           <a:solidFill>
             <a:srgbClr val="D9EBF7"/>
           </a:solidFill>
-          <a:ln w="19050">
+          <a:ln w="22860">
             <a:solidFill>
               <a:srgbClr val="4A90E2"/>
             </a:solidFill>
@@ -5208,7 +5212,7 @@
           <a:lstStyle/>
           <a:p>
             <a:pPr algn="ctr">
-              <a:defRPr sz="1250" b="1">
+              <a:defRPr sz="1650" b="1">
                 <a:solidFill>
                   <a:srgbClr val="0B3968"/>
                 </a:solidFill>
@@ -5233,8 +5237,8 @@
         </p:nvSpPr>
         <p:spPr>
           <a:xfrm>
-            <a:off x="7315200" y="4572000"/>
-            <a:ext cx="457200" cy="274320"/>
+            <a:off x="7498079" y="4709160"/>
+            <a:ext cx="502920" cy="320040"/>
           </a:xfrm>
           <a:prstGeom prst="rightArrow">
             <a:avLst/>
@@ -5276,8 +5280,8 @@
         </p:nvSpPr>
         <p:spPr>
           <a:xfrm>
-            <a:off x="8046720" y="4297680"/>
-            <a:ext cx="1828800" cy="822960"/>
+            <a:off x="8229600" y="4434840"/>
+            <a:ext cx="2103120" cy="868680"/>
           </a:xfrm>
           <a:prstGeom prst="roundRect">
             <a:avLst/>
@@ -5285,7 +5289,7 @@
           <a:solidFill>
             <a:srgbClr val="D9EBF7"/>
           </a:solidFill>
-          <a:ln w="19050">
+          <a:ln w="22860">
             <a:solidFill>
               <a:srgbClr val="4A90E2"/>
             </a:solidFill>
@@ -5310,7 +5314,7 @@
           <a:lstStyle/>
           <a:p>
             <a:pPr algn="ctr">
-              <a:defRPr sz="1250" b="1">
+              <a:defRPr sz="1650" b="1">
                 <a:solidFill>
                   <a:srgbClr val="0B3968"/>
                 </a:solidFill>
@@ -5354,7 +5358,7 @@
         <p:spPr>
           <a:xfrm>
             <a:off x="0" y="0"/>
-            <a:ext cx="12191695" cy="530352"/>
+            <a:ext cx="12191695" cy="585216"/>
           </a:xfrm>
           <a:prstGeom prst="rect">
             <a:avLst/>
@@ -5397,7 +5401,7 @@
         <p:spPr>
           <a:xfrm>
             <a:off x="301752" y="73152"/>
-            <a:ext cx="9144000" cy="411480"/>
+            <a:ext cx="9144000" cy="457200"/>
           </a:xfrm>
           <a:prstGeom prst="rect">
             <a:avLst/>
@@ -5411,7 +5415,7 @@
           <a:lstStyle/>
           <a:p>
             <a:pPr>
-              <a:defRPr sz="1800" b="1">
+              <a:defRPr sz="2000" b="1">
                 <a:solidFill>
                   <a:srgbClr val="FFFFFF"/>
                 </a:solidFill>
@@ -5432,8 +5436,8 @@
         </p:nvSpPr>
         <p:spPr>
           <a:xfrm>
-            <a:off x="10789920" y="128016"/>
-            <a:ext cx="484632" cy="274320"/>
+            <a:off x="10698480" y="137160"/>
+            <a:ext cx="530352" cy="301752"/>
           </a:xfrm>
           <a:prstGeom prst="roundRect">
             <a:avLst/>
@@ -5466,7 +5470,7 @@
           <a:lstStyle/>
           <a:p>
             <a:pPr algn="ctr">
-              <a:defRPr sz="1100" i="1">
+              <a:defRPr sz="1200" i="1" b="1">
                 <a:solidFill>
                   <a:srgbClr val="E8F1F8"/>
                 </a:solidFill>
@@ -5488,7 +5492,7 @@
         <p:spPr>
           <a:xfrm>
             <a:off x="11430000" y="73152"/>
-            <a:ext cx="548640" cy="411480"/>
+            <a:ext cx="548640" cy="457200"/>
           </a:xfrm>
           <a:prstGeom prst="rect">
             <a:avLst/>
@@ -5502,7 +5506,7 @@
           <a:lstStyle/>
           <a:p>
             <a:pPr algn="ctr">
-              <a:defRPr sz="1800" b="1">
+              <a:defRPr sz="2000" b="1">
                 <a:solidFill>
                   <a:srgbClr val="FFFFFF"/>
                 </a:solidFill>
@@ -5538,7 +5542,7 @@
           <a:lstStyle/>
           <a:p>
             <a:pPr algn="r">
-              <a:defRPr sz="800">
+              <a:defRPr sz="900">
                 <a:solidFill>
                   <a:srgbClr val="666666"/>
                 </a:solidFill>
@@ -5559,8 +5563,8 @@
         </p:nvSpPr>
         <p:spPr>
           <a:xfrm>
-            <a:off x="640080" y="868680"/>
-            <a:ext cx="4389120" cy="4389120"/>
+            <a:off x="548640" y="822960"/>
+            <a:ext cx="4572000" cy="4572000"/>
           </a:xfrm>
           <a:prstGeom prst="rect">
             <a:avLst/>
@@ -5577,7 +5581,7 @@
               <a:spcBef>
                 <a:spcPts val="0"/>
               </a:spcBef>
-              <a:defRPr sz="1350" b="1">
+              <a:defRPr sz="2000" b="1">
                 <a:solidFill>
                   <a:srgbClr val="111111"/>
                 </a:solidFill>
@@ -5591,11 +5595,11 @@
           <a:p>
             <a:pPr>
               <a:spcBef>
-                <a:spcPts val="400"/>
+                <a:spcPts val="600"/>
               </a:spcBef>
-              <a:defRPr sz="1200" b="0">
-                <a:solidFill>
-                  <a:srgbClr val="333333"/>
+              <a:defRPr sz="1700" b="0">
+                <a:solidFill>
+                  <a:srgbClr val="222222"/>
                 </a:solidFill>
                 <a:latin typeface="BIZ UDPGothic"/>
               </a:defRPr>
@@ -5611,9 +5615,9 @@
           <a:p>
             <a:pPr>
               <a:spcBef>
-                <a:spcPts val="1000"/>
+                <a:spcPts val="1400"/>
               </a:spcBef>
-              <a:defRPr sz="1250" b="1">
+              <a:defRPr sz="1800" b="1">
                 <a:solidFill>
                   <a:srgbClr val="111111"/>
                 </a:solidFill>
@@ -5627,11 +5631,11 @@
           <a:p>
             <a:pPr>
               <a:spcBef>
-                <a:spcPts val="200"/>
+                <a:spcPts val="300"/>
               </a:spcBef>
-              <a:defRPr sz="1200" b="0">
-                <a:solidFill>
-                  <a:srgbClr val="333333"/>
+              <a:defRPr sz="1650" b="0">
+                <a:solidFill>
+                  <a:srgbClr val="222222"/>
                 </a:solidFill>
                 <a:latin typeface="BIZ UDPGothic"/>
               </a:defRPr>
@@ -5643,9 +5647,9 @@
           <a:p>
             <a:pPr>
               <a:spcBef>
-                <a:spcPts val="1000"/>
+                <a:spcPts val="1400"/>
               </a:spcBef>
-              <a:defRPr sz="1250" b="1">
+              <a:defRPr sz="1800" b="1">
                 <a:solidFill>
                   <a:srgbClr val="111111"/>
                 </a:solidFill>
@@ -5659,11 +5663,11 @@
           <a:p>
             <a:pPr>
               <a:spcBef>
-                <a:spcPts val="200"/>
+                <a:spcPts val="300"/>
               </a:spcBef>
-              <a:defRPr sz="1200" b="0">
-                <a:solidFill>
-                  <a:srgbClr val="333333"/>
+              <a:defRPr sz="1650" b="0">
+                <a:solidFill>
+                  <a:srgbClr val="222222"/>
                 </a:solidFill>
                 <a:latin typeface="BIZ UDPGothic"/>
               </a:defRPr>
@@ -5675,9 +5679,9 @@
           <a:p>
             <a:pPr>
               <a:spcBef>
-                <a:spcPts val="1000"/>
+                <a:spcPts val="1400"/>
               </a:spcBef>
-              <a:defRPr sz="1250" b="1">
+              <a:defRPr sz="1800" b="1">
                 <a:solidFill>
                   <a:srgbClr val="111111"/>
                 </a:solidFill>
@@ -5691,11 +5695,11 @@
           <a:p>
             <a:pPr>
               <a:spcBef>
-                <a:spcPts val="200"/>
+                <a:spcPts val="300"/>
               </a:spcBef>
-              <a:defRPr sz="1200" b="0">
-                <a:solidFill>
-                  <a:srgbClr val="333333"/>
+              <a:defRPr sz="1650" b="0">
+                <a:solidFill>
+                  <a:srgbClr val="222222"/>
                 </a:solidFill>
                 <a:latin typeface="BIZ UDPGothic"/>
               </a:defRPr>
@@ -5718,8 +5722,8 @@
         </p:nvSpPr>
         <p:spPr>
           <a:xfrm>
-            <a:off x="640080" y="5486400"/>
-            <a:ext cx="10789920" cy="731520"/>
+            <a:off x="548640" y="5486400"/>
+            <a:ext cx="10972800" cy="731520"/>
           </a:xfrm>
           <a:prstGeom prst="rect">
             <a:avLst/>
@@ -5733,7 +5737,7 @@
           <a:lstStyle/>
           <a:p>
             <a:pPr>
-              <a:defRPr sz="1200" b="1">
+              <a:defRPr sz="1700" b="1">
                 <a:solidFill>
                   <a:srgbClr val="111111"/>
                 </a:solidFill>
@@ -5763,7 +5767,7 @@
         <p:spPr>
           <a:xfrm>
             <a:off x="4846320" y="731520"/>
-            <a:ext cx="6858000" cy="4480560"/>
+            <a:ext cx="6858000" cy="4572000"/>
           </a:xfrm>
           <a:prstGeom prst="rect">
             <a:avLst/>
@@ -5797,7 +5801,7 @@
         <p:spPr>
           <a:xfrm>
             <a:off x="0" y="0"/>
-            <a:ext cx="12191695" cy="530352"/>
+            <a:ext cx="12191695" cy="585216"/>
           </a:xfrm>
           <a:prstGeom prst="rect">
             <a:avLst/>
@@ -5840,7 +5844,7 @@
         <p:spPr>
           <a:xfrm>
             <a:off x="301752" y="73152"/>
-            <a:ext cx="9144000" cy="411480"/>
+            <a:ext cx="9144000" cy="457200"/>
           </a:xfrm>
           <a:prstGeom prst="rect">
             <a:avLst/>
@@ -5854,7 +5858,7 @@
           <a:lstStyle/>
           <a:p>
             <a:pPr>
-              <a:defRPr sz="1800" b="1">
+              <a:defRPr sz="2000" b="1">
                 <a:solidFill>
                   <a:srgbClr val="FFFFFF"/>
                 </a:solidFill>
@@ -5875,8 +5879,8 @@
         </p:nvSpPr>
         <p:spPr>
           <a:xfrm>
-            <a:off x="10789920" y="128016"/>
-            <a:ext cx="484632" cy="274320"/>
+            <a:off x="10698480" y="137160"/>
+            <a:ext cx="530352" cy="301752"/>
           </a:xfrm>
           <a:prstGeom prst="roundRect">
             <a:avLst/>
@@ -5909,7 +5913,7 @@
           <a:lstStyle/>
           <a:p>
             <a:pPr algn="ctr">
-              <a:defRPr sz="1100" i="1">
+              <a:defRPr sz="1200" i="1" b="1">
                 <a:solidFill>
                   <a:srgbClr val="E8F1F8"/>
                 </a:solidFill>
@@ -5931,7 +5935,7 @@
         <p:spPr>
           <a:xfrm>
             <a:off x="11430000" y="73152"/>
-            <a:ext cx="548640" cy="411480"/>
+            <a:ext cx="548640" cy="457200"/>
           </a:xfrm>
           <a:prstGeom prst="rect">
             <a:avLst/>
@@ -5945,7 +5949,7 @@
           <a:lstStyle/>
           <a:p>
             <a:pPr algn="ctr">
-              <a:defRPr sz="1800" b="1">
+              <a:defRPr sz="2000" b="1">
                 <a:solidFill>
                   <a:srgbClr val="FFFFFF"/>
                 </a:solidFill>
@@ -5981,7 +5985,7 @@
           <a:lstStyle/>
           <a:p>
             <a:pPr algn="r">
-              <a:defRPr sz="800">
+              <a:defRPr sz="900">
                 <a:solidFill>
                   <a:srgbClr val="666666"/>
                 </a:solidFill>
@@ -6002,8 +6006,8 @@
         </p:nvSpPr>
         <p:spPr>
           <a:xfrm>
-            <a:off x="640080" y="868680"/>
-            <a:ext cx="4572000" cy="3474720"/>
+            <a:off x="548640" y="822960"/>
+            <a:ext cx="4754880" cy="3657600"/>
           </a:xfrm>
           <a:prstGeom prst="rect">
             <a:avLst/>
@@ -6020,7 +6024,7 @@
               <a:spcBef>
                 <a:spcPts val="0"/>
               </a:spcBef>
-              <a:defRPr sz="1350" b="1">
+              <a:defRPr sz="2000" b="1">
                 <a:solidFill>
                   <a:srgbClr val="111111"/>
                 </a:solidFill>
@@ -6034,17 +6038,17 @@
           <a:p>
             <a:pPr>
               <a:spcBef>
-                <a:spcPts val="400"/>
+                <a:spcPts val="600"/>
               </a:spcBef>
-              <a:defRPr sz="1200" b="0">
-                <a:solidFill>
-                  <a:srgbClr val="333333"/>
-                </a:solidFill>
-                <a:latin typeface="BIZ UDPGothic"/>
-              </a:defRPr>
-            </a:pPr>
-            <a:r>
-              <a:t>・対象期間:2025/8/19〜8/30</a:t>
+              <a:defRPr sz="1700" b="0">
+                <a:solidFill>
+                  <a:srgbClr val="222222"/>
+                </a:solidFill>
+                <a:latin typeface="BIZ UDPGothic"/>
+              </a:defRPr>
+            </a:pPr>
+            <a:r>
+              <a:t>・対象期間: 2025/8/19〜8/30</a:t>
             </a:r>
             <a:br/>
             <a:r>
@@ -6056,15 +6060,15 @@
             </a:r>
             <a:br/>
             <a:r>
-              <a:t>・6:30〜7:00に設定温度へ到達</a:t>
+              <a:t>・6:30〜7:00 に設定温度へ到達</a:t>
             </a:r>
           </a:p>
           <a:p>
             <a:pPr>
               <a:spcBef>
-                <a:spcPts val="1200"/>
+                <a:spcPts val="1600"/>
               </a:spcBef>
-              <a:defRPr sz="1350" b="1">
+              <a:defRPr sz="2000" b="1">
                 <a:solidFill>
                   <a:srgbClr val="111111"/>
                 </a:solidFill>
@@ -6078,11 +6082,11 @@
           <a:p>
             <a:pPr>
               <a:spcBef>
-                <a:spcPts val="400"/>
+                <a:spcPts val="600"/>
               </a:spcBef>
-              <a:defRPr sz="1200" b="0">
-                <a:solidFill>
-                  <a:srgbClr val="333333"/>
+              <a:defRPr sz="1700" b="0">
+                <a:solidFill>
+                  <a:srgbClr val="222222"/>
                 </a:solidFill>
                 <a:latin typeface="BIZ UDPGothic"/>
               </a:defRPr>
@@ -6117,8 +6121,8 @@
         </p:nvSpPr>
         <p:spPr>
           <a:xfrm>
-            <a:off x="914400" y="4297680"/>
-            <a:ext cx="3657600" cy="1188720"/>
+            <a:off x="731520" y="4297680"/>
+            <a:ext cx="4206240" cy="1325880"/>
           </a:xfrm>
           <a:prstGeom prst="roundRect">
             <a:avLst/>
@@ -6126,7 +6130,7 @@
           <a:solidFill>
             <a:srgbClr val="EDF5FB"/>
           </a:solidFill>
-          <a:ln w="19050">
+          <a:ln w="22860">
             <a:solidFill>
               <a:srgbClr val="7BA4C7"/>
             </a:solidFill>
@@ -6151,7 +6155,7 @@
           <a:lstStyle/>
           <a:p>
             <a:pPr algn="ctr">
-              <a:defRPr sz="1250" b="1">
+              <a:defRPr sz="1700" b="1">
                 <a:solidFill>
                   <a:srgbClr val="111111"/>
                 </a:solidFill>
@@ -6169,9 +6173,9 @@
           <a:p>
             <a:pPr algn="ctr">
               <a:spcBef>
-                <a:spcPts val="400"/>
+                <a:spcPts val="600"/>
               </a:spcBef>
-              <a:defRPr sz="1400" b="1">
+              <a:defRPr sz="1900" b="1">
                 <a:solidFill>
                   <a:srgbClr val="C8102E"/>
                 </a:solidFill>
@@ -6200,8 +6204,8 @@
         </p:blipFill>
         <p:spPr>
           <a:xfrm>
-            <a:off x="5212080" y="777240"/>
-            <a:ext cx="6583680" cy="5303520"/>
+            <a:off x="5120640" y="777240"/>
+            <a:ext cx="6675120" cy="5486400"/>
           </a:xfrm>
           <a:prstGeom prst="rect">
             <a:avLst/>
@@ -6235,7 +6239,7 @@
         <p:spPr>
           <a:xfrm>
             <a:off x="0" y="0"/>
-            <a:ext cx="12191695" cy="530352"/>
+            <a:ext cx="12191695" cy="585216"/>
           </a:xfrm>
           <a:prstGeom prst="rect">
             <a:avLst/>
@@ -6278,7 +6282,7 @@
         <p:spPr>
           <a:xfrm>
             <a:off x="301752" y="73152"/>
-            <a:ext cx="9144000" cy="411480"/>
+            <a:ext cx="9144000" cy="457200"/>
           </a:xfrm>
           <a:prstGeom prst="rect">
             <a:avLst/>
@@ -6292,7 +6296,7 @@
           <a:lstStyle/>
           <a:p>
             <a:pPr>
-              <a:defRPr sz="1800" b="1">
+              <a:defRPr sz="2000" b="1">
                 <a:solidFill>
                   <a:srgbClr val="FFFFFF"/>
                 </a:solidFill>
@@ -6313,8 +6317,8 @@
         </p:nvSpPr>
         <p:spPr>
           <a:xfrm>
-            <a:off x="10789920" y="128016"/>
-            <a:ext cx="484632" cy="274320"/>
+            <a:off x="10698480" y="137160"/>
+            <a:ext cx="530352" cy="301752"/>
           </a:xfrm>
           <a:prstGeom prst="roundRect">
             <a:avLst/>
@@ -6347,7 +6351,7 @@
           <a:lstStyle/>
           <a:p>
             <a:pPr algn="ctr">
-              <a:defRPr sz="1100" i="1">
+              <a:defRPr sz="1200" i="1" b="1">
                 <a:solidFill>
                   <a:srgbClr val="E8F1F8"/>
                 </a:solidFill>
@@ -6369,7 +6373,7 @@
         <p:spPr>
           <a:xfrm>
             <a:off x="11430000" y="73152"/>
-            <a:ext cx="548640" cy="411480"/>
+            <a:ext cx="548640" cy="457200"/>
           </a:xfrm>
           <a:prstGeom prst="rect">
             <a:avLst/>
@@ -6383,7 +6387,7 @@
           <a:lstStyle/>
           <a:p>
             <a:pPr algn="ctr">
-              <a:defRPr sz="1800" b="1">
+              <a:defRPr sz="2000" b="1">
                 <a:solidFill>
                   <a:srgbClr val="FFFFFF"/>
                 </a:solidFill>
@@ -6419,7 +6423,7 @@
           <a:lstStyle/>
           <a:p>
             <a:pPr algn="r">
-              <a:defRPr sz="800">
+              <a:defRPr sz="900">
                 <a:solidFill>
                   <a:srgbClr val="666666"/>
                 </a:solidFill>
@@ -6440,8 +6444,8 @@
         </p:nvSpPr>
         <p:spPr>
           <a:xfrm>
-            <a:off x="640080" y="868680"/>
-            <a:ext cx="10789920" cy="2926080"/>
+            <a:off x="548640" y="822960"/>
+            <a:ext cx="10972800" cy="3108960"/>
           </a:xfrm>
           <a:prstGeom prst="rect">
             <a:avLst/>
@@ -6458,7 +6462,7 @@
               <a:spcBef>
                 <a:spcPts val="0"/>
               </a:spcBef>
-              <a:defRPr sz="1350" b="1">
+              <a:defRPr sz="2000" b="1">
                 <a:solidFill>
                   <a:srgbClr val="111111"/>
                 </a:solidFill>
@@ -6472,9 +6476,9 @@
           <a:p>
             <a:pPr>
               <a:spcBef>
-                <a:spcPts val="400"/>
+                <a:spcPts val="600"/>
               </a:spcBef>
-              <a:defRPr sz="1250" b="1">
+              <a:defRPr sz="1800" b="1">
                 <a:solidFill>
                   <a:srgbClr val="111111"/>
                 </a:solidFill>
@@ -6488,11 +6492,11 @@
           <a:p>
             <a:pPr>
               <a:spcBef>
-                <a:spcPts val="200"/>
+                <a:spcPts val="300"/>
               </a:spcBef>
-              <a:defRPr sz="1200" b="0">
-                <a:solidFill>
-                  <a:srgbClr val="333333"/>
+              <a:defRPr sz="1650" b="0">
+                <a:solidFill>
+                  <a:srgbClr val="222222"/>
                 </a:solidFill>
                 <a:latin typeface="BIZ UDPGothic"/>
               </a:defRPr>
@@ -6508,9 +6512,9 @@
           <a:p>
             <a:pPr>
               <a:spcBef>
-                <a:spcPts val="1000"/>
+                <a:spcPts val="1400"/>
               </a:spcBef>
-              <a:defRPr sz="1250" b="1">
+              <a:defRPr sz="1800" b="1">
                 <a:solidFill>
                   <a:srgbClr val="111111"/>
                 </a:solidFill>
@@ -6524,21 +6528,21 @@
           <a:p>
             <a:pPr>
               <a:spcBef>
-                <a:spcPts val="200"/>
+                <a:spcPts val="300"/>
               </a:spcBef>
-              <a:defRPr sz="1200" b="0">
-                <a:solidFill>
-                  <a:srgbClr val="333333"/>
-                </a:solidFill>
-                <a:latin typeface="BIZ UDPGothic"/>
-              </a:defRPr>
-            </a:pPr>
-            <a:r>
-              <a:t>・始業時に設定温度未達→快適性を損なう(高コスト)</a:t>
+              <a:defRPr sz="1650" b="0">
+                <a:solidFill>
+                  <a:srgbClr val="222222"/>
+                </a:solidFill>
+                <a:latin typeface="BIZ UDPGothic"/>
+              </a:defRPr>
+            </a:pPr>
+            <a:r>
+              <a:t>・始業時に設定温度未達 → 快適性を損なう(高コスト)</a:t>
             </a:r>
             <a:br/>
             <a:r>
-              <a:t>・過剰予冷→電力の無駄にはなるが、快適性は担保される(低コスト)</a:t>
+              <a:t>・過剰予冷 → 電力の無駄にはなるが、快適性は担保される(低コスト)</a:t>
             </a:r>
             <a:br/>
             <a:r>
@@ -6552,9 +6556,9 @@
           <a:p>
             <a:pPr>
               <a:spcBef>
-                <a:spcPts val="1600"/>
+                <a:spcPts val="2000"/>
               </a:spcBef>
-              <a:defRPr sz="1350" b="1">
+              <a:defRPr sz="2000" b="1">
                 <a:solidFill>
                   <a:srgbClr val="111111"/>
                 </a:solidFill>
@@ -6575,8 +6579,8 @@
         </p:nvSpPr>
         <p:spPr>
           <a:xfrm>
-            <a:off x="1371600" y="4572000"/>
-            <a:ext cx="9418320" cy="731520"/>
+            <a:off x="914400" y="4663440"/>
+            <a:ext cx="10332720" cy="822960"/>
           </a:xfrm>
           <a:prstGeom prst="rect">
             <a:avLst/>
@@ -6590,7 +6594,7 @@
           <a:lstStyle/>
           <a:p>
             <a:pPr algn="ctr">
-              <a:defRPr sz="1600" b="1">
+              <a:defRPr sz="1900" b="1">
                 <a:solidFill>
                   <a:srgbClr val="113355"/>
                 </a:solidFill>
@@ -6611,8 +6615,8 @@
         </p:nvSpPr>
         <p:spPr>
           <a:xfrm>
-            <a:off x="3017520" y="3931920"/>
-            <a:ext cx="2011680" cy="411480"/>
+            <a:off x="2651760" y="3931920"/>
+            <a:ext cx="2286000" cy="457200"/>
           </a:xfrm>
           <a:prstGeom prst="roundRect">
             <a:avLst/>
@@ -6620,7 +6624,7 @@
           <a:solidFill>
             <a:srgbClr val="FFFFFF"/>
           </a:solidFill>
-          <a:ln w="15240">
+          <a:ln w="19050">
             <a:solidFill>
               <a:srgbClr val="7BA4C7"/>
             </a:solidFill>
@@ -6645,7 +6649,7 @@
           <a:lstStyle/>
           <a:p>
             <a:pPr algn="ctr">
-              <a:defRPr sz="1100">
+              <a:defRPr sz="1500" b="1">
                 <a:solidFill>
                   <a:srgbClr val="111111"/>
                 </a:solidFill>
@@ -6666,8 +6670,8 @@
         </p:nvSpPr>
         <p:spPr>
           <a:xfrm>
-            <a:off x="5303520" y="5303520"/>
-            <a:ext cx="1828800" cy="411480"/>
+            <a:off x="5120640" y="5486400"/>
+            <a:ext cx="2011680" cy="457200"/>
           </a:xfrm>
           <a:prstGeom prst="roundRect">
             <a:avLst/>
@@ -6675,7 +6679,7 @@
           <a:solidFill>
             <a:srgbClr val="FFFFFF"/>
           </a:solidFill>
-          <a:ln w="15240">
+          <a:ln w="19050">
             <a:solidFill>
               <a:srgbClr val="7BA4C7"/>
             </a:solidFill>
@@ -6700,7 +6704,7 @@
           <a:lstStyle/>
           <a:p>
             <a:pPr algn="ctr">
-              <a:defRPr sz="1100">
+              <a:defRPr sz="1500" b="1">
                 <a:solidFill>
                   <a:srgbClr val="111111"/>
                 </a:solidFill>
@@ -6722,7 +6726,7 @@
         <p:spPr>
           <a:xfrm>
             <a:off x="8046720" y="3840480"/>
-            <a:ext cx="2011680" cy="502920"/>
+            <a:ext cx="2286000" cy="594360"/>
           </a:xfrm>
           <a:prstGeom prst="roundRect">
             <a:avLst/>
@@ -6730,7 +6734,7 @@
           <a:solidFill>
             <a:srgbClr val="FFFFFF"/>
           </a:solidFill>
-          <a:ln w="15240">
+          <a:ln w="19050">
             <a:solidFill>
               <a:srgbClr val="7BA4C7"/>
             </a:solidFill>
@@ -6755,7 +6759,7 @@
           <a:lstStyle/>
           <a:p>
             <a:pPr algn="ctr">
-              <a:defRPr sz="1100">
+              <a:defRPr sz="1500" b="1">
                 <a:solidFill>
                   <a:srgbClr val="111111"/>
                 </a:solidFill>
@@ -6799,7 +6803,7 @@
         <p:spPr>
           <a:xfrm>
             <a:off x="0" y="0"/>
-            <a:ext cx="12191695" cy="530352"/>
+            <a:ext cx="12191695" cy="585216"/>
           </a:xfrm>
           <a:prstGeom prst="rect">
             <a:avLst/>
@@ -6842,7 +6846,7 @@
         <p:spPr>
           <a:xfrm>
             <a:off x="301752" y="73152"/>
-            <a:ext cx="9144000" cy="411480"/>
+            <a:ext cx="9144000" cy="457200"/>
           </a:xfrm>
           <a:prstGeom prst="rect">
             <a:avLst/>
@@ -6856,7 +6860,7 @@
           <a:lstStyle/>
           <a:p>
             <a:pPr>
-              <a:defRPr sz="1800" b="1">
+              <a:defRPr sz="2000" b="1">
                 <a:solidFill>
                   <a:srgbClr val="FFFFFF"/>
                 </a:solidFill>
@@ -6877,8 +6881,8 @@
         </p:nvSpPr>
         <p:spPr>
           <a:xfrm>
-            <a:off x="10789920" y="128016"/>
-            <a:ext cx="484632" cy="274320"/>
+            <a:off x="10698480" y="137160"/>
+            <a:ext cx="530352" cy="301752"/>
           </a:xfrm>
           <a:prstGeom prst="roundRect">
             <a:avLst/>
@@ -6911,7 +6915,7 @@
           <a:lstStyle/>
           <a:p>
             <a:pPr algn="ctr">
-              <a:defRPr sz="1100" i="1">
+              <a:defRPr sz="1200" i="1" b="1">
                 <a:solidFill>
                   <a:srgbClr val="E8F1F8"/>
                 </a:solidFill>
@@ -6933,7 +6937,7 @@
         <p:spPr>
           <a:xfrm>
             <a:off x="11430000" y="73152"/>
-            <a:ext cx="548640" cy="411480"/>
+            <a:ext cx="548640" cy="457200"/>
           </a:xfrm>
           <a:prstGeom prst="rect">
             <a:avLst/>
@@ -6947,7 +6951,7 @@
           <a:lstStyle/>
           <a:p>
             <a:pPr algn="ctr">
-              <a:defRPr sz="1800" b="1">
+              <a:defRPr sz="2000" b="1">
                 <a:solidFill>
                   <a:srgbClr val="FFFFFF"/>
                 </a:solidFill>
@@ -6983,7 +6987,7 @@
           <a:lstStyle/>
           <a:p>
             <a:pPr algn="r">
-              <a:defRPr sz="800">
+              <a:defRPr sz="900">
                 <a:solidFill>
                   <a:srgbClr val="666666"/>
                 </a:solidFill>
@@ -7004,8 +7008,8 @@
         </p:nvSpPr>
         <p:spPr>
           <a:xfrm>
-            <a:off x="640080" y="868680"/>
-            <a:ext cx="6583680" cy="5029200"/>
+            <a:off x="548640" y="822960"/>
+            <a:ext cx="6766560" cy="5303520"/>
           </a:xfrm>
           <a:prstGeom prst="rect">
             <a:avLst/>
@@ -7022,7 +7026,7 @@
               <a:spcBef>
                 <a:spcPts val="0"/>
               </a:spcBef>
-              <a:defRPr sz="1350" b="1">
+              <a:defRPr sz="2000" b="1">
                 <a:solidFill>
                   <a:srgbClr val="111111"/>
                 </a:solidFill>
@@ -7036,9 +7040,9 @@
           <a:p>
             <a:pPr>
               <a:spcBef>
-                <a:spcPts val="400"/>
+                <a:spcPts val="600"/>
               </a:spcBef>
-              <a:defRPr sz="1250" b="1">
+              <a:defRPr sz="1800" b="1">
                 <a:solidFill>
                   <a:srgbClr val="111111"/>
                 </a:solidFill>
@@ -7052,11 +7056,11 @@
           <a:p>
             <a:pPr>
               <a:spcBef>
-                <a:spcPts val="200"/>
+                <a:spcPts val="300"/>
               </a:spcBef>
-              <a:defRPr sz="1200" b="0">
-                <a:solidFill>
-                  <a:srgbClr val="333333"/>
+              <a:defRPr sz="1650" b="0">
+                <a:solidFill>
+                  <a:srgbClr val="222222"/>
                 </a:solidFill>
                 <a:latin typeface="BIZ UDPGothic"/>
               </a:defRPr>
@@ -7076,9 +7080,9 @@
           <a:p>
             <a:pPr>
               <a:spcBef>
-                <a:spcPts val="1000"/>
+                <a:spcPts val="1400"/>
               </a:spcBef>
-              <a:defRPr sz="1250" b="1">
+              <a:defRPr sz="1800" b="1">
                 <a:solidFill>
                   <a:srgbClr val="111111"/>
                 </a:solidFill>
@@ -7092,11 +7096,11 @@
           <a:p>
             <a:pPr>
               <a:spcBef>
-                <a:spcPts val="200"/>
+                <a:spcPts val="300"/>
               </a:spcBef>
-              <a:defRPr sz="1200" b="0">
-                <a:solidFill>
-                  <a:srgbClr val="333333"/>
+              <a:defRPr sz="1650" b="0">
+                <a:solidFill>
+                  <a:srgbClr val="222222"/>
                 </a:solidFill>
                 <a:latin typeface="BIZ UDPGothic"/>
               </a:defRPr>
@@ -7120,9 +7124,9 @@
           <a:p>
             <a:pPr>
               <a:spcBef>
-                <a:spcPts val="1000"/>
+                <a:spcPts val="1400"/>
               </a:spcBef>
-              <a:defRPr sz="1250" b="1">
+              <a:defRPr sz="1800" b="1">
                 <a:solidFill>
                   <a:srgbClr val="111111"/>
                 </a:solidFill>
@@ -7136,11 +7140,11 @@
           <a:p>
             <a:pPr>
               <a:spcBef>
-                <a:spcPts val="200"/>
+                <a:spcPts val="300"/>
               </a:spcBef>
-              <a:defRPr sz="1200" b="0">
-                <a:solidFill>
-                  <a:srgbClr val="333333"/>
+              <a:defRPr sz="1650" b="0">
+                <a:solidFill>
+                  <a:srgbClr val="222222"/>
                 </a:solidFill>
                 <a:latin typeface="BIZ UDPGothic"/>
               </a:defRPr>
@@ -7171,8 +7175,8 @@
         </p:blipFill>
         <p:spPr>
           <a:xfrm>
-            <a:off x="7406640" y="731520"/>
-            <a:ext cx="4297680" cy="2286000"/>
+            <a:off x="7315200" y="731520"/>
+            <a:ext cx="4480560" cy="2377440"/>
           </a:xfrm>
           <a:prstGeom prst="rect">
             <a:avLst/>
@@ -7195,8 +7199,8 @@
         </p:blipFill>
         <p:spPr>
           <a:xfrm>
-            <a:off x="7406640" y="3108960"/>
-            <a:ext cx="4297680" cy="3017520"/>
+            <a:off x="7315200" y="3200400"/>
+            <a:ext cx="4480560" cy="3108960"/>
           </a:xfrm>
           <a:prstGeom prst="rect">
             <a:avLst/>
@@ -7230,7 +7234,7 @@
         <p:spPr>
           <a:xfrm>
             <a:off x="0" y="0"/>
-            <a:ext cx="12191695" cy="530352"/>
+            <a:ext cx="12191695" cy="585216"/>
           </a:xfrm>
           <a:prstGeom prst="rect">
             <a:avLst/>
@@ -7273,7 +7277,7 @@
         <p:spPr>
           <a:xfrm>
             <a:off x="301752" y="73152"/>
-            <a:ext cx="9144000" cy="411480"/>
+            <a:ext cx="9144000" cy="457200"/>
           </a:xfrm>
           <a:prstGeom prst="rect">
             <a:avLst/>
@@ -7287,7 +7291,7 @@
           <a:lstStyle/>
           <a:p>
             <a:pPr>
-              <a:defRPr sz="1800" b="1">
+              <a:defRPr sz="2000" b="1">
                 <a:solidFill>
                   <a:srgbClr val="FFFFFF"/>
                 </a:solidFill>
@@ -7308,8 +7312,8 @@
         </p:nvSpPr>
         <p:spPr>
           <a:xfrm>
-            <a:off x="10789920" y="128016"/>
-            <a:ext cx="484632" cy="274320"/>
+            <a:off x="10698480" y="137160"/>
+            <a:ext cx="530352" cy="301752"/>
           </a:xfrm>
           <a:prstGeom prst="roundRect">
             <a:avLst/>
@@ -7342,7 +7346,7 @@
           <a:lstStyle/>
           <a:p>
             <a:pPr algn="ctr">
-              <a:defRPr sz="1100" i="1">
+              <a:defRPr sz="1200" i="1" b="1">
                 <a:solidFill>
                   <a:srgbClr val="E8F1F8"/>
                 </a:solidFill>
@@ -7364,7 +7368,7 @@
         <p:spPr>
           <a:xfrm>
             <a:off x="11430000" y="73152"/>
-            <a:ext cx="548640" cy="411480"/>
+            <a:ext cx="548640" cy="457200"/>
           </a:xfrm>
           <a:prstGeom prst="rect">
             <a:avLst/>
@@ -7378,7 +7382,7 @@
           <a:lstStyle/>
           <a:p>
             <a:pPr algn="ctr">
-              <a:defRPr sz="1800" b="1">
+              <a:defRPr sz="2000" b="1">
                 <a:solidFill>
                   <a:srgbClr val="FFFFFF"/>
                 </a:solidFill>
@@ -7414,7 +7418,7 @@
           <a:lstStyle/>
           <a:p>
             <a:pPr algn="r">
-              <a:defRPr sz="800">
+              <a:defRPr sz="900">
                 <a:solidFill>
                   <a:srgbClr val="666666"/>
                 </a:solidFill>
@@ -7435,8 +7439,8 @@
         </p:nvSpPr>
         <p:spPr>
           <a:xfrm>
-            <a:off x="640080" y="868680"/>
-            <a:ext cx="4846320" cy="1371600"/>
+            <a:off x="548640" y="822960"/>
+            <a:ext cx="5120640" cy="1463040"/>
           </a:xfrm>
           <a:prstGeom prst="rect">
             <a:avLst/>
@@ -7453,7 +7457,7 @@
               <a:spcBef>
                 <a:spcPts val="0"/>
               </a:spcBef>
-              <a:defRPr sz="1350" b="1">
+              <a:defRPr sz="2000" b="1">
                 <a:solidFill>
                   <a:srgbClr val="111111"/>
                 </a:solidFill>
@@ -7467,11 +7471,11 @@
           <a:p>
             <a:pPr>
               <a:spcBef>
-                <a:spcPts val="400"/>
+                <a:spcPts val="600"/>
               </a:spcBef>
-              <a:defRPr sz="1200" b="0">
-                <a:solidFill>
-                  <a:srgbClr val="333333"/>
+              <a:defRPr sz="1700" b="0">
+                <a:solidFill>
+                  <a:srgbClr val="222222"/>
                 </a:solidFill>
                 <a:latin typeface="BIZ UDPGothic"/>
               </a:defRPr>
@@ -7494,8 +7498,8 @@
         </p:nvSpPr>
         <p:spPr>
           <a:xfrm>
-            <a:off x="1097280" y="2011680"/>
-            <a:ext cx="3931920" cy="1371600"/>
+            <a:off x="822960" y="2011680"/>
+            <a:ext cx="4389120" cy="1463040"/>
           </a:xfrm>
           <a:prstGeom prst="roundRect">
             <a:avLst/>
@@ -7503,7 +7507,7 @@
           <a:solidFill>
             <a:srgbClr val="EDF5FB"/>
           </a:solidFill>
-          <a:ln w="19050">
+          <a:ln w="22860">
             <a:solidFill>
               <a:srgbClr val="7BA4C7"/>
             </a:solidFill>
@@ -7528,7 +7532,7 @@
           <a:lstStyle/>
           <a:p>
             <a:pPr algn="ctr">
-              <a:defRPr sz="1300" b="1">
+              <a:defRPr sz="1700" b="1">
                 <a:solidFill>
                   <a:srgbClr val="111111"/>
                 </a:solidFill>
@@ -7544,7 +7548,7 @@
               <a:spcBef>
                 <a:spcPts val="400"/>
               </a:spcBef>
-              <a:defRPr sz="2600" b="1">
+              <a:defRPr sz="3200" b="1">
                 <a:solidFill>
                   <a:srgbClr val="00509E"/>
                 </a:solidFill>
@@ -7560,7 +7564,7 @@
               <a:spcBef>
                 <a:spcPts val="200"/>
               </a:spcBef>
-              <a:defRPr sz="1050">
+              <a:defRPr sz="1400">
                 <a:solidFill>
                   <a:srgbClr val="666666"/>
                 </a:solidFill>
@@ -7581,8 +7585,8 @@
         </p:nvSpPr>
         <p:spPr>
           <a:xfrm>
-            <a:off x="1097280" y="3749039"/>
-            <a:ext cx="3931920" cy="1371600"/>
+            <a:off x="822960" y="3749039"/>
+            <a:ext cx="4389120" cy="1463040"/>
           </a:xfrm>
           <a:prstGeom prst="roundRect">
             <a:avLst/>
@@ -7590,7 +7594,7 @@
           <a:solidFill>
             <a:srgbClr val="EDF5FB"/>
           </a:solidFill>
-          <a:ln w="19050">
+          <a:ln w="22860">
             <a:solidFill>
               <a:srgbClr val="7BA4C7"/>
             </a:solidFill>
@@ -7615,7 +7619,7 @@
           <a:lstStyle/>
           <a:p>
             <a:pPr algn="ctr">
-              <a:defRPr sz="1300" b="1">
+              <a:defRPr sz="1700" b="1">
                 <a:solidFill>
                   <a:srgbClr val="111111"/>
                 </a:solidFill>
@@ -7631,7 +7635,7 @@
               <a:spcBef>
                 <a:spcPts val="400"/>
               </a:spcBef>
-              <a:defRPr sz="2600" b="1">
+              <a:defRPr sz="3200" b="1">
                 <a:solidFill>
                   <a:srgbClr val="00509E"/>
                 </a:solidFill>
@@ -7647,7 +7651,7 @@
               <a:spcBef>
                 <a:spcPts val="200"/>
               </a:spcBef>
-              <a:defRPr sz="1050">
+              <a:defRPr sz="1400">
                 <a:solidFill>
                   <a:srgbClr val="666666"/>
                 </a:solidFill>
@@ -7676,8 +7680,8 @@
         </p:blipFill>
         <p:spPr>
           <a:xfrm>
-            <a:off x="5760720" y="731520"/>
-            <a:ext cx="6035040" cy="2651760"/>
+            <a:off x="5669280" y="731520"/>
+            <a:ext cx="6217920" cy="2743200"/>
           </a:xfrm>
           <a:prstGeom prst="rect">
             <a:avLst/>
@@ -7700,8 +7704,8 @@
         </p:blipFill>
         <p:spPr>
           <a:xfrm>
-            <a:off x="5760720" y="3474720"/>
-            <a:ext cx="6035040" cy="2926080"/>
+            <a:off x="5669280" y="3566160"/>
+            <a:ext cx="6217920" cy="2926080"/>
           </a:xfrm>
           <a:prstGeom prst="rect">
             <a:avLst/>
@@ -7735,7 +7739,7 @@
         <p:spPr>
           <a:xfrm>
             <a:off x="0" y="0"/>
-            <a:ext cx="12191695" cy="530352"/>
+            <a:ext cx="12191695" cy="585216"/>
           </a:xfrm>
           <a:prstGeom prst="rect">
             <a:avLst/>
@@ -7778,7 +7782,7 @@
         <p:spPr>
           <a:xfrm>
             <a:off x="301752" y="73152"/>
-            <a:ext cx="9144000" cy="411480"/>
+            <a:ext cx="9144000" cy="457200"/>
           </a:xfrm>
           <a:prstGeom prst="rect">
             <a:avLst/>
@@ -7792,7 +7796,7 @@
           <a:lstStyle/>
           <a:p>
             <a:pPr>
-              <a:defRPr sz="1800" b="1">
+              <a:defRPr sz="2000" b="1">
                 <a:solidFill>
                   <a:srgbClr val="FFFFFF"/>
                 </a:solidFill>
@@ -7813,8 +7817,8 @@
         </p:nvSpPr>
         <p:spPr>
           <a:xfrm>
-            <a:off x="10789920" y="128016"/>
-            <a:ext cx="484632" cy="274320"/>
+            <a:off x="10698480" y="137160"/>
+            <a:ext cx="530352" cy="301752"/>
           </a:xfrm>
           <a:prstGeom prst="roundRect">
             <a:avLst/>
@@ -7847,7 +7851,7 @@
           <a:lstStyle/>
           <a:p>
             <a:pPr algn="ctr">
-              <a:defRPr sz="1100" i="1">
+              <a:defRPr sz="1200" i="1" b="1">
                 <a:solidFill>
                   <a:srgbClr val="E8F1F8"/>
                 </a:solidFill>
@@ -7869,7 +7873,7 @@
         <p:spPr>
           <a:xfrm>
             <a:off x="11430000" y="73152"/>
-            <a:ext cx="548640" cy="411480"/>
+            <a:ext cx="548640" cy="457200"/>
           </a:xfrm>
           <a:prstGeom prst="rect">
             <a:avLst/>
@@ -7883,7 +7887,7 @@
           <a:lstStyle/>
           <a:p>
             <a:pPr algn="ctr">
-              <a:defRPr sz="1800" b="1">
+              <a:defRPr sz="2000" b="1">
                 <a:solidFill>
                   <a:srgbClr val="FFFFFF"/>
                 </a:solidFill>
@@ -7919,7 +7923,7 @@
           <a:lstStyle/>
           <a:p>
             <a:pPr algn="r">
-              <a:defRPr sz="800">
+              <a:defRPr sz="900">
                 <a:solidFill>
                   <a:srgbClr val="666666"/>
                 </a:solidFill>
@@ -7948,8 +7952,8 @@
         </p:blipFill>
         <p:spPr>
           <a:xfrm>
-            <a:off x="2103120" y="731520"/>
-            <a:ext cx="7863840" cy="5394960"/>
+            <a:off x="2194560" y="731520"/>
+            <a:ext cx="7772400" cy="5394960"/>
           </a:xfrm>
           <a:prstGeom prst="rect">
             <a:avLst/>
@@ -7964,8 +7968,8 @@
         </p:nvSpPr>
         <p:spPr>
           <a:xfrm>
-            <a:off x="320040" y="1280160"/>
-            <a:ext cx="1554480" cy="502920"/>
+            <a:off x="228600" y="1280160"/>
+            <a:ext cx="1828800" cy="548640"/>
           </a:xfrm>
           <a:prstGeom prst="roundRect">
             <a:avLst/>
@@ -7973,7 +7977,7 @@
           <a:solidFill>
             <a:srgbClr val="FFFFFF"/>
           </a:solidFill>
-          <a:ln w="15240">
+          <a:ln w="19050">
             <a:solidFill>
               <a:srgbClr val="7BA4C7"/>
             </a:solidFill>
@@ -7998,7 +8002,7 @@
           <a:lstStyle/>
           <a:p>
             <a:pPr algn="ctr">
-              <a:defRPr sz="1100">
+              <a:defRPr sz="1500" b="1">
                 <a:solidFill>
                   <a:srgbClr val="111111"/>
                 </a:solidFill>
@@ -8019,8 +8023,8 @@
         </p:nvSpPr>
         <p:spPr>
           <a:xfrm>
-            <a:off x="320040" y="2103120"/>
-            <a:ext cx="1554480" cy="502920"/>
+            <a:off x="228600" y="2057400"/>
+            <a:ext cx="1828800" cy="548640"/>
           </a:xfrm>
           <a:prstGeom prst="roundRect">
             <a:avLst/>
@@ -8028,7 +8032,7 @@
           <a:solidFill>
             <a:srgbClr val="FFFFFF"/>
           </a:solidFill>
-          <a:ln w="15240">
+          <a:ln w="19050">
             <a:solidFill>
               <a:srgbClr val="7BA4C7"/>
             </a:solidFill>
@@ -8053,7 +8057,7 @@
           <a:lstStyle/>
           <a:p>
             <a:pPr algn="ctr">
-              <a:defRPr sz="1100">
+              <a:defRPr sz="1500" b="1">
                 <a:solidFill>
                   <a:srgbClr val="111111"/>
                 </a:solidFill>
@@ -8074,8 +8078,8 @@
         </p:nvSpPr>
         <p:spPr>
           <a:xfrm>
-            <a:off x="320040" y="2834640"/>
-            <a:ext cx="1554480" cy="502920"/>
+            <a:off x="228600" y="2834640"/>
+            <a:ext cx="1828800" cy="548640"/>
           </a:xfrm>
           <a:prstGeom prst="roundRect">
             <a:avLst/>
@@ -8083,7 +8087,7 @@
           <a:solidFill>
             <a:srgbClr val="FFFFFF"/>
           </a:solidFill>
-          <a:ln w="15240">
+          <a:ln w="19050">
             <a:solidFill>
               <a:srgbClr val="7BA4C7"/>
             </a:solidFill>
@@ -8108,7 +8112,7 @@
           <a:lstStyle/>
           <a:p>
             <a:pPr algn="ctr">
-              <a:defRPr sz="1100">
+              <a:defRPr sz="1500" b="1">
                 <a:solidFill>
                   <a:srgbClr val="111111"/>
                 </a:solidFill>
@@ -8129,8 +8133,8 @@
         </p:nvSpPr>
         <p:spPr>
           <a:xfrm>
-            <a:off x="320040" y="3657600"/>
-            <a:ext cx="1554480" cy="502920"/>
+            <a:off x="228600" y="3611880"/>
+            <a:ext cx="1828800" cy="548640"/>
           </a:xfrm>
           <a:prstGeom prst="roundRect">
             <a:avLst/>
@@ -8138,7 +8142,7 @@
           <a:solidFill>
             <a:srgbClr val="FFFFFF"/>
           </a:solidFill>
-          <a:ln w="15240">
+          <a:ln w="19050">
             <a:solidFill>
               <a:srgbClr val="7BA4C7"/>
             </a:solidFill>
@@ -8163,7 +8167,7 @@
           <a:lstStyle/>
           <a:p>
             <a:pPr algn="ctr">
-              <a:defRPr sz="1100">
+              <a:defRPr sz="1500" b="1">
                 <a:solidFill>
                   <a:srgbClr val="111111"/>
                 </a:solidFill>
@@ -8184,8 +8188,8 @@
         </p:nvSpPr>
         <p:spPr>
           <a:xfrm>
-            <a:off x="914400" y="5120640"/>
-            <a:ext cx="2103120" cy="731520"/>
+            <a:off x="822960" y="5120640"/>
+            <a:ext cx="2377440" cy="777240"/>
           </a:xfrm>
           <a:prstGeom prst="roundRect">
             <a:avLst/>
@@ -8193,7 +8197,7 @@
           <a:solidFill>
             <a:srgbClr val="FFFFFF"/>
           </a:solidFill>
-          <a:ln w="15240">
+          <a:ln w="19050">
             <a:solidFill>
               <a:srgbClr val="7BA4C7"/>
             </a:solidFill>
@@ -8218,7 +8222,7 @@
           <a:lstStyle/>
           <a:p>
             <a:pPr algn="ctr">
-              <a:defRPr sz="1100">
+              <a:defRPr sz="1500" b="1">
                 <a:solidFill>
                   <a:srgbClr val="111111"/>
                 </a:solidFill>
@@ -8261,7 +8265,7 @@
               <a:spcBef>
                 <a:spcPts val="0"/>
               </a:spcBef>
-              <a:defRPr sz="1250" b="1">
+              <a:defRPr sz="1600" b="1">
                 <a:solidFill>
                   <a:srgbClr val="111111"/>
                 </a:solidFill>
@@ -8275,9 +8279,9 @@
           <a:p>
             <a:pPr>
               <a:spcBef>
-                <a:spcPts val="3000"/>
+                <a:spcPts val="2600"/>
               </a:spcBef>
-              <a:defRPr sz="1250" b="1">
+              <a:defRPr sz="1600" b="1">
                 <a:solidFill>
                   <a:srgbClr val="111111"/>
                 </a:solidFill>
@@ -8295,9 +8299,9 @@
           <a:p>
             <a:pPr>
               <a:spcBef>
-                <a:spcPts val="4000"/>
+                <a:spcPts val="3600"/>
               </a:spcBef>
-              <a:defRPr sz="1150" b="1">
+              <a:defRPr sz="1400" b="1">
                 <a:solidFill>
                   <a:srgbClr val="0B3968"/>
                 </a:solidFill>

--- a/public/slides/hvac-precooling-slides.pptx
+++ b/public/slides/hvac-precooling-slides.pptx
@@ -3642,7 +3642,7 @@
               <a:spcBef>
                 <a:spcPts val="0"/>
               </a:spcBef>
-              <a:defRPr sz="2000" b="1">
+              <a:defRPr sz="1900" b="1">
                 <a:solidFill>
                   <a:srgbClr val="111111"/>
                 </a:solidFill>
@@ -3651,6 +3651,38 @@
             </a:pPr>
             <a:r>
               <a:t>■ 課題</a:t>
+            </a:r>
+          </a:p>
+          <a:p>
+            <a:pPr>
+              <a:spcBef>
+                <a:spcPts val="600"/>
+              </a:spcBef>
+              <a:defRPr sz="1650" b="1">
+                <a:solidFill>
+                  <a:srgbClr val="111111"/>
+                </a:solidFill>
+                <a:latin typeface="BIZ UDPGothic"/>
+              </a:defRPr>
+            </a:pPr>
+            <a:r>
+              <a:t>1. 休み明けの補正が1件からの逆算である</a:t>
+            </a:r>
+          </a:p>
+          <a:p>
+            <a:pPr>
+              <a:spcBef>
+                <a:spcPts val="200"/>
+              </a:spcBef>
+              <a:defRPr sz="1500" b="0">
+                <a:solidFill>
+                  <a:srgbClr val="222222"/>
+                </a:solidFill>
+                <a:latin typeface="BIZ UDPGothic"/>
+              </a:defRPr>
+            </a:pPr>
+            <a:r>
+              <a:t>・+2.0℃ は休日明け n=1 から逆算した暫定値で、同じデータでは検証できない</a:t>
             </a:r>
           </a:p>
           <a:p>
@@ -3658,7 +3690,7 @@
               <a:spcBef>
                 <a:spcPts val="800"/>
               </a:spcBef>
-              <a:defRPr sz="1800" b="1">
+              <a:defRPr sz="1650" b="1">
                 <a:solidFill>
                   <a:srgbClr val="111111"/>
                 </a:solidFill>
@@ -3666,7 +3698,151 @@
               </a:defRPr>
             </a:pPr>
             <a:r>
-              <a:t>1. 休み明けの予測の正確性</a:t>
+              <a:t>2. 目的変数そのものに分解能の限界がある</a:t>
+            </a:r>
+          </a:p>
+          <a:p>
+            <a:pPr>
+              <a:spcBef>
+                <a:spcPts val="200"/>
+              </a:spcBef>
+              <a:defRPr sz="1500" b="0">
+                <a:solidFill>
+                  <a:srgbClr val="222222"/>
+                </a:solidFill>
+                <a:latin typeface="BIZ UDPGothic"/>
+              </a:defRPr>
+            </a:pPr>
+            <a:r>
+              <a:t>・室温ログが0.5℃刻みのため到達時刻の特定に幅が出る。平均誤差3.7分と同オーダー</a:t>
+            </a:r>
+          </a:p>
+          <a:p>
+            <a:pPr>
+              <a:spcBef>
+                <a:spcPts val="800"/>
+              </a:spcBef>
+              <a:defRPr sz="1650" b="1">
+                <a:solidFill>
+                  <a:srgbClr val="111111"/>
+                </a:solidFill>
+                <a:latin typeface="BIZ UDPGothic"/>
+              </a:defRPr>
+            </a:pPr>
+            <a:r>
+              <a:t>3. 外気温の観測範囲が狭い</a:t>
+            </a:r>
+          </a:p>
+          <a:p>
+            <a:pPr>
+              <a:spcBef>
+                <a:spcPts val="200"/>
+              </a:spcBef>
+              <a:defRPr sz="1500" b="0">
+                <a:solidFill>
+                  <a:srgbClr val="222222"/>
+                </a:solidFill>
+                <a:latin typeface="BIZ UDPGothic"/>
+              </a:defRPr>
+            </a:pPr>
+            <a:r>
+              <a:t>・2週間・8月下旬のため学習範囲は約28℃前後に集中。猛暑日や涼しい朝は外挿になる</a:t>
+            </a:r>
+          </a:p>
+          <a:p>
+            <a:pPr>
+              <a:spcBef>
+                <a:spcPts val="800"/>
+              </a:spcBef>
+              <a:defRPr sz="1650" b="1">
+                <a:solidFill>
+                  <a:srgbClr val="111111"/>
+                </a:solidFill>
+                <a:latin typeface="BIZ UDPGothic"/>
+              </a:defRPr>
+            </a:pPr>
+            <a:r>
+              <a:t>4. 未達をどこまで許容するかは技術では決められない</a:t>
+            </a:r>
+          </a:p>
+          <a:p>
+            <a:pPr>
+              <a:spcBef>
+                <a:spcPts val="200"/>
+              </a:spcBef>
+              <a:defRPr sz="1500" b="0">
+                <a:solidFill>
+                  <a:srgbClr val="222222"/>
+                </a:solidFill>
+                <a:latin typeface="BIZ UDPGothic"/>
+              </a:defRPr>
+            </a:pPr>
+            <a:r>
+              <a:t>・安全側の分位をどこに置くかは現場が許容できる未達リスク次第。運用値は要合意</a:t>
+            </a:r>
+          </a:p>
+          <a:p>
+            <a:pPr>
+              <a:spcBef>
+                <a:spcPts val="800"/>
+              </a:spcBef>
+              <a:defRPr sz="1650" b="1">
+                <a:solidFill>
+                  <a:srgbClr val="111111"/>
+                </a:solidFill>
+                <a:latin typeface="BIZ UDPGothic"/>
+              </a:defRPr>
+            </a:pPr>
+            <a:r>
+              <a:t>5. 検証が同一期間のバックテストである</a:t>
+            </a:r>
+          </a:p>
+          <a:p>
+            <a:pPr>
+              <a:spcBef>
+                <a:spcPts val="200"/>
+              </a:spcBef>
+              <a:defRPr sz="1500" b="0">
+                <a:solidFill>
+                  <a:srgbClr val="222222"/>
+                </a:solidFill>
+                <a:latin typeface="BIZ UDPGothic"/>
+              </a:defRPr>
+            </a:pPr>
+            <a:r>
+              <a:t>・到達率100%は学習に使った2週間への後ろ向き検証。前向き運用での実証は今後</a:t>
+            </a:r>
+          </a:p>
+          <a:p>
+            <a:pPr>
+              <a:spcBef>
+                <a:spcPts val="1600"/>
+              </a:spcBef>
+              <a:defRPr sz="1900" b="1">
+                <a:solidFill>
+                  <a:srgbClr val="111111"/>
+                </a:solidFill>
+                <a:latin typeface="BIZ UDPGothic"/>
+              </a:defRPr>
+            </a:pPr>
+            <a:r>
+              <a:t>■ 今後の展望</a:t>
+            </a:r>
+          </a:p>
+          <a:p>
+            <a:pPr>
+              <a:spcBef>
+                <a:spcPts val="600"/>
+              </a:spcBef>
+              <a:defRPr sz="1550" b="0">
+                <a:solidFill>
+                  <a:srgbClr val="222222"/>
+                </a:solidFill>
+                <a:latin typeface="BIZ UDPGothic"/>
+              </a:defRPr>
+            </a:pPr>
+            <a:r>
+              <a:t>1. 暖房期への対応 － 未達が高コストという損失の向きは同じ。係数を取り直せば枠組みは流用できる</a:t>
             </a:r>
           </a:p>
           <a:p>
@@ -3674,7 +3850,7 @@
               <a:spcBef>
                 <a:spcPts val="400"/>
               </a:spcBef>
-              <a:defRPr sz="1700" b="0">
+              <a:defRPr sz="1550" b="0">
                 <a:solidFill>
                   <a:srgbClr val="222222"/>
                 </a:solidFill>
@@ -3682,23 +3858,7 @@
               </a:defRPr>
             </a:pPr>
             <a:r>
-              <a:t>・現状は平日運用とほぼ同じモデルを利用しているため、モデルとして適していない可能性</a:t>
-            </a:r>
-          </a:p>
-          <a:p>
-            <a:pPr>
-              <a:spcBef>
-                <a:spcPts val="1400"/>
-              </a:spcBef>
-              <a:defRPr sz="1800" b="1">
-                <a:solidFill>
-                  <a:srgbClr val="111111"/>
-                </a:solidFill>
-                <a:latin typeface="BIZ UDPGothic"/>
-              </a:defRPr>
-            </a:pPr>
-            <a:r>
-              <a:t>2. データ期間が短い</a:t>
+              <a:t>2. 他フロア・他棟への展開 － 躯体の熱容量が異なるため、係数はフロアごとに学習する必要がある</a:t>
             </a:r>
           </a:p>
           <a:p>
@@ -3706,7 +3866,7 @@
               <a:spcBef>
                 <a:spcPts val="400"/>
               </a:spcBef>
-              <a:defRPr sz="1700" b="0">
+              <a:defRPr sz="1550" b="0">
                 <a:solidFill>
                   <a:srgbClr val="222222"/>
                 </a:solidFill>
@@ -3714,87 +3874,23 @@
               </a:defRPr>
             </a:pPr>
             <a:r>
-              <a:t>・詳細なデータは2週間分であったため、より一般的な傾向をとらえきれていない可能性がある</a:t>
+              <a:t>3. 追加変数の検討 － 外気湿度は精度向上がわずかで今回は見送り。データが増えれば再評価の余地</a:t>
             </a:r>
           </a:p>
           <a:p>
             <a:pPr>
               <a:spcBef>
-                <a:spcPts val="2600"/>
+                <a:spcPts val="400"/>
               </a:spcBef>
-              <a:defRPr sz="2000" b="1">
-                <a:solidFill>
-                  <a:srgbClr val="111111"/>
-                </a:solidFill>
-                <a:latin typeface="BIZ UDPGothic"/>
-              </a:defRPr>
-            </a:pPr>
-            <a:r>
-              <a:t>■ 今後の展望</a:t>
-            </a:r>
-          </a:p>
-          <a:p>
-            <a:pPr>
-              <a:spcBef>
-                <a:spcPts val="800"/>
-              </a:spcBef>
-              <a:defRPr sz="1800" b="1">
-                <a:solidFill>
-                  <a:srgbClr val="111111"/>
-                </a:solidFill>
-                <a:latin typeface="BIZ UDPGothic"/>
-              </a:defRPr>
-            </a:pPr>
-            <a:r>
-              <a:t>1. 暖房期への対応</a:t>
-            </a:r>
-          </a:p>
-          <a:p>
-            <a:pPr>
-              <a:spcBef>
-                <a:spcPts val="800"/>
-              </a:spcBef>
-              <a:defRPr sz="1800" b="1">
-                <a:solidFill>
-                  <a:srgbClr val="111111"/>
-                </a:solidFill>
-                <a:latin typeface="BIZ UDPGothic"/>
-              </a:defRPr>
-            </a:pPr>
-            <a:r>
-              <a:t>2. 第二別館内の他フロア、または他棟への展開</a:t>
-            </a:r>
-          </a:p>
-          <a:p>
-            <a:pPr>
-              <a:spcBef>
-                <a:spcPts val="800"/>
-              </a:spcBef>
-              <a:defRPr sz="1800" b="1">
-                <a:solidFill>
-                  <a:srgbClr val="111111"/>
-                </a:solidFill>
-                <a:latin typeface="BIZ UDPGothic"/>
-              </a:defRPr>
-            </a:pPr>
-            <a:r>
-              <a:t>3. 外気温度、設定温度以外の変数の考慮（外気湿度など）</a:t>
-            </a:r>
-          </a:p>
-          <a:p>
-            <a:pPr>
-              <a:spcBef>
-                <a:spcPts val="800"/>
-              </a:spcBef>
-              <a:defRPr sz="1800" b="1">
-                <a:solidFill>
-                  <a:srgbClr val="111111"/>
-                </a:solidFill>
-                <a:latin typeface="BIZ UDPGothic"/>
-              </a:defRPr>
-            </a:pPr>
-            <a:r>
-              <a:t>4. データ読み取り → モデル再学習</a:t>
+              <a:defRPr sz="1550" b="0">
+                <a:solidFill>
+                  <a:srgbClr val="222222"/>
+                </a:solidFill>
+                <a:latin typeface="BIZ UDPGothic"/>
+              </a:defRPr>
+            </a:pPr>
+            <a:r>
+              <a:t>4. 再学習サイクル － 係数はJSON経由で画面へ渡す構造。データを足して学習し直せば画面が追随する</a:t>
             </a:r>
           </a:p>
         </p:txBody>
@@ -4049,7 +4145,7 @@
               <a:spcBef>
                 <a:spcPts val="0"/>
               </a:spcBef>
-              <a:defRPr sz="2000" b="1">
+              <a:defRPr sz="1900" b="1">
                 <a:solidFill>
                   <a:srgbClr val="111111"/>
                 </a:solidFill>
@@ -4057,15 +4153,15 @@
               </a:defRPr>
             </a:pPr>
             <a:r>
-              <a:t>■ 実習を通して</a:t>
+              <a:t>■ 技術面で学んだこと</a:t>
             </a:r>
           </a:p>
           <a:p>
             <a:pPr>
               <a:spcBef>
-                <a:spcPts val="800"/>
+                <a:spcPts val="600"/>
               </a:spcBef>
-              <a:defRPr sz="1750" b="0">
+              <a:defRPr sz="1650" b="0">
                 <a:solidFill>
                   <a:srgbClr val="222222"/>
                 </a:solidFill>
@@ -4073,19 +4169,51 @@
               </a:defRPr>
             </a:pPr>
             <a:r>
-              <a:t>・お客様目線でのアプリケーション開発は相手の要望を想像しながらしなければいけない部分もあり、</a:t>
+              <a:t>・予測精度より先に、いつ・誰が・何を知った状態で決めるかを捉える必要がある</a:t>
             </a:r>
             <a:br/>
             <a:r>
-              <a:t>  難しかった。</a:t>
+              <a:t>　→ 前日夕方に決めるという制約が、室温を使わないモデル設計そのものを決めた</a:t>
             </a:r>
           </a:p>
           <a:p>
             <a:pPr>
               <a:spcBef>
-                <a:spcPts val="3000"/>
+                <a:spcPts val="400"/>
               </a:spcBef>
-              <a:defRPr sz="2000" b="1">
+              <a:defRPr sz="1650" b="0">
+                <a:solidFill>
+                  <a:srgbClr val="222222"/>
+                </a:solidFill>
+                <a:latin typeface="BIZ UDPGothic"/>
+              </a:defRPr>
+            </a:pPr>
+            <a:r>
+              <a:t>・未達と過剰予冷では損失の大きさが違い、平均誤差だけでは運用の判断基準を設計できない</a:t>
+            </a:r>
+          </a:p>
+          <a:p>
+            <a:pPr>
+              <a:spcBef>
+                <a:spcPts val="400"/>
+              </a:spcBef>
+              <a:defRPr sz="1650" b="0">
+                <a:solidFill>
+                  <a:srgbClr val="222222"/>
+                </a:solidFill>
+                <a:latin typeface="BIZ UDPGothic"/>
+              </a:defRPr>
+            </a:pPr>
+            <a:r>
+              <a:t>・当てはまりの良さより、係数の符号が物理的に妥当かを見る必要がある</a:t>
+            </a:r>
+          </a:p>
+          <a:p>
+            <a:pPr>
+              <a:spcBef>
+                <a:spcPts val="1800"/>
+              </a:spcBef>
+              <a:defRPr sz="1900" b="1">
                 <a:solidFill>
                   <a:srgbClr val="111111"/>
                 </a:solidFill>
@@ -4093,15 +4221,79 @@
               </a:defRPr>
             </a:pPr>
             <a:r>
+              <a:t>■ お客様目線での開発</a:t>
+            </a:r>
+          </a:p>
+          <a:p>
+            <a:pPr>
+              <a:spcBef>
+                <a:spcPts val="600"/>
+              </a:spcBef>
+              <a:defRPr sz="1650" b="0">
+                <a:solidFill>
+                  <a:srgbClr val="222222"/>
+                </a:solidFill>
+                <a:latin typeface="BIZ UDPGothic"/>
+              </a:defRPr>
+            </a:pPr>
+            <a:r>
+              <a:t>・BMが最も避けたいのは始業時の未達であり、朝は起動をやり直すことができない</a:t>
+            </a:r>
+          </a:p>
+          <a:p>
+            <a:pPr>
+              <a:spcBef>
+                <a:spcPts val="400"/>
+              </a:spcBef>
+              <a:defRPr sz="1650" b="0">
+                <a:solidFill>
+                  <a:srgbClr val="222222"/>
+                </a:solidFill>
+                <a:latin typeface="BIZ UDPGothic"/>
+              </a:defRPr>
+            </a:pPr>
+            <a:r>
+              <a:t>・だから推奨値だけでなく、根拠と適用限界（外挿警告・予冷時間の内訳）を画面に出す設計にした</a:t>
+            </a:r>
+          </a:p>
+          <a:p>
+            <a:pPr>
+              <a:spcBef>
+                <a:spcPts val="400"/>
+              </a:spcBef>
+              <a:defRPr sz="1650" b="0">
+                <a:solidFill>
+                  <a:srgbClr val="222222"/>
+                </a:solidFill>
+                <a:latin typeface="BIZ UDPGothic"/>
+              </a:defRPr>
+            </a:pPr>
+            <a:r>
+              <a:t>・相手の運用と立場を想像しながら作る難しさと重要性を学んだ</a:t>
+            </a:r>
+          </a:p>
+          <a:p>
+            <a:pPr>
+              <a:spcBef>
+                <a:spcPts val="1800"/>
+              </a:spcBef>
+              <a:defRPr sz="1900" b="1">
+                <a:solidFill>
+                  <a:srgbClr val="111111"/>
+                </a:solidFill>
+                <a:latin typeface="BIZ UDPGothic"/>
+              </a:defRPr>
+            </a:pPr>
+            <a:r>
               <a:t>■ インターンシップを通して</a:t>
             </a:r>
           </a:p>
           <a:p>
             <a:pPr>
               <a:spcBef>
-                <a:spcPts val="800"/>
+                <a:spcPts val="600"/>
               </a:spcBef>
-              <a:defRPr sz="1750" b="0">
+              <a:defRPr sz="1650" b="0">
                 <a:solidFill>
                   <a:srgbClr val="222222"/>
                 </a:solidFill>
@@ -4113,7 +4305,7 @@
             </a:r>
             <a:br/>
             <a:r>
-              <a:t>  様々なものに触れられて、とても実りある2週間でした</a:t>
+              <a:t>　様々なものに触れられて、とても実りある2週間でした</a:t>
             </a:r>
           </a:p>
         </p:txBody>
@@ -6100,15 +6292,15 @@
             </a:r>
             <a:br/>
             <a:r>
-              <a:t>・8:00 の始業時に冷え切っていないとクレーム</a:t>
+              <a:t>・始業時の未達は執務環境に直結し、朝は</a:t>
             </a:r>
             <a:br/>
             <a:r>
-              <a:t>  になる</a:t>
+              <a:t>  やり直しがきかない</a:t>
             </a:r>
             <a:br/>
             <a:r>
-              <a:t>  →かなり余裕のある起動時間設定</a:t>
+              <a:t>  →確実性を優先した起動設定</a:t>
             </a:r>
           </a:p>
         </p:txBody>
@@ -6304,7 +6496,7 @@
               </a:defRPr>
             </a:pPr>
             <a:r>
-              <a:t>5. モデルの開発</a:t>
+              <a:t>5. モデル設計の前提と制約</a:t>
             </a:r>
           </a:p>
         </p:txBody>
@@ -6538,7 +6730,7 @@
               </a:defRPr>
             </a:pPr>
             <a:r>
-              <a:t>・始業時に設定温度未達 → 快適性を損なう(高コスト)</a:t>
+              <a:t>・始業時に設定温度未達 → 執務環境に直結し、朝はやり直しがきかない(高コスト)</a:t>
             </a:r>
             <a:br/>
             <a:r>
@@ -6868,7 +7060,7 @@
               </a:defRPr>
             </a:pPr>
             <a:r>
-              <a:t>6. アプリ開発</a:t>
+              <a:t>6. モデルの構築と工夫</a:t>
             </a:r>
           </a:p>
         </p:txBody>
@@ -7119,6 +7311,22 @@
             <a:br/>
             <a:r>
               <a:t>・データが少ないため、予想外気温に+2.0℃ することで対応</a:t>
+            </a:r>
+          </a:p>
+          <a:p>
+            <a:pPr>
+              <a:spcBef>
+                <a:spcPts val="200"/>
+              </a:spcBef>
+              <a:defRPr sz="1400" b="0">
+                <a:solidFill>
+                  <a:srgbClr val="444444"/>
+                </a:solidFill>
+                <a:latin typeface="BIZ UDPGothic"/>
+              </a:defRPr>
+            </a:pPr>
+            <a:r>
+              <a:t>※ +2.0℃ は n=1 から逆算した暫定値。運用前に実データでの再確認が必要</a:t>
             </a:r>
           </a:p>
           <a:p>
@@ -8314,6 +8522,42 @@
             <a:br/>
             <a:r>
               <a:t>青、赤: 設定温度到達時刻</a:t>
+            </a:r>
+          </a:p>
+        </p:txBody>
+      </p:sp>
+      <p:sp>
+        <p:nvSpPr>
+          <p:cNvPr id="14" name="TextBox 13"/>
+          <p:cNvSpPr txBox="1"/>
+          <p:nvPr/>
+        </p:nvSpPr>
+        <p:spPr>
+          <a:xfrm>
+            <a:off x="301752" y="6263640"/>
+            <a:ext cx="10058400" cy="365760"/>
+          </a:xfrm>
+          <a:prstGeom prst="rect">
+            <a:avLst/>
+          </a:prstGeom>
+          <a:noFill/>
+        </p:spPr>
+        <p:txBody>
+          <a:bodyPr wrap="none">
+            <a:spAutoFit/>
+          </a:bodyPr>
+          <a:lstStyle/>
+          <a:p>
+            <a:pPr>
+              <a:defRPr sz="1300" b="1">
+                <a:solidFill>
+                  <a:srgbClr val="C8102E"/>
+                </a:solidFill>
+                <a:latin typeface="BIZ UDPGothic"/>
+              </a:defRPr>
+            </a:pPr>
+            <a:r>
+              <a:t>※ 画面の数値はダミーデータによる表示例であり、実測値ではない（実データでの検証結果は P7）</a:t>
             </a:r>
           </a:p>
         </p:txBody>

--- a/public/slides/hvac-precooling-slides.pptx
+++ b/public/slides/hvac-precooling-slides.pptx
@@ -3666,7 +3666,7 @@
               </a:defRPr>
             </a:pPr>
             <a:r>
-              <a:t>1. 休み明けの補正が1件からの逆算である</a:t>
+              <a:t>1. 休み明けの補正は1件からの逆算</a:t>
             </a:r>
           </a:p>
           <a:p>
@@ -3682,7 +3682,7 @@
               </a:defRPr>
             </a:pPr>
             <a:r>
-              <a:t>・+2.0℃ は休日明け n=1 から逆算した暫定値で、同じデータでは検証できない</a:t>
+              <a:t>・+2.0℃ は休日明け1件（n=1）から逆算した暫定値で、同じデータでは検証できない</a:t>
             </a:r>
           </a:p>
           <a:p>
@@ -3698,7 +3698,7 @@
               </a:defRPr>
             </a:pPr>
             <a:r>
-              <a:t>2. 目的変数そのものに分解能の限界がある</a:t>
+              <a:t>2. 目的変数の分解能に限界がある</a:t>
             </a:r>
           </a:p>
           <a:p>
@@ -3714,7 +3714,7 @@
               </a:defRPr>
             </a:pPr>
             <a:r>
-              <a:t>・室温ログが0.5℃刻みのため到達時刻の特定に幅が出る。平均誤差3.7分と同オーダー</a:t>
+              <a:t>・室温ログが0.5℃刻みのため、到達時刻の特定に幅が出る。平均誤差3.7分と同程度の大きさ</a:t>
             </a:r>
           </a:p>
           <a:p>
@@ -3746,7 +3746,7 @@
               </a:defRPr>
             </a:pPr>
             <a:r>
-              <a:t>・2週間・8月下旬のため学習範囲は約28℃前後に集中。猛暑日や涼しい朝は外挿になる</a:t>
+              <a:t>・8月下旬の2週間分のため、学習範囲が早朝の狭い気温帯に集中。猛暑日や涼しい朝は外挿になる</a:t>
             </a:r>
           </a:p>
           <a:p>
@@ -3762,7 +3762,7 @@
               </a:defRPr>
             </a:pPr>
             <a:r>
-              <a:t>4. 未達をどこまで許容するかは技術では決められない</a:t>
+              <a:t>4. 未達の許容度は技術では決められない</a:t>
             </a:r>
           </a:p>
           <a:p>
@@ -3778,7 +3778,7 @@
               </a:defRPr>
             </a:pPr>
             <a:r>
-              <a:t>・安全側の分位をどこに置くかは現場が許容できる未達リスク次第。運用値は要合意</a:t>
+              <a:t>・安全側の分位をどこに置くかは、現場が許容できる未達リスク次第。運用値は現場と合意して決める</a:t>
             </a:r>
           </a:p>
           <a:p>
@@ -3794,7 +3794,7 @@
               </a:defRPr>
             </a:pPr>
             <a:r>
-              <a:t>5. 検証が同一期間のバックテストである</a:t>
+              <a:t>5. 検証は同一期間のバックテスト</a:t>
             </a:r>
           </a:p>
           <a:p>
@@ -3810,7 +3810,7 @@
               </a:defRPr>
             </a:pPr>
             <a:r>
-              <a:t>・到達率100%は学習に使った2週間への後ろ向き検証。前向き運用での実証は今後</a:t>
+              <a:t>・到達率100%は、学習に使った2週間に対する後ろ向きの検証。前向き運用での実証はこれから</a:t>
             </a:r>
           </a:p>
           <a:p>
@@ -3858,7 +3858,7 @@
               </a:defRPr>
             </a:pPr>
             <a:r>
-              <a:t>2. 他フロア・他棟への展開 － 躯体の熱容量が異なるため、係数はフロアごとに学習する必要がある</a:t>
+              <a:t>2. 他フロア・他棟への展開 － 躯体の熱容量が異なるため、係数はフロアごとに学習し直す</a:t>
             </a:r>
           </a:p>
           <a:p>
@@ -3874,7 +3874,7 @@
               </a:defRPr>
             </a:pPr>
             <a:r>
-              <a:t>3. 追加変数の検討 － 外気湿度は精度向上がわずかで今回は見送り。データが増えれば再評価の余地</a:t>
+              <a:t>3. 追加変数の検討 － 外気湿度は精度向上がわずかで今回は見送った。データが増えれば再評価の余地がある</a:t>
             </a:r>
           </a:p>
           <a:p>
@@ -3890,7 +3890,7 @@
               </a:defRPr>
             </a:pPr>
             <a:r>
-              <a:t>4. 再学習サイクル － 係数はJSON経由で画面へ渡す構造。データを足して学習し直せば画面が追随する</a:t>
+              <a:t>4. 再学習サイクル － 係数はファイル経由で画面へ渡す構造。学習し直せば画面が自動で追随する</a:t>
             </a:r>
           </a:p>
         </p:txBody>
@@ -4253,7 +4253,7 @@
               </a:defRPr>
             </a:pPr>
             <a:r>
-              <a:t>・だから推奨値だけでなく、根拠と適用限界（外挿警告・予冷時間の内訳）を画面に出す設計にした</a:t>
+              <a:t>・そのため推奨値だけでなく、根拠と適用限界（外挿警告・予冷時間の内訳）を画面に出す設計にした</a:t>
             </a:r>
           </a:p>
           <a:p>
@@ -6730,7 +6730,7 @@
               </a:defRPr>
             </a:pPr>
             <a:r>
-              <a:t>・始業時に設定温度未達 → 執務環境に直結し、朝はやり直しがきかない(高コスト)</a:t>
+              <a:t>・始業時に設定温度未達 → 執務環境に直接影響し、起動のやり直しがきかない(高コスト)</a:t>
             </a:r>
             <a:br/>
             <a:r>

--- a/public/slides/hvac-precooling-slides.pptx
+++ b/public/slides/hvac-precooling-slides.pptx
@@ -6,14 +6,14 @@
   </p:sldMasterIdLst>
   <p:sldIdLst>
     <p:sldId id="256" r:id="rId7"/>
-    <p:sldId id="257" r:id="rId8"/>
-    <p:sldId id="258" r:id="rId9"/>
-    <p:sldId id="259" r:id="rId10"/>
-    <p:sldId id="260" r:id="rId11"/>
-    <p:sldId id="261" r:id="rId12"/>
-    <p:sldId id="262" r:id="rId13"/>
-    <p:sldId id="263" r:id="rId14"/>
-    <p:sldId id="264" r:id="rId15"/>
+    <p:sldId id="257" r:id="rId9"/>
+    <p:sldId id="258" r:id="rId10"/>
+    <p:sldId id="259" r:id="rId11"/>
+    <p:sldId id="260" r:id="rId12"/>
+    <p:sldId id="261" r:id="rId13"/>
+    <p:sldId id="262" r:id="rId14"/>
+    <p:sldId id="263" r:id="rId15"/>
+    <p:sldId id="264" r:id="rId16"/>
   </p:sldIdLst>
   <p:sldSz cx="12191695" cy="6858000" type="screen4x3"/>
   <p:notesSz cx="6858000" cy="9144000"/>
@@ -113,6 +113,986 @@
     </a:lvl9pPr>
   </p:defaultTextStyle>
 </p:presentation>
+</file>
+
+<file path=ppt/notesMasters/notesMaster1.xml><?xml version="1.0" encoding="utf-8"?>
+<p:notesMaster xmlns:a="http://schemas.openxmlformats.org/drawingml/2006/main" xmlns:p="http://schemas.openxmlformats.org/presentationml/2006/main" xmlns:r="http://schemas.openxmlformats.org/officeDocument/2006/relationships">
+  <p:cSld>
+    <p:bg>
+      <p:bgRef idx="1001">
+        <a:schemeClr val="bg1"/>
+      </p:bgRef>
+    </p:bg>
+    <p:spTree>
+      <p:nvGrpSpPr>
+        <p:cNvPr id="1" name=""/>
+        <p:cNvGrpSpPr/>
+        <p:nvPr/>
+      </p:nvGrpSpPr>
+      <p:grpSpPr>
+        <a:xfrm>
+          <a:off x="0" y="0"/>
+          <a:ext cx="0" cy="0"/>
+          <a:chOff x="0" y="0"/>
+          <a:chExt cx="0" cy="0"/>
+        </a:xfrm>
+      </p:grpSpPr>
+      <p:sp>
+        <p:nvSpPr>
+          <p:cNvPr id="2" name="Header Placeholder 1"/>
+          <p:cNvSpPr>
+            <a:spLocks noGrp="1"/>
+          </p:cNvSpPr>
+          <p:nvPr>
+            <p:ph type="hdr" sz="quarter"/>
+          </p:nvPr>
+        </p:nvSpPr>
+        <p:spPr>
+          <a:xfrm>
+            <a:off x="0" y="0"/>
+            <a:ext cx="2971800" cy="457200"/>
+          </a:xfrm>
+          <a:prstGeom prst="rect">
+            <a:avLst/>
+          </a:prstGeom>
+        </p:spPr>
+        <p:txBody>
+          <a:bodyPr vert="horz" lIns="91440" tIns="45720" rIns="91440" bIns="45720" rtlCol="0"/>
+          <a:lstStyle>
+            <a:lvl1pPr algn="l">
+              <a:defRPr sz="1200"/>
+            </a:lvl1pPr>
+          </a:lstStyle>
+          <a:p>
+            <a:endParaRPr lang="en-US"/>
+          </a:p>
+        </p:txBody>
+      </p:sp>
+      <p:sp>
+        <p:nvSpPr>
+          <p:cNvPr id="3" name="Date Placeholder 2"/>
+          <p:cNvSpPr>
+            <a:spLocks noGrp="1"/>
+          </p:cNvSpPr>
+          <p:nvPr>
+            <p:ph type="dt" idx="1"/>
+          </p:nvPr>
+        </p:nvSpPr>
+        <p:spPr>
+          <a:xfrm>
+            <a:off x="3884613" y="0"/>
+            <a:ext cx="2971800" cy="457200"/>
+          </a:xfrm>
+          <a:prstGeom prst="rect">
+            <a:avLst/>
+          </a:prstGeom>
+        </p:spPr>
+        <p:txBody>
+          <a:bodyPr vert="horz" lIns="91440" tIns="45720" rIns="91440" bIns="45720" rtlCol="0"/>
+          <a:lstStyle>
+            <a:lvl1pPr algn="r">
+              <a:defRPr sz="1200"/>
+            </a:lvl1pPr>
+          </a:lstStyle>
+          <a:p>
+            <a:fld id="{0F89C1C7-3DCD-1040-A9CF-14679D8B5DDD}" type="datetimeFigureOut">
+              <a:rPr lang="en-US" smtClean="0"/>
+              <a:t>10/17/16</a:t>
+            </a:fld>
+            <a:endParaRPr lang="en-US"/>
+          </a:p>
+        </p:txBody>
+      </p:sp>
+      <p:sp>
+        <p:nvSpPr>
+          <p:cNvPr id="4" name="Slide Image Placeholder 3"/>
+          <p:cNvSpPr>
+            <a:spLocks noGrp="1" noRot="1" noChangeAspect="1"/>
+          </p:cNvSpPr>
+          <p:nvPr>
+            <p:ph type="sldImg" idx="2"/>
+          </p:nvPr>
+        </p:nvSpPr>
+        <p:spPr>
+          <a:xfrm>
+            <a:off x="1143000" y="685800"/>
+            <a:ext cx="4572000" cy="3429000"/>
+          </a:xfrm>
+          <a:prstGeom prst="rect">
+            <a:avLst/>
+          </a:prstGeom>
+          <a:noFill/>
+          <a:ln w="12700">
+            <a:solidFill>
+              <a:prstClr val="black"/>
+            </a:solidFill>
+          </a:ln>
+        </p:spPr>
+        <p:txBody>
+          <a:bodyPr vert="horz" lIns="91440" tIns="45720" rIns="91440" bIns="45720" rtlCol="0" anchor="ctr"/>
+          <a:lstStyle/>
+          <a:p>
+            <a:endParaRPr lang="en-US"/>
+          </a:p>
+        </p:txBody>
+      </p:sp>
+      <p:sp>
+        <p:nvSpPr>
+          <p:cNvPr id="5" name="Notes Placeholder 4"/>
+          <p:cNvSpPr>
+            <a:spLocks noGrp="1"/>
+          </p:cNvSpPr>
+          <p:nvPr>
+            <p:ph type="body" sz="quarter" idx="3"/>
+          </p:nvPr>
+        </p:nvSpPr>
+        <p:spPr>
+          <a:xfrm>
+            <a:off x="685800" y="4343400"/>
+            <a:ext cx="5486400" cy="4114800"/>
+          </a:xfrm>
+          <a:prstGeom prst="rect">
+            <a:avLst/>
+          </a:prstGeom>
+        </p:spPr>
+        <p:txBody>
+          <a:bodyPr vert="horz" lIns="91440" tIns="45720" rIns="91440" bIns="45720" rtlCol="0"/>
+          <a:lstStyle/>
+          <a:p>
+            <a:pPr lvl="0"/>
+            <a:r>
+              <a:rPr lang="en-US" smtClean="0"/>
+              <a:t>Click to edit Master text styles</a:t>
+            </a:r>
+          </a:p>
+          <a:p>
+            <a:pPr lvl="1"/>
+            <a:r>
+              <a:rPr lang="en-US" smtClean="0"/>
+              <a:t>Second level</a:t>
+            </a:r>
+          </a:p>
+          <a:p>
+            <a:pPr lvl="2"/>
+            <a:r>
+              <a:rPr lang="en-US" smtClean="0"/>
+              <a:t>Third level</a:t>
+            </a:r>
+          </a:p>
+          <a:p>
+            <a:pPr lvl="3"/>
+            <a:r>
+              <a:rPr lang="en-US" smtClean="0"/>
+              <a:t>Fourth level</a:t>
+            </a:r>
+          </a:p>
+          <a:p>
+            <a:pPr lvl="4"/>
+            <a:r>
+              <a:rPr lang="en-US" smtClean="0"/>
+              <a:t>Fifth level</a:t>
+            </a:r>
+            <a:endParaRPr lang="en-US"/>
+          </a:p>
+        </p:txBody>
+      </p:sp>
+      <p:sp>
+        <p:nvSpPr>
+          <p:cNvPr id="6" name="Footer Placeholder 5"/>
+          <p:cNvSpPr>
+            <a:spLocks noGrp="1"/>
+          </p:cNvSpPr>
+          <p:nvPr>
+            <p:ph type="ftr" sz="quarter" idx="4"/>
+          </p:nvPr>
+        </p:nvSpPr>
+        <p:spPr>
+          <a:xfrm>
+            <a:off x="0" y="8685213"/>
+            <a:ext cx="2971800" cy="457200"/>
+          </a:xfrm>
+          <a:prstGeom prst="rect">
+            <a:avLst/>
+          </a:prstGeom>
+        </p:spPr>
+        <p:txBody>
+          <a:bodyPr vert="horz" lIns="91440" tIns="45720" rIns="91440" bIns="45720" rtlCol="0" anchor="b"/>
+          <a:lstStyle>
+            <a:lvl1pPr algn="l">
+              <a:defRPr sz="1200"/>
+            </a:lvl1pPr>
+          </a:lstStyle>
+          <a:p>
+            <a:endParaRPr lang="en-US"/>
+          </a:p>
+        </p:txBody>
+      </p:sp>
+      <p:sp>
+        <p:nvSpPr>
+          <p:cNvPr id="7" name="Slide Number Placeholder 6"/>
+          <p:cNvSpPr>
+            <a:spLocks noGrp="1"/>
+          </p:cNvSpPr>
+          <p:nvPr>
+            <p:ph type="sldNum" sz="quarter" idx="5"/>
+          </p:nvPr>
+        </p:nvSpPr>
+        <p:spPr>
+          <a:xfrm>
+            <a:off x="3884613" y="8685213"/>
+            <a:ext cx="2971800" cy="457200"/>
+          </a:xfrm>
+          <a:prstGeom prst="rect">
+            <a:avLst/>
+          </a:prstGeom>
+        </p:spPr>
+        <p:txBody>
+          <a:bodyPr vert="horz" lIns="91440" tIns="45720" rIns="91440" bIns="45720" rtlCol="0" anchor="b"/>
+          <a:lstStyle>
+            <a:lvl1pPr algn="r">
+              <a:defRPr sz="1200"/>
+            </a:lvl1pPr>
+          </a:lstStyle>
+          <a:p>
+            <a:fld id="{BB5E49A5-4136-284D-997B-48E1D791AD67}" type="slidenum">
+              <a:rPr lang="en-US" smtClean="0"/>
+              <a:t>‹#›</a:t>
+            </a:fld>
+            <a:endParaRPr lang="en-US"/>
+          </a:p>
+        </p:txBody>
+      </p:sp>
+    </p:spTree>
+    <p:extLst>
+      <p:ext uri="{BB962C8B-B14F-4D97-AF65-F5344CB8AC3E}">
+        <p14:creationId xmlns:p14="http://schemas.microsoft.com/office/powerpoint/2010/main" val="2623252185"/>
+      </p:ext>
+    </p:extLst>
+  </p:cSld>
+  <p:clrMap bg1="lt1" tx1="dk1" bg2="lt2" tx2="dk2" accent1="accent1" accent2="accent2" accent3="accent3" accent4="accent4" accent5="accent5" accent6="accent6" hlink="hlink" folHlink="folHlink"/>
+  <p:notesStyle>
+    <a:lvl1pPr marL="0" algn="l" defTabSz="457200" rtl="0" eaLnBrk="1" latinLnBrk="0" hangingPunct="1">
+      <a:defRPr sz="1200" kern="1200">
+        <a:solidFill>
+          <a:schemeClr val="tx1"/>
+        </a:solidFill>
+        <a:latin typeface="+mn-lt"/>
+        <a:ea typeface="+mn-ea"/>
+        <a:cs typeface="+mn-cs"/>
+      </a:defRPr>
+    </a:lvl1pPr>
+    <a:lvl2pPr marL="457200" algn="l" defTabSz="457200" rtl="0" eaLnBrk="1" latinLnBrk="0" hangingPunct="1">
+      <a:defRPr sz="1200" kern="1200">
+        <a:solidFill>
+          <a:schemeClr val="tx1"/>
+        </a:solidFill>
+        <a:latin typeface="+mn-lt"/>
+        <a:ea typeface="+mn-ea"/>
+        <a:cs typeface="+mn-cs"/>
+      </a:defRPr>
+    </a:lvl2pPr>
+    <a:lvl3pPr marL="914400" algn="l" defTabSz="457200" rtl="0" eaLnBrk="1" latinLnBrk="0" hangingPunct="1">
+      <a:defRPr sz="1200" kern="1200">
+        <a:solidFill>
+          <a:schemeClr val="tx1"/>
+        </a:solidFill>
+        <a:latin typeface="+mn-lt"/>
+        <a:ea typeface="+mn-ea"/>
+        <a:cs typeface="+mn-cs"/>
+      </a:defRPr>
+    </a:lvl3pPr>
+    <a:lvl4pPr marL="1371600" algn="l" defTabSz="457200" rtl="0" eaLnBrk="1" latinLnBrk="0" hangingPunct="1">
+      <a:defRPr sz="1200" kern="1200">
+        <a:solidFill>
+          <a:schemeClr val="tx1"/>
+        </a:solidFill>
+        <a:latin typeface="+mn-lt"/>
+        <a:ea typeface="+mn-ea"/>
+        <a:cs typeface="+mn-cs"/>
+      </a:defRPr>
+    </a:lvl4pPr>
+    <a:lvl5pPr marL="1828800" algn="l" defTabSz="457200" rtl="0" eaLnBrk="1" latinLnBrk="0" hangingPunct="1">
+      <a:defRPr sz="1200" kern="1200">
+        <a:solidFill>
+          <a:schemeClr val="tx1"/>
+        </a:solidFill>
+        <a:latin typeface="+mn-lt"/>
+        <a:ea typeface="+mn-ea"/>
+        <a:cs typeface="+mn-cs"/>
+      </a:defRPr>
+    </a:lvl5pPr>
+    <a:lvl6pPr marL="2286000" algn="l" defTabSz="457200" rtl="0" eaLnBrk="1" latinLnBrk="0" hangingPunct="1">
+      <a:defRPr sz="1200" kern="1200">
+        <a:solidFill>
+          <a:schemeClr val="tx1"/>
+        </a:solidFill>
+        <a:latin typeface="+mn-lt"/>
+        <a:ea typeface="+mn-ea"/>
+        <a:cs typeface="+mn-cs"/>
+      </a:defRPr>
+    </a:lvl6pPr>
+    <a:lvl7pPr marL="2743200" algn="l" defTabSz="457200" rtl="0" eaLnBrk="1" latinLnBrk="0" hangingPunct="1">
+      <a:defRPr sz="1200" kern="1200">
+        <a:solidFill>
+          <a:schemeClr val="tx1"/>
+        </a:solidFill>
+        <a:latin typeface="+mn-lt"/>
+        <a:ea typeface="+mn-ea"/>
+        <a:cs typeface="+mn-cs"/>
+      </a:defRPr>
+    </a:lvl7pPr>
+    <a:lvl8pPr marL="3200400" algn="l" defTabSz="457200" rtl="0" eaLnBrk="1" latinLnBrk="0" hangingPunct="1">
+      <a:defRPr sz="1200" kern="1200">
+        <a:solidFill>
+          <a:schemeClr val="tx1"/>
+        </a:solidFill>
+        <a:latin typeface="+mn-lt"/>
+        <a:ea typeface="+mn-ea"/>
+        <a:cs typeface="+mn-cs"/>
+      </a:defRPr>
+    </a:lvl8pPr>
+    <a:lvl9pPr marL="3657600" algn="l" defTabSz="457200" rtl="0" eaLnBrk="1" latinLnBrk="0" hangingPunct="1">
+      <a:defRPr sz="1200" kern="1200">
+        <a:solidFill>
+          <a:schemeClr val="tx1"/>
+        </a:solidFill>
+        <a:latin typeface="+mn-lt"/>
+        <a:ea typeface="+mn-ea"/>
+        <a:cs typeface="+mn-cs"/>
+      </a:defRPr>
+    </a:lvl9pPr>
+  </p:notesStyle>
+</p:notesMaster>
+</file>
+
+<file path=ppt/notesSlides/notesSlide1.xml><?xml version="1.0" encoding="utf-8"?>
+<p:notes xmlns:a="http://schemas.openxmlformats.org/drawingml/2006/main" xmlns:p="http://schemas.openxmlformats.org/presentationml/2006/main" xmlns:r="http://schemas.openxmlformats.org/officeDocument/2006/relationships">
+  <p:cSld>
+    <p:spTree>
+      <p:nvGrpSpPr>
+        <p:cNvPr id="1" name=""/>
+        <p:cNvGrpSpPr/>
+        <p:nvPr/>
+      </p:nvGrpSpPr>
+      <p:grpSpPr>
+        <a:xfrm>
+          <a:off x="0" y="0"/>
+          <a:ext cx="0" cy="0"/>
+          <a:chOff x="0" y="0"/>
+          <a:chExt cx="0" cy="0"/>
+        </a:xfrm>
+      </p:grpSpPr>
+      <p:sp>
+        <p:nvSpPr>
+          <p:cNvPr id="2" name="Slide Image Placeholder 1"/>
+          <p:cNvSpPr>
+            <a:spLocks noGrp="1"/>
+          </p:cNvSpPr>
+          <p:nvPr>
+            <p:ph type="sldImg" idx="2"/>
+          </p:nvPr>
+        </p:nvSpPr>
+        <p:spPr/>
+      </p:sp>
+      <p:sp>
+        <p:nvSpPr>
+          <p:cNvPr id="3" name="Notes Placeholder 2"/>
+          <p:cNvSpPr>
+            <a:spLocks noGrp="1"/>
+          </p:cNvSpPr>
+          <p:nvPr>
+            <p:ph type="body" idx="3" sz="quarter"/>
+          </p:nvPr>
+        </p:nvSpPr>
+        <p:spPr/>
+        <p:txBody>
+          <a:bodyPr/>
+          <a:lstStyle/>
+          <a:p>
+            <a:r>
+              <a:t>本日、「空調熱源の起動時刻を翌朝の気温予報から決める、非住宅省エネ効果可視化アプリの開発」というテーマで、2週間のインターンシップ成果報告をさせていただきます。北海道大学大学院の越海斗と申します。よろしくお願いいたします。</a:t>
+            </a:r>
+          </a:p>
+        </p:txBody>
+      </p:sp>
+      <p:sp>
+        <p:nvSpPr>
+          <p:cNvPr id="4" name="Slide Number Placeholder 3"/>
+          <p:cNvSpPr>
+            <a:spLocks noGrp="1"/>
+          </p:cNvSpPr>
+          <p:nvPr>
+            <p:ph type="sldNum" idx="5" sz="quarter"/>
+          </p:nvPr>
+        </p:nvSpPr>
+        <p:spPr/>
+      </p:sp>
+    </p:spTree>
+  </p:cSld>
+  <p:clrMapOvr>
+    <a:masterClrMapping/>
+  </p:clrMapOvr>
+</p:notes>
+</file>
+
+<file path=ppt/notesSlides/notesSlide2.xml><?xml version="1.0" encoding="utf-8"?>
+<p:notes xmlns:a="http://schemas.openxmlformats.org/drawingml/2006/main" xmlns:p="http://schemas.openxmlformats.org/presentationml/2006/main" xmlns:r="http://schemas.openxmlformats.org/officeDocument/2006/relationships">
+  <p:cSld>
+    <p:spTree>
+      <p:nvGrpSpPr>
+        <p:cNvPr id="1" name=""/>
+        <p:cNvGrpSpPr/>
+        <p:nvPr/>
+      </p:nvGrpSpPr>
+      <p:grpSpPr>
+        <a:xfrm>
+          <a:off x="0" y="0"/>
+          <a:ext cx="0" cy="0"/>
+          <a:chOff x="0" y="0"/>
+          <a:chExt cx="0" cy="0"/>
+        </a:xfrm>
+      </p:grpSpPr>
+      <p:sp>
+        <p:nvSpPr>
+          <p:cNvPr id="2" name="Slide Image Placeholder 1"/>
+          <p:cNvSpPr>
+            <a:spLocks noGrp="1"/>
+          </p:cNvSpPr>
+          <p:nvPr>
+            <p:ph type="sldImg" idx="2"/>
+          </p:nvPr>
+        </p:nvSpPr>
+        <p:spPr/>
+      </p:sp>
+      <p:sp>
+        <p:nvSpPr>
+          <p:cNvPr id="3" name="Notes Placeholder 2"/>
+          <p:cNvSpPr>
+            <a:spLocks noGrp="1"/>
+          </p:cNvSpPr>
+          <p:nvPr>
+            <p:ph type="body" idx="3" sz="quarter"/>
+          </p:nvPr>
+        </p:nvSpPr>
+        <p:spPr/>
+        <p:txBody>
+          <a:bodyPr/>
+          <a:lstStyle/>
+          <a:p>
+            <a:r>
+              <a:t>まず初めに、自己紹介をさせていただきます。私は北海道大学大学院情報科学専攻で、遺伝子ネットワークモデルの制御や投薬順序の最適化に関する研究を行っています。趣味は鉄道旅行です。今回のインターンシップには、「大学では扱えない実機・現場の実データに触れたい」「お客様目線でのシステム開発を学びたい」「関西の活気ある雰囲気を感じたい」という3つの理由から参加いたしました。</a:t>
+            </a:r>
+          </a:p>
+        </p:txBody>
+      </p:sp>
+      <p:sp>
+        <p:nvSpPr>
+          <p:cNvPr id="4" name="Slide Number Placeholder 3"/>
+          <p:cNvSpPr>
+            <a:spLocks noGrp="1"/>
+          </p:cNvSpPr>
+          <p:nvPr>
+            <p:ph type="sldNum" idx="5" sz="quarter"/>
+          </p:nvPr>
+        </p:nvSpPr>
+        <p:spPr/>
+      </p:sp>
+    </p:spTree>
+  </p:cSld>
+  <p:clrMapOvr>
+    <a:masterClrMapping/>
+  </p:clrMapOvr>
+</p:notes>
+</file>
+
+<file path=ppt/notesSlides/notesSlide3.xml><?xml version="1.0" encoding="utf-8"?>
+<p:notes xmlns:a="http://schemas.openxmlformats.org/drawingml/2006/main" xmlns:p="http://schemas.openxmlformats.org/presentationml/2006/main" xmlns:r="http://schemas.openxmlformats.org/officeDocument/2006/relationships">
+  <p:cSld>
+    <p:spTree>
+      <p:nvGrpSpPr>
+        <p:cNvPr id="1" name=""/>
+        <p:cNvGrpSpPr/>
+        <p:nvPr/>
+      </p:nvGrpSpPr>
+      <p:grpSpPr>
+        <a:xfrm>
+          <a:off x="0" y="0"/>
+          <a:ext cx="0" cy="0"/>
+          <a:chOff x="0" y="0"/>
+          <a:chExt cx="0" cy="0"/>
+        </a:xfrm>
+      </p:grpSpPr>
+      <p:sp>
+        <p:nvSpPr>
+          <p:cNvPr id="2" name="Slide Image Placeholder 1"/>
+          <p:cNvSpPr>
+            <a:spLocks noGrp="1"/>
+          </p:cNvSpPr>
+          <p:nvPr>
+            <p:ph type="sldImg" idx="2"/>
+          </p:nvPr>
+        </p:nvSpPr>
+        <p:spPr/>
+      </p:sp>
+      <p:sp>
+        <p:nvSpPr>
+          <p:cNvPr id="3" name="Notes Placeholder 2"/>
+          <p:cNvSpPr>
+            <a:spLocks noGrp="1"/>
+          </p:cNvSpPr>
+          <p:nvPr>
+            <p:ph type="body" idx="3" sz="quarter"/>
+          </p:nvPr>
+        </p:nvSpPr>
+        <p:spPr/>
+        <p:txBody>
+          <a:bodyPr/>
+          <a:lstStyle/>
+          <a:p>
+            <a:r>
+              <a:t>背景と目的です。近年、脱炭素社会の実現やESG投資の拡大に伴い、ビル設備の省エネは企業価値に直結する重要課題となっています。当社ではシミュレーション技術を通じた脱炭素化と企業価値向上に取り組んでおり、その具体策の一つとしてオフィスビルの熱源起動時刻の最適化に着目しました。目指すのは、早朝予冷の無駄を削りつつ、始業時の快適性を確実に守ることです。ビルメンテナンス担当者が根拠を持って安全に起動時刻を判断できるよう、予冷時間予測から削減効果の可視化、意思決定までを支援するシステムを構築しました。</a:t>
+            </a:r>
+          </a:p>
+        </p:txBody>
+      </p:sp>
+      <p:sp>
+        <p:nvSpPr>
+          <p:cNvPr id="4" name="Slide Number Placeholder 3"/>
+          <p:cNvSpPr>
+            <a:spLocks noGrp="1"/>
+          </p:cNvSpPr>
+          <p:nvPr>
+            <p:ph type="sldNum" idx="5" sz="quarter"/>
+          </p:nvPr>
+        </p:nvSpPr>
+        <p:spPr/>
+      </p:sp>
+    </p:spTree>
+  </p:cSld>
+  <p:clrMapOvr>
+    <a:masterClrMapping/>
+  </p:clrMapOvr>
+</p:notes>
+</file>
+
+<file path=ppt/notesSlides/notesSlide4.xml><?xml version="1.0" encoding="utf-8"?>
+<p:notes xmlns:a="http://schemas.openxmlformats.org/drawingml/2006/main" xmlns:p="http://schemas.openxmlformats.org/presentationml/2006/main" xmlns:r="http://schemas.openxmlformats.org/officeDocument/2006/relationships">
+  <p:cSld>
+    <p:spTree>
+      <p:nvGrpSpPr>
+        <p:cNvPr id="1" name=""/>
+        <p:cNvGrpSpPr/>
+        <p:nvPr/>
+      </p:nvGrpSpPr>
+      <p:grpSpPr>
+        <a:xfrm>
+          <a:off x="0" y="0"/>
+          <a:ext cx="0" cy="0"/>
+          <a:chOff x="0" y="0"/>
+          <a:chExt cx="0" cy="0"/>
+        </a:xfrm>
+      </p:grpSpPr>
+      <p:sp>
+        <p:nvSpPr>
+          <p:cNvPr id="2" name="Slide Image Placeholder 1"/>
+          <p:cNvSpPr>
+            <a:spLocks noGrp="1"/>
+          </p:cNvSpPr>
+          <p:nvPr>
+            <p:ph type="sldImg" idx="2"/>
+          </p:nvPr>
+        </p:nvSpPr>
+        <p:spPr/>
+      </p:sp>
+      <p:sp>
+        <p:nvSpPr>
+          <p:cNvPr id="3" name="Notes Placeholder 2"/>
+          <p:cNvSpPr>
+            <a:spLocks noGrp="1"/>
+          </p:cNvSpPr>
+          <p:nvPr>
+            <p:ph type="body" idx="3" sz="quarter"/>
+          </p:nvPr>
+        </p:nvSpPr>
+        <p:spPr/>
+        <p:txBody>
+          <a:bodyPr/>
+          <a:lstStyle/>
+          <a:p>
+            <a:r>
+              <a:t>現場の実態データを分析した結果について説明させていただきます。今回、2025年夏季の第二別館のデータを用いて、外気温・室温・消費電力を分析しました。現状の運用では、前日に翌日の起動時刻を決めており、通常平日5:00、休み明け3:00という早朝一律の起動が行われていました。その結果、6:30〜7:00には設定温度へ到達しており、8:00の始業時までに毎朝1時間以上の過剰予冷が発生し、電力を浪費していることが分かりました。起動時刻を後ろ倒しできる余地は十分にありますが、「どこまで遅らせても始業に間に合うのか」という判断材料がないことが最大の課題でした。</a:t>
+            </a:r>
+          </a:p>
+        </p:txBody>
+      </p:sp>
+      <p:sp>
+        <p:nvSpPr>
+          <p:cNvPr id="4" name="Slide Number Placeholder 3"/>
+          <p:cNvSpPr>
+            <a:spLocks noGrp="1"/>
+          </p:cNvSpPr>
+          <p:nvPr>
+            <p:ph type="sldNum" idx="5" sz="quarter"/>
+          </p:nvPr>
+        </p:nvSpPr>
+        <p:spPr/>
+      </p:sp>
+    </p:spTree>
+  </p:cSld>
+  <p:clrMapOvr>
+    <a:masterClrMapping/>
+  </p:clrMapOvr>
+</p:notes>
+</file>
+
+<file path=ppt/notesSlides/notesSlide5.xml><?xml version="1.0" encoding="utf-8"?>
+<p:notes xmlns:a="http://schemas.openxmlformats.org/drawingml/2006/main" xmlns:p="http://schemas.openxmlformats.org/presentationml/2006/main" xmlns:r="http://schemas.openxmlformats.org/officeDocument/2006/relationships">
+  <p:cSld>
+    <p:spTree>
+      <p:nvGrpSpPr>
+        <p:cNvPr id="1" name=""/>
+        <p:cNvGrpSpPr/>
+        <p:nvPr/>
+      </p:nvGrpSpPr>
+      <p:grpSpPr>
+        <a:xfrm>
+          <a:off x="0" y="0"/>
+          <a:ext cx="0" cy="0"/>
+          <a:chOff x="0" y="0"/>
+          <a:chExt cx="0" cy="0"/>
+        </a:xfrm>
+      </p:grpSpPr>
+      <p:sp>
+        <p:nvSpPr>
+          <p:cNvPr id="2" name="Slide Image Placeholder 1"/>
+          <p:cNvSpPr>
+            <a:spLocks noGrp="1"/>
+          </p:cNvSpPr>
+          <p:nvPr>
+            <p:ph type="sldImg" idx="2"/>
+          </p:nvPr>
+        </p:nvSpPr>
+        <p:spPr/>
+      </p:sp>
+      <p:sp>
+        <p:nvSpPr>
+          <p:cNvPr id="3" name="Notes Placeholder 2"/>
+          <p:cNvSpPr>
+            <a:spLocks noGrp="1"/>
+          </p:cNvSpPr>
+          <p:nvPr>
+            <p:ph type="body" idx="3" sz="quarter"/>
+          </p:nvPr>
+        </p:nvSpPr>
+        <p:spPr/>
+        <p:txBody>
+          <a:bodyPr/>
+          <a:lstStyle/>
+          <a:p>
+            <a:r>
+              <a:t>次に、モデル設計にあたって現場の判断材料をどのように求めたかをご説明します。担当者が前日に知りたいのは、「明日の何時に起動すれば、何時に設定温度に到達するか」です。そこで、過去データから予冷時間を推計するモデルを構築しました。式の基本構造は、外気温と設定温度から求めるベース予冷時間に、安全マージンを加える形です。外気温には前日夕方に取得できる天気予報を用い、設定温度は任意に変更可能としています。また、朝は起動をやり直せないため、予報誤差やモデル精度を見込んだ安全マージンを上乗せして確実に間に合わせます。さらに、休み明けは躯体に熱が残って室温が約2℃高いことが分かったため、外気温に+2℃のオフセットをかけて同じモデルに通す工夫を行いました。</a:t>
+            </a:r>
+          </a:p>
+        </p:txBody>
+      </p:sp>
+      <p:sp>
+        <p:nvSpPr>
+          <p:cNvPr id="4" name="Slide Number Placeholder 3"/>
+          <p:cNvSpPr>
+            <a:spLocks noGrp="1"/>
+          </p:cNvSpPr>
+          <p:nvPr>
+            <p:ph type="sldNum" idx="5" sz="quarter"/>
+          </p:nvPr>
+        </p:nvSpPr>
+        <p:spPr/>
+      </p:sp>
+    </p:spTree>
+  </p:cSld>
+  <p:clrMapOvr>
+    <a:masterClrMapping/>
+  </p:clrMapOvr>
+</p:notes>
+</file>
+
+<file path=ppt/notesSlides/notesSlide6.xml><?xml version="1.0" encoding="utf-8"?>
+<p:notes xmlns:a="http://schemas.openxmlformats.org/drawingml/2006/main" xmlns:p="http://schemas.openxmlformats.org/presentationml/2006/main" xmlns:r="http://schemas.openxmlformats.org/officeDocument/2006/relationships">
+  <p:cSld>
+    <p:spTree>
+      <p:nvGrpSpPr>
+        <p:cNvPr id="1" name=""/>
+        <p:cNvGrpSpPr/>
+        <p:nvPr/>
+      </p:nvGrpSpPr>
+      <p:grpSpPr>
+        <a:xfrm>
+          <a:off x="0" y="0"/>
+          <a:ext cx="0" cy="0"/>
+          <a:chOff x="0" y="0"/>
+          <a:chExt cx="0" cy="0"/>
+        </a:xfrm>
+      </p:grpSpPr>
+      <p:sp>
+        <p:nvSpPr>
+          <p:cNvPr id="2" name="Slide Image Placeholder 1"/>
+          <p:cNvSpPr>
+            <a:spLocks noGrp="1"/>
+          </p:cNvSpPr>
+          <p:nvPr>
+            <p:ph type="sldImg" idx="2"/>
+          </p:nvPr>
+        </p:nvSpPr>
+        <p:spPr/>
+      </p:sp>
+      <p:sp>
+        <p:nvSpPr>
+          <p:cNvPr id="3" name="Notes Placeholder 2"/>
+          <p:cNvSpPr>
+            <a:spLocks noGrp="1"/>
+          </p:cNvSpPr>
+          <p:nvPr>
+            <p:ph type="body" idx="3" sz="quarter"/>
+          </p:nvPr>
+        </p:nvSpPr>
+        <p:spPr/>
+        <p:txBody>
+          <a:bodyPr/>
+          <a:lstStyle/>
+          <a:p>
+            <a:r>
+              <a:t>開発した最適起動モデルを実データに適用した、バックテスト検証結果です。過去データの実測気温推移からモデルで起動時刻を決定し直したところ、全日で8:00始業前の設定温度到達を達成できました。効果として、まず運転時間は平均で約104分短縮され、最大で1時間40分ほど起動を遅らせることができました。その結果、始業前の消費電力量は平均で約36%削減できることを確認いたしました。</a:t>
+            </a:r>
+          </a:p>
+        </p:txBody>
+      </p:sp>
+      <p:sp>
+        <p:nvSpPr>
+          <p:cNvPr id="4" name="Slide Number Placeholder 3"/>
+          <p:cNvSpPr>
+            <a:spLocks noGrp="1"/>
+          </p:cNvSpPr>
+          <p:nvPr>
+            <p:ph type="sldNum" idx="5" sz="quarter"/>
+          </p:nvPr>
+        </p:nvSpPr>
+        <p:spPr/>
+      </p:sp>
+    </p:spTree>
+  </p:cSld>
+  <p:clrMapOvr>
+    <a:masterClrMapping/>
+  </p:clrMapOvr>
+</p:notes>
+</file>
+
+<file path=ppt/notesSlides/notesSlide7.xml><?xml version="1.0" encoding="utf-8"?>
+<p:notes xmlns:a="http://schemas.openxmlformats.org/drawingml/2006/main" xmlns:p="http://schemas.openxmlformats.org/presentationml/2006/main" xmlns:r="http://schemas.openxmlformats.org/officeDocument/2006/relationships">
+  <p:cSld>
+    <p:spTree>
+      <p:nvGrpSpPr>
+        <p:cNvPr id="1" name=""/>
+        <p:cNvGrpSpPr/>
+        <p:nvPr/>
+      </p:nvGrpSpPr>
+      <p:grpSpPr>
+        <a:xfrm>
+          <a:off x="0" y="0"/>
+          <a:ext cx="0" cy="0"/>
+          <a:chOff x="0" y="0"/>
+          <a:chExt cx="0" cy="0"/>
+        </a:xfrm>
+      </p:grpSpPr>
+      <p:sp>
+        <p:nvSpPr>
+          <p:cNvPr id="2" name="Slide Image Placeholder 1"/>
+          <p:cNvSpPr>
+            <a:spLocks noGrp="1"/>
+          </p:cNvSpPr>
+          <p:nvPr>
+            <p:ph type="sldImg" idx="2"/>
+          </p:nvPr>
+        </p:nvSpPr>
+        <p:spPr/>
+      </p:sp>
+      <p:sp>
+        <p:nvSpPr>
+          <p:cNvPr id="3" name="Notes Placeholder 2"/>
+          <p:cNvSpPr>
+            <a:spLocks noGrp="1"/>
+          </p:cNvSpPr>
+          <p:nvPr>
+            <p:ph type="body" idx="3" sz="quarter"/>
+          </p:nvPr>
+        </p:nvSpPr>
+        <p:spPr/>
+        <p:txBody>
+          <a:bodyPr/>
+          <a:lstStyle/>
+          <a:p>
+            <a:r>
+              <a:t>続いて、現場のビルメンテナンス担当者が実際に使用する可視化アプリです。担当者が夕方に翌日の日付を選ぶだけで、天気予報を自動取得し、推奨起動時刻（例えば07:10など）を算出して提示します。単に推奨時刻を出すだけでなく、二軸のトレードオフ曲線によって「起動を早めると電力を消費し、遅らせると到達リスクが高まる」という関係を可視化しています。これにより、担当者が納得感と安心感を持って翌日の起動時刻を決定できます。また、予報気温が過去データの範囲を超える場合は外挿警告を出し、担当者に判断を委ねる安全設計としています。</a:t>
+            </a:r>
+          </a:p>
+        </p:txBody>
+      </p:sp>
+      <p:sp>
+        <p:nvSpPr>
+          <p:cNvPr id="4" name="Slide Number Placeholder 3"/>
+          <p:cNvSpPr>
+            <a:spLocks noGrp="1"/>
+          </p:cNvSpPr>
+          <p:nvPr>
+            <p:ph type="sldNum" idx="5" sz="quarter"/>
+          </p:nvPr>
+        </p:nvSpPr>
+        <p:spPr/>
+      </p:sp>
+    </p:spTree>
+  </p:cSld>
+  <p:clrMapOvr>
+    <a:masterClrMapping/>
+  </p:clrMapOvr>
+</p:notes>
+</file>
+
+<file path=ppt/notesSlides/notesSlide8.xml><?xml version="1.0" encoding="utf-8"?>
+<p:notes xmlns:a="http://schemas.openxmlformats.org/drawingml/2006/main" xmlns:p="http://schemas.openxmlformats.org/presentationml/2006/main" xmlns:r="http://schemas.openxmlformats.org/officeDocument/2006/relationships">
+  <p:cSld>
+    <p:spTree>
+      <p:nvGrpSpPr>
+        <p:cNvPr id="1" name=""/>
+        <p:cNvGrpSpPr/>
+        <p:nvPr/>
+      </p:nvGrpSpPr>
+      <p:grpSpPr>
+        <a:xfrm>
+          <a:off x="0" y="0"/>
+          <a:ext cx="0" cy="0"/>
+          <a:chOff x="0" y="0"/>
+          <a:chExt cx="0" cy="0"/>
+        </a:xfrm>
+      </p:grpSpPr>
+      <p:sp>
+        <p:nvSpPr>
+          <p:cNvPr id="2" name="Slide Image Placeholder 1"/>
+          <p:cNvSpPr>
+            <a:spLocks noGrp="1"/>
+          </p:cNvSpPr>
+          <p:nvPr>
+            <p:ph type="sldImg" idx="2"/>
+          </p:nvPr>
+        </p:nvSpPr>
+        <p:spPr/>
+      </p:sp>
+      <p:sp>
+        <p:nvSpPr>
+          <p:cNvPr id="3" name="Notes Placeholder 2"/>
+          <p:cNvSpPr>
+            <a:spLocks noGrp="1"/>
+          </p:cNvSpPr>
+          <p:nvPr>
+            <p:ph type="body" idx="3" sz="quarter"/>
+          </p:nvPr>
+        </p:nvSpPr>
+        <p:spPr/>
+        <p:txBody>
+          <a:bodyPr/>
+          <a:lstStyle/>
+          <a:p>
+            <a:r>
+              <a:t>結論、今回明らかになった課題と今後の展望です。本実習を通じ、過去データから予冷時間を推計し、起動時刻決定と削減電力量の推定を行う仕組みを確立し、BM向けの可視化アプリを完成させることができました。一方で、休み明けの標本数が少ない点や、室温データの分解能に伴うモデル精度の向上、そして暖房期への対応が今後の課題です。今後は、日々の実運用データを自動で取り込んでモデルを再学習するサイクルの構築や、冬季データを用いた暖房予測モデルの構築へと展開していく予定です。</a:t>
+            </a:r>
+          </a:p>
+        </p:txBody>
+      </p:sp>
+      <p:sp>
+        <p:nvSpPr>
+          <p:cNvPr id="4" name="Slide Number Placeholder 3"/>
+          <p:cNvSpPr>
+            <a:spLocks noGrp="1"/>
+          </p:cNvSpPr>
+          <p:nvPr>
+            <p:ph type="sldNum" idx="5" sz="quarter"/>
+          </p:nvPr>
+        </p:nvSpPr>
+        <p:spPr/>
+      </p:sp>
+    </p:spTree>
+  </p:cSld>
+  <p:clrMapOvr>
+    <a:masterClrMapping/>
+  </p:clrMapOvr>
+</p:notes>
+</file>
+
+<file path=ppt/notesSlides/notesSlide9.xml><?xml version="1.0" encoding="utf-8"?>
+<p:notes xmlns:a="http://schemas.openxmlformats.org/drawingml/2006/main" xmlns:p="http://schemas.openxmlformats.org/presentationml/2006/main" xmlns:r="http://schemas.openxmlformats.org/officeDocument/2006/relationships">
+  <p:cSld>
+    <p:spTree>
+      <p:nvGrpSpPr>
+        <p:cNvPr id="1" name=""/>
+        <p:cNvGrpSpPr/>
+        <p:nvPr/>
+      </p:nvGrpSpPr>
+      <p:grpSpPr>
+        <a:xfrm>
+          <a:off x="0" y="0"/>
+          <a:ext cx="0" cy="0"/>
+          <a:chOff x="0" y="0"/>
+          <a:chExt cx="0" cy="0"/>
+        </a:xfrm>
+      </p:grpSpPr>
+      <p:sp>
+        <p:nvSpPr>
+          <p:cNvPr id="2" name="Slide Image Placeholder 1"/>
+          <p:cNvSpPr>
+            <a:spLocks noGrp="1"/>
+          </p:cNvSpPr>
+          <p:nvPr>
+            <p:ph type="sldImg" idx="2"/>
+          </p:nvPr>
+        </p:nvSpPr>
+        <p:spPr/>
+      </p:sp>
+      <p:sp>
+        <p:nvSpPr>
+          <p:cNvPr id="3" name="Notes Placeholder 2"/>
+          <p:cNvSpPr>
+            <a:spLocks noGrp="1"/>
+          </p:cNvSpPr>
+          <p:nvPr>
+            <p:ph type="body" idx="3" sz="quarter"/>
+          </p:nvPr>
+        </p:nvSpPr>
+        <p:spPr/>
+        <p:txBody>
+          <a:bodyPr/>
+          <a:lstStyle/>
+          <a:p>
+            <a:r>
+              <a:t>最後に、2週間の実習を通した所感です。今回、現場の担当者がどう判断するかという「お客様目線」での開発に取り組み、単にアルゴリズムを作るだけでなく、相手のニーズを汲み取って安全側マージンや可視化画面を設計することの難しさと重要性を深く学びました。また、実際の設備現場や実験住宅の見学など、机上のプログラミングにとどまらない貴重な体験をさせていただき、自分の技術が脱炭素や社会貢献につながるという強い実感を得ることができました。ご指導いただいたメンターの皆様、関係者の皆様に心より感謝申し上げます。ご清聴ありがとうございました。</a:t>
+            </a:r>
+          </a:p>
+        </p:txBody>
+      </p:sp>
+      <p:sp>
+        <p:nvSpPr>
+          <p:cNvPr id="4" name="Slide Number Placeholder 3"/>
+          <p:cNvSpPr>
+            <a:spLocks noGrp="1"/>
+          </p:cNvSpPr>
+          <p:nvPr>
+            <p:ph type="sldNum" idx="5" sz="quarter"/>
+          </p:nvPr>
+        </p:nvSpPr>
+        <p:spPr/>
+      </p:sp>
+    </p:spTree>
+  </p:cSld>
+  <p:clrMapOvr>
+    <a:masterClrMapping/>
+  </p:clrMapOvr>
+</p:notes>
 </file>
 
 <file path=ppt/slideLayouts/slideLayout1.xml><?xml version="1.0" encoding="utf-8"?>
@@ -3105,7 +4085,50 @@
         <p:spPr>
           <a:xfrm>
             <a:off x="0" y="0"/>
-            <a:ext cx="2031949" cy="6857828"/>
+            <a:ext cx="12191695" cy="6858000"/>
+          </a:xfrm>
+          <a:prstGeom prst="rect">
+            <a:avLst/>
+          </a:prstGeom>
+          <a:solidFill>
+            <a:srgbClr val="FFFFFF"/>
+          </a:solidFill>
+          <a:ln>
+            <a:noFill/>
+          </a:ln>
+        </p:spPr>
+        <p:style>
+          <a:lnRef idx="1">
+            <a:schemeClr val="accent1"/>
+          </a:lnRef>
+          <a:fillRef idx="3">
+            <a:schemeClr val="accent1"/>
+          </a:fillRef>
+          <a:effectRef idx="2">
+            <a:schemeClr val="accent1"/>
+          </a:effectRef>
+          <a:fontRef idx="minor">
+            <a:schemeClr val="lt1"/>
+          </a:fontRef>
+        </p:style>
+        <p:txBody>
+          <a:bodyPr rtlCol="0" anchor="ctr"/>
+          <a:lstStyle/>
+          <a:p>
+            <a:pPr algn="ctr"/>
+          </a:p>
+        </p:txBody>
+      </p:sp>
+      <p:sp>
+        <p:nvSpPr>
+          <p:cNvPr id="3" name="Rectangle 2"/>
+          <p:cNvSpPr/>
+          <p:nvPr/>
+        </p:nvSpPr>
+        <p:spPr>
+          <a:xfrm>
+            <a:off x="0" y="0"/>
+            <a:ext cx="2031949" cy="6858000"/>
           </a:xfrm>
           <a:prstGeom prst="rect">
             <a:avLst/>
@@ -3116,7 +4139,6 @@
           <a:ln>
             <a:noFill/>
           </a:ln>
-          <a:effectLst/>
         </p:spPr>
         <p:style>
           <a:lnRef idx="1">
@@ -3142,14 +4164,14 @@
       </p:sp>
       <p:sp>
         <p:nvSpPr>
-          <p:cNvPr id="3" name="TextBox 2"/>
+          <p:cNvPr id="4" name="TextBox 3"/>
           <p:cNvSpPr txBox="1"/>
           <p:nvPr/>
         </p:nvSpPr>
         <p:spPr>
           <a:xfrm>
-            <a:off x="2793930" y="1752556"/>
-            <a:ext cx="8635784" cy="304792"/>
+            <a:off x="2793930" y="1524000"/>
+            <a:ext cx="8889777" cy="4445000"/>
           </a:xfrm>
           <a:prstGeom prst="rect">
             <a:avLst/>
@@ -3157,13 +4179,16 @@
           <a:noFill/>
         </p:spPr>
         <p:txBody>
-          <a:bodyPr wrap="square" lIns="0" rIns="0" tIns="0" bIns="0">
+          <a:bodyPr wrap="square">
             <a:spAutoFit/>
           </a:bodyPr>
           <a:lstStyle/>
           <a:p>
-            <a:pPr algn="l">
-              <a:defRPr sz="1800" b="0">
+            <a:pPr>
+              <a:spcAft>
+                <a:spcPts val="2000"/>
+              </a:spcAft>
+              <a:defRPr sz="1600">
                 <a:solidFill>
                   <a:srgbClr val="555555"/>
                 </a:solidFill>
@@ -3174,31 +4199,11 @@
               <a:t>2026年度夏季インターンシップ 成果報告会</a:t>
             </a:r>
           </a:p>
-        </p:txBody>
-      </p:sp>
-      <p:sp>
-        <p:nvSpPr>
-          <p:cNvPr id="4" name="TextBox 3"/>
-          <p:cNvSpPr txBox="1"/>
-          <p:nvPr/>
-        </p:nvSpPr>
-        <p:spPr>
-          <a:xfrm>
-            <a:off x="2793930" y="2387540"/>
-            <a:ext cx="8889777" cy="558786"/>
-          </a:xfrm>
-          <a:prstGeom prst="rect">
-            <a:avLst/>
-          </a:prstGeom>
-          <a:noFill/>
-        </p:spPr>
-        <p:txBody>
-          <a:bodyPr wrap="square" lIns="0" rIns="0" tIns="0" bIns="0">
-            <a:spAutoFit/>
-          </a:bodyPr>
-          <a:lstStyle/>
-          <a:p>
-            <a:pPr algn="l">
+          <a:p>
+            <a:pPr>
+              <a:spcAft>
+                <a:spcPts val="800"/>
+              </a:spcAft>
               <a:defRPr sz="2800" b="1">
                 <a:solidFill>
                   <a:srgbClr val="111111"/>
@@ -3210,31 +4215,11 @@
               <a:t>空調熱源の起動時刻を、翌朝の気温予報から決める</a:t>
             </a:r>
           </a:p>
-        </p:txBody>
-      </p:sp>
-      <p:sp>
-        <p:nvSpPr>
-          <p:cNvPr id="5" name="TextBox 4"/>
-          <p:cNvSpPr txBox="1"/>
-          <p:nvPr/>
-        </p:nvSpPr>
-        <p:spPr>
-          <a:xfrm>
-            <a:off x="2793930" y="3098722"/>
-            <a:ext cx="8889777" cy="355591"/>
-          </a:xfrm>
-          <a:prstGeom prst="rect">
-            <a:avLst/>
-          </a:prstGeom>
-          <a:noFill/>
-        </p:spPr>
-        <p:txBody>
-          <a:bodyPr wrap="square" lIns="0" rIns="0" tIns="0" bIns="0">
-            <a:spAutoFit/>
-          </a:bodyPr>
-          <a:lstStyle/>
-          <a:p>
-            <a:pPr algn="l">
+          <a:p>
+            <a:pPr>
+              <a:spcAft>
+                <a:spcPts val="3000"/>
+              </a:spcAft>
               <a:defRPr sz="2000" b="1">
                 <a:solidFill>
                   <a:srgbClr val="00509E"/>
@@ -3246,32 +4231,12 @@
               <a:t>非住宅省エネ効果可視化アプリの開発</a:t>
             </a:r>
           </a:p>
-        </p:txBody>
-      </p:sp>
-      <p:sp>
-        <p:nvSpPr>
-          <p:cNvPr id="6" name="TextBox 5"/>
-          <p:cNvSpPr txBox="1"/>
-          <p:nvPr/>
-        </p:nvSpPr>
-        <p:spPr>
-          <a:xfrm>
-            <a:off x="2793930" y="4089297"/>
-            <a:ext cx="8889777" cy="304792"/>
-          </a:xfrm>
-          <a:prstGeom prst="rect">
-            <a:avLst/>
-          </a:prstGeom>
-          <a:noFill/>
-        </p:spPr>
-        <p:txBody>
-          <a:bodyPr wrap="square" lIns="0" rIns="0" tIns="0" bIns="0">
-            <a:spAutoFit/>
-          </a:bodyPr>
-          <a:lstStyle/>
-          <a:p>
-            <a:pPr algn="l">
-              <a:defRPr sz="1400" b="0">
+          <a:p>
+            <a:pPr>
+              <a:spcAft>
+                <a:spcPts val="1400"/>
+              </a:spcAft>
+              <a:defRPr sz="1300">
                 <a:solidFill>
                   <a:srgbClr val="555555"/>
                 </a:solidFill>
@@ -3282,32 +4247,9 @@
               <a:t>システムソリューション開発センター エンジニアリングアプリケーション開発部</a:t>
             </a:r>
           </a:p>
-        </p:txBody>
-      </p:sp>
-      <p:sp>
-        <p:nvSpPr>
-          <p:cNvPr id="7" name="TextBox 6"/>
-          <p:cNvSpPr txBox="1"/>
-          <p:nvPr/>
-        </p:nvSpPr>
-        <p:spPr>
-          <a:xfrm>
-            <a:off x="2793930" y="4775080"/>
-            <a:ext cx="8889777" cy="304792"/>
-          </a:xfrm>
-          <a:prstGeom prst="rect">
-            <a:avLst/>
-          </a:prstGeom>
-          <a:noFill/>
-        </p:spPr>
-        <p:txBody>
-          <a:bodyPr wrap="square" lIns="0" rIns="0" tIns="0" bIns="0">
-            <a:spAutoFit/>
-          </a:bodyPr>
-          <a:lstStyle/>
-          <a:p>
-            <a:pPr algn="l">
-              <a:defRPr sz="1600" b="0">
+          <a:p>
+            <a:pPr>
+              <a:defRPr sz="1400">
                 <a:solidFill>
                   <a:srgbClr val="222222"/>
                 </a:solidFill>
@@ -3318,31 +4260,11 @@
               <a:t>北海道大学大学院 情報科学専攻 修士1年</a:t>
             </a:r>
           </a:p>
-        </p:txBody>
-      </p:sp>
-      <p:sp>
-        <p:nvSpPr>
-          <p:cNvPr id="8" name="TextBox 7"/>
-          <p:cNvSpPr txBox="1"/>
-          <p:nvPr/>
-        </p:nvSpPr>
-        <p:spPr>
-          <a:xfrm>
-            <a:off x="2793930" y="5130671"/>
-            <a:ext cx="5079873" cy="380990"/>
-          </a:xfrm>
-          <a:prstGeom prst="rect">
-            <a:avLst/>
-          </a:prstGeom>
-          <a:noFill/>
-        </p:spPr>
-        <p:txBody>
-          <a:bodyPr wrap="square" lIns="0" rIns="0" tIns="0" bIns="0">
-            <a:spAutoFit/>
-          </a:bodyPr>
-          <a:lstStyle/>
-          <a:p>
-            <a:pPr algn="l">
+          <a:p>
+            <a:pPr>
+              <a:spcAft>
+                <a:spcPts val="2400"/>
+              </a:spcAft>
               <a:defRPr sz="2200" b="1">
                 <a:solidFill>
                   <a:srgbClr val="111111"/>
@@ -3354,32 +4276,9 @@
               <a:t>越 海斗</a:t>
             </a:r>
           </a:p>
-        </p:txBody>
-      </p:sp>
-      <p:sp>
-        <p:nvSpPr>
-          <p:cNvPr id="9" name="TextBox 8"/>
-          <p:cNvSpPr txBox="1"/>
-          <p:nvPr/>
-        </p:nvSpPr>
-        <p:spPr>
-          <a:xfrm>
-            <a:off x="2793930" y="5816454"/>
-            <a:ext cx="5079873" cy="279393"/>
-          </a:xfrm>
-          <a:prstGeom prst="rect">
-            <a:avLst/>
-          </a:prstGeom>
-          <a:noFill/>
-        </p:spPr>
-        <p:txBody>
-          <a:bodyPr wrap="square" lIns="0" rIns="0" tIns="0" bIns="0">
-            <a:spAutoFit/>
-          </a:bodyPr>
-          <a:lstStyle/>
-          <a:p>
-            <a:pPr algn="l">
-              <a:defRPr sz="1400" b="0">
+          <a:p>
+            <a:pPr>
+              <a:defRPr sz="1300">
                 <a:solidFill>
                   <a:srgbClr val="555555"/>
                 </a:solidFill>
@@ -3419,7 +4318,50 @@
         <p:spPr>
           <a:xfrm>
             <a:off x="0" y="0"/>
-            <a:ext cx="12191695" cy="584185"/>
+            <a:ext cx="12191695" cy="6858000"/>
+          </a:xfrm>
+          <a:prstGeom prst="rect">
+            <a:avLst/>
+          </a:prstGeom>
+          <a:solidFill>
+            <a:srgbClr val="FFFFFF"/>
+          </a:solidFill>
+          <a:ln>
+            <a:noFill/>
+          </a:ln>
+        </p:spPr>
+        <p:style>
+          <a:lnRef idx="1">
+            <a:schemeClr val="accent1"/>
+          </a:lnRef>
+          <a:fillRef idx="3">
+            <a:schemeClr val="accent1"/>
+          </a:fillRef>
+          <a:effectRef idx="2">
+            <a:schemeClr val="accent1"/>
+          </a:effectRef>
+          <a:fontRef idx="minor">
+            <a:schemeClr val="lt1"/>
+          </a:fontRef>
+        </p:style>
+        <p:txBody>
+          <a:bodyPr rtlCol="0" anchor="ctr"/>
+          <a:lstStyle/>
+          <a:p>
+            <a:pPr algn="ctr"/>
+          </a:p>
+        </p:txBody>
+      </p:sp>
+      <p:sp>
+        <p:nvSpPr>
+          <p:cNvPr id="3" name="Rectangle 2"/>
+          <p:cNvSpPr/>
+          <p:nvPr/>
+        </p:nvSpPr>
+        <p:spPr>
+          <a:xfrm>
+            <a:off x="0" y="0"/>
+            <a:ext cx="12191695" cy="584200"/>
           </a:xfrm>
           <a:prstGeom prst="rect">
             <a:avLst/>
@@ -3430,7 +4372,6 @@
           <a:ln>
             <a:noFill/>
           </a:ln>
-          <a:effectLst/>
         </p:spPr>
         <p:style>
           <a:lnRef idx="1">
@@ -3456,14 +4397,14 @@
       </p:sp>
       <p:sp>
         <p:nvSpPr>
-          <p:cNvPr id="3" name="TextBox 2"/>
+          <p:cNvPr id="4" name="TextBox 3"/>
           <p:cNvSpPr txBox="1"/>
           <p:nvPr/>
         </p:nvSpPr>
         <p:spPr>
           <a:xfrm>
-            <a:off x="304792" y="101597"/>
-            <a:ext cx="9905752" cy="406389"/>
+            <a:off x="304792" y="50800"/>
+            <a:ext cx="10159745" cy="482600"/>
           </a:xfrm>
           <a:prstGeom prst="rect">
             <a:avLst/>
@@ -3471,13 +4412,13 @@
           <a:noFill/>
         </p:spPr>
         <p:txBody>
-          <a:bodyPr wrap="square" lIns="0" rIns="0" tIns="0" bIns="0">
+          <a:bodyPr wrap="none">
             <a:spAutoFit/>
           </a:bodyPr>
           <a:lstStyle/>
           <a:p>
-            <a:pPr algn="l">
-              <a:defRPr sz="2000" b="1">
+            <a:pPr>
+              <a:defRPr sz="1800" b="1">
                 <a:solidFill>
                   <a:srgbClr val="FFFFFF"/>
                 </a:solidFill>
@@ -3492,14 +4433,69 @@
       </p:sp>
       <p:sp>
         <p:nvSpPr>
-          <p:cNvPr id="4" name="TextBox 3"/>
+          <p:cNvPr id="5" name="Rounded Rectangle 4"/>
+          <p:cNvSpPr/>
+          <p:nvPr/>
+        </p:nvSpPr>
+        <p:spPr>
+          <a:xfrm>
+            <a:off x="10731231" y="139700"/>
+            <a:ext cx="533386" cy="304800"/>
+          </a:xfrm>
+          <a:prstGeom prst="roundRect">
+            <a:avLst/>
+          </a:prstGeom>
+          <a:solidFill>
+            <a:srgbClr val="24588E"/>
+          </a:solidFill>
+          <a:ln>
+            <a:solidFill>
+              <a:srgbClr val="5E8DBE"/>
+            </a:solidFill>
+          </a:ln>
+        </p:spPr>
+        <p:style>
+          <a:lnRef idx="1">
+            <a:schemeClr val="accent1"/>
+          </a:lnRef>
+          <a:fillRef idx="3">
+            <a:schemeClr val="accent1"/>
+          </a:fillRef>
+          <a:effectRef idx="2">
+            <a:schemeClr val="accent1"/>
+          </a:effectRef>
+          <a:fontRef idx="minor">
+            <a:schemeClr val="lt1"/>
+          </a:fontRef>
+        </p:style>
+        <p:txBody>
+          <a:bodyPr rtlCol="0" anchor="ctr"/>
+          <a:lstStyle/>
+          <a:p>
+            <a:pPr algn="ctr">
+              <a:defRPr sz="1000" b="1" i="1">
+                <a:solidFill>
+                  <a:srgbClr val="FFFFFF"/>
+                </a:solidFill>
+                <a:latin typeface="BIZ UDPGothic"/>
+              </a:defRPr>
+            </a:pPr>
+            <a:r>
+              <a:t>IUO</a:t>
+            </a:r>
+          </a:p>
+        </p:txBody>
+      </p:sp>
+      <p:sp>
+        <p:nvSpPr>
+          <p:cNvPr id="6" name="TextBox 5"/>
           <p:cNvSpPr txBox="1"/>
           <p:nvPr/>
         </p:nvSpPr>
         <p:spPr>
           <a:xfrm>
-            <a:off x="11302717" y="101597"/>
-            <a:ext cx="698482" cy="406389"/>
+            <a:off x="11366215" y="50800"/>
+            <a:ext cx="634984" cy="482600"/>
           </a:xfrm>
           <a:prstGeom prst="rect">
             <a:avLst/>
@@ -3507,13 +4503,13 @@
           <a:noFill/>
         </p:spPr>
         <p:txBody>
-          <a:bodyPr wrap="square" lIns="0" rIns="0" tIns="0" bIns="0">
+          <a:bodyPr wrap="none">
             <a:spAutoFit/>
           </a:bodyPr>
           <a:lstStyle/>
           <a:p>
             <a:pPr algn="ctr">
-              <a:defRPr sz="2000" b="1">
+              <a:defRPr sz="1800" b="1">
                 <a:solidFill>
                   <a:srgbClr val="FFFFFF"/>
                 </a:solidFill>
@@ -3528,100 +4524,66 @@
       </p:sp>
       <p:sp>
         <p:nvSpPr>
-          <p:cNvPr id="5" name="TextBox 4"/>
-          <p:cNvSpPr txBox="1"/>
+          <p:cNvPr id="7" name="Rounded Rectangle 6"/>
+          <p:cNvSpPr/>
           <p:nvPr/>
         </p:nvSpPr>
         <p:spPr>
           <a:xfrm>
-            <a:off x="7873803" y="6629234"/>
-            <a:ext cx="4013099" cy="203194"/>
-          </a:xfrm>
-          <a:prstGeom prst="rect">
+            <a:off x="444488" y="825500"/>
+            <a:ext cx="6603834" cy="5588000"/>
+          </a:xfrm>
+          <a:prstGeom prst="roundRect">
             <a:avLst/>
           </a:prstGeom>
-          <a:noFill/>
-        </p:spPr>
-        <p:txBody>
-          <a:bodyPr wrap="square" lIns="0" rIns="0" tIns="0" bIns="0">
-            <a:spAutoFit/>
-          </a:bodyPr>
-          <a:lstStyle/>
-          <a:p>
-            <a:pPr algn="r">
-              <a:defRPr sz="900" b="0">
-                <a:solidFill>
-                  <a:srgbClr val="AAAAAA"/>
-                </a:solidFill>
-                <a:latin typeface="BIZ UDPGothic"/>
-              </a:defRPr>
-            </a:pPr>
-            <a:r>
-              <a:t>© Panasonic Corporation</a:t>
-            </a:r>
-          </a:p>
-        </p:txBody>
-      </p:sp>
-      <p:sp>
-        <p:nvSpPr>
-          <p:cNvPr id="6" name="TextBox 5"/>
-          <p:cNvSpPr txBox="1"/>
-          <p:nvPr/>
-        </p:nvSpPr>
-        <p:spPr>
-          <a:xfrm>
-            <a:off x="571485" y="990575"/>
-            <a:ext cx="6349841" cy="330191"/>
-          </a:xfrm>
-          <a:prstGeom prst="rect">
-            <a:avLst/>
-          </a:prstGeom>
-          <a:noFill/>
-        </p:spPr>
-        <p:txBody>
-          <a:bodyPr wrap="square" lIns="0" rIns="0" tIns="0" bIns="0">
-            <a:spAutoFit/>
-          </a:bodyPr>
-          <a:lstStyle/>
-          <a:p>
-            <a:pPr algn="l">
-              <a:defRPr sz="1800" b="1">
-                <a:solidFill>
-                  <a:srgbClr val="111111"/>
-                </a:solidFill>
-                <a:latin typeface="BIZ UDPGothic"/>
-              </a:defRPr>
-            </a:pPr>
-            <a:r>
-              <a:t>■ 所属と研究</a:t>
-            </a:r>
-          </a:p>
-        </p:txBody>
-      </p:sp>
-      <p:sp>
-        <p:nvSpPr>
-          <p:cNvPr id="7" name="TextBox 6"/>
-          <p:cNvSpPr txBox="1"/>
-          <p:nvPr/>
-        </p:nvSpPr>
-        <p:spPr>
-          <a:xfrm>
-            <a:off x="825479" y="1371565"/>
-            <a:ext cx="6603834" cy="888977"/>
-          </a:xfrm>
-          <a:prstGeom prst="rect">
-            <a:avLst/>
-          </a:prstGeom>
-          <a:noFill/>
-        </p:spPr>
-        <p:txBody>
-          <a:bodyPr wrap="square" lIns="0" rIns="0" tIns="0" bIns="0">
-            <a:spAutoFit/>
-          </a:bodyPr>
-          <a:lstStyle/>
-          <a:p>
-            <a:pPr algn="l">
-              <a:defRPr sz="1600" b="0">
+          <a:solidFill>
+            <a:srgbClr val="EDF5FB"/>
+          </a:solidFill>
+          <a:ln>
+            <a:solidFill>
+              <a:srgbClr val="7BA4C7"/>
+            </a:solidFill>
+          </a:ln>
+        </p:spPr>
+        <p:style>
+          <a:lnRef idx="1">
+            <a:schemeClr val="accent1"/>
+          </a:lnRef>
+          <a:fillRef idx="3">
+            <a:schemeClr val="accent1"/>
+          </a:fillRef>
+          <a:effectRef idx="2">
+            <a:schemeClr val="accent1"/>
+          </a:effectRef>
+          <a:fontRef idx="minor">
+            <a:schemeClr val="lt1"/>
+          </a:fontRef>
+        </p:style>
+        <p:txBody>
+          <a:bodyPr rtlCol="0" anchor="ctr" wrap="square"/>
+          <a:lstStyle/>
+          <a:p>
+            <a:pPr algn="ctr">
+              <a:spcAft>
+                <a:spcPts val="800"/>
+              </a:spcAft>
+              <a:defRPr sz="1600" b="1">
+                <a:solidFill>
+                  <a:srgbClr val="0B3968"/>
+                </a:solidFill>
+                <a:latin typeface="BIZ UDPGothic"/>
+              </a:defRPr>
+            </a:pPr>
+            <a:r>
+              <a:t>■ インターンシップに参加した理由</a:t>
+            </a:r>
+          </a:p>
+          <a:p>
+            <a:pPr>
+              <a:spcAft>
+                <a:spcPts val="400"/>
+              </a:spcAft>
+              <a:defRPr sz="1400">
                 <a:solidFill>
                   <a:srgbClr val="222222"/>
                 </a:solidFill>
@@ -3629,12 +4591,15 @@
               </a:defRPr>
             </a:pPr>
             <a:r>
-              <a:t>北海道大学大学院 情報科学専攻 修士1年</a:t>
-            </a:r>
-          </a:p>
-          <a:p>
-            <a:pPr algn="l">
-              <a:defRPr sz="1600" b="0">
+              <a:t>   ① 大学では扱えない実データに触れる</a:t>
+            </a:r>
+          </a:p>
+          <a:p>
+            <a:pPr>
+              <a:spcAft>
+                <a:spcPts val="400"/>
+              </a:spcAft>
+              <a:defRPr sz="1400">
                 <a:solidFill>
                   <a:srgbClr val="222222"/>
                 </a:solidFill>
@@ -3642,71 +4607,15 @@
               </a:defRPr>
             </a:pPr>
             <a:r>
-              <a:t>遺伝子ネットワークの制御と、投薬順序の最適化</a:t>
-            </a:r>
-          </a:p>
-        </p:txBody>
-      </p:sp>
-      <p:sp>
-        <p:nvSpPr>
-          <p:cNvPr id="8" name="TextBox 7"/>
-          <p:cNvSpPr txBox="1"/>
-          <p:nvPr/>
-        </p:nvSpPr>
-        <p:spPr>
-          <a:xfrm>
-            <a:off x="571485" y="2412939"/>
-            <a:ext cx="6349841" cy="330191"/>
-          </a:xfrm>
-          <a:prstGeom prst="rect">
-            <a:avLst/>
-          </a:prstGeom>
-          <a:noFill/>
-        </p:spPr>
-        <p:txBody>
-          <a:bodyPr wrap="square" lIns="0" rIns="0" tIns="0" bIns="0">
-            <a:spAutoFit/>
-          </a:bodyPr>
-          <a:lstStyle/>
-          <a:p>
-            <a:pPr algn="l">
-              <a:defRPr sz="1800" b="1">
-                <a:solidFill>
-                  <a:srgbClr val="111111"/>
-                </a:solidFill>
-                <a:latin typeface="BIZ UDPGothic"/>
-              </a:defRPr>
-            </a:pPr>
-            <a:r>
-              <a:t>■ 参加した理由</a:t>
-            </a:r>
-          </a:p>
-        </p:txBody>
-      </p:sp>
-      <p:sp>
-        <p:nvSpPr>
-          <p:cNvPr id="9" name="TextBox 8"/>
-          <p:cNvSpPr txBox="1"/>
-          <p:nvPr/>
-        </p:nvSpPr>
-        <p:spPr>
-          <a:xfrm>
-            <a:off x="825479" y="2793930"/>
-            <a:ext cx="6603834" cy="888977"/>
-          </a:xfrm>
-          <a:prstGeom prst="rect">
-            <a:avLst/>
-          </a:prstGeom>
-          <a:noFill/>
-        </p:spPr>
-        <p:txBody>
-          <a:bodyPr wrap="square" lIns="0" rIns="0" tIns="0" bIns="0">
-            <a:spAutoFit/>
-          </a:bodyPr>
-          <a:lstStyle/>
-          <a:p>
-            <a:pPr algn="l">
-              <a:defRPr sz="1600" b="0">
+              <a:t>   ② お客様目線での開発</a:t>
+            </a:r>
+          </a:p>
+          <a:p>
+            <a:pPr>
+              <a:spcAft>
+                <a:spcPts val="400"/>
+              </a:spcAft>
+              <a:defRPr sz="1400">
                 <a:solidFill>
                   <a:srgbClr val="222222"/>
                 </a:solidFill>
@@ -3714,12 +4623,31 @@
               </a:defRPr>
             </a:pPr>
             <a:r>
-              <a:t>大学では触れられない実データを扱い、</a:t>
-            </a:r>
-          </a:p>
-          <a:p>
-            <a:pPr algn="l">
-              <a:defRPr sz="1600" b="0">
+              <a:t>   ③ 関西の雰囲気味を知る</a:t>
+            </a:r>
+          </a:p>
+          <a:p>
+            <a:pPr>
+              <a:spcBef>
+                <a:spcPts val="1400"/>
+              </a:spcBef>
+              <a:spcAft>
+                <a:spcPts val="600"/>
+              </a:spcAft>
+              <a:defRPr sz="1600" b="1">
+                <a:solidFill>
+                  <a:srgbClr val="0B3968"/>
+                </a:solidFill>
+                <a:latin typeface="BIZ UDPGothic"/>
+              </a:defRPr>
+            </a:pPr>
+            <a:r>
+              <a:t>■ 大学での研究</a:t>
+            </a:r>
+          </a:p>
+          <a:p>
+            <a:pPr>
+              <a:defRPr sz="1400">
                 <a:solidFill>
                   <a:srgbClr val="222222"/>
                 </a:solidFill>
@@ -3727,37 +4655,36 @@
               </a:defRPr>
             </a:pPr>
             <a:r>
-              <a:t>使う人の目線でものを作る経験をしたかった</a:t>
-            </a:r>
-          </a:p>
-        </p:txBody>
-      </p:sp>
-      <p:sp>
-        <p:nvSpPr>
-          <p:cNvPr id="10" name="TextBox 9"/>
-          <p:cNvSpPr txBox="1"/>
-          <p:nvPr/>
-        </p:nvSpPr>
-        <p:spPr>
-          <a:xfrm>
-            <a:off x="571485" y="3809904"/>
-            <a:ext cx="6349841" cy="330191"/>
-          </a:xfrm>
-          <a:prstGeom prst="rect">
-            <a:avLst/>
-          </a:prstGeom>
-          <a:noFill/>
-        </p:spPr>
-        <p:txBody>
-          <a:bodyPr wrap="square" lIns="0" rIns="0" tIns="0" bIns="0">
-            <a:spAutoFit/>
-          </a:bodyPr>
-          <a:lstStyle/>
-          <a:p>
-            <a:pPr algn="l">
-              <a:defRPr sz="1800" b="1">
-                <a:solidFill>
-                  <a:srgbClr val="111111"/>
+              <a:t>   遺伝子ネットワークモデルの制御</a:t>
+            </a:r>
+          </a:p>
+          <a:p>
+            <a:pPr>
+              <a:spcAft>
+                <a:spcPts val="800"/>
+              </a:spcAft>
+              <a:defRPr sz="1300">
+                <a:solidFill>
+                  <a:srgbClr val="555555"/>
+                </a:solidFill>
+                <a:latin typeface="BIZ UDPGothic"/>
+              </a:defRPr>
+            </a:pPr>
+            <a:r>
+              <a:t>   病気を治すための投薬順序の最適化</a:t>
+            </a:r>
+          </a:p>
+          <a:p>
+            <a:pPr>
+              <a:spcBef>
+                <a:spcPts val="1400"/>
+              </a:spcBef>
+              <a:spcAft>
+                <a:spcPts val="600"/>
+              </a:spcAft>
+              <a:defRPr sz="1600" b="1">
+                <a:solidFill>
+                  <a:srgbClr val="0B3968"/>
                 </a:solidFill>
                 <a:latin typeface="BIZ UDPGothic"/>
               </a:defRPr>
@@ -3766,32 +4693,9 @@
               <a:t>■ 趣味</a:t>
             </a:r>
           </a:p>
-        </p:txBody>
-      </p:sp>
-      <p:sp>
-        <p:nvSpPr>
-          <p:cNvPr id="11" name="TextBox 10"/>
-          <p:cNvSpPr txBox="1"/>
-          <p:nvPr/>
-        </p:nvSpPr>
-        <p:spPr>
-          <a:xfrm>
-            <a:off x="825479" y="4190895"/>
-            <a:ext cx="6603834" cy="330191"/>
-          </a:xfrm>
-          <a:prstGeom prst="rect">
-            <a:avLst/>
-          </a:prstGeom>
-          <a:noFill/>
-        </p:spPr>
-        <p:txBody>
-          <a:bodyPr wrap="square" lIns="0" rIns="0" tIns="0" bIns="0">
-            <a:spAutoFit/>
-          </a:bodyPr>
-          <a:lstStyle/>
-          <a:p>
-            <a:pPr algn="l">
-              <a:defRPr sz="1600" b="0">
+          <a:p>
+            <a:pPr>
+              <a:defRPr sz="1400">
                 <a:solidFill>
                   <a:srgbClr val="222222"/>
                 </a:solidFill>
@@ -3799,29 +4703,53 @@
               </a:defRPr>
             </a:pPr>
             <a:r>
-              <a:t>鉄道旅行</a:t>
+              <a:t>   鉄道旅行（乗り鉄）</a:t>
             </a:r>
           </a:p>
         </p:txBody>
       </p:sp>
       <p:pic>
         <p:nvPicPr>
-          <p:cNvPr id="12" name="Picture 11" descr="profile_person.png"/>
+          <p:cNvPr id="8" name="Picture 7" descr="profile_person.png"/>
           <p:cNvPicPr>
             <a:picLocks noChangeAspect="1"/>
           </p:cNvPicPr>
           <p:nvPr/>
         </p:nvPicPr>
         <p:blipFill>
-          <a:blip r:embed="rId2"/>
+          <a:blip r:embed="rId3"/>
           <a:stretch>
             <a:fillRect/>
           </a:stretch>
         </p:blipFill>
         <p:spPr>
           <a:xfrm>
-            <a:off x="7492812" y="1015974"/>
-            <a:ext cx="4063898" cy="5079873"/>
+            <a:off x="7429314" y="825500"/>
+            <a:ext cx="4317891" cy="2730500"/>
+          </a:xfrm>
+          <a:prstGeom prst="rect">
+            <a:avLst/>
+          </a:prstGeom>
+        </p:spPr>
+      </p:pic>
+      <p:pic>
+        <p:nvPicPr>
+          <p:cNvPr id="9" name="Picture 8" descr="profile_train.png"/>
+          <p:cNvPicPr>
+            <a:picLocks noChangeAspect="1"/>
+          </p:cNvPicPr>
+          <p:nvPr/>
+        </p:nvPicPr>
+        <p:blipFill>
+          <a:blip r:embed="rId4"/>
+          <a:stretch>
+            <a:fillRect/>
+          </a:stretch>
+        </p:blipFill>
+        <p:spPr>
+          <a:xfrm>
+            <a:off x="7429314" y="3683000"/>
+            <a:ext cx="4317891" cy="2730500"/>
           </a:xfrm>
           <a:prstGeom prst="rect">
             <a:avLst/>
@@ -3855,7 +4783,50 @@
         <p:spPr>
           <a:xfrm>
             <a:off x="0" y="0"/>
-            <a:ext cx="12191695" cy="584185"/>
+            <a:ext cx="12191695" cy="6858000"/>
+          </a:xfrm>
+          <a:prstGeom prst="rect">
+            <a:avLst/>
+          </a:prstGeom>
+          <a:solidFill>
+            <a:srgbClr val="FFFFFF"/>
+          </a:solidFill>
+          <a:ln>
+            <a:noFill/>
+          </a:ln>
+        </p:spPr>
+        <p:style>
+          <a:lnRef idx="1">
+            <a:schemeClr val="accent1"/>
+          </a:lnRef>
+          <a:fillRef idx="3">
+            <a:schemeClr val="accent1"/>
+          </a:fillRef>
+          <a:effectRef idx="2">
+            <a:schemeClr val="accent1"/>
+          </a:effectRef>
+          <a:fontRef idx="minor">
+            <a:schemeClr val="lt1"/>
+          </a:fontRef>
+        </p:style>
+        <p:txBody>
+          <a:bodyPr rtlCol="0" anchor="ctr"/>
+          <a:lstStyle/>
+          <a:p>
+            <a:pPr algn="ctr"/>
+          </a:p>
+        </p:txBody>
+      </p:sp>
+      <p:sp>
+        <p:nvSpPr>
+          <p:cNvPr id="3" name="Rectangle 2"/>
+          <p:cNvSpPr/>
+          <p:nvPr/>
+        </p:nvSpPr>
+        <p:spPr>
+          <a:xfrm>
+            <a:off x="0" y="0"/>
+            <a:ext cx="12191695" cy="584200"/>
           </a:xfrm>
           <a:prstGeom prst="rect">
             <a:avLst/>
@@ -3866,7 +4837,6 @@
           <a:ln>
             <a:noFill/>
           </a:ln>
-          <a:effectLst/>
         </p:spPr>
         <p:style>
           <a:lnRef idx="1">
@@ -3892,14 +4862,14 @@
       </p:sp>
       <p:sp>
         <p:nvSpPr>
-          <p:cNvPr id="3" name="TextBox 2"/>
+          <p:cNvPr id="4" name="TextBox 3"/>
           <p:cNvSpPr txBox="1"/>
           <p:nvPr/>
         </p:nvSpPr>
         <p:spPr>
           <a:xfrm>
-            <a:off x="304792" y="101597"/>
-            <a:ext cx="9905752" cy="406389"/>
+            <a:off x="304792" y="50800"/>
+            <a:ext cx="10159745" cy="482600"/>
           </a:xfrm>
           <a:prstGeom prst="rect">
             <a:avLst/>
@@ -3907,13 +4877,13 @@
           <a:noFill/>
         </p:spPr>
         <p:txBody>
-          <a:bodyPr wrap="square" lIns="0" rIns="0" tIns="0" bIns="0">
+          <a:bodyPr wrap="none">
             <a:spAutoFit/>
           </a:bodyPr>
           <a:lstStyle/>
           <a:p>
-            <a:pPr algn="l">
-              <a:defRPr sz="2000" b="1">
+            <a:pPr>
+              <a:defRPr sz="1800" b="1">
                 <a:solidFill>
                   <a:srgbClr val="FFFFFF"/>
                 </a:solidFill>
@@ -3921,21 +4891,76 @@
               </a:defRPr>
             </a:pPr>
             <a:r>
-              <a:t>2. 現状：毎朝1時間以上、冷やしすぎている</a:t>
-            </a:r>
-          </a:p>
-        </p:txBody>
-      </p:sp>
-      <p:sp>
-        <p:nvSpPr>
-          <p:cNvPr id="4" name="TextBox 3"/>
+              <a:t>2. 背景・目的</a:t>
+            </a:r>
+          </a:p>
+        </p:txBody>
+      </p:sp>
+      <p:sp>
+        <p:nvSpPr>
+          <p:cNvPr id="5" name="Rounded Rectangle 4"/>
+          <p:cNvSpPr/>
+          <p:nvPr/>
+        </p:nvSpPr>
+        <p:spPr>
+          <a:xfrm>
+            <a:off x="10731231" y="139700"/>
+            <a:ext cx="533386" cy="304800"/>
+          </a:xfrm>
+          <a:prstGeom prst="roundRect">
+            <a:avLst/>
+          </a:prstGeom>
+          <a:solidFill>
+            <a:srgbClr val="24588E"/>
+          </a:solidFill>
+          <a:ln>
+            <a:solidFill>
+              <a:srgbClr val="5E8DBE"/>
+            </a:solidFill>
+          </a:ln>
+        </p:spPr>
+        <p:style>
+          <a:lnRef idx="1">
+            <a:schemeClr val="accent1"/>
+          </a:lnRef>
+          <a:fillRef idx="3">
+            <a:schemeClr val="accent1"/>
+          </a:fillRef>
+          <a:effectRef idx="2">
+            <a:schemeClr val="accent1"/>
+          </a:effectRef>
+          <a:fontRef idx="minor">
+            <a:schemeClr val="lt1"/>
+          </a:fontRef>
+        </p:style>
+        <p:txBody>
+          <a:bodyPr rtlCol="0" anchor="ctr"/>
+          <a:lstStyle/>
+          <a:p>
+            <a:pPr algn="ctr">
+              <a:defRPr sz="1000" b="1" i="1">
+                <a:solidFill>
+                  <a:srgbClr val="FFFFFF"/>
+                </a:solidFill>
+                <a:latin typeface="BIZ UDPGothic"/>
+              </a:defRPr>
+            </a:pPr>
+            <a:r>
+              <a:t>IUO</a:t>
+            </a:r>
+          </a:p>
+        </p:txBody>
+      </p:sp>
+      <p:sp>
+        <p:nvSpPr>
+          <p:cNvPr id="6" name="TextBox 5"/>
           <p:cNvSpPr txBox="1"/>
           <p:nvPr/>
         </p:nvSpPr>
         <p:spPr>
           <a:xfrm>
-            <a:off x="11302717" y="101597"/>
-            <a:ext cx="698482" cy="406389"/>
+            <a:off x="11366215" y="50800"/>
+            <a:ext cx="634984" cy="482600"/>
           </a:xfrm>
           <a:prstGeom prst="rect">
             <a:avLst/>
@@ -3943,13 +4968,13 @@
           <a:noFill/>
         </p:spPr>
         <p:txBody>
-          <a:bodyPr wrap="square" lIns="0" rIns="0" tIns="0" bIns="0">
+          <a:bodyPr wrap="none">
             <a:spAutoFit/>
           </a:bodyPr>
           <a:lstStyle/>
           <a:p>
             <a:pPr algn="ctr">
-              <a:defRPr sz="2000" b="1">
+              <a:defRPr sz="1800" b="1">
                 <a:solidFill>
                   <a:srgbClr val="FFFFFF"/>
                 </a:solidFill>
@@ -3964,14 +4989,14 @@
       </p:sp>
       <p:sp>
         <p:nvSpPr>
-          <p:cNvPr id="5" name="TextBox 4"/>
+          <p:cNvPr id="7" name="TextBox 6"/>
           <p:cNvSpPr txBox="1"/>
           <p:nvPr/>
         </p:nvSpPr>
         <p:spPr>
           <a:xfrm>
-            <a:off x="7873803" y="6629234"/>
-            <a:ext cx="4013099" cy="203194"/>
+            <a:off x="571485" y="889000"/>
+            <a:ext cx="11048723" cy="5334000"/>
           </a:xfrm>
           <a:prstGeom prst="rect">
             <a:avLst/>
@@ -3979,85 +5004,32 @@
           <a:noFill/>
         </p:spPr>
         <p:txBody>
-          <a:bodyPr wrap="square" lIns="0" rIns="0" tIns="0" bIns="0">
+          <a:bodyPr wrap="square">
             <a:spAutoFit/>
           </a:bodyPr>
           <a:lstStyle/>
           <a:p>
-            <a:pPr algn="r">
-              <a:defRPr sz="900" b="0">
-                <a:solidFill>
-                  <a:srgbClr val="AAAAAA"/>
-                </a:solidFill>
-                <a:latin typeface="BIZ UDPGothic"/>
-              </a:defRPr>
-            </a:pPr>
-            <a:r>
-              <a:t>© Panasonic Corporation</a:t>
-            </a:r>
-          </a:p>
-        </p:txBody>
-      </p:sp>
-      <p:sp>
-        <p:nvSpPr>
-          <p:cNvPr id="6" name="TextBox 5"/>
-          <p:cNvSpPr txBox="1"/>
-          <p:nvPr/>
-        </p:nvSpPr>
-        <p:spPr>
-          <a:xfrm>
-            <a:off x="571485" y="939776"/>
-            <a:ext cx="4571885" cy="330191"/>
-          </a:xfrm>
-          <a:prstGeom prst="rect">
-            <a:avLst/>
-          </a:prstGeom>
-          <a:noFill/>
-        </p:spPr>
-        <p:txBody>
-          <a:bodyPr wrap="square" lIns="0" rIns="0" tIns="0" bIns="0">
-            <a:spAutoFit/>
-          </a:bodyPr>
-          <a:lstStyle/>
-          <a:p>
-            <a:pPr algn="l">
-              <a:defRPr sz="1800" b="1">
-                <a:solidFill>
-                  <a:srgbClr val="111111"/>
-                </a:solidFill>
-                <a:latin typeface="BIZ UDPGothic"/>
-              </a:defRPr>
-            </a:pPr>
-            <a:r>
-              <a:t>■ 対象</a:t>
-            </a:r>
-          </a:p>
-        </p:txBody>
-      </p:sp>
-      <p:sp>
-        <p:nvSpPr>
-          <p:cNvPr id="7" name="TextBox 6"/>
-          <p:cNvSpPr txBox="1"/>
-          <p:nvPr/>
-        </p:nvSpPr>
-        <p:spPr>
-          <a:xfrm>
-            <a:off x="825479" y="1269968"/>
-            <a:ext cx="4571885" cy="888977"/>
-          </a:xfrm>
-          <a:prstGeom prst="rect">
-            <a:avLst/>
-          </a:prstGeom>
-          <a:noFill/>
-        </p:spPr>
-        <p:txBody>
-          <a:bodyPr wrap="square" lIns="0" rIns="0" tIns="0" bIns="0">
-            <a:spAutoFit/>
-          </a:bodyPr>
-          <a:lstStyle/>
-          <a:p>
-            <a:pPr algn="l">
-              <a:defRPr sz="1500" b="0">
+            <a:pPr>
+              <a:spcAft>
+                <a:spcPts val="600"/>
+              </a:spcAft>
+              <a:defRPr sz="1600" b="1">
+                <a:solidFill>
+                  <a:srgbClr val="0B3968"/>
+                </a:solidFill>
+                <a:latin typeface="BIZ UDPGothic"/>
+              </a:defRPr>
+            </a:pPr>
+            <a:r>
+              <a:t>■ 背景</a:t>
+            </a:r>
+          </a:p>
+          <a:p>
+            <a:pPr>
+              <a:spcAft>
+                <a:spcPts val="400"/>
+              </a:spcAft>
+              <a:defRPr sz="1300">
                 <a:solidFill>
                   <a:srgbClr val="222222"/>
                 </a:solidFill>
@@ -4065,12 +5037,15 @@
               </a:defRPr>
             </a:pPr>
             <a:r>
-              <a:t>第二別館7F、2025年8月下旬の平日（冷房期）</a:t>
-            </a:r>
-          </a:p>
-          <a:p>
-            <a:pPr algn="l">
-              <a:defRPr sz="1500" b="0">
+              <a:t>  ・近年、気候変動への対応やカーボンニュートラルの実現に向け、ESG※1投資が世界的に拡大している</a:t>
+            </a:r>
+          </a:p>
+          <a:p>
+            <a:pPr>
+              <a:spcAft>
+                <a:spcPts val="400"/>
+              </a:spcAft>
+              <a:defRPr sz="1300">
                 <a:solidFill>
                   <a:srgbClr val="222222"/>
                 </a:solidFill>
@@ -4078,71 +5053,15 @@
               </a:defRPr>
             </a:pPr>
             <a:r>
-              <a:t>外気温・室温・設定温度・熱源の消費電力を1分値で取得</a:t>
-            </a:r>
-          </a:p>
-        </p:txBody>
-      </p:sp>
-      <p:sp>
-        <p:nvSpPr>
-          <p:cNvPr id="8" name="TextBox 7"/>
-          <p:cNvSpPr txBox="1"/>
-          <p:nvPr/>
-        </p:nvSpPr>
-        <p:spPr>
-          <a:xfrm>
-            <a:off x="571485" y="2184345"/>
-            <a:ext cx="4571885" cy="330191"/>
-          </a:xfrm>
-          <a:prstGeom prst="rect">
-            <a:avLst/>
-          </a:prstGeom>
-          <a:noFill/>
-        </p:spPr>
-        <p:txBody>
-          <a:bodyPr wrap="square" lIns="0" rIns="0" tIns="0" bIns="0">
-            <a:spAutoFit/>
-          </a:bodyPr>
-          <a:lstStyle/>
-          <a:p>
-            <a:pPr algn="l">
-              <a:defRPr sz="1800" b="1">
-                <a:solidFill>
-                  <a:srgbClr val="111111"/>
-                </a:solidFill>
-                <a:latin typeface="BIZ UDPGothic"/>
-              </a:defRPr>
-            </a:pPr>
-            <a:r>
-              <a:t>■ いまの運用</a:t>
-            </a:r>
-          </a:p>
-        </p:txBody>
-      </p:sp>
-      <p:sp>
-        <p:nvSpPr>
-          <p:cNvPr id="9" name="TextBox 8"/>
-          <p:cNvSpPr txBox="1"/>
-          <p:nvPr/>
-        </p:nvSpPr>
-        <p:spPr>
-          <a:xfrm>
-            <a:off x="825479" y="2514537"/>
-            <a:ext cx="4571885" cy="1015974"/>
-          </a:xfrm>
-          <a:prstGeom prst="rect">
-            <a:avLst/>
-          </a:prstGeom>
-          <a:noFill/>
-        </p:spPr>
-        <p:txBody>
-          <a:bodyPr wrap="square" lIns="0" rIns="0" tIns="0" bIns="0">
-            <a:spAutoFit/>
-          </a:bodyPr>
-          <a:lstStyle/>
-          <a:p>
-            <a:pPr algn="l">
-              <a:defRPr sz="1500" b="0">
+              <a:t>  ・快適性とエネルギーに関してシミュレーション技術で脱炭素化と企業価値向上に貢献する</a:t>
+            </a:r>
+          </a:p>
+          <a:p>
+            <a:pPr>
+              <a:spcAft>
+                <a:spcPts val="400"/>
+              </a:spcAft>
+              <a:defRPr sz="1300">
                 <a:solidFill>
                   <a:srgbClr val="222222"/>
                 </a:solidFill>
@@ -4150,12 +5069,34 @@
               </a:defRPr>
             </a:pPr>
             <a:r>
-              <a:t>・通常 5:00 / 休み明け 3:00 に一律で起動</a:t>
-            </a:r>
-          </a:p>
-          <a:p>
-            <a:pPr algn="l">
-              <a:defRPr sz="1500" b="0">
+              <a:t>  ・その中の一つとして、オフィスビルの熱源起動時刻の最適化を考える。</a:t>
+            </a:r>
+          </a:p>
+          <a:p>
+            <a:pPr>
+              <a:spcBef>
+                <a:spcPts val="1600"/>
+              </a:spcBef>
+              <a:spcAft>
+                <a:spcPts val="600"/>
+              </a:spcAft>
+              <a:defRPr sz="1600" b="1">
+                <a:solidFill>
+                  <a:srgbClr val="0B3968"/>
+                </a:solidFill>
+                <a:latin typeface="BIZ UDPGothic"/>
+              </a:defRPr>
+            </a:pPr>
+            <a:r>
+              <a:t>■ 目的</a:t>
+            </a:r>
+          </a:p>
+          <a:p>
+            <a:pPr>
+              <a:spcAft>
+                <a:spcPts val="400"/>
+              </a:spcAft>
+              <a:defRPr sz="1300">
                 <a:solidFill>
                   <a:srgbClr val="222222"/>
                 </a:solidFill>
@@ -4163,12 +5104,15 @@
               </a:defRPr>
             </a:pPr>
             <a:r>
-              <a:t>・6:30〜7:00 には設定温度に到達</a:t>
-            </a:r>
-          </a:p>
-          <a:p>
-            <a:pPr algn="l">
-              <a:defRPr sz="1500" b="0">
+              <a:t>  ・空調熱源起動時刻をデータに基づいて最適化し、早朝予冷の無駄削減を目指す</a:t>
+            </a:r>
+          </a:p>
+          <a:p>
+            <a:pPr>
+              <a:spcAft>
+                <a:spcPts val="400"/>
+              </a:spcAft>
+              <a:defRPr sz="1300">
                 <a:solidFill>
                   <a:srgbClr val="222222"/>
                 </a:solidFill>
@@ -4176,21 +5120,37 @@
               </a:defRPr>
             </a:pPr>
             <a:r>
-              <a:t>・始業 8:00 まで、無人の室内を冷やし続ける</a:t>
-            </a:r>
-          </a:p>
-        </p:txBody>
-      </p:sp>
-      <p:sp>
-        <p:nvSpPr>
-          <p:cNvPr id="10" name="Rounded Rectangle 9"/>
+              <a:t>  ・それらの情報をわかりやすく可視化することで、ビルメンテナンス(BM)が根拠を持って</a:t>
+            </a:r>
+          </a:p>
+          <a:p>
+            <a:pPr>
+              <a:spcAft>
+                <a:spcPts val="400"/>
+              </a:spcAft>
+              <a:defRPr sz="1300">
+                <a:solidFill>
+                  <a:srgbClr val="222222"/>
+                </a:solidFill>
+                <a:latin typeface="BIZ UDPGothic"/>
+              </a:defRPr>
+            </a:pPr>
+            <a:r>
+              <a:t>     安全に起動時刻を判断できる意思決定支援システムを構築する</a:t>
+            </a:r>
+          </a:p>
+        </p:txBody>
+      </p:sp>
+      <p:sp>
+        <p:nvSpPr>
+          <p:cNvPr id="8" name="Rounded Rectangle 7"/>
           <p:cNvSpPr/>
           <p:nvPr/>
         </p:nvSpPr>
         <p:spPr>
           <a:xfrm>
-            <a:off x="698482" y="3682907"/>
-            <a:ext cx="4444888" cy="1650958"/>
+            <a:off x="2031949" y="4826000"/>
+            <a:ext cx="2158945" cy="762000"/>
           </a:xfrm>
           <a:prstGeom prst="roundRect">
             <a:avLst/>
@@ -4198,12 +5158,11 @@
           <a:solidFill>
             <a:srgbClr val="EDF5FB"/>
           </a:solidFill>
-          <a:ln w="22860">
+          <a:ln>
             <a:solidFill>
               <a:srgbClr val="7BA4C7"/>
             </a:solidFill>
           </a:ln>
-          <a:effectLst/>
         </p:spPr>
         <p:style>
           <a:lnRef idx="1">
@@ -4223,145 +5182,145 @@
           <a:bodyPr rtlCol="0" anchor="ctr"/>
           <a:lstStyle/>
           <a:p>
-            <a:pPr algn="ctr"/>
-          </a:p>
-        </p:txBody>
-      </p:sp>
-      <p:sp>
-        <p:nvSpPr>
-          <p:cNvPr id="11" name="TextBox 10"/>
-          <p:cNvSpPr txBox="1"/>
+            <a:pPr algn="ctr">
+              <a:defRPr sz="1200" b="1">
+                <a:solidFill>
+                  <a:srgbClr val="0B3968"/>
+                </a:solidFill>
+                <a:latin typeface="BIZ UDPGothic"/>
+              </a:defRPr>
+            </a:pPr>
+            <a:r>
+              <a:t>必要な</a:t>
+            </a:r>
+          </a:p>
+          <a:p>
+            <a:r>
+              <a:t>予冷時間の予測</a:t>
+            </a:r>
+          </a:p>
+        </p:txBody>
+      </p:sp>
+      <p:sp>
+        <p:nvSpPr>
+          <p:cNvPr id="9" name="Rounded Rectangle 8"/>
+          <p:cNvSpPr/>
           <p:nvPr/>
         </p:nvSpPr>
         <p:spPr>
           <a:xfrm>
-            <a:off x="825479" y="3962300"/>
-            <a:ext cx="4190895" cy="1269968"/>
-          </a:xfrm>
-          <a:prstGeom prst="rect">
+            <a:off x="5206869" y="4826000"/>
+            <a:ext cx="2158945" cy="762000"/>
+          </a:xfrm>
+          <a:prstGeom prst="roundRect">
             <a:avLst/>
           </a:prstGeom>
-          <a:noFill/>
-        </p:spPr>
-        <p:txBody>
-          <a:bodyPr wrap="square" lIns="0" rIns="0" tIns="0" bIns="0">
-            <a:spAutoFit/>
-          </a:bodyPr>
+          <a:solidFill>
+            <a:srgbClr val="EDF5FB"/>
+          </a:solidFill>
+          <a:ln>
+            <a:solidFill>
+              <a:srgbClr val="7BA4C7"/>
+            </a:solidFill>
+          </a:ln>
+        </p:spPr>
+        <p:style>
+          <a:lnRef idx="1">
+            <a:schemeClr val="accent1"/>
+          </a:lnRef>
+          <a:fillRef idx="3">
+            <a:schemeClr val="accent1"/>
+          </a:fillRef>
+          <a:effectRef idx="2">
+            <a:schemeClr val="accent1"/>
+          </a:effectRef>
+          <a:fontRef idx="minor">
+            <a:schemeClr val="lt1"/>
+          </a:fontRef>
+        </p:style>
+        <p:txBody>
+          <a:bodyPr rtlCol="0" anchor="ctr"/>
           <a:lstStyle/>
           <a:p>
             <a:pPr algn="ctr">
-              <a:defRPr sz="1500" b="0">
-                <a:solidFill>
-                  <a:srgbClr val="222222"/>
-                </a:solidFill>
-                <a:latin typeface="BIZ UDPGothic"/>
-              </a:defRPr>
-            </a:pPr>
-            <a:r>
-              <a:t>始業前に毎朝</a:t>
-            </a:r>
-          </a:p>
-          <a:p>
-            <a:pPr algn="ctr">
-              <a:defRPr sz="1500" b="0">
-                <a:solidFill>
-                  <a:srgbClr val="222222"/>
-                </a:solidFill>
-                <a:latin typeface="BIZ UDPGothic"/>
-              </a:defRPr>
-            </a:pPr>
-            <a:r>
-              <a:t>1時間以上の過剰予冷</a:t>
-            </a:r>
-          </a:p>
-          <a:p>
-            <a:pPr algn="ctr">
-              <a:defRPr sz="1500" b="0">
-                <a:solidFill>
-                  <a:srgbClr val="222222"/>
-                </a:solidFill>
-                <a:latin typeface="BIZ UDPGothic"/>
-              </a:defRPr>
-            </a:pPr>
-            <a:r>
-              <a:t>遅らせる余地はある。根拠がない</a:t>
-            </a:r>
-          </a:p>
-        </p:txBody>
-      </p:sp>
-      <p:sp>
-        <p:nvSpPr>
-          <p:cNvPr id="12" name="TextBox 11"/>
-          <p:cNvSpPr txBox="1"/>
+              <a:defRPr sz="1200" b="1">
+                <a:solidFill>
+                  <a:srgbClr val="0B3968"/>
+                </a:solidFill>
+                <a:latin typeface="BIZ UDPGothic"/>
+              </a:defRPr>
+            </a:pPr>
+            <a:r>
+              <a:t>削減効果の</a:t>
+            </a:r>
+          </a:p>
+          <a:p>
+            <a:r>
+              <a:t>可視化</a:t>
+            </a:r>
+          </a:p>
+        </p:txBody>
+      </p:sp>
+      <p:sp>
+        <p:nvSpPr>
+          <p:cNvPr id="10" name="Rounded Rectangle 9"/>
+          <p:cNvSpPr/>
           <p:nvPr/>
         </p:nvSpPr>
         <p:spPr>
           <a:xfrm>
-            <a:off x="571485" y="5816454"/>
-            <a:ext cx="4571885" cy="761980"/>
-          </a:xfrm>
-          <a:prstGeom prst="rect">
+            <a:off x="8381790" y="4826000"/>
+            <a:ext cx="2158945" cy="762000"/>
+          </a:xfrm>
+          <a:prstGeom prst="roundRect">
             <a:avLst/>
           </a:prstGeom>
-          <a:noFill/>
-        </p:spPr>
-        <p:txBody>
-          <a:bodyPr wrap="square" lIns="0" rIns="0" tIns="0" bIns="0">
-            <a:spAutoFit/>
-          </a:bodyPr>
-          <a:lstStyle/>
-          <a:p>
-            <a:pPr algn="l">
-              <a:defRPr sz="1300" b="0">
-                <a:solidFill>
-                  <a:srgbClr val="555555"/>
-                </a:solidFill>
-                <a:latin typeface="BIZ UDPGothic"/>
-              </a:defRPr>
-            </a:pPr>
-            <a:r>
-              <a:t>前任者から引き継いだ起動時刻をそのまま使っており、</a:t>
-            </a:r>
-          </a:p>
-          <a:p>
-            <a:pPr algn="l">
-              <a:defRPr sz="1300" b="0">
-                <a:solidFill>
-                  <a:srgbClr val="555555"/>
-                </a:solidFill>
-                <a:latin typeface="BIZ UDPGothic"/>
-              </a:defRPr>
-            </a:pPr>
-            <a:r>
-              <a:t>「どこまで遅らせてよいか」を判断する材料が現場にない</a:t>
-            </a:r>
-          </a:p>
-        </p:txBody>
-      </p:sp>
-      <p:pic>
-        <p:nvPicPr>
-          <p:cNvPr id="13" name="Picture 12" descr="deck_slide04_waveform.png"/>
-          <p:cNvPicPr>
-            <a:picLocks noChangeAspect="1"/>
-          </p:cNvPicPr>
-          <p:nvPr/>
-        </p:nvPicPr>
-        <p:blipFill>
-          <a:blip r:embed="rId2"/>
-          <a:stretch>
-            <a:fillRect/>
-          </a:stretch>
-        </p:blipFill>
-        <p:spPr>
-          <a:xfrm>
-            <a:off x="5333866" y="761980"/>
-            <a:ext cx="6603834" cy="5460863"/>
-          </a:xfrm>
-          <a:prstGeom prst="rect">
-            <a:avLst/>
-          </a:prstGeom>
-        </p:spPr>
-      </p:pic>
+          <a:solidFill>
+            <a:srgbClr val="EDF5FB"/>
+          </a:solidFill>
+          <a:ln>
+            <a:solidFill>
+              <a:srgbClr val="7BA4C7"/>
+            </a:solidFill>
+          </a:ln>
+        </p:spPr>
+        <p:style>
+          <a:lnRef idx="1">
+            <a:schemeClr val="accent1"/>
+          </a:lnRef>
+          <a:fillRef idx="3">
+            <a:schemeClr val="accent1"/>
+          </a:fillRef>
+          <a:effectRef idx="2">
+            <a:schemeClr val="accent1"/>
+          </a:effectRef>
+          <a:fontRef idx="minor">
+            <a:schemeClr val="lt1"/>
+          </a:fontRef>
+        </p:style>
+        <p:txBody>
+          <a:bodyPr rtlCol="0" anchor="ctr"/>
+          <a:lstStyle/>
+          <a:p>
+            <a:pPr algn="ctr">
+              <a:defRPr sz="1200" b="1">
+                <a:solidFill>
+                  <a:srgbClr val="0B3968"/>
+                </a:solidFill>
+                <a:latin typeface="BIZ UDPGothic"/>
+              </a:defRPr>
+            </a:pPr>
+            <a:r>
+              <a:t>BM</a:t>
+            </a:r>
+          </a:p>
+          <a:p>
+            <a:r>
+              <a:t>意思決定</a:t>
+            </a:r>
+          </a:p>
+        </p:txBody>
+      </p:sp>
     </p:spTree>
   </p:cSld>
   <p:clrMapOvr>
@@ -4389,7 +5348,50 @@
         <p:spPr>
           <a:xfrm>
             <a:off x="0" y="0"/>
-            <a:ext cx="12191695" cy="584185"/>
+            <a:ext cx="12191695" cy="6858000"/>
+          </a:xfrm>
+          <a:prstGeom prst="rect">
+            <a:avLst/>
+          </a:prstGeom>
+          <a:solidFill>
+            <a:srgbClr val="FFFFFF"/>
+          </a:solidFill>
+          <a:ln>
+            <a:noFill/>
+          </a:ln>
+        </p:spPr>
+        <p:style>
+          <a:lnRef idx="1">
+            <a:schemeClr val="accent1"/>
+          </a:lnRef>
+          <a:fillRef idx="3">
+            <a:schemeClr val="accent1"/>
+          </a:fillRef>
+          <a:effectRef idx="2">
+            <a:schemeClr val="accent1"/>
+          </a:effectRef>
+          <a:fontRef idx="minor">
+            <a:schemeClr val="lt1"/>
+          </a:fontRef>
+        </p:style>
+        <p:txBody>
+          <a:bodyPr rtlCol="0" anchor="ctr"/>
+          <a:lstStyle/>
+          <a:p>
+            <a:pPr algn="ctr"/>
+          </a:p>
+        </p:txBody>
+      </p:sp>
+      <p:sp>
+        <p:nvSpPr>
+          <p:cNvPr id="3" name="Rectangle 2"/>
+          <p:cNvSpPr/>
+          <p:nvPr/>
+        </p:nvSpPr>
+        <p:spPr>
+          <a:xfrm>
+            <a:off x="0" y="0"/>
+            <a:ext cx="12191695" cy="584200"/>
           </a:xfrm>
           <a:prstGeom prst="rect">
             <a:avLst/>
@@ -4400,7 +5402,6 @@
           <a:ln>
             <a:noFill/>
           </a:ln>
-          <a:effectLst/>
         </p:spPr>
         <p:style>
           <a:lnRef idx="1">
@@ -4426,14 +5427,14 @@
       </p:sp>
       <p:sp>
         <p:nvSpPr>
-          <p:cNvPr id="3" name="TextBox 2"/>
+          <p:cNvPr id="4" name="TextBox 3"/>
           <p:cNvSpPr txBox="1"/>
           <p:nvPr/>
         </p:nvSpPr>
         <p:spPr>
           <a:xfrm>
-            <a:off x="304792" y="101597"/>
-            <a:ext cx="9905752" cy="406389"/>
+            <a:off x="304792" y="50800"/>
+            <a:ext cx="10159745" cy="482600"/>
           </a:xfrm>
           <a:prstGeom prst="rect">
             <a:avLst/>
@@ -4441,13 +5442,13 @@
           <a:noFill/>
         </p:spPr>
         <p:txBody>
-          <a:bodyPr wrap="square" lIns="0" rIns="0" tIns="0" bIns="0">
+          <a:bodyPr wrap="none">
             <a:spAutoFit/>
           </a:bodyPr>
           <a:lstStyle/>
           <a:p>
-            <a:pPr algn="l">
-              <a:defRPr sz="2000" b="1">
+            <a:pPr>
+              <a:defRPr sz="1800" b="1">
                 <a:solidFill>
                   <a:srgbClr val="FFFFFF"/>
                 </a:solidFill>
@@ -4455,106 +5456,33 @@
               </a:defRPr>
             </a:pPr>
             <a:r>
-              <a:t>3. 何が難しいか：2つの制約</a:t>
-            </a:r>
-          </a:p>
-        </p:txBody>
-      </p:sp>
-      <p:sp>
-        <p:nvSpPr>
-          <p:cNvPr id="4" name="TextBox 3"/>
-          <p:cNvSpPr txBox="1"/>
-          <p:nvPr/>
-        </p:nvSpPr>
-        <p:spPr>
-          <a:xfrm>
-            <a:off x="11302717" y="101597"/>
-            <a:ext cx="698482" cy="406389"/>
-          </a:xfrm>
-          <a:prstGeom prst="rect">
-            <a:avLst/>
-          </a:prstGeom>
-          <a:noFill/>
-        </p:spPr>
-        <p:txBody>
-          <a:bodyPr wrap="square" lIns="0" rIns="0" tIns="0" bIns="0">
-            <a:spAutoFit/>
-          </a:bodyPr>
-          <a:lstStyle/>
-          <a:p>
-            <a:pPr algn="ctr">
-              <a:defRPr sz="2000" b="1">
-                <a:solidFill>
-                  <a:srgbClr val="FFFFFF"/>
-                </a:solidFill>
-                <a:latin typeface="BIZ UDPGothic"/>
-              </a:defRPr>
-            </a:pPr>
-            <a:r>
-              <a:t>4</a:t>
-            </a:r>
-          </a:p>
-        </p:txBody>
-      </p:sp>
-      <p:sp>
-        <p:nvSpPr>
-          <p:cNvPr id="5" name="TextBox 4"/>
-          <p:cNvSpPr txBox="1"/>
-          <p:nvPr/>
-        </p:nvSpPr>
-        <p:spPr>
-          <a:xfrm>
-            <a:off x="7873803" y="6629234"/>
-            <a:ext cx="4013099" cy="203194"/>
-          </a:xfrm>
-          <a:prstGeom prst="rect">
-            <a:avLst/>
-          </a:prstGeom>
-          <a:noFill/>
-        </p:spPr>
-        <p:txBody>
-          <a:bodyPr wrap="square" lIns="0" rIns="0" tIns="0" bIns="0">
-            <a:spAutoFit/>
-          </a:bodyPr>
-          <a:lstStyle/>
-          <a:p>
-            <a:pPr algn="r">
-              <a:defRPr sz="900" b="0">
-                <a:solidFill>
-                  <a:srgbClr val="AAAAAA"/>
-                </a:solidFill>
-                <a:latin typeface="BIZ UDPGothic"/>
-              </a:defRPr>
-            </a:pPr>
-            <a:r>
-              <a:t>© Panasonic Corporation</a:t>
-            </a:r>
-          </a:p>
-        </p:txBody>
-      </p:sp>
-      <p:sp>
-        <p:nvSpPr>
-          <p:cNvPr id="6" name="Rounded Rectangle 5"/>
+              <a:t>3. 現状と課題</a:t>
+            </a:r>
+          </a:p>
+        </p:txBody>
+      </p:sp>
+      <p:sp>
+        <p:nvSpPr>
+          <p:cNvPr id="5" name="Rounded Rectangle 4"/>
           <p:cNvSpPr/>
           <p:nvPr/>
         </p:nvSpPr>
         <p:spPr>
           <a:xfrm>
-            <a:off x="571485" y="952476"/>
-            <a:ext cx="5397365" cy="2539936"/>
+            <a:off x="10731231" y="139700"/>
+            <a:ext cx="533386" cy="304800"/>
           </a:xfrm>
           <a:prstGeom prst="roundRect">
             <a:avLst/>
           </a:prstGeom>
           <a:solidFill>
-            <a:srgbClr val="EDF5FB"/>
+            <a:srgbClr val="24588E"/>
           </a:solidFill>
-          <a:ln w="22860">
+          <a:ln>
             <a:solidFill>
-              <a:srgbClr val="7BA4C7"/>
+              <a:srgbClr val="5E8DBE"/>
             </a:solidFill>
           </a:ln>
-          <a:effectLst/>
         </p:spPr>
         <p:style>
           <a:lnRef idx="1">
@@ -4574,20 +5502,30 @@
           <a:bodyPr rtlCol="0" anchor="ctr"/>
           <a:lstStyle/>
           <a:p>
-            <a:pPr algn="ctr"/>
-          </a:p>
-        </p:txBody>
-      </p:sp>
-      <p:sp>
-        <p:nvSpPr>
-          <p:cNvPr id="7" name="TextBox 6"/>
+            <a:pPr algn="ctr">
+              <a:defRPr sz="1000" b="1" i="1">
+                <a:solidFill>
+                  <a:srgbClr val="FFFFFF"/>
+                </a:solidFill>
+                <a:latin typeface="BIZ UDPGothic"/>
+              </a:defRPr>
+            </a:pPr>
+            <a:r>
+              <a:t>IUO</a:t>
+            </a:r>
+          </a:p>
+        </p:txBody>
+      </p:sp>
+      <p:sp>
+        <p:nvSpPr>
+          <p:cNvPr id="6" name="TextBox 5"/>
           <p:cNvSpPr txBox="1"/>
           <p:nvPr/>
         </p:nvSpPr>
         <p:spPr>
           <a:xfrm>
-            <a:off x="825479" y="1219169"/>
-            <a:ext cx="4952876" cy="330191"/>
+            <a:off x="11366215" y="50800"/>
+            <a:ext cx="634984" cy="482600"/>
           </a:xfrm>
           <a:prstGeom prst="rect">
             <a:avLst/>
@@ -4595,35 +5533,35 @@
           <a:noFill/>
         </p:spPr>
         <p:txBody>
-          <a:bodyPr wrap="square" lIns="0" rIns="0" tIns="0" bIns="0">
+          <a:bodyPr wrap="none">
             <a:spAutoFit/>
           </a:bodyPr>
           <a:lstStyle/>
           <a:p>
-            <a:pPr algn="l">
-              <a:defRPr sz="1700" b="1">
-                <a:solidFill>
-                  <a:srgbClr val="111111"/>
-                </a:solidFill>
-                <a:latin typeface="BIZ UDPGothic"/>
-              </a:defRPr>
-            </a:pPr>
-            <a:r>
-              <a:t>制約1  起動時刻は前日の夕方に決める</a:t>
-            </a:r>
-          </a:p>
-        </p:txBody>
-      </p:sp>
-      <p:sp>
-        <p:nvSpPr>
-          <p:cNvPr id="8" name="TextBox 7"/>
+            <a:pPr algn="ctr">
+              <a:defRPr sz="1800" b="1">
+                <a:solidFill>
+                  <a:srgbClr val="FFFFFF"/>
+                </a:solidFill>
+                <a:latin typeface="BIZ UDPGothic"/>
+              </a:defRPr>
+            </a:pPr>
+            <a:r>
+              <a:t>4</a:t>
+            </a:r>
+          </a:p>
+        </p:txBody>
+      </p:sp>
+      <p:sp>
+        <p:nvSpPr>
+          <p:cNvPr id="7" name="TextBox 6"/>
           <p:cNvSpPr txBox="1"/>
           <p:nvPr/>
         </p:nvSpPr>
         <p:spPr>
           <a:xfrm>
-            <a:off x="825479" y="1625559"/>
-            <a:ext cx="4952876" cy="1650958"/>
+            <a:off x="444488" y="825500"/>
+            <a:ext cx="5333866" cy="3810000"/>
           </a:xfrm>
           <a:prstGeom prst="rect">
             <a:avLst/>
@@ -4631,13 +5569,26 @@
           <a:noFill/>
         </p:spPr>
         <p:txBody>
-          <a:bodyPr wrap="square" lIns="0" rIns="0" tIns="0" bIns="0">
+          <a:bodyPr wrap="square">
             <a:spAutoFit/>
           </a:bodyPr>
           <a:lstStyle/>
           <a:p>
-            <a:pPr algn="l">
-              <a:defRPr sz="1500" b="0">
+            <a:pPr>
+              <a:defRPr sz="1500" b="1">
+                <a:solidFill>
+                  <a:srgbClr val="0B3968"/>
+                </a:solidFill>
+                <a:latin typeface="BIZ UDPGothic"/>
+              </a:defRPr>
+            </a:pPr>
+            <a:r>
+              <a:t>■ 分析対象</a:t>
+            </a:r>
+          </a:p>
+          <a:p>
+            <a:pPr>
+              <a:defRPr sz="1200">
                 <a:solidFill>
                   <a:srgbClr val="222222"/>
                 </a:solidFill>
@@ -4645,12 +5596,12 @@
               </a:defRPr>
             </a:pPr>
             <a:r>
-              <a:t>・決める時点で、翌朝の室温は分からない</a:t>
-            </a:r>
-          </a:p>
-          <a:p>
-            <a:pPr algn="l">
-              <a:defRPr sz="1500" b="0">
+              <a:t>  ・2025年夏季の第二別館のデータ</a:t>
+            </a:r>
+          </a:p>
+          <a:p>
+            <a:pPr>
+              <a:defRPr sz="1200">
                 <a:solidFill>
                   <a:srgbClr val="222222"/>
                 </a:solidFill>
@@ -4658,22 +5609,41 @@
               </a:defRPr>
             </a:pPr>
             <a:r>
-              <a:t>・室温を見て制御する方式が使えない</a:t>
-            </a:r>
-          </a:p>
-          <a:p>
-            <a:pPr algn="l">
-              <a:defRPr sz="1500" b="0">
+              <a:t>  ・①外気温 ②室温 ③消費電力</a:t>
+            </a:r>
+          </a:p>
+          <a:p>
+            <a:pPr>
+              <a:spcBef>
+                <a:spcPts val="800"/>
+              </a:spcBef>
+              <a:defRPr sz="1500" b="1">
+                <a:solidFill>
+                  <a:srgbClr val="0B3968"/>
+                </a:solidFill>
+                <a:latin typeface="BIZ UDPGothic"/>
+              </a:defRPr>
+            </a:pPr>
+            <a:r>
+              <a:t>■ 現状運用</a:t>
+            </a:r>
+          </a:p>
+          <a:p>
+            <a:pPr>
+              <a:defRPr sz="1200">
                 <a:solidFill>
                   <a:srgbClr val="222222"/>
                 </a:solidFill>
                 <a:latin typeface="BIZ UDPGothic"/>
               </a:defRPr>
             </a:pPr>
-          </a:p>
-          <a:p>
-            <a:pPr algn="l">
-              <a:defRPr sz="1500" b="0">
+            <a:r>
+              <a:t>  ・前日に翌日の起動時間を決定</a:t>
+            </a:r>
+          </a:p>
+          <a:p>
+            <a:pPr>
+              <a:defRPr sz="1200">
                 <a:solidFill>
                   <a:srgbClr val="222222"/>
                 </a:solidFill>
@@ -4681,12 +5651,12 @@
               </a:defRPr>
             </a:pPr>
             <a:r>
-              <a:t>→ 前日に手に入る翌日の気温予報から、</a:t>
-            </a:r>
-          </a:p>
-          <a:p>
-            <a:pPr algn="l">
-              <a:defRPr sz="1500" b="0">
+              <a:t>  ・早朝一律(通常5:00 / 休み明け3:00)に起動</a:t>
+            </a:r>
+          </a:p>
+          <a:p>
+            <a:pPr>
+              <a:defRPr sz="1200">
                 <a:solidFill>
                   <a:srgbClr val="222222"/>
                 </a:solidFill>
@@ -4694,34 +5664,75 @@
               </a:defRPr>
             </a:pPr>
             <a:r>
-              <a:t>　 予冷時間を直接読む</a:t>
-            </a:r>
-          </a:p>
-        </p:txBody>
-      </p:sp>
-      <p:sp>
-        <p:nvSpPr>
-          <p:cNvPr id="9" name="Rounded Rectangle 8"/>
+              <a:t>  ・6:30〜7:00に設定温度へ到達</a:t>
+            </a:r>
+          </a:p>
+          <a:p>
+            <a:pPr>
+              <a:defRPr sz="1100">
+                <a:solidFill>
+                  <a:srgbClr val="555555"/>
+                </a:solidFill>
+                <a:latin typeface="BIZ UDPGothic"/>
+              </a:defRPr>
+            </a:pPr>
+            <a:r>
+              <a:t>  快適性を担保するために、8:00の始業時に必ず設定温度に到達しているように、かなり余裕を持った設定</a:t>
+            </a:r>
+          </a:p>
+          <a:p>
+            <a:pPr>
+              <a:spcBef>
+                <a:spcPts val="800"/>
+              </a:spcBef>
+              <a:defRPr sz="1500" b="1">
+                <a:solidFill>
+                  <a:srgbClr val="0B3968"/>
+                </a:solidFill>
+                <a:latin typeface="BIZ UDPGothic"/>
+              </a:defRPr>
+            </a:pPr>
+            <a:r>
+              <a:t>■ 課題</a:t>
+            </a:r>
+          </a:p>
+          <a:p>
+            <a:pPr>
+              <a:defRPr sz="1200">
+                <a:solidFill>
+                  <a:srgbClr val="222222"/>
+                </a:solidFill>
+                <a:latin typeface="BIZ UDPGothic"/>
+              </a:defRPr>
+            </a:pPr>
+            <a:r>
+              <a:t>  ・始業(8:00)までの毎朝1時間以上が過剰予冷となり、電力を浪費している</a:t>
+            </a:r>
+          </a:p>
+        </p:txBody>
+      </p:sp>
+      <p:sp>
+        <p:nvSpPr>
+          <p:cNvPr id="8" name="Rounded Rectangle 7"/>
           <p:cNvSpPr/>
           <p:nvPr/>
         </p:nvSpPr>
         <p:spPr>
           <a:xfrm>
-            <a:off x="6222844" y="952476"/>
-            <a:ext cx="5397365" cy="2539936"/>
+            <a:off x="571485" y="4826000"/>
+            <a:ext cx="4825879" cy="889000"/>
           </a:xfrm>
           <a:prstGeom prst="roundRect">
             <a:avLst/>
           </a:prstGeom>
           <a:solidFill>
-            <a:srgbClr val="EDF5FB"/>
+            <a:srgbClr val="E0F2FE"/>
           </a:solidFill>
-          <a:ln w="22860">
+          <a:ln>
             <a:solidFill>
-              <a:srgbClr val="7BA4C7"/>
+              <a:srgbClr val="7DD3FC"/>
             </a:solidFill>
           </a:ln>
-          <a:effectLst/>
         </p:spPr>
         <p:style>
           <a:lnRef idx="1">
@@ -4738,291 +5749,84 @@
           </a:fontRef>
         </p:style>
         <p:txBody>
-          <a:bodyPr rtlCol="0" anchor="ctr"/>
-          <a:lstStyle/>
-          <a:p>
-            <a:pPr algn="ctr"/>
-          </a:p>
-        </p:txBody>
-      </p:sp>
-      <p:sp>
-        <p:nvSpPr>
-          <p:cNvPr id="10" name="TextBox 9"/>
-          <p:cNvSpPr txBox="1"/>
+          <a:bodyPr rtlCol="0" anchor="ctr" wrap="square"/>
+          <a:lstStyle/>
+          <a:p>
+            <a:pPr algn="ctr">
+              <a:defRPr sz="1100" b="1">
+                <a:solidFill>
+                  <a:srgbClr val="0B3968"/>
+                </a:solidFill>
+                <a:latin typeface="BIZ UDPGothic"/>
+              </a:defRPr>
+            </a:pPr>
+            <a:r>
+              <a:t>起動時刻を遅らせる余地はあるが、どこまで遅らせられるか</a:t>
+            </a:r>
+          </a:p>
+          <a:p>
+            <a:pPr algn="ctr">
+              <a:defRPr sz="1300" b="1">
+                <a:solidFill>
+                  <a:srgbClr val="C8102E"/>
+                </a:solidFill>
+                <a:latin typeface="BIZ UDPGothic"/>
+              </a:defRPr>
+            </a:pPr>
+            <a:r>
+              <a:t>判断材料がないことが問題</a:t>
+            </a:r>
+          </a:p>
+        </p:txBody>
+      </p:sp>
+      <p:pic>
+        <p:nvPicPr>
+          <p:cNvPr id="9" name="Picture 8" descr="deck_slide03_concept.png"/>
+          <p:cNvPicPr>
+            <a:picLocks noChangeAspect="1"/>
+          </p:cNvPicPr>
           <p:nvPr/>
-        </p:nvSpPr>
-        <p:spPr>
-          <a:xfrm>
-            <a:off x="6476838" y="1219169"/>
-            <a:ext cx="4952876" cy="330191"/>
+        </p:nvPicPr>
+        <p:blipFill>
+          <a:blip r:embed="rId3"/>
+          <a:stretch>
+            <a:fillRect/>
+          </a:stretch>
+        </p:blipFill>
+        <p:spPr>
+          <a:xfrm>
+            <a:off x="5968850" y="736600"/>
+            <a:ext cx="5841853" cy="2730500"/>
           </a:xfrm>
           <a:prstGeom prst="rect">
             <a:avLst/>
           </a:prstGeom>
-          <a:noFill/>
-        </p:spPr>
-        <p:txBody>
-          <a:bodyPr wrap="square" lIns="0" rIns="0" tIns="0" bIns="0">
-            <a:spAutoFit/>
-          </a:bodyPr>
-          <a:lstStyle/>
-          <a:p>
-            <a:pPr algn="l">
-              <a:defRPr sz="1700" b="1">
-                <a:solidFill>
-                  <a:srgbClr val="111111"/>
-                </a:solidFill>
-                <a:latin typeface="BIZ UDPGothic"/>
-              </a:defRPr>
-            </a:pPr>
-            <a:r>
-              <a:t>制約2  未達は、朝になってからやり直せない</a:t>
-            </a:r>
-          </a:p>
-        </p:txBody>
-      </p:sp>
-      <p:sp>
-        <p:nvSpPr>
-          <p:cNvPr id="11" name="TextBox 10"/>
-          <p:cNvSpPr txBox="1"/>
+        </p:spPr>
+      </p:pic>
+      <p:pic>
+        <p:nvPicPr>
+          <p:cNvPr id="10" name="Picture 9" descr="deck_slide04_waveform.png"/>
+          <p:cNvPicPr>
+            <a:picLocks noChangeAspect="1"/>
+          </p:cNvPicPr>
           <p:nvPr/>
-        </p:nvSpPr>
-        <p:spPr>
-          <a:xfrm>
-            <a:off x="6476838" y="1625559"/>
-            <a:ext cx="5016374" cy="1650958"/>
+        </p:nvPicPr>
+        <p:blipFill>
+          <a:blip r:embed="rId4"/>
+          <a:stretch>
+            <a:fillRect/>
+          </a:stretch>
+        </p:blipFill>
+        <p:spPr>
+          <a:xfrm>
+            <a:off x="5968850" y="3556000"/>
+            <a:ext cx="5841853" cy="2857500"/>
           </a:xfrm>
           <a:prstGeom prst="rect">
             <a:avLst/>
           </a:prstGeom>
-          <a:noFill/>
-        </p:spPr>
-        <p:txBody>
-          <a:bodyPr wrap="square" lIns="0" rIns="0" tIns="0" bIns="0">
-            <a:spAutoFit/>
-          </a:bodyPr>
-          <a:lstStyle/>
-          <a:p>
-            <a:pPr algn="l">
-              <a:defRPr sz="1500" b="0">
-                <a:solidFill>
-                  <a:srgbClr val="222222"/>
-                </a:solidFill>
-                <a:latin typeface="BIZ UDPGothic"/>
-              </a:defRPr>
-            </a:pPr>
-            <a:r>
-              <a:t>・設定温度に届かない → 執務環境に直接影響（高コスト）</a:t>
-            </a:r>
-          </a:p>
-          <a:p>
-            <a:pPr algn="l">
-              <a:defRPr sz="1500" b="0">
-                <a:solidFill>
-                  <a:srgbClr val="222222"/>
-                </a:solidFill>
-                <a:latin typeface="BIZ UDPGothic"/>
-              </a:defRPr>
-            </a:pPr>
-            <a:r>
-              <a:t>・冷やしすぎ → 電力の無駄で済む（低コスト）</a:t>
-            </a:r>
-          </a:p>
-          <a:p>
-            <a:pPr algn="l">
-              <a:defRPr sz="1500" b="0">
-                <a:solidFill>
-                  <a:srgbClr val="222222"/>
-                </a:solidFill>
-                <a:latin typeface="BIZ UDPGothic"/>
-              </a:defRPr>
-            </a:pPr>
-          </a:p>
-          <a:p>
-            <a:pPr algn="l">
-              <a:defRPr sz="1500" b="0">
-                <a:solidFill>
-                  <a:srgbClr val="222222"/>
-                </a:solidFill>
-                <a:latin typeface="BIZ UDPGothic"/>
-              </a:defRPr>
-            </a:pPr>
-            <a:r>
-              <a:t>→ 損失が非対称なので、予冷時間は</a:t>
-            </a:r>
-          </a:p>
-          <a:p>
-            <a:pPr algn="l">
-              <a:defRPr sz="1500" b="0">
-                <a:solidFill>
-                  <a:srgbClr val="222222"/>
-                </a:solidFill>
-                <a:latin typeface="BIZ UDPGothic"/>
-              </a:defRPr>
-            </a:pPr>
-            <a:r>
-              <a:t>　 中央値ではなく上側で見積もる</a:t>
-            </a:r>
-          </a:p>
-        </p:txBody>
-      </p:sp>
-      <p:sp>
-        <p:nvSpPr>
-          <p:cNvPr id="12" name="TextBox 11"/>
-          <p:cNvSpPr txBox="1"/>
-          <p:nvPr/>
-        </p:nvSpPr>
-        <p:spPr>
-          <a:xfrm>
-            <a:off x="571485" y="4000399"/>
-            <a:ext cx="6349841" cy="330191"/>
-          </a:xfrm>
-          <a:prstGeom prst="rect">
-            <a:avLst/>
-          </a:prstGeom>
-          <a:noFill/>
-        </p:spPr>
-        <p:txBody>
-          <a:bodyPr wrap="square" lIns="0" rIns="0" tIns="0" bIns="0">
-            <a:spAutoFit/>
-          </a:bodyPr>
-          <a:lstStyle/>
-          <a:p>
-            <a:pPr algn="l">
-              <a:defRPr sz="1800" b="1">
-                <a:solidFill>
-                  <a:srgbClr val="111111"/>
-                </a:solidFill>
-                <a:latin typeface="BIZ UDPGothic"/>
-              </a:defRPr>
-            </a:pPr>
-            <a:r>
-              <a:t>■ 問いの立て方</a:t>
-            </a:r>
-          </a:p>
-        </p:txBody>
-      </p:sp>
-      <p:sp>
-        <p:nvSpPr>
-          <p:cNvPr id="13" name="TextBox 12"/>
-          <p:cNvSpPr txBox="1"/>
-          <p:nvPr/>
-        </p:nvSpPr>
-        <p:spPr>
-          <a:xfrm>
-            <a:off x="761980" y="4470288"/>
-            <a:ext cx="10667733" cy="380990"/>
-          </a:xfrm>
-          <a:prstGeom prst="rect">
-            <a:avLst/>
-          </a:prstGeom>
-          <a:noFill/>
-        </p:spPr>
-        <p:txBody>
-          <a:bodyPr wrap="square" lIns="0" rIns="0" tIns="0" bIns="0">
-            <a:spAutoFit/>
-          </a:bodyPr>
-          <a:lstStyle/>
-          <a:p>
-            <a:pPr algn="ctr">
-              <a:defRPr sz="2000" b="1">
-                <a:solidFill>
-                  <a:srgbClr val="00509E"/>
-                </a:solidFill>
-                <a:latin typeface="BIZ UDPGothic"/>
-              </a:defRPr>
-            </a:pPr>
-            <a:r>
-              <a:t>起動時刻 ＝ 8:00 − 必要な予冷時間</a:t>
-            </a:r>
-          </a:p>
-        </p:txBody>
-      </p:sp>
-      <p:sp>
-        <p:nvSpPr>
-          <p:cNvPr id="14" name="TextBox 13"/>
-          <p:cNvSpPr txBox="1"/>
-          <p:nvPr/>
-        </p:nvSpPr>
-        <p:spPr>
-          <a:xfrm>
-            <a:off x="761980" y="4927476"/>
-            <a:ext cx="10667733" cy="330191"/>
-          </a:xfrm>
-          <a:prstGeom prst="rect">
-            <a:avLst/>
-          </a:prstGeom>
-          <a:noFill/>
-        </p:spPr>
-        <p:txBody>
-          <a:bodyPr wrap="square" lIns="0" rIns="0" tIns="0" bIns="0">
-            <a:spAutoFit/>
-          </a:bodyPr>
-          <a:lstStyle/>
-          <a:p>
-            <a:pPr algn="ctr">
-              <a:defRPr sz="1600" b="1">
-                <a:solidFill>
-                  <a:srgbClr val="00509E"/>
-                </a:solidFill>
-                <a:latin typeface="BIZ UDPGothic"/>
-              </a:defRPr>
-            </a:pPr>
-            <a:r>
-              <a:t>必要な予冷時間 ＝ f(起動時刻の外気温, 設定温度) ＋ 安全側の余裕</a:t>
-            </a:r>
-          </a:p>
-        </p:txBody>
-      </p:sp>
-      <p:sp>
-        <p:nvSpPr>
-          <p:cNvPr id="15" name="TextBox 14"/>
-          <p:cNvSpPr txBox="1"/>
-          <p:nvPr/>
-        </p:nvSpPr>
-        <p:spPr>
-          <a:xfrm>
-            <a:off x="571485" y="5587860"/>
-            <a:ext cx="11048723" cy="761980"/>
-          </a:xfrm>
-          <a:prstGeom prst="rect">
-            <a:avLst/>
-          </a:prstGeom>
-          <a:noFill/>
-        </p:spPr>
-        <p:txBody>
-          <a:bodyPr wrap="square" lIns="0" rIns="0" tIns="0" bIns="0">
-            <a:spAutoFit/>
-          </a:bodyPr>
-          <a:lstStyle/>
-          <a:p>
-            <a:pPr algn="l">
-              <a:defRPr sz="1300" b="0">
-                <a:solidFill>
-                  <a:srgbClr val="555555"/>
-                </a:solidFill>
-                <a:latin typeface="BIZ UDPGothic"/>
-              </a:defRPr>
-            </a:pPr>
-            <a:r>
-              <a:t>「間に合う範囲で最も遅い時刻」を、前日に分かる情報だけから決める。</a:t>
-            </a:r>
-          </a:p>
-          <a:p>
-            <a:pPr algn="l">
-              <a:defRPr sz="1300" b="0">
-                <a:solidFill>
-                  <a:srgbClr val="555555"/>
-                </a:solidFill>
-                <a:latin typeface="BIZ UDPGothic"/>
-              </a:defRPr>
-            </a:pPr>
-            <a:r>
-              <a:t>外気温は起動時刻ごとに変わるので、候補ごとに予冷時間を求め、間に合う中で最も遅い時刻を選ぶ。</a:t>
-            </a:r>
-          </a:p>
-        </p:txBody>
-      </p:sp>
+        </p:spPr>
+      </p:pic>
     </p:spTree>
   </p:cSld>
   <p:clrMapOvr>
@@ -5050,7 +5854,50 @@
         <p:spPr>
           <a:xfrm>
             <a:off x="0" y="0"/>
-            <a:ext cx="12191695" cy="584185"/>
+            <a:ext cx="12191695" cy="6858000"/>
+          </a:xfrm>
+          <a:prstGeom prst="rect">
+            <a:avLst/>
+          </a:prstGeom>
+          <a:solidFill>
+            <a:srgbClr val="FFFFFF"/>
+          </a:solidFill>
+          <a:ln>
+            <a:noFill/>
+          </a:ln>
+        </p:spPr>
+        <p:style>
+          <a:lnRef idx="1">
+            <a:schemeClr val="accent1"/>
+          </a:lnRef>
+          <a:fillRef idx="3">
+            <a:schemeClr val="accent1"/>
+          </a:fillRef>
+          <a:effectRef idx="2">
+            <a:schemeClr val="accent1"/>
+          </a:effectRef>
+          <a:fontRef idx="minor">
+            <a:schemeClr val="lt1"/>
+          </a:fontRef>
+        </p:style>
+        <p:txBody>
+          <a:bodyPr rtlCol="0" anchor="ctr"/>
+          <a:lstStyle/>
+          <a:p>
+            <a:pPr algn="ctr"/>
+          </a:p>
+        </p:txBody>
+      </p:sp>
+      <p:sp>
+        <p:nvSpPr>
+          <p:cNvPr id="3" name="Rectangle 2"/>
+          <p:cNvSpPr/>
+          <p:nvPr/>
+        </p:nvSpPr>
+        <p:spPr>
+          <a:xfrm>
+            <a:off x="0" y="0"/>
+            <a:ext cx="12191695" cy="584200"/>
           </a:xfrm>
           <a:prstGeom prst="rect">
             <a:avLst/>
@@ -5061,7 +5908,6 @@
           <a:ln>
             <a:noFill/>
           </a:ln>
-          <a:effectLst/>
         </p:spPr>
         <p:style>
           <a:lnRef idx="1">
@@ -5087,14 +5933,14 @@
       </p:sp>
       <p:sp>
         <p:nvSpPr>
-          <p:cNvPr id="3" name="TextBox 2"/>
+          <p:cNvPr id="4" name="TextBox 3"/>
           <p:cNvSpPr txBox="1"/>
           <p:nvPr/>
         </p:nvSpPr>
         <p:spPr>
           <a:xfrm>
-            <a:off x="304792" y="101597"/>
-            <a:ext cx="9905752" cy="406389"/>
+            <a:off x="304792" y="50800"/>
+            <a:ext cx="10159745" cy="482600"/>
           </a:xfrm>
           <a:prstGeom prst="rect">
             <a:avLst/>
@@ -5102,13 +5948,13 @@
           <a:noFill/>
         </p:spPr>
         <p:txBody>
-          <a:bodyPr wrap="square" lIns="0" rIns="0" tIns="0" bIns="0">
+          <a:bodyPr wrap="none">
             <a:spAutoFit/>
           </a:bodyPr>
           <a:lstStyle/>
           <a:p>
-            <a:pPr algn="l">
-              <a:defRPr sz="2000" b="1">
+            <a:pPr>
+              <a:defRPr sz="1800" b="1">
                 <a:solidFill>
                   <a:srgbClr val="FFFFFF"/>
                 </a:solidFill>
@@ -5116,140 +5962,33 @@
               </a:defRPr>
             </a:pPr>
             <a:r>
-              <a:t>4. 判断材料をどう求めるか</a:t>
-            </a:r>
-          </a:p>
-        </p:txBody>
-      </p:sp>
-      <p:sp>
-        <p:nvSpPr>
-          <p:cNvPr id="4" name="TextBox 3"/>
-          <p:cNvSpPr txBox="1"/>
-          <p:nvPr/>
-        </p:nvSpPr>
-        <p:spPr>
-          <a:xfrm>
-            <a:off x="11302717" y="101597"/>
-            <a:ext cx="698482" cy="406389"/>
-          </a:xfrm>
-          <a:prstGeom prst="rect">
-            <a:avLst/>
-          </a:prstGeom>
-          <a:noFill/>
-        </p:spPr>
-        <p:txBody>
-          <a:bodyPr wrap="square" lIns="0" rIns="0" tIns="0" bIns="0">
-            <a:spAutoFit/>
-          </a:bodyPr>
-          <a:lstStyle/>
-          <a:p>
-            <a:pPr algn="ctr">
-              <a:defRPr sz="2000" b="1">
-                <a:solidFill>
-                  <a:srgbClr val="FFFFFF"/>
-                </a:solidFill>
-                <a:latin typeface="BIZ UDPGothic"/>
-              </a:defRPr>
-            </a:pPr>
-            <a:r>
-              <a:t>5</a:t>
-            </a:r>
-          </a:p>
-        </p:txBody>
-      </p:sp>
-      <p:sp>
-        <p:nvSpPr>
-          <p:cNvPr id="5" name="TextBox 4"/>
-          <p:cNvSpPr txBox="1"/>
-          <p:nvPr/>
-        </p:nvSpPr>
-        <p:spPr>
-          <a:xfrm>
-            <a:off x="7873803" y="6629234"/>
-            <a:ext cx="4013099" cy="203194"/>
-          </a:xfrm>
-          <a:prstGeom prst="rect">
-            <a:avLst/>
-          </a:prstGeom>
-          <a:noFill/>
-        </p:spPr>
-        <p:txBody>
-          <a:bodyPr wrap="square" lIns="0" rIns="0" tIns="0" bIns="0">
-            <a:spAutoFit/>
-          </a:bodyPr>
-          <a:lstStyle/>
-          <a:p>
-            <a:pPr algn="r">
-              <a:defRPr sz="900" b="0">
-                <a:solidFill>
-                  <a:srgbClr val="AAAAAA"/>
-                </a:solidFill>
-                <a:latin typeface="BIZ UDPGothic"/>
-              </a:defRPr>
-            </a:pPr>
-            <a:r>
-              <a:t>© Panasonic Corporation</a:t>
-            </a:r>
-          </a:p>
-        </p:txBody>
-      </p:sp>
-      <p:sp>
-        <p:nvSpPr>
-          <p:cNvPr id="6" name="TextBox 5"/>
-          <p:cNvSpPr txBox="1"/>
-          <p:nvPr/>
-        </p:nvSpPr>
-        <p:spPr>
-          <a:xfrm>
-            <a:off x="571485" y="888977"/>
-            <a:ext cx="11175720" cy="279393"/>
-          </a:xfrm>
-          <a:prstGeom prst="rect">
-            <a:avLst/>
-          </a:prstGeom>
-          <a:noFill/>
-        </p:spPr>
-        <p:txBody>
-          <a:bodyPr wrap="square" lIns="0" rIns="0" tIns="0" bIns="0">
-            <a:spAutoFit/>
-          </a:bodyPr>
-          <a:lstStyle/>
-          <a:p>
-            <a:pPr algn="l">
-              <a:defRPr sz="1400" b="0">
-                <a:solidFill>
-                  <a:srgbClr val="555555"/>
-                </a:solidFill>
-                <a:latin typeface="BIZ UDPGothic"/>
-              </a:defRPr>
-            </a:pPr>
-            <a:r>
-              <a:t>推奨起動時刻 ＝ 8:00 − 必要な予冷時間。その予冷時間を、次の4つに分けて積む。</a:t>
-            </a:r>
-          </a:p>
-        </p:txBody>
-      </p:sp>
-      <p:sp>
-        <p:nvSpPr>
-          <p:cNvPr id="7" name="Rectangle 6"/>
+              <a:t>4. 判断材料の求め方</a:t>
+            </a:r>
+          </a:p>
+        </p:txBody>
+      </p:sp>
+      <p:sp>
+        <p:nvSpPr>
+          <p:cNvPr id="5" name="Rounded Rectangle 4"/>
           <p:cNvSpPr/>
           <p:nvPr/>
         </p:nvSpPr>
         <p:spPr>
           <a:xfrm>
-            <a:off x="888977" y="1244568"/>
-            <a:ext cx="3809904" cy="558786"/>
-          </a:xfrm>
-          <a:prstGeom prst="rect">
+            <a:off x="10731231" y="139700"/>
+            <a:ext cx="533386" cy="304800"/>
+          </a:xfrm>
+          <a:prstGeom prst="roundRect">
             <a:avLst/>
           </a:prstGeom>
           <a:solidFill>
-            <a:srgbClr val="3E6FA8"/>
+            <a:srgbClr val="24588E"/>
           </a:solidFill>
           <a:ln>
-            <a:noFill/>
+            <a:solidFill>
+              <a:srgbClr val="5E8DBE"/>
+            </a:solidFill>
           </a:ln>
-          <a:effectLst/>
         </p:spPr>
         <p:style>
           <a:lnRef idx="1">
@@ -5269,154 +6008,30 @@
           <a:bodyPr rtlCol="0" anchor="ctr"/>
           <a:lstStyle/>
           <a:p>
-            <a:pPr algn="ctr"/>
-          </a:p>
-        </p:txBody>
-      </p:sp>
-      <p:sp>
-        <p:nvSpPr>
-          <p:cNvPr id="8" name="Rectangle 7"/>
-          <p:cNvSpPr/>
-          <p:nvPr/>
-        </p:nvSpPr>
-        <p:spPr>
-          <a:xfrm>
-            <a:off x="4698882" y="1244568"/>
-            <a:ext cx="1904952" cy="558786"/>
-          </a:xfrm>
-          <a:prstGeom prst="rect">
-            <a:avLst/>
-          </a:prstGeom>
-          <a:solidFill>
-            <a:srgbClr val="7BA4C7"/>
-          </a:solidFill>
-          <a:ln>
-            <a:noFill/>
-          </a:ln>
-          <a:effectLst/>
-        </p:spPr>
-        <p:style>
-          <a:lnRef idx="1">
-            <a:schemeClr val="accent1"/>
-          </a:lnRef>
-          <a:fillRef idx="3">
-            <a:schemeClr val="accent1"/>
-          </a:fillRef>
-          <a:effectRef idx="2">
-            <a:schemeClr val="accent1"/>
-          </a:effectRef>
-          <a:fontRef idx="minor">
-            <a:schemeClr val="lt1"/>
-          </a:fontRef>
-        </p:style>
-        <p:txBody>
-          <a:bodyPr rtlCol="0" anchor="ctr"/>
-          <a:lstStyle/>
-          <a:p>
-            <a:pPr algn="ctr"/>
-          </a:p>
-        </p:txBody>
-      </p:sp>
-      <p:sp>
-        <p:nvSpPr>
-          <p:cNvPr id="9" name="Rectangle 8"/>
-          <p:cNvSpPr/>
-          <p:nvPr/>
-        </p:nvSpPr>
-        <p:spPr>
-          <a:xfrm>
-            <a:off x="6603834" y="1244568"/>
-            <a:ext cx="2285942" cy="558786"/>
-          </a:xfrm>
-          <a:prstGeom prst="rect">
-            <a:avLst/>
-          </a:prstGeom>
-          <a:solidFill>
-            <a:srgbClr val="B7CEE3"/>
-          </a:solidFill>
-          <a:ln>
-            <a:noFill/>
-          </a:ln>
-          <a:effectLst/>
-        </p:spPr>
-        <p:style>
-          <a:lnRef idx="1">
-            <a:schemeClr val="accent1"/>
-          </a:lnRef>
-          <a:fillRef idx="3">
-            <a:schemeClr val="accent1"/>
-          </a:fillRef>
-          <a:effectRef idx="2">
-            <a:schemeClr val="accent1"/>
-          </a:effectRef>
-          <a:fontRef idx="minor">
-            <a:schemeClr val="lt1"/>
-          </a:fontRef>
-        </p:style>
-        <p:txBody>
-          <a:bodyPr rtlCol="0" anchor="ctr"/>
-          <a:lstStyle/>
-          <a:p>
-            <a:pPr algn="ctr"/>
-          </a:p>
-        </p:txBody>
-      </p:sp>
-      <p:sp>
-        <p:nvSpPr>
-          <p:cNvPr id="10" name="Rectangle 9"/>
-          <p:cNvSpPr/>
-          <p:nvPr/>
-        </p:nvSpPr>
-        <p:spPr>
-          <a:xfrm>
-            <a:off x="8889777" y="1244568"/>
-            <a:ext cx="2412939" cy="558786"/>
-          </a:xfrm>
-          <a:prstGeom prst="rect">
-            <a:avLst/>
-          </a:prstGeom>
-          <a:solidFill>
-            <a:srgbClr val="E3B9BF"/>
-          </a:solidFill>
-          <a:ln w="19050">
-            <a:solidFill>
-              <a:srgbClr val="C8102E"/>
-            </a:solidFill>
-          </a:ln>
-          <a:effectLst/>
-        </p:spPr>
-        <p:style>
-          <a:lnRef idx="1">
-            <a:schemeClr val="accent1"/>
-          </a:lnRef>
-          <a:fillRef idx="3">
-            <a:schemeClr val="accent1"/>
-          </a:fillRef>
-          <a:effectRef idx="2">
-            <a:schemeClr val="accent1"/>
-          </a:effectRef>
-          <a:fontRef idx="minor">
-            <a:schemeClr val="lt1"/>
-          </a:fontRef>
-        </p:style>
-        <p:txBody>
-          <a:bodyPr rtlCol="0" anchor="ctr"/>
-          <a:lstStyle/>
-          <a:p>
-            <a:pPr algn="ctr"/>
-          </a:p>
-        </p:txBody>
-      </p:sp>
-      <p:sp>
-        <p:nvSpPr>
-          <p:cNvPr id="11" name="TextBox 10"/>
+            <a:pPr algn="ctr">
+              <a:defRPr sz="1000" b="1" i="1">
+                <a:solidFill>
+                  <a:srgbClr val="FFFFFF"/>
+                </a:solidFill>
+                <a:latin typeface="BIZ UDPGothic"/>
+              </a:defRPr>
+            </a:pPr>
+            <a:r>
+              <a:t>IUO</a:t>
+            </a:r>
+          </a:p>
+        </p:txBody>
+      </p:sp>
+      <p:sp>
+        <p:nvSpPr>
+          <p:cNvPr id="6" name="TextBox 5"/>
           <p:cNvSpPr txBox="1"/>
           <p:nvPr/>
         </p:nvSpPr>
         <p:spPr>
           <a:xfrm>
-            <a:off x="888977" y="1396965"/>
-            <a:ext cx="3809904" cy="253993"/>
+            <a:off x="11366215" y="50800"/>
+            <a:ext cx="634984" cy="482600"/>
           </a:xfrm>
           <a:prstGeom prst="rect">
             <a:avLst/>
@@ -5424,13 +6039,13 @@
           <a:noFill/>
         </p:spPr>
         <p:txBody>
-          <a:bodyPr wrap="square" lIns="0" rIns="0" tIns="0" bIns="0">
+          <a:bodyPr wrap="none">
             <a:spAutoFit/>
           </a:bodyPr>
           <a:lstStyle/>
           <a:p>
             <a:pPr algn="ctr">
-              <a:defRPr sz="1300" b="1">
+              <a:defRPr sz="1800" b="1">
                 <a:solidFill>
                   <a:srgbClr val="FFFFFF"/>
                 </a:solidFill>
@@ -5438,21 +6053,21 @@
               </a:defRPr>
             </a:pPr>
             <a:r>
-              <a:t>モデルの予測</a:t>
-            </a:r>
-          </a:p>
-        </p:txBody>
-      </p:sp>
-      <p:sp>
-        <p:nvSpPr>
-          <p:cNvPr id="12" name="TextBox 11"/>
+              <a:t>5</a:t>
+            </a:r>
+          </a:p>
+        </p:txBody>
+      </p:sp>
+      <p:sp>
+        <p:nvSpPr>
+          <p:cNvPr id="7" name="TextBox 6"/>
           <p:cNvSpPr txBox="1"/>
           <p:nvPr/>
         </p:nvSpPr>
         <p:spPr>
           <a:xfrm>
-            <a:off x="4698882" y="1396965"/>
-            <a:ext cx="1904952" cy="253993"/>
+            <a:off x="444488" y="825500"/>
+            <a:ext cx="6984825" cy="5461000"/>
           </a:xfrm>
           <a:prstGeom prst="rect">
             <a:avLst/>
@@ -5460,398 +6075,237 @@
           <a:noFill/>
         </p:spPr>
         <p:txBody>
-          <a:bodyPr wrap="square" lIns="0" rIns="0" tIns="0" bIns="0">
+          <a:bodyPr wrap="square">
             <a:spAutoFit/>
           </a:bodyPr>
           <a:lstStyle/>
           <a:p>
-            <a:pPr algn="ctr">
+            <a:pPr>
+              <a:defRPr sz="1500" b="1">
+                <a:solidFill>
+                  <a:srgbClr val="0B3968"/>
+                </a:solidFill>
+                <a:latin typeface="BIZ UDPGothic"/>
+              </a:defRPr>
+            </a:pPr>
+            <a:r>
+              <a:t>■ BMが知りたい情報</a:t>
+            </a:r>
+          </a:p>
+          <a:p>
+            <a:pPr>
+              <a:defRPr sz="1200">
+                <a:solidFill>
+                  <a:srgbClr val="222222"/>
+                </a:solidFill>
+                <a:latin typeface="BIZ UDPGothic"/>
+              </a:defRPr>
+            </a:pPr>
+            <a:r>
+              <a:t>  ・判断材料として、明日の何時に熱源を起動したら、何時に室温が設定温度に到達するかという情報</a:t>
+            </a:r>
+          </a:p>
+          <a:p>
+            <a:pPr>
+              <a:defRPr sz="1200">
+                <a:solidFill>
+                  <a:srgbClr val="222222"/>
+                </a:solidFill>
+                <a:latin typeface="BIZ UDPGothic"/>
+              </a:defRPr>
+            </a:pPr>
+            <a:r>
+              <a:t>  ・過去のデータから外気温と室温を下げるのに必要な時間の関係を推測するモデルを作成する</a:t>
+            </a:r>
+          </a:p>
+          <a:p>
+            <a:pPr>
+              <a:spcBef>
+                <a:spcPts val="800"/>
+              </a:spcBef>
+              <a:defRPr sz="1500" b="1">
+                <a:solidFill>
+                  <a:srgbClr val="0B3968"/>
+                </a:solidFill>
+                <a:latin typeface="BIZ UDPGothic"/>
+              </a:defRPr>
+            </a:pPr>
+            <a:r>
+              <a:t>■ 推測モデルの基本構造</a:t>
+            </a:r>
+          </a:p>
+          <a:p>
+            <a:pPr>
               <a:defRPr sz="1200" b="1">
                 <a:solidFill>
-                  <a:srgbClr val="FFFFFF"/>
-                </a:solidFill>
-                <a:latin typeface="BIZ UDPGothic"/>
-              </a:defRPr>
-            </a:pPr>
-            <a:r>
-              <a:t>安全側の余裕</a:t>
-            </a:r>
-          </a:p>
-        </p:txBody>
-      </p:sp>
-      <p:sp>
-        <p:nvSpPr>
-          <p:cNvPr id="13" name="TextBox 12"/>
-          <p:cNvSpPr txBox="1"/>
+                  <a:srgbClr val="0B3968"/>
+                </a:solidFill>
+                <a:latin typeface="BIZ UDPGothic"/>
+              </a:defRPr>
+            </a:pPr>
+            <a:r>
+              <a:t>  必要な予冷時間[分] = f(①起動時刻の外気温, ②設定温度) ＋ ③安全マージン</a:t>
+            </a:r>
+          </a:p>
+          <a:p>
+            <a:pPr>
+              <a:defRPr sz="1200" b="1">
+                <a:solidFill>
+                  <a:srgbClr val="C8102E"/>
+                </a:solidFill>
+                <a:latin typeface="BIZ UDPGothic"/>
+              </a:defRPr>
+            </a:pPr>
+            <a:r>
+              <a:t>  ① 起動時の外気温</a:t>
+            </a:r>
+          </a:p>
+          <a:p>
+            <a:pPr>
+              <a:defRPr sz="1100">
+                <a:solidFill>
+                  <a:srgbClr val="222222"/>
+                </a:solidFill>
+                <a:latin typeface="BIZ UDPGothic"/>
+              </a:defRPr>
+            </a:pPr>
+            <a:r>
+              <a:t>    ・予測として使う際には、前日にわかる情報として天気予報の気温情報を利用する</a:t>
+            </a:r>
+          </a:p>
+          <a:p>
+            <a:pPr>
+              <a:defRPr sz="1200" b="1">
+                <a:solidFill>
+                  <a:srgbClr val="00509E"/>
+                </a:solidFill>
+                <a:latin typeface="BIZ UDPGothic"/>
+              </a:defRPr>
+            </a:pPr>
+            <a:r>
+              <a:t>  ② 設定温度</a:t>
+            </a:r>
+          </a:p>
+          <a:p>
+            <a:pPr>
+              <a:defRPr sz="1100">
+                <a:solidFill>
+                  <a:srgbClr val="222222"/>
+                </a:solidFill>
+                <a:latin typeface="BIZ UDPGothic"/>
+              </a:defRPr>
+            </a:pPr>
+            <a:r>
+              <a:t>    ・BMが柔軟に設定できるように、変数として設定</a:t>
+            </a:r>
+          </a:p>
+          <a:p>
+            <a:pPr>
+              <a:defRPr sz="1200" b="1">
+                <a:solidFill>
+                  <a:srgbClr val="16A34A"/>
+                </a:solidFill>
+                <a:latin typeface="BIZ UDPGothic"/>
+              </a:defRPr>
+            </a:pPr>
+            <a:r>
+              <a:t>  ③ 安全マージン</a:t>
+            </a:r>
+          </a:p>
+          <a:p>
+            <a:pPr>
+              <a:defRPr sz="1100">
+                <a:solidFill>
+                  <a:srgbClr val="222222"/>
+                </a:solidFill>
+                <a:latin typeface="BIZ UDPGothic"/>
+              </a:defRPr>
+            </a:pPr>
+            <a:r>
+              <a:t>    ・天気予報の誤差や、モデル全体の精度を考慮し、始業前に必ず到達するようにマージンを設ける</a:t>
+            </a:r>
+          </a:p>
+          <a:p>
+            <a:pPr>
+              <a:spcBef>
+                <a:spcPts val="800"/>
+              </a:spcBef>
+              <a:defRPr sz="1500" b="1">
+                <a:solidFill>
+                  <a:srgbClr val="0B3968"/>
+                </a:solidFill>
+                <a:latin typeface="BIZ UDPGothic"/>
+              </a:defRPr>
+            </a:pPr>
+            <a:r>
+              <a:t>■ 休み明けの考慮</a:t>
+            </a:r>
+          </a:p>
+          <a:p>
+            <a:pPr>
+              <a:defRPr sz="1100">
+                <a:solidFill>
+                  <a:srgbClr val="222222"/>
+                </a:solidFill>
+                <a:latin typeface="BIZ UDPGothic"/>
+              </a:defRPr>
+            </a:pPr>
+            <a:r>
+              <a:t>  ・先日が休日の場合、建物の躯体に熱が残り予冷に時間がかかる</a:t>
+            </a:r>
+          </a:p>
+          <a:p>
+            <a:pPr>
+              <a:defRPr sz="1100">
+                <a:solidFill>
+                  <a:srgbClr val="222222"/>
+                </a:solidFill>
+                <a:latin typeface="BIZ UDPGothic"/>
+              </a:defRPr>
+            </a:pPr>
+            <a:r>
+              <a:t>  ・過去データから、室温が2℃ほど高いことが判明</a:t>
+            </a:r>
+          </a:p>
+          <a:p>
+            <a:pPr>
+              <a:defRPr sz="1200" b="1">
+                <a:solidFill>
+                  <a:srgbClr val="00509E"/>
+                </a:solidFill>
+                <a:latin typeface="BIZ UDPGothic"/>
+              </a:defRPr>
+            </a:pPr>
+            <a:r>
+              <a:t>  → 外気温に+2℃のオフセットをかけ、対応できる</a:t>
+            </a:r>
+          </a:p>
+        </p:txBody>
+      </p:sp>
+      <p:pic>
+        <p:nvPicPr>
+          <p:cNvPr id="8" name="Picture 7" descr="deck_slide06_scatter.png"/>
+          <p:cNvPicPr>
+            <a:picLocks noChangeAspect="1"/>
+          </p:cNvPicPr>
           <p:nvPr/>
-        </p:nvSpPr>
-        <p:spPr>
-          <a:xfrm>
-            <a:off x="6603834" y="1396965"/>
-            <a:ext cx="2285942" cy="253993"/>
+        </p:nvPicPr>
+        <p:blipFill>
+          <a:blip r:embed="rId3"/>
+          <a:stretch>
+            <a:fillRect/>
+          </a:stretch>
+        </p:blipFill>
+        <p:spPr>
+          <a:xfrm>
+            <a:off x="7556310" y="2286000"/>
+            <a:ext cx="4381390" cy="3556000"/>
           </a:xfrm>
           <a:prstGeom prst="rect">
             <a:avLst/>
           </a:prstGeom>
-          <a:noFill/>
-        </p:spPr>
-        <p:txBody>
-          <a:bodyPr wrap="square" lIns="0" rIns="0" tIns="0" bIns="0">
-            <a:spAutoFit/>
-          </a:bodyPr>
-          <a:lstStyle/>
-          <a:p>
-            <a:pPr algn="ctr">
-              <a:defRPr sz="1200" b="1">
-                <a:solidFill>
-                  <a:srgbClr val="111111"/>
-                </a:solidFill>
-                <a:latin typeface="BIZ UDPGothic"/>
-              </a:defRPr>
-            </a:pPr>
-            <a:r>
-              <a:t>予報の外れ分</a:t>
-            </a:r>
-          </a:p>
-        </p:txBody>
-      </p:sp>
-      <p:sp>
-        <p:nvSpPr>
-          <p:cNvPr id="14" name="TextBox 13"/>
-          <p:cNvSpPr txBox="1"/>
-          <p:nvPr/>
-        </p:nvSpPr>
-        <p:spPr>
-          <a:xfrm>
-            <a:off x="8889777" y="1396965"/>
-            <a:ext cx="2412939" cy="253993"/>
-          </a:xfrm>
-          <a:prstGeom prst="rect">
-            <a:avLst/>
-          </a:prstGeom>
-          <a:noFill/>
-        </p:spPr>
-        <p:txBody>
-          <a:bodyPr wrap="square" lIns="0" rIns="0" tIns="0" bIns="0">
-            <a:spAutoFit/>
-          </a:bodyPr>
-          <a:lstStyle/>
-          <a:p>
-            <a:pPr algn="ctr">
-              <a:defRPr sz="1200" b="1">
-                <a:solidFill>
-                  <a:srgbClr val="111111"/>
-                </a:solidFill>
-                <a:latin typeface="BIZ UDPGothic"/>
-              </a:defRPr>
-            </a:pPr>
-            <a:r>
-              <a:t>休み明けの上乗せ</a:t>
-            </a:r>
-          </a:p>
-        </p:txBody>
-      </p:sp>
-      <p:sp>
-        <p:nvSpPr>
-          <p:cNvPr id="15" name="TextBox 14"/>
-          <p:cNvSpPr txBox="1"/>
-          <p:nvPr/>
-        </p:nvSpPr>
-        <p:spPr>
-          <a:xfrm>
-            <a:off x="761980" y="2412939"/>
-            <a:ext cx="10794730" cy="330191"/>
-          </a:xfrm>
-          <a:prstGeom prst="rect">
-            <a:avLst/>
-          </a:prstGeom>
-          <a:noFill/>
-        </p:spPr>
-        <p:txBody>
-          <a:bodyPr wrap="square" lIns="0" rIns="0" tIns="0" bIns="0">
-            <a:spAutoFit/>
-          </a:bodyPr>
-          <a:lstStyle/>
-          <a:p>
-            <a:pPr algn="l">
-              <a:defRPr sz="1400" b="0">
-                <a:solidFill>
-                  <a:srgbClr val="222222"/>
-                </a:solidFill>
-                <a:latin typeface="BIZ UDPGothic"/>
-              </a:defRPr>
-            </a:pPr>
-            <a:r>
-              <a:t>①  モデルの予測：外気温と設定温度の差を線形回帰。交差検証の平均誤差 3.7 分で採用（外気温のみ 5.6 / 定数 6.3）</a:t>
-            </a:r>
-          </a:p>
-        </p:txBody>
-      </p:sp>
-      <p:sp>
-        <p:nvSpPr>
-          <p:cNvPr id="16" name="TextBox 15"/>
-          <p:cNvSpPr txBox="1"/>
-          <p:nvPr/>
-        </p:nvSpPr>
-        <p:spPr>
-          <a:xfrm>
-            <a:off x="761980" y="2768530"/>
-            <a:ext cx="10794730" cy="330191"/>
-          </a:xfrm>
-          <a:prstGeom prst="rect">
-            <a:avLst/>
-          </a:prstGeom>
-          <a:noFill/>
-        </p:spPr>
-        <p:txBody>
-          <a:bodyPr wrap="square" lIns="0" rIns="0" tIns="0" bIns="0">
-            <a:spAutoFit/>
-          </a:bodyPr>
-          <a:lstStyle/>
-          <a:p>
-            <a:pPr algn="l">
-              <a:defRPr sz="1400" b="0">
-                <a:solidFill>
-                  <a:srgbClr val="222222"/>
-                </a:solidFill>
-                <a:latin typeface="BIZ UDPGothic"/>
-              </a:defRPr>
-            </a:pPr>
-            <a:r>
-              <a:t>②  安全側の余裕：残差の上側分位を足す。未達を何日に1日まで許すかで幅が決まる</a:t>
-            </a:r>
-          </a:p>
-        </p:txBody>
-      </p:sp>
-      <p:sp>
-        <p:nvSpPr>
-          <p:cNvPr id="17" name="TextBox 16"/>
-          <p:cNvSpPr txBox="1"/>
-          <p:nvPr/>
-        </p:nvSpPr>
-        <p:spPr>
-          <a:xfrm>
-            <a:off x="761980" y="3124121"/>
-            <a:ext cx="10794730" cy="330191"/>
-          </a:xfrm>
-          <a:prstGeom prst="rect">
-            <a:avLst/>
-          </a:prstGeom>
-          <a:noFill/>
-        </p:spPr>
-        <p:txBody>
-          <a:bodyPr wrap="square" lIns="0" rIns="0" tIns="0" bIns="0">
-            <a:spAutoFit/>
-          </a:bodyPr>
-          <a:lstStyle/>
-          <a:p>
-            <a:pPr algn="l">
-              <a:defRPr sz="1400" b="0">
-                <a:solidFill>
-                  <a:srgbClr val="222222"/>
-                </a:solidFill>
-                <a:latin typeface="BIZ UDPGothic"/>
-              </a:defRPr>
-            </a:pPr>
-            <a:r>
-              <a:t>③  予報の外れ分：学習は実測の外気温、運用は予報。予報誤差 1.5℃ を安全側に上乗せ</a:t>
-            </a:r>
-          </a:p>
-        </p:txBody>
-      </p:sp>
-      <p:sp>
-        <p:nvSpPr>
-          <p:cNvPr id="18" name="TextBox 17"/>
-          <p:cNvSpPr txBox="1"/>
-          <p:nvPr/>
-        </p:nvSpPr>
-        <p:spPr>
-          <a:xfrm>
-            <a:off x="761980" y="3479713"/>
-            <a:ext cx="10794730" cy="609584"/>
-          </a:xfrm>
-          <a:prstGeom prst="rect">
-            <a:avLst/>
-          </a:prstGeom>
-          <a:noFill/>
-        </p:spPr>
-        <p:txBody>
-          <a:bodyPr wrap="square" lIns="0" rIns="0" tIns="0" bIns="0">
-            <a:spAutoFit/>
-          </a:bodyPr>
-          <a:lstStyle/>
-          <a:p>
-            <a:pPr algn="l">
-              <a:defRPr sz="1400" b="0">
-                <a:solidFill>
-                  <a:srgbClr val="222222"/>
-                </a:solidFill>
-                <a:latin typeface="BIZ UDPGothic"/>
-              </a:defRPr>
-            </a:pPr>
-            <a:r>
-              <a:t>④  休み明けの上乗せ：躯体に残った熱を「外気が 2.0℃ 高い日」として同じ式に通す</a:t>
-            </a:r>
-          </a:p>
-          <a:p>
-            <a:pPr algn="l">
-              <a:defRPr sz="1400" b="0">
-                <a:solidFill>
-                  <a:srgbClr val="222222"/>
-                </a:solidFill>
-                <a:latin typeface="BIZ UDPGothic"/>
-              </a:defRPr>
-            </a:pPr>
-            <a:r>
-              <a:t>　　通常平日 51 分 に対し休日明け 135 分。1 件からの暫定値で、運用前に再確認する</a:t>
-            </a:r>
-          </a:p>
-        </p:txBody>
-      </p:sp>
-      <p:sp>
-        <p:nvSpPr>
-          <p:cNvPr id="19" name="TextBox 18"/>
-          <p:cNvSpPr txBox="1"/>
-          <p:nvPr/>
-        </p:nvSpPr>
-        <p:spPr>
-          <a:xfrm>
-            <a:off x="761980" y="4165495"/>
-            <a:ext cx="10794730" cy="304792"/>
-          </a:xfrm>
-          <a:prstGeom prst="rect">
-            <a:avLst/>
-          </a:prstGeom>
-          <a:noFill/>
-        </p:spPr>
-        <p:txBody>
-          <a:bodyPr wrap="square" lIns="0" rIns="0" tIns="0" bIns="0">
-            <a:spAutoFit/>
-          </a:bodyPr>
-          <a:lstStyle/>
-          <a:p>
-            <a:pPr algn="l">
-              <a:defRPr sz="1400" b="0">
-                <a:solidFill>
-                  <a:srgbClr val="222222"/>
-                </a:solidFill>
-                <a:latin typeface="BIZ UDPGothic"/>
-              </a:defRPr>
-            </a:pPr>
-            <a:r>
-              <a:t>・学習範囲の外は外挿警告を出し、担当者に判断を委ねる</a:t>
-            </a:r>
-          </a:p>
-        </p:txBody>
-      </p:sp>
-      <p:sp>
-        <p:nvSpPr>
-          <p:cNvPr id="20" name="Rounded Rectangle 19"/>
-          <p:cNvSpPr/>
-          <p:nvPr/>
-        </p:nvSpPr>
-        <p:spPr>
-          <a:xfrm>
-            <a:off x="698482" y="4521086"/>
-            <a:ext cx="10794730" cy="1219169"/>
-          </a:xfrm>
-          <a:prstGeom prst="roundRect">
-            <a:avLst/>
-          </a:prstGeom>
-          <a:solidFill>
-            <a:srgbClr val="EDF5FB"/>
-          </a:solidFill>
-          <a:ln w="22860">
-            <a:solidFill>
-              <a:srgbClr val="7BA4C7"/>
-            </a:solidFill>
-          </a:ln>
-          <a:effectLst/>
-        </p:spPr>
-        <p:style>
-          <a:lnRef idx="1">
-            <a:schemeClr val="accent1"/>
-          </a:lnRef>
-          <a:fillRef idx="3">
-            <a:schemeClr val="accent1"/>
-          </a:fillRef>
-          <a:effectRef idx="2">
-            <a:schemeClr val="accent1"/>
-          </a:effectRef>
-          <a:fontRef idx="minor">
-            <a:schemeClr val="lt1"/>
-          </a:fontRef>
-        </p:style>
-        <p:txBody>
-          <a:bodyPr rtlCol="0" anchor="ctr"/>
-          <a:lstStyle/>
-          <a:p>
-            <a:pPr algn="ctr"/>
-          </a:p>
-        </p:txBody>
-      </p:sp>
-      <p:sp>
-        <p:nvSpPr>
-          <p:cNvPr id="21" name="TextBox 20"/>
-          <p:cNvSpPr txBox="1"/>
-          <p:nvPr/>
-        </p:nvSpPr>
-        <p:spPr>
-          <a:xfrm>
-            <a:off x="952476" y="4775080"/>
-            <a:ext cx="10413739" cy="888977"/>
-          </a:xfrm>
-          <a:prstGeom prst="rect">
-            <a:avLst/>
-          </a:prstGeom>
-          <a:noFill/>
-        </p:spPr>
-        <p:txBody>
-          <a:bodyPr wrap="square" lIns="0" rIns="0" tIns="0" bIns="0">
-            <a:spAutoFit/>
-          </a:bodyPr>
-          <a:lstStyle/>
-          <a:p>
-            <a:pPr algn="l">
-              <a:defRPr sz="1400" b="0">
-                <a:solidFill>
-                  <a:srgbClr val="111111"/>
-                </a:solidFill>
-                <a:latin typeface="BIZ UDPGothic"/>
-              </a:defRPr>
-            </a:pPr>
-            <a:r>
-              <a:t>合算して1つの数字にしない</a:t>
-            </a:r>
-          </a:p>
-          <a:p>
-            <a:pPr algn="l">
-              <a:defRPr sz="1400" b="0">
-                <a:solidFill>
-                  <a:srgbClr val="111111"/>
-                </a:solidFill>
-                <a:latin typeface="BIZ UDPGothic"/>
-              </a:defRPr>
-            </a:pPr>
-            <a:r>
-              <a:t>4つを分けて画面に出すと、担当者が「なぜその時刻になったのか」を追える。</a:t>
-            </a:r>
-          </a:p>
-          <a:p>
-            <a:pPr algn="l">
-              <a:defRPr sz="1400" b="0">
-                <a:solidFill>
-                  <a:srgbClr val="111111"/>
-                </a:solidFill>
-                <a:latin typeface="BIZ UDPGothic"/>
-              </a:defRPr>
-            </a:pPr>
-            <a:r>
-              <a:t>学習し直したときも、どの項が動いたのかを切り分けられる。</a:t>
-            </a:r>
-          </a:p>
-        </p:txBody>
-      </p:sp>
+        </p:spPr>
+      </p:pic>
     </p:spTree>
   </p:cSld>
   <p:clrMapOvr>
@@ -5879,7 +6333,50 @@
         <p:spPr>
           <a:xfrm>
             <a:off x="0" y="0"/>
-            <a:ext cx="12191695" cy="584185"/>
+            <a:ext cx="12191695" cy="6858000"/>
+          </a:xfrm>
+          <a:prstGeom prst="rect">
+            <a:avLst/>
+          </a:prstGeom>
+          <a:solidFill>
+            <a:srgbClr val="FFFFFF"/>
+          </a:solidFill>
+          <a:ln>
+            <a:noFill/>
+          </a:ln>
+        </p:spPr>
+        <p:style>
+          <a:lnRef idx="1">
+            <a:schemeClr val="accent1"/>
+          </a:lnRef>
+          <a:fillRef idx="3">
+            <a:schemeClr val="accent1"/>
+          </a:fillRef>
+          <a:effectRef idx="2">
+            <a:schemeClr val="accent1"/>
+          </a:effectRef>
+          <a:fontRef idx="minor">
+            <a:schemeClr val="lt1"/>
+          </a:fontRef>
+        </p:style>
+        <p:txBody>
+          <a:bodyPr rtlCol="0" anchor="ctr"/>
+          <a:lstStyle/>
+          <a:p>
+            <a:pPr algn="ctr"/>
+          </a:p>
+        </p:txBody>
+      </p:sp>
+      <p:sp>
+        <p:nvSpPr>
+          <p:cNvPr id="3" name="Rectangle 2"/>
+          <p:cNvSpPr/>
+          <p:nvPr/>
+        </p:nvSpPr>
+        <p:spPr>
+          <a:xfrm>
+            <a:off x="0" y="0"/>
+            <a:ext cx="12191695" cy="584200"/>
           </a:xfrm>
           <a:prstGeom prst="rect">
             <a:avLst/>
@@ -5890,7 +6387,6 @@
           <a:ln>
             <a:noFill/>
           </a:ln>
-          <a:effectLst/>
         </p:spPr>
         <p:style>
           <a:lnRef idx="1">
@@ -5916,14 +6412,14 @@
       </p:sp>
       <p:sp>
         <p:nvSpPr>
-          <p:cNvPr id="3" name="TextBox 2"/>
+          <p:cNvPr id="4" name="TextBox 3"/>
           <p:cNvSpPr txBox="1"/>
           <p:nvPr/>
         </p:nvSpPr>
         <p:spPr>
           <a:xfrm>
-            <a:off x="304792" y="101597"/>
-            <a:ext cx="9905752" cy="406389"/>
+            <a:off x="304792" y="50800"/>
+            <a:ext cx="10159745" cy="482600"/>
           </a:xfrm>
           <a:prstGeom prst="rect">
             <a:avLst/>
@@ -5931,13 +6427,13 @@
           <a:noFill/>
         </p:spPr>
         <p:txBody>
-          <a:bodyPr wrap="square" lIns="0" rIns="0" tIns="0" bIns="0">
+          <a:bodyPr wrap="none">
             <a:spAutoFit/>
           </a:bodyPr>
           <a:lstStyle/>
           <a:p>
-            <a:pPr algn="l">
-              <a:defRPr sz="2000" b="1">
+            <a:pPr>
+              <a:defRPr sz="1800" b="1">
                 <a:solidFill>
                   <a:srgbClr val="FFFFFF"/>
                 </a:solidFill>
@@ -5945,191 +6441,33 @@
               </a:defRPr>
             </a:pPr>
             <a:r>
-              <a:t>5. 実データでの検証</a:t>
-            </a:r>
-          </a:p>
-        </p:txBody>
-      </p:sp>
-      <p:sp>
-        <p:nvSpPr>
-          <p:cNvPr id="4" name="TextBox 3"/>
-          <p:cNvSpPr txBox="1"/>
-          <p:nvPr/>
-        </p:nvSpPr>
-        <p:spPr>
-          <a:xfrm>
-            <a:off x="11302717" y="101597"/>
-            <a:ext cx="698482" cy="406389"/>
-          </a:xfrm>
-          <a:prstGeom prst="rect">
-            <a:avLst/>
-          </a:prstGeom>
-          <a:noFill/>
-        </p:spPr>
-        <p:txBody>
-          <a:bodyPr wrap="square" lIns="0" rIns="0" tIns="0" bIns="0">
-            <a:spAutoFit/>
-          </a:bodyPr>
-          <a:lstStyle/>
-          <a:p>
-            <a:pPr algn="ctr">
-              <a:defRPr sz="2000" b="1">
-                <a:solidFill>
-                  <a:srgbClr val="FFFFFF"/>
-                </a:solidFill>
-                <a:latin typeface="BIZ UDPGothic"/>
-              </a:defRPr>
-            </a:pPr>
-            <a:r>
-              <a:t>6</a:t>
-            </a:r>
-          </a:p>
-        </p:txBody>
-      </p:sp>
-      <p:sp>
-        <p:nvSpPr>
-          <p:cNvPr id="5" name="TextBox 4"/>
-          <p:cNvSpPr txBox="1"/>
-          <p:nvPr/>
-        </p:nvSpPr>
-        <p:spPr>
-          <a:xfrm>
-            <a:off x="7873803" y="6629234"/>
-            <a:ext cx="4013099" cy="203194"/>
-          </a:xfrm>
-          <a:prstGeom prst="rect">
-            <a:avLst/>
-          </a:prstGeom>
-          <a:noFill/>
-        </p:spPr>
-        <p:txBody>
-          <a:bodyPr wrap="square" lIns="0" rIns="0" tIns="0" bIns="0">
-            <a:spAutoFit/>
-          </a:bodyPr>
-          <a:lstStyle/>
-          <a:p>
-            <a:pPr algn="r">
-              <a:defRPr sz="900" b="0">
-                <a:solidFill>
-                  <a:srgbClr val="AAAAAA"/>
-                </a:solidFill>
-                <a:latin typeface="BIZ UDPGothic"/>
-              </a:defRPr>
-            </a:pPr>
-            <a:r>
-              <a:t>© Panasonic Corporation</a:t>
-            </a:r>
-          </a:p>
-        </p:txBody>
-      </p:sp>
-      <p:sp>
-        <p:nvSpPr>
-          <p:cNvPr id="6" name="TextBox 5"/>
-          <p:cNvSpPr txBox="1"/>
-          <p:nvPr/>
-        </p:nvSpPr>
-        <p:spPr>
-          <a:xfrm>
-            <a:off x="571485" y="990575"/>
-            <a:ext cx="4825879" cy="330191"/>
-          </a:xfrm>
-          <a:prstGeom prst="rect">
-            <a:avLst/>
-          </a:prstGeom>
-          <a:noFill/>
-        </p:spPr>
-        <p:txBody>
-          <a:bodyPr wrap="square" lIns="0" rIns="0" tIns="0" bIns="0">
-            <a:spAutoFit/>
-          </a:bodyPr>
-          <a:lstStyle/>
-          <a:p>
-            <a:pPr algn="l">
-              <a:defRPr sz="1800" b="1">
-                <a:solidFill>
-                  <a:srgbClr val="111111"/>
-                </a:solidFill>
-                <a:latin typeface="BIZ UDPGothic"/>
-              </a:defRPr>
-            </a:pPr>
-            <a:r>
-              <a:t>■ 方法</a:t>
-            </a:r>
-          </a:p>
-        </p:txBody>
-      </p:sp>
-      <p:sp>
-        <p:nvSpPr>
-          <p:cNvPr id="7" name="TextBox 6"/>
-          <p:cNvSpPr txBox="1"/>
-          <p:nvPr/>
-        </p:nvSpPr>
-        <p:spPr>
-          <a:xfrm>
-            <a:off x="825479" y="1320766"/>
-            <a:ext cx="4825879" cy="634984"/>
-          </a:xfrm>
-          <a:prstGeom prst="rect">
-            <a:avLst/>
-          </a:prstGeom>
-          <a:noFill/>
-        </p:spPr>
-        <p:txBody>
-          <a:bodyPr wrap="square" lIns="0" rIns="0" tIns="0" bIns="0">
-            <a:spAutoFit/>
-          </a:bodyPr>
-          <a:lstStyle/>
-          <a:p>
-            <a:pPr algn="l">
-              <a:defRPr sz="1500" b="0">
-                <a:solidFill>
-                  <a:srgbClr val="222222"/>
-                </a:solidFill>
-                <a:latin typeface="BIZ UDPGothic"/>
-              </a:defRPr>
-            </a:pPr>
-            <a:r>
-              <a:t>過去の平日 9 日について、その日の気温推移から</a:t>
-            </a:r>
-          </a:p>
-          <a:p>
-            <a:pPr algn="l">
-              <a:defRPr sz="1500" b="0">
-                <a:solidFill>
-                  <a:srgbClr val="222222"/>
-                </a:solidFill>
-                <a:latin typeface="BIZ UDPGothic"/>
-              </a:defRPr>
-            </a:pPr>
-            <a:r>
-              <a:t>予冷時間を求め、起動時刻を決め直した場合を計算</a:t>
-            </a:r>
-          </a:p>
-        </p:txBody>
-      </p:sp>
-      <p:sp>
-        <p:nvSpPr>
-          <p:cNvPr id="8" name="Rounded Rectangle 7"/>
+              <a:t>5. 削減効果の検証</a:t>
+            </a:r>
+          </a:p>
+        </p:txBody>
+      </p:sp>
+      <p:sp>
+        <p:nvSpPr>
+          <p:cNvPr id="5" name="Rounded Rectangle 4"/>
           <p:cNvSpPr/>
           <p:nvPr/>
         </p:nvSpPr>
         <p:spPr>
           <a:xfrm>
-            <a:off x="825479" y="2031949"/>
-            <a:ext cx="4508387" cy="1396965"/>
+            <a:off x="10731231" y="139700"/>
+            <a:ext cx="533386" cy="304800"/>
           </a:xfrm>
           <a:prstGeom prst="roundRect">
             <a:avLst/>
           </a:prstGeom>
           <a:solidFill>
-            <a:srgbClr val="EDF5FB"/>
+            <a:srgbClr val="24588E"/>
           </a:solidFill>
-          <a:ln w="22860">
+          <a:ln>
             <a:solidFill>
-              <a:srgbClr val="7BA4C7"/>
+              <a:srgbClr val="5E8DBE"/>
             </a:solidFill>
           </a:ln>
-          <a:effectLst/>
         </p:spPr>
         <p:style>
           <a:lnRef idx="1">
@@ -6149,20 +6487,30 @@
           <a:bodyPr rtlCol="0" anchor="ctr"/>
           <a:lstStyle/>
           <a:p>
-            <a:pPr algn="ctr"/>
-          </a:p>
-        </p:txBody>
-      </p:sp>
-      <p:sp>
-        <p:nvSpPr>
-          <p:cNvPr id="9" name="TextBox 8"/>
+            <a:pPr algn="ctr">
+              <a:defRPr sz="1000" b="1" i="1">
+                <a:solidFill>
+                  <a:srgbClr val="FFFFFF"/>
+                </a:solidFill>
+                <a:latin typeface="BIZ UDPGothic"/>
+              </a:defRPr>
+            </a:pPr>
+            <a:r>
+              <a:t>IUO</a:t>
+            </a:r>
+          </a:p>
+        </p:txBody>
+      </p:sp>
+      <p:sp>
+        <p:nvSpPr>
+          <p:cNvPr id="6" name="TextBox 5"/>
           <p:cNvSpPr txBox="1"/>
           <p:nvPr/>
         </p:nvSpPr>
         <p:spPr>
           <a:xfrm>
-            <a:off x="1142971" y="2235144"/>
-            <a:ext cx="4063898" cy="1142971"/>
+            <a:off x="11366215" y="50800"/>
+            <a:ext cx="634984" cy="482600"/>
           </a:xfrm>
           <a:prstGeom prst="rect">
             <a:avLst/>
@@ -6170,58 +6518,35 @@
           <a:noFill/>
         </p:spPr>
         <p:txBody>
-          <a:bodyPr wrap="square" lIns="0" rIns="0" tIns="0" bIns="0">
+          <a:bodyPr wrap="none">
             <a:spAutoFit/>
           </a:bodyPr>
           <a:lstStyle/>
           <a:p>
-            <a:pPr algn="l">
-              <a:defRPr sz="2000" b="1">
-                <a:solidFill>
-                  <a:srgbClr val="00509E"/>
-                </a:solidFill>
-                <a:latin typeface="BIZ UDPGothic"/>
-              </a:defRPr>
-            </a:pPr>
-            <a:r>
-              <a:t>8:00 到達率</a:t>
-            </a:r>
-          </a:p>
-          <a:p>
-            <a:pPr algn="l">
-              <a:defRPr sz="2000" b="1">
-                <a:solidFill>
-                  <a:srgbClr val="00509E"/>
-                </a:solidFill>
-                <a:latin typeface="BIZ UDPGothic"/>
-              </a:defRPr>
-            </a:pPr>
-          </a:p>
-          <a:p>
-            <a:pPr algn="l">
-              <a:defRPr sz="2000" b="1">
-                <a:solidFill>
-                  <a:srgbClr val="00509E"/>
-                </a:solidFill>
-                <a:latin typeface="BIZ UDPGothic"/>
-              </a:defRPr>
-            </a:pPr>
-            <a:r>
-              <a:t>100 %</a:t>
-            </a:r>
-          </a:p>
-        </p:txBody>
-      </p:sp>
-      <p:sp>
-        <p:nvSpPr>
-          <p:cNvPr id="10" name="TextBox 9"/>
+            <a:pPr algn="ctr">
+              <a:defRPr sz="1800" b="1">
+                <a:solidFill>
+                  <a:srgbClr val="FFFFFF"/>
+                </a:solidFill>
+                <a:latin typeface="BIZ UDPGothic"/>
+              </a:defRPr>
+            </a:pPr>
+            <a:r>
+              <a:t>6</a:t>
+            </a:r>
+          </a:p>
+        </p:txBody>
+      </p:sp>
+      <p:sp>
+        <p:nvSpPr>
+          <p:cNvPr id="7" name="TextBox 6"/>
           <p:cNvSpPr txBox="1"/>
           <p:nvPr/>
         </p:nvSpPr>
         <p:spPr>
           <a:xfrm>
-            <a:off x="1142971" y="3124121"/>
-            <a:ext cx="4063898" cy="253993"/>
+            <a:off x="444488" y="762000"/>
+            <a:ext cx="11302717" cy="762000"/>
           </a:xfrm>
           <a:prstGeom prst="rect">
             <a:avLst/>
@@ -6229,278 +6554,41 @@
           <a:noFill/>
         </p:spPr>
         <p:txBody>
-          <a:bodyPr wrap="square" lIns="0" rIns="0" tIns="0" bIns="0">
+          <a:bodyPr wrap="none">
             <a:spAutoFit/>
           </a:bodyPr>
           <a:lstStyle/>
           <a:p>
-            <a:pPr algn="l">
-              <a:defRPr sz="1200" b="0">
-                <a:solidFill>
-                  <a:srgbClr val="555555"/>
-                </a:solidFill>
-                <a:latin typeface="BIZ UDPGothic"/>
-              </a:defRPr>
-            </a:pPr>
-            <a:r>
-              <a:t>9 日すべてで始業前に設定温度へ到達</a:t>
-            </a:r>
-          </a:p>
-        </p:txBody>
-      </p:sp>
-      <p:sp>
-        <p:nvSpPr>
-          <p:cNvPr id="11" name="Rounded Rectangle 10"/>
-          <p:cNvSpPr/>
-          <p:nvPr/>
-        </p:nvSpPr>
-        <p:spPr>
-          <a:xfrm>
-            <a:off x="825479" y="3682907"/>
-            <a:ext cx="4508387" cy="1396965"/>
-          </a:xfrm>
-          <a:prstGeom prst="roundRect">
-            <a:avLst/>
-          </a:prstGeom>
-          <a:solidFill>
-            <a:srgbClr val="EDF5FB"/>
-          </a:solidFill>
-          <a:ln w="22860">
-            <a:solidFill>
-              <a:srgbClr val="7BA4C7"/>
-            </a:solidFill>
-          </a:ln>
-          <a:effectLst/>
-        </p:spPr>
-        <p:style>
-          <a:lnRef idx="1">
-            <a:schemeClr val="accent1"/>
-          </a:lnRef>
-          <a:fillRef idx="3">
-            <a:schemeClr val="accent1"/>
-          </a:fillRef>
-          <a:effectRef idx="2">
-            <a:schemeClr val="accent1"/>
-          </a:effectRef>
-          <a:fontRef idx="minor">
-            <a:schemeClr val="lt1"/>
-          </a:fontRef>
-        </p:style>
-        <p:txBody>
-          <a:bodyPr rtlCol="0" anchor="ctr"/>
-          <a:lstStyle/>
-          <a:p>
-            <a:pPr algn="ctr"/>
-          </a:p>
-        </p:txBody>
-      </p:sp>
-      <p:sp>
-        <p:nvSpPr>
-          <p:cNvPr id="12" name="TextBox 11"/>
-          <p:cNvSpPr txBox="1"/>
-          <p:nvPr/>
-        </p:nvSpPr>
-        <p:spPr>
-          <a:xfrm>
-            <a:off x="1142971" y="3886102"/>
-            <a:ext cx="4063898" cy="1015974"/>
-          </a:xfrm>
-          <a:prstGeom prst="rect">
-            <a:avLst/>
-          </a:prstGeom>
-          <a:noFill/>
-        </p:spPr>
-        <p:txBody>
-          <a:bodyPr wrap="square" lIns="0" rIns="0" tIns="0" bIns="0">
-            <a:spAutoFit/>
-          </a:bodyPr>
-          <a:lstStyle/>
-          <a:p>
-            <a:pPr algn="l">
-              <a:defRPr sz="1800" b="1">
-                <a:solidFill>
-                  <a:srgbClr val="00509E"/>
-                </a:solidFill>
-                <a:latin typeface="BIZ UDPGothic"/>
-              </a:defRPr>
-            </a:pPr>
-            <a:r>
-              <a:t>始業前の消費電力量 削減率</a:t>
-            </a:r>
-          </a:p>
-          <a:p>
-            <a:pPr algn="l">
-              <a:defRPr sz="1800" b="1">
-                <a:solidFill>
-                  <a:srgbClr val="00509E"/>
-                </a:solidFill>
-                <a:latin typeface="BIZ UDPGothic"/>
-              </a:defRPr>
-            </a:pPr>
-          </a:p>
-          <a:p>
-            <a:pPr algn="l">
-              <a:defRPr sz="1800" b="1">
-                <a:solidFill>
-                  <a:srgbClr val="00509E"/>
-                </a:solidFill>
-                <a:latin typeface="BIZ UDPGothic"/>
-              </a:defRPr>
-            </a:pPr>
-            <a:r>
-              <a:t>平均 約 36 %</a:t>
-            </a:r>
-          </a:p>
-        </p:txBody>
-      </p:sp>
-      <p:sp>
-        <p:nvSpPr>
-          <p:cNvPr id="13" name="TextBox 12"/>
-          <p:cNvSpPr txBox="1"/>
-          <p:nvPr/>
-        </p:nvSpPr>
-        <p:spPr>
-          <a:xfrm>
-            <a:off x="1142971" y="4800479"/>
-            <a:ext cx="4063898" cy="253993"/>
-          </a:xfrm>
-          <a:prstGeom prst="rect">
-            <a:avLst/>
-          </a:prstGeom>
-          <a:noFill/>
-        </p:spPr>
-        <p:txBody>
-          <a:bodyPr wrap="square" lIns="0" rIns="0" tIns="0" bIns="0">
-            <a:spAutoFit/>
-          </a:bodyPr>
-          <a:lstStyle/>
-          <a:p>
-            <a:pPr algn="l">
-              <a:defRPr sz="1200" b="0">
-                <a:solidFill>
-                  <a:srgbClr val="555555"/>
-                </a:solidFill>
-                <a:latin typeface="BIZ UDPGothic"/>
-              </a:defRPr>
-            </a:pPr>
-            <a:r>
-              <a:t>起動を最大 1 時間以上遅らせられた</a:t>
-            </a:r>
-          </a:p>
-        </p:txBody>
-      </p:sp>
-      <p:sp>
-        <p:nvSpPr>
-          <p:cNvPr id="14" name="TextBox 13"/>
-          <p:cNvSpPr txBox="1"/>
-          <p:nvPr/>
-        </p:nvSpPr>
-        <p:spPr>
-          <a:xfrm>
-            <a:off x="571485" y="5460863"/>
-            <a:ext cx="4952876" cy="888977"/>
-          </a:xfrm>
-          <a:prstGeom prst="rect">
-            <a:avLst/>
-          </a:prstGeom>
-          <a:noFill/>
-        </p:spPr>
-        <p:txBody>
-          <a:bodyPr wrap="square" lIns="0" rIns="0" tIns="0" bIns="0">
-            <a:spAutoFit/>
-          </a:bodyPr>
-          <a:lstStyle/>
-          <a:p>
-            <a:pPr algn="l">
-              <a:defRPr sz="1300" b="0">
-                <a:solidFill>
-                  <a:srgbClr val="555555"/>
-                </a:solidFill>
-                <a:latin typeface="BIZ UDPGothic"/>
-              </a:defRPr>
-            </a:pPr>
-            <a:r>
-              <a:t>現行と推奨を別々に積算して比べている。「遅らせた時間 × 保温電力」の</a:t>
-            </a:r>
-          </a:p>
-          <a:p>
-            <a:pPr algn="l">
-              <a:defRPr sz="1300" b="0">
-                <a:solidFill>
-                  <a:srgbClr val="555555"/>
-                </a:solidFill>
-                <a:latin typeface="BIZ UDPGothic"/>
-              </a:defRPr>
-            </a:pPr>
-            <a:r>
-              <a:t>引き算では、プルダウンの電力が消えて削減率が過大になるため。</a:t>
-            </a:r>
-          </a:p>
-        </p:txBody>
-      </p:sp>
-      <p:sp>
-        <p:nvSpPr>
-          <p:cNvPr id="15" name="TextBox 14"/>
-          <p:cNvSpPr txBox="1"/>
-          <p:nvPr/>
-        </p:nvSpPr>
-        <p:spPr>
-          <a:xfrm>
-            <a:off x="571485" y="6349841"/>
-            <a:ext cx="5079873" cy="253993"/>
-          </a:xfrm>
-          <a:prstGeom prst="rect">
-            <a:avLst/>
-          </a:prstGeom>
-          <a:noFill/>
-        </p:spPr>
-        <p:txBody>
-          <a:bodyPr wrap="square" lIns="0" rIns="0" tIns="0" bIns="0">
-            <a:spAutoFit/>
-          </a:bodyPr>
-          <a:lstStyle/>
-          <a:p>
-            <a:pPr algn="l">
-              <a:defRPr sz="1200" b="1">
-                <a:solidFill>
-                  <a:srgbClr val="C8102E"/>
-                </a:solidFill>
-                <a:latin typeface="BIZ UDPGothic"/>
-              </a:defRPr>
-            </a:pPr>
-            <a:r>
-              <a:t>※ 学習に使った同じ 2 週間に対する後ろ向きの検証</a:t>
+            <a:pPr>
+              <a:defRPr sz="1500" b="1">
+                <a:solidFill>
+                  <a:srgbClr val="0B3968"/>
+                </a:solidFill>
+                <a:latin typeface="BIZ UDPGothic"/>
+              </a:defRPr>
+            </a:pPr>
+            <a:r>
+              <a:t>■ 実データでの検証</a:t>
+            </a:r>
+          </a:p>
+          <a:p>
+            <a:pPr>
+              <a:defRPr sz="1300">
+                <a:solidFill>
+                  <a:srgbClr val="222222"/>
+                </a:solidFill>
+                <a:latin typeface="BIZ UDPGothic"/>
+              </a:defRPr>
+            </a:pPr>
+            <a:r>
+              <a:t>  ・作成した予測モデルを用い、実際の過去データの気温推移から必要な予冷時間を推測、起動時間を決定した</a:t>
             </a:r>
           </a:p>
         </p:txBody>
       </p:sp>
       <p:pic>
         <p:nvPicPr>
-          <p:cNvPr id="16" name="Picture 15" descr="deck_slide07_timeline.png"/>
-          <p:cNvPicPr>
-            <a:picLocks noChangeAspect="1"/>
-          </p:cNvPicPr>
-          <p:nvPr/>
-        </p:nvPicPr>
-        <p:blipFill>
-          <a:blip r:embed="rId2"/>
-          <a:stretch>
-            <a:fillRect/>
-          </a:stretch>
-        </p:blipFill>
-        <p:spPr>
-          <a:xfrm>
-            <a:off x="5651358" y="698482"/>
-            <a:ext cx="6222844" cy="2793930"/>
-          </a:xfrm>
-          <a:prstGeom prst="rect">
-            <a:avLst/>
-          </a:prstGeom>
-        </p:spPr>
-      </p:pic>
-      <p:pic>
-        <p:nvPicPr>
-          <p:cNvPr id="17" name="Picture 16" descr="deck_slide07_energy.png"/>
+          <p:cNvPr id="8" name="Picture 7" descr="onsite_timeline_combined.png"/>
           <p:cNvPicPr>
             <a:picLocks noChangeAspect="1"/>
           </p:cNvPicPr>
@@ -6514,14 +6602,174 @@
         </p:blipFill>
         <p:spPr>
           <a:xfrm>
-            <a:off x="5651358" y="3530511"/>
-            <a:ext cx="6222844" cy="2984425"/>
+            <a:off x="507987" y="1714500"/>
+            <a:ext cx="5587860" cy="3048000"/>
           </a:xfrm>
           <a:prstGeom prst="rect">
             <a:avLst/>
           </a:prstGeom>
         </p:spPr>
       </p:pic>
+      <p:sp>
+        <p:nvSpPr>
+          <p:cNvPr id="9" name="Rounded Rectangle 8"/>
+          <p:cNvSpPr/>
+          <p:nvPr/>
+        </p:nvSpPr>
+        <p:spPr>
+          <a:xfrm>
+            <a:off x="1396965" y="5016500"/>
+            <a:ext cx="3301917" cy="952500"/>
+          </a:xfrm>
+          <a:prstGeom prst="roundRect">
+            <a:avLst/>
+          </a:prstGeom>
+          <a:solidFill>
+            <a:srgbClr val="EDF5FB"/>
+          </a:solidFill>
+          <a:ln>
+            <a:solidFill>
+              <a:srgbClr val="7BA4C7"/>
+            </a:solidFill>
+          </a:ln>
+        </p:spPr>
+        <p:style>
+          <a:lnRef idx="1">
+            <a:schemeClr val="accent1"/>
+          </a:lnRef>
+          <a:fillRef idx="3">
+            <a:schemeClr val="accent1"/>
+          </a:fillRef>
+          <a:effectRef idx="2">
+            <a:schemeClr val="accent1"/>
+          </a:effectRef>
+          <a:fontRef idx="minor">
+            <a:schemeClr val="lt1"/>
+          </a:fontRef>
+        </p:style>
+        <p:txBody>
+          <a:bodyPr rtlCol="0" anchor="ctr"/>
+          <a:lstStyle/>
+          <a:p>
+            <a:pPr algn="ctr">
+              <a:defRPr sz="1300">
+                <a:solidFill>
+                  <a:srgbClr val="222222"/>
+                </a:solidFill>
+                <a:latin typeface="BIZ UDPGothic"/>
+              </a:defRPr>
+            </a:pPr>
+            <a:r>
+              <a:t>削減した運転時間</a:t>
+            </a:r>
+          </a:p>
+          <a:p>
+            <a:pPr algn="ctr">
+              <a:defRPr sz="2000" b="1">
+                <a:solidFill>
+                  <a:srgbClr val="00509E"/>
+                </a:solidFill>
+                <a:latin typeface="BIZ UDPGothic"/>
+              </a:defRPr>
+            </a:pPr>
+            <a:r>
+              <a:t>平均 約 104 分</a:t>
+            </a:r>
+          </a:p>
+        </p:txBody>
+      </p:sp>
+      <p:pic>
+        <p:nvPicPr>
+          <p:cNvPr id="10" name="Picture 9" descr="onsite_barchart_with_badges.png"/>
+          <p:cNvPicPr>
+            <a:picLocks noChangeAspect="1"/>
+          </p:cNvPicPr>
+          <p:nvPr/>
+        </p:nvPicPr>
+        <p:blipFill>
+          <a:blip r:embed="rId4"/>
+          <a:stretch>
+            <a:fillRect/>
+          </a:stretch>
+        </p:blipFill>
+        <p:spPr>
+          <a:xfrm>
+            <a:off x="6349841" y="1714500"/>
+            <a:ext cx="5460863" cy="3048000"/>
+          </a:xfrm>
+          <a:prstGeom prst="rect">
+            <a:avLst/>
+          </a:prstGeom>
+        </p:spPr>
+      </p:pic>
+      <p:sp>
+        <p:nvSpPr>
+          <p:cNvPr id="11" name="Rounded Rectangle 10"/>
+          <p:cNvSpPr/>
+          <p:nvPr/>
+        </p:nvSpPr>
+        <p:spPr>
+          <a:xfrm>
+            <a:off x="7238818" y="5016500"/>
+            <a:ext cx="3555911" cy="952500"/>
+          </a:xfrm>
+          <a:prstGeom prst="roundRect">
+            <a:avLst/>
+          </a:prstGeom>
+          <a:solidFill>
+            <a:srgbClr val="EDF5FB"/>
+          </a:solidFill>
+          <a:ln>
+            <a:solidFill>
+              <a:srgbClr val="7BA4C7"/>
+            </a:solidFill>
+          </a:ln>
+        </p:spPr>
+        <p:style>
+          <a:lnRef idx="1">
+            <a:schemeClr val="accent1"/>
+          </a:lnRef>
+          <a:fillRef idx="3">
+            <a:schemeClr val="accent1"/>
+          </a:fillRef>
+          <a:effectRef idx="2">
+            <a:schemeClr val="accent1"/>
+          </a:effectRef>
+          <a:fontRef idx="minor">
+            <a:schemeClr val="lt1"/>
+          </a:fontRef>
+        </p:style>
+        <p:txBody>
+          <a:bodyPr rtlCol="0" anchor="ctr"/>
+          <a:lstStyle/>
+          <a:p>
+            <a:pPr algn="ctr">
+              <a:defRPr sz="1300">
+                <a:solidFill>
+                  <a:srgbClr val="222222"/>
+                </a:solidFill>
+                <a:latin typeface="BIZ UDPGothic"/>
+              </a:defRPr>
+            </a:pPr>
+            <a:r>
+              <a:t>始業前消費電力量 削減率</a:t>
+            </a:r>
+          </a:p>
+          <a:p>
+            <a:pPr algn="ctr">
+              <a:defRPr sz="2000" b="1">
+                <a:solidFill>
+                  <a:srgbClr val="00509E"/>
+                </a:solidFill>
+                <a:latin typeface="BIZ UDPGothic"/>
+              </a:defRPr>
+            </a:pPr>
+            <a:r>
+              <a:t>平均 約 36 %</a:t>
+            </a:r>
+          </a:p>
+        </p:txBody>
+      </p:sp>
     </p:spTree>
   </p:cSld>
   <p:clrMapOvr>
@@ -6549,7 +6797,50 @@
         <p:spPr>
           <a:xfrm>
             <a:off x="0" y="0"/>
-            <a:ext cx="12191695" cy="584185"/>
+            <a:ext cx="12191695" cy="6858000"/>
+          </a:xfrm>
+          <a:prstGeom prst="rect">
+            <a:avLst/>
+          </a:prstGeom>
+          <a:solidFill>
+            <a:srgbClr val="FFFFFF"/>
+          </a:solidFill>
+          <a:ln>
+            <a:noFill/>
+          </a:ln>
+        </p:spPr>
+        <p:style>
+          <a:lnRef idx="1">
+            <a:schemeClr val="accent1"/>
+          </a:lnRef>
+          <a:fillRef idx="3">
+            <a:schemeClr val="accent1"/>
+          </a:fillRef>
+          <a:effectRef idx="2">
+            <a:schemeClr val="accent1"/>
+          </a:effectRef>
+          <a:fontRef idx="minor">
+            <a:schemeClr val="lt1"/>
+          </a:fontRef>
+        </p:style>
+        <p:txBody>
+          <a:bodyPr rtlCol="0" anchor="ctr"/>
+          <a:lstStyle/>
+          <a:p>
+            <a:pPr algn="ctr"/>
+          </a:p>
+        </p:txBody>
+      </p:sp>
+      <p:sp>
+        <p:nvSpPr>
+          <p:cNvPr id="3" name="Rectangle 2"/>
+          <p:cNvSpPr/>
+          <p:nvPr/>
+        </p:nvSpPr>
+        <p:spPr>
+          <a:xfrm>
+            <a:off x="0" y="0"/>
+            <a:ext cx="12191695" cy="584200"/>
           </a:xfrm>
           <a:prstGeom prst="rect">
             <a:avLst/>
@@ -6560,7 +6851,6 @@
           <a:ln>
             <a:noFill/>
           </a:ln>
-          <a:effectLst/>
         </p:spPr>
         <p:style>
           <a:lnRef idx="1">
@@ -6586,14 +6876,14 @@
       </p:sp>
       <p:sp>
         <p:nvSpPr>
-          <p:cNvPr id="3" name="TextBox 2"/>
+          <p:cNvPr id="4" name="TextBox 3"/>
           <p:cNvSpPr txBox="1"/>
           <p:nvPr/>
         </p:nvSpPr>
         <p:spPr>
           <a:xfrm>
-            <a:off x="304792" y="101597"/>
-            <a:ext cx="9905752" cy="406389"/>
+            <a:off x="304792" y="50800"/>
+            <a:ext cx="10159745" cy="482600"/>
           </a:xfrm>
           <a:prstGeom prst="rect">
             <a:avLst/>
@@ -6601,13 +6891,13 @@
           <a:noFill/>
         </p:spPr>
         <p:txBody>
-          <a:bodyPr wrap="square" lIns="0" rIns="0" tIns="0" bIns="0">
+          <a:bodyPr wrap="none">
             <a:spAutoFit/>
           </a:bodyPr>
           <a:lstStyle/>
           <a:p>
-            <a:pPr algn="l">
-              <a:defRPr sz="2000" b="1">
+            <a:pPr>
+              <a:defRPr sz="1800" b="1">
                 <a:solidFill>
                   <a:srgbClr val="FFFFFF"/>
                 </a:solidFill>
@@ -6615,21 +6905,76 @@
               </a:defRPr>
             </a:pPr>
             <a:r>
-              <a:t>6. 担当者が毎夕使う画面</a:t>
-            </a:r>
-          </a:p>
-        </p:txBody>
-      </p:sp>
-      <p:sp>
-        <p:nvSpPr>
-          <p:cNvPr id="4" name="TextBox 3"/>
+              <a:t>6. 可視化アプリ</a:t>
+            </a:r>
+          </a:p>
+        </p:txBody>
+      </p:sp>
+      <p:sp>
+        <p:nvSpPr>
+          <p:cNvPr id="5" name="Rounded Rectangle 4"/>
+          <p:cNvSpPr/>
+          <p:nvPr/>
+        </p:nvSpPr>
+        <p:spPr>
+          <a:xfrm>
+            <a:off x="10731231" y="139700"/>
+            <a:ext cx="533386" cy="304800"/>
+          </a:xfrm>
+          <a:prstGeom prst="roundRect">
+            <a:avLst/>
+          </a:prstGeom>
+          <a:solidFill>
+            <a:srgbClr val="24588E"/>
+          </a:solidFill>
+          <a:ln>
+            <a:solidFill>
+              <a:srgbClr val="5E8DBE"/>
+            </a:solidFill>
+          </a:ln>
+        </p:spPr>
+        <p:style>
+          <a:lnRef idx="1">
+            <a:schemeClr val="accent1"/>
+          </a:lnRef>
+          <a:fillRef idx="3">
+            <a:schemeClr val="accent1"/>
+          </a:fillRef>
+          <a:effectRef idx="2">
+            <a:schemeClr val="accent1"/>
+          </a:effectRef>
+          <a:fontRef idx="minor">
+            <a:schemeClr val="lt1"/>
+          </a:fontRef>
+        </p:style>
+        <p:txBody>
+          <a:bodyPr rtlCol="0" anchor="ctr"/>
+          <a:lstStyle/>
+          <a:p>
+            <a:pPr algn="ctr">
+              <a:defRPr sz="1000" b="1" i="1">
+                <a:solidFill>
+                  <a:srgbClr val="FFFFFF"/>
+                </a:solidFill>
+                <a:latin typeface="BIZ UDPGothic"/>
+              </a:defRPr>
+            </a:pPr>
+            <a:r>
+              <a:t>IUO</a:t>
+            </a:r>
+          </a:p>
+        </p:txBody>
+      </p:sp>
+      <p:sp>
+        <p:nvSpPr>
+          <p:cNvPr id="6" name="TextBox 5"/>
           <p:cNvSpPr txBox="1"/>
           <p:nvPr/>
         </p:nvSpPr>
         <p:spPr>
           <a:xfrm>
-            <a:off x="11302717" y="101597"/>
-            <a:ext cx="698482" cy="406389"/>
+            <a:off x="11366215" y="50800"/>
+            <a:ext cx="634984" cy="482600"/>
           </a:xfrm>
           <a:prstGeom prst="rect">
             <a:avLst/>
@@ -6637,13 +6982,13 @@
           <a:noFill/>
         </p:spPr>
         <p:txBody>
-          <a:bodyPr wrap="square" lIns="0" rIns="0" tIns="0" bIns="0">
+          <a:bodyPr wrap="none">
             <a:spAutoFit/>
           </a:bodyPr>
           <a:lstStyle/>
           <a:p>
             <a:pPr algn="ctr">
-              <a:defRPr sz="2000" b="1">
+              <a:defRPr sz="1800" b="1">
                 <a:solidFill>
                   <a:srgbClr val="FFFFFF"/>
                 </a:solidFill>
@@ -6652,64 +6997,28 @@
             </a:pPr>
             <a:r>
               <a:t>7</a:t>
-            </a:r>
-          </a:p>
-        </p:txBody>
-      </p:sp>
-      <p:sp>
-        <p:nvSpPr>
-          <p:cNvPr id="5" name="TextBox 4"/>
-          <p:cNvSpPr txBox="1"/>
-          <p:nvPr/>
-        </p:nvSpPr>
-        <p:spPr>
-          <a:xfrm>
-            <a:off x="7873803" y="6629234"/>
-            <a:ext cx="4013099" cy="203194"/>
-          </a:xfrm>
-          <a:prstGeom prst="rect">
-            <a:avLst/>
-          </a:prstGeom>
-          <a:noFill/>
-        </p:spPr>
-        <p:txBody>
-          <a:bodyPr wrap="square" lIns="0" rIns="0" tIns="0" bIns="0">
-            <a:spAutoFit/>
-          </a:bodyPr>
-          <a:lstStyle/>
-          <a:p>
-            <a:pPr algn="r">
-              <a:defRPr sz="900" b="0">
-                <a:solidFill>
-                  <a:srgbClr val="AAAAAA"/>
-                </a:solidFill>
-                <a:latin typeface="BIZ UDPGothic"/>
-              </a:defRPr>
-            </a:pPr>
-            <a:r>
-              <a:t>© Panasonic Corporation</a:t>
             </a:r>
           </a:p>
         </p:txBody>
       </p:sp>
       <p:pic>
         <p:nvPicPr>
-          <p:cNvPr id="6" name="Picture 5" descr="deck_slide08_app.png"/>
+          <p:cNvPr id="7" name="Picture 6" descr="deck_slide08_app.png"/>
           <p:cNvPicPr>
             <a:picLocks noChangeAspect="1"/>
           </p:cNvPicPr>
           <p:nvPr/>
         </p:nvPicPr>
         <p:blipFill>
-          <a:blip r:embed="rId2"/>
+          <a:blip r:embed="rId3"/>
           <a:stretch>
             <a:fillRect/>
           </a:stretch>
         </p:blipFill>
         <p:spPr>
           <a:xfrm>
-            <a:off x="2222444" y="698482"/>
-            <a:ext cx="7810304" cy="5397365"/>
+            <a:off x="2222444" y="698500"/>
+            <a:ext cx="7810304" cy="5397500"/>
           </a:xfrm>
           <a:prstGeom prst="rect">
             <a:avLst/>
@@ -6718,14 +7027,14 @@
       </p:pic>
       <p:sp>
         <p:nvSpPr>
-          <p:cNvPr id="7" name="Rounded Rectangle 6"/>
+          <p:cNvPr id="8" name="Rounded Rectangle 7"/>
           <p:cNvSpPr/>
           <p:nvPr/>
         </p:nvSpPr>
         <p:spPr>
           <a:xfrm>
-            <a:off x="228594" y="1396965"/>
-            <a:ext cx="1904952" cy="990575"/>
+            <a:off x="228594" y="1397000"/>
+            <a:ext cx="1904952" cy="1016000"/>
           </a:xfrm>
           <a:prstGeom prst="roundRect">
             <a:avLst/>
@@ -6733,12 +7042,11 @@
           <a:solidFill>
             <a:srgbClr val="EDF5FB"/>
           </a:solidFill>
-          <a:ln w="22860">
+          <a:ln>
             <a:solidFill>
               <a:srgbClr val="7BA4C7"/>
             </a:solidFill>
           </a:ln>
-          <a:effectLst/>
         </p:spPr>
         <p:style>
           <a:lnRef idx="1">
@@ -6758,34 +7066,8 @@
           <a:bodyPr rtlCol="0" anchor="ctr"/>
           <a:lstStyle/>
           <a:p>
-            <a:pPr algn="ctr"/>
-          </a:p>
-        </p:txBody>
-      </p:sp>
-      <p:sp>
-        <p:nvSpPr>
-          <p:cNvPr id="8" name="TextBox 7"/>
-          <p:cNvSpPr txBox="1"/>
-          <p:nvPr/>
-        </p:nvSpPr>
-        <p:spPr>
-          <a:xfrm>
-            <a:off x="304792" y="1523961"/>
-            <a:ext cx="1752556" cy="761980"/>
-          </a:xfrm>
-          <a:prstGeom prst="rect">
-            <a:avLst/>
-          </a:prstGeom>
-          <a:noFill/>
-        </p:spPr>
-        <p:txBody>
-          <a:bodyPr wrap="square" lIns="0" rIns="0" tIns="0" bIns="0">
-            <a:spAutoFit/>
-          </a:bodyPr>
-          <a:lstStyle/>
-          <a:p>
             <a:pPr algn="ctr">
-              <a:defRPr sz="1200" b="1">
+              <a:defRPr sz="1300" b="1">
                 <a:solidFill>
                   <a:srgbClr val="111111"/>
                 </a:solidFill>
@@ -6798,9 +7080,9 @@
           </a:p>
           <a:p>
             <a:pPr algn="ctr">
-              <a:defRPr sz="1200" b="1">
-                <a:solidFill>
-                  <a:srgbClr val="111111"/>
+              <a:defRPr sz="1100">
+                <a:solidFill>
+                  <a:srgbClr val="555555"/>
                 </a:solidFill>
                 <a:latin typeface="BIZ UDPGothic"/>
               </a:defRPr>
@@ -6819,8 +7101,8 @@
         </p:nvSpPr>
         <p:spPr>
           <a:xfrm>
-            <a:off x="228594" y="2730431"/>
-            <a:ext cx="1904952" cy="990575"/>
+            <a:off x="228594" y="2730500"/>
+            <a:ext cx="1904952" cy="1016000"/>
           </a:xfrm>
           <a:prstGeom prst="roundRect">
             <a:avLst/>
@@ -6828,12 +7110,11 @@
           <a:solidFill>
             <a:srgbClr val="EDF5FB"/>
           </a:solidFill>
-          <a:ln w="22860">
+          <a:ln>
             <a:solidFill>
               <a:srgbClr val="7BA4C7"/>
             </a:solidFill>
           </a:ln>
-          <a:effectLst/>
         </p:spPr>
         <p:style>
           <a:lnRef idx="1">
@@ -6853,34 +7134,8 @@
           <a:bodyPr rtlCol="0" anchor="ctr"/>
           <a:lstStyle/>
           <a:p>
-            <a:pPr algn="ctr"/>
-          </a:p>
-        </p:txBody>
-      </p:sp>
-      <p:sp>
-        <p:nvSpPr>
-          <p:cNvPr id="10" name="TextBox 9"/>
-          <p:cNvSpPr txBox="1"/>
-          <p:nvPr/>
-        </p:nvSpPr>
-        <p:spPr>
-          <a:xfrm>
-            <a:off x="304792" y="2857428"/>
-            <a:ext cx="1752556" cy="761980"/>
-          </a:xfrm>
-          <a:prstGeom prst="rect">
-            <a:avLst/>
-          </a:prstGeom>
-          <a:noFill/>
-        </p:spPr>
-        <p:txBody>
-          <a:bodyPr wrap="square" lIns="0" rIns="0" tIns="0" bIns="0">
-            <a:spAutoFit/>
-          </a:bodyPr>
-          <a:lstStyle/>
-          <a:p>
             <a:pPr algn="ctr">
-              <a:defRPr sz="1200" b="1">
+              <a:defRPr sz="1300" b="1">
                 <a:solidFill>
                   <a:srgbClr val="111111"/>
                 </a:solidFill>
@@ -6893,9 +7148,9 @@
           </a:p>
           <a:p>
             <a:pPr algn="ctr">
-              <a:defRPr sz="1200" b="1">
-                <a:solidFill>
-                  <a:srgbClr val="111111"/>
+              <a:defRPr sz="1100">
+                <a:solidFill>
+                  <a:srgbClr val="555555"/>
                 </a:solidFill>
                 <a:latin typeface="BIZ UDPGothic"/>
               </a:defRPr>
@@ -6908,14 +7163,14 @@
       </p:sp>
       <p:sp>
         <p:nvSpPr>
-          <p:cNvPr id="11" name="Rounded Rectangle 10"/>
+          <p:cNvPr id="10" name="Rounded Rectangle 9"/>
           <p:cNvSpPr/>
           <p:nvPr/>
         </p:nvSpPr>
         <p:spPr>
           <a:xfrm>
-            <a:off x="228594" y="4063898"/>
-            <a:ext cx="1904952" cy="1219169"/>
+            <a:off x="228594" y="4064000"/>
+            <a:ext cx="1904952" cy="1016000"/>
           </a:xfrm>
           <a:prstGeom prst="roundRect">
             <a:avLst/>
@@ -6923,12 +7178,11 @@
           <a:solidFill>
             <a:srgbClr val="EDF5FB"/>
           </a:solidFill>
-          <a:ln w="22860">
+          <a:ln>
             <a:solidFill>
               <a:srgbClr val="7BA4C7"/>
             </a:solidFill>
           </a:ln>
-          <a:effectLst/>
         </p:spPr>
         <p:style>
           <a:lnRef idx="1">
@@ -6948,34 +7202,8 @@
           <a:bodyPr rtlCol="0" anchor="ctr"/>
           <a:lstStyle/>
           <a:p>
-            <a:pPr algn="ctr"/>
-          </a:p>
-        </p:txBody>
-      </p:sp>
-      <p:sp>
-        <p:nvSpPr>
-          <p:cNvPr id="12" name="TextBox 11"/>
-          <p:cNvSpPr txBox="1"/>
-          <p:nvPr/>
-        </p:nvSpPr>
-        <p:spPr>
-          <a:xfrm>
-            <a:off x="304792" y="4216294"/>
-            <a:ext cx="1752556" cy="965175"/>
-          </a:xfrm>
-          <a:prstGeom prst="rect">
-            <a:avLst/>
-          </a:prstGeom>
-          <a:noFill/>
-        </p:spPr>
-        <p:txBody>
-          <a:bodyPr wrap="square" lIns="0" rIns="0" tIns="0" bIns="0">
-            <a:spAutoFit/>
-          </a:bodyPr>
-          <a:lstStyle/>
-          <a:p>
             <a:pPr algn="ctr">
-              <a:defRPr sz="1200" b="1">
+              <a:defRPr sz="1300" b="1">
                 <a:solidFill>
                   <a:srgbClr val="111111"/>
                 </a:solidFill>
@@ -6988,9 +7216,9 @@
           </a:p>
           <a:p>
             <a:pPr algn="ctr">
-              <a:defRPr sz="1200" b="1">
-                <a:solidFill>
-                  <a:srgbClr val="111111"/>
+              <a:defRPr sz="1100">
+                <a:solidFill>
+                  <a:srgbClr val="555555"/>
                 </a:solidFill>
                 <a:latin typeface="BIZ UDPGothic"/>
               </a:defRPr>
@@ -6998,152 +7226,9 @@
             <a:r>
               <a:t>内訳・トレードオフ</a:t>
             </a:r>
-          </a:p>
-          <a:p>
-            <a:pPr algn="ctr">
-              <a:defRPr sz="1200" b="1">
-                <a:solidFill>
-                  <a:srgbClr val="111111"/>
-                </a:solidFill>
-                <a:latin typeface="BIZ UDPGothic"/>
-              </a:defRPr>
-            </a:pPr>
+            <a:br/>
             <a:r>
               <a:t>外挿警告</a:t>
-            </a:r>
-          </a:p>
-        </p:txBody>
-      </p:sp>
-      <p:sp>
-        <p:nvSpPr>
-          <p:cNvPr id="13" name="TextBox 12"/>
-          <p:cNvSpPr txBox="1"/>
-          <p:nvPr/>
-        </p:nvSpPr>
-        <p:spPr>
-          <a:xfrm>
-            <a:off x="10096247" y="2603434"/>
-            <a:ext cx="1904952" cy="304792"/>
-          </a:xfrm>
-          <a:prstGeom prst="rect">
-            <a:avLst/>
-          </a:prstGeom>
-          <a:noFill/>
-        </p:spPr>
-        <p:txBody>
-          <a:bodyPr wrap="square" lIns="0" rIns="0" tIns="0" bIns="0">
-            <a:spAutoFit/>
-          </a:bodyPr>
-          <a:lstStyle/>
-          <a:p>
-            <a:pPr algn="l">
-              <a:defRPr sz="1400" b="1">
-                <a:solidFill>
-                  <a:srgbClr val="111111"/>
-                </a:solidFill>
-                <a:latin typeface="BIZ UDPGothic"/>
-              </a:defRPr>
-            </a:pPr>
-            <a:r>
-              <a:t>外気温の推移</a:t>
-            </a:r>
-          </a:p>
-        </p:txBody>
-      </p:sp>
-      <p:sp>
-        <p:nvSpPr>
-          <p:cNvPr id="14" name="TextBox 13"/>
-          <p:cNvSpPr txBox="1"/>
-          <p:nvPr/>
-        </p:nvSpPr>
-        <p:spPr>
-          <a:xfrm>
-            <a:off x="10096247" y="3873403"/>
-            <a:ext cx="1904952" cy="888977"/>
-          </a:xfrm>
-          <a:prstGeom prst="rect">
-            <a:avLst/>
-          </a:prstGeom>
-          <a:noFill/>
-        </p:spPr>
-        <p:txBody>
-          <a:bodyPr wrap="square" lIns="0" rIns="0" tIns="0" bIns="0">
-            <a:spAutoFit/>
-          </a:bodyPr>
-          <a:lstStyle/>
-          <a:p>
-            <a:pPr algn="l">
-              <a:defRPr sz="1400" b="1">
-                <a:solidFill>
-                  <a:srgbClr val="111111"/>
-                </a:solidFill>
-                <a:latin typeface="BIZ UDPGothic"/>
-              </a:defRPr>
-            </a:pPr>
-            <a:r>
-              <a:t>起動時刻と</a:t>
-            </a:r>
-          </a:p>
-          <a:p>
-            <a:pPr algn="l">
-              <a:defRPr sz="1400" b="1">
-                <a:solidFill>
-                  <a:srgbClr val="111111"/>
-                </a:solidFill>
-                <a:latin typeface="BIZ UDPGothic"/>
-              </a:defRPr>
-            </a:pPr>
-            <a:r>
-              <a:t>消費電力・到達</a:t>
-            </a:r>
-          </a:p>
-          <a:p>
-            <a:pPr algn="l">
-              <a:defRPr sz="1400" b="1">
-                <a:solidFill>
-                  <a:srgbClr val="111111"/>
-                </a:solidFill>
-                <a:latin typeface="BIZ UDPGothic"/>
-              </a:defRPr>
-            </a:pPr>
-            <a:r>
-              <a:t>時刻の関係</a:t>
-            </a:r>
-          </a:p>
-        </p:txBody>
-      </p:sp>
-      <p:sp>
-        <p:nvSpPr>
-          <p:cNvPr id="15" name="TextBox 14"/>
-          <p:cNvSpPr txBox="1"/>
-          <p:nvPr/>
-        </p:nvSpPr>
-        <p:spPr>
-          <a:xfrm>
-            <a:off x="304792" y="6299042"/>
-            <a:ext cx="11429714" cy="253993"/>
-          </a:xfrm>
-          <a:prstGeom prst="rect">
-            <a:avLst/>
-          </a:prstGeom>
-          <a:noFill/>
-        </p:spPr>
-        <p:txBody>
-          <a:bodyPr wrap="square" lIns="0" rIns="0" tIns="0" bIns="0">
-            <a:spAutoFit/>
-          </a:bodyPr>
-          <a:lstStyle/>
-          <a:p>
-            <a:pPr algn="l">
-              <a:defRPr sz="1200" b="1">
-                <a:solidFill>
-                  <a:srgbClr val="C8102E"/>
-                </a:solidFill>
-                <a:latin typeface="BIZ UDPGothic"/>
-              </a:defRPr>
-            </a:pPr>
-            <a:r>
-              <a:t>※ 画面の数値はダミーデータによる表示例。実データでの結果は前のスライド</a:t>
             </a:r>
           </a:p>
         </p:txBody>
@@ -7175,7 +7260,50 @@
         <p:spPr>
           <a:xfrm>
             <a:off x="0" y="0"/>
-            <a:ext cx="12191695" cy="584185"/>
+            <a:ext cx="12191695" cy="6858000"/>
+          </a:xfrm>
+          <a:prstGeom prst="rect">
+            <a:avLst/>
+          </a:prstGeom>
+          <a:solidFill>
+            <a:srgbClr val="FFFFFF"/>
+          </a:solidFill>
+          <a:ln>
+            <a:noFill/>
+          </a:ln>
+        </p:spPr>
+        <p:style>
+          <a:lnRef idx="1">
+            <a:schemeClr val="accent1"/>
+          </a:lnRef>
+          <a:fillRef idx="3">
+            <a:schemeClr val="accent1"/>
+          </a:fillRef>
+          <a:effectRef idx="2">
+            <a:schemeClr val="accent1"/>
+          </a:effectRef>
+          <a:fontRef idx="minor">
+            <a:schemeClr val="lt1"/>
+          </a:fontRef>
+        </p:style>
+        <p:txBody>
+          <a:bodyPr rtlCol="0" anchor="ctr"/>
+          <a:lstStyle/>
+          <a:p>
+            <a:pPr algn="ctr"/>
+          </a:p>
+        </p:txBody>
+      </p:sp>
+      <p:sp>
+        <p:nvSpPr>
+          <p:cNvPr id="3" name="Rectangle 2"/>
+          <p:cNvSpPr/>
+          <p:nvPr/>
+        </p:nvSpPr>
+        <p:spPr>
+          <a:xfrm>
+            <a:off x="0" y="0"/>
+            <a:ext cx="12191695" cy="584200"/>
           </a:xfrm>
           <a:prstGeom prst="rect">
             <a:avLst/>
@@ -7186,7 +7314,6 @@
           <a:ln>
             <a:noFill/>
           </a:ln>
-          <a:effectLst/>
         </p:spPr>
         <p:style>
           <a:lnRef idx="1">
@@ -7212,14 +7339,14 @@
       </p:sp>
       <p:sp>
         <p:nvSpPr>
-          <p:cNvPr id="3" name="TextBox 2"/>
+          <p:cNvPr id="4" name="TextBox 3"/>
           <p:cNvSpPr txBox="1"/>
           <p:nvPr/>
         </p:nvSpPr>
         <p:spPr>
           <a:xfrm>
-            <a:off x="304792" y="101597"/>
-            <a:ext cx="9905752" cy="406389"/>
+            <a:off x="304792" y="50800"/>
+            <a:ext cx="10159745" cy="482600"/>
           </a:xfrm>
           <a:prstGeom prst="rect">
             <a:avLst/>
@@ -7227,13 +7354,13 @@
           <a:noFill/>
         </p:spPr>
         <p:txBody>
-          <a:bodyPr wrap="square" lIns="0" rIns="0" tIns="0" bIns="0">
+          <a:bodyPr wrap="none">
             <a:spAutoFit/>
           </a:bodyPr>
           <a:lstStyle/>
           <a:p>
-            <a:pPr algn="l">
-              <a:defRPr sz="2000" b="1">
+            <a:pPr>
+              <a:defRPr sz="1800" b="1">
                 <a:solidFill>
                   <a:srgbClr val="FFFFFF"/>
                 </a:solidFill>
@@ -7241,315 +7368,33 @@
               </a:defRPr>
             </a:pPr>
             <a:r>
-              <a:t>7. 課題と今後</a:t>
-            </a:r>
-          </a:p>
-        </p:txBody>
-      </p:sp>
-      <p:sp>
-        <p:nvSpPr>
-          <p:cNvPr id="4" name="TextBox 3"/>
-          <p:cNvSpPr txBox="1"/>
-          <p:nvPr/>
-        </p:nvSpPr>
-        <p:spPr>
-          <a:xfrm>
-            <a:off x="11302717" y="101597"/>
-            <a:ext cx="698482" cy="406389"/>
-          </a:xfrm>
-          <a:prstGeom prst="rect">
-            <a:avLst/>
-          </a:prstGeom>
-          <a:noFill/>
-        </p:spPr>
-        <p:txBody>
-          <a:bodyPr wrap="square" lIns="0" rIns="0" tIns="0" bIns="0">
-            <a:spAutoFit/>
-          </a:bodyPr>
-          <a:lstStyle/>
-          <a:p>
-            <a:pPr algn="ctr">
-              <a:defRPr sz="2000" b="1">
-                <a:solidFill>
-                  <a:srgbClr val="FFFFFF"/>
-                </a:solidFill>
-                <a:latin typeface="BIZ UDPGothic"/>
-              </a:defRPr>
-            </a:pPr>
-            <a:r>
-              <a:t>8</a:t>
-            </a:r>
-          </a:p>
-        </p:txBody>
-      </p:sp>
-      <p:sp>
-        <p:nvSpPr>
-          <p:cNvPr id="5" name="TextBox 4"/>
-          <p:cNvSpPr txBox="1"/>
-          <p:nvPr/>
-        </p:nvSpPr>
-        <p:spPr>
-          <a:xfrm>
-            <a:off x="7873803" y="6629234"/>
-            <a:ext cx="4013099" cy="203194"/>
-          </a:xfrm>
-          <a:prstGeom prst="rect">
-            <a:avLst/>
-          </a:prstGeom>
-          <a:noFill/>
-        </p:spPr>
-        <p:txBody>
-          <a:bodyPr wrap="square" lIns="0" rIns="0" tIns="0" bIns="0">
-            <a:spAutoFit/>
-          </a:bodyPr>
-          <a:lstStyle/>
-          <a:p>
-            <a:pPr algn="r">
-              <a:defRPr sz="900" b="0">
-                <a:solidFill>
-                  <a:srgbClr val="AAAAAA"/>
-                </a:solidFill>
-                <a:latin typeface="BIZ UDPGothic"/>
-              </a:defRPr>
-            </a:pPr>
-            <a:r>
-              <a:t>© Panasonic Corporation</a:t>
-            </a:r>
-          </a:p>
-        </p:txBody>
-      </p:sp>
-      <p:sp>
-        <p:nvSpPr>
-          <p:cNvPr id="6" name="TextBox 5"/>
-          <p:cNvSpPr txBox="1"/>
-          <p:nvPr/>
-        </p:nvSpPr>
-        <p:spPr>
-          <a:xfrm>
-            <a:off x="571485" y="990575"/>
-            <a:ext cx="6349841" cy="330191"/>
-          </a:xfrm>
-          <a:prstGeom prst="rect">
-            <a:avLst/>
-          </a:prstGeom>
-          <a:noFill/>
-        </p:spPr>
-        <p:txBody>
-          <a:bodyPr wrap="square" lIns="0" rIns="0" tIns="0" bIns="0">
-            <a:spAutoFit/>
-          </a:bodyPr>
-          <a:lstStyle/>
-          <a:p>
-            <a:pPr algn="l">
-              <a:defRPr sz="1800" b="1">
-                <a:solidFill>
-                  <a:srgbClr val="111111"/>
-                </a:solidFill>
-                <a:latin typeface="BIZ UDPGothic"/>
-              </a:defRPr>
-            </a:pPr>
-            <a:r>
-              <a:t>■ 課題</a:t>
-            </a:r>
-          </a:p>
-        </p:txBody>
-      </p:sp>
-      <p:sp>
-        <p:nvSpPr>
-          <p:cNvPr id="7" name="TextBox 6"/>
-          <p:cNvSpPr txBox="1"/>
-          <p:nvPr/>
-        </p:nvSpPr>
-        <p:spPr>
-          <a:xfrm>
-            <a:off x="825479" y="1320766"/>
-            <a:ext cx="10794730" cy="1650958"/>
-          </a:xfrm>
-          <a:prstGeom prst="rect">
-            <a:avLst/>
-          </a:prstGeom>
-          <a:noFill/>
-        </p:spPr>
-        <p:txBody>
-          <a:bodyPr wrap="square" lIns="0" rIns="0" tIns="0" bIns="0">
-            <a:spAutoFit/>
-          </a:bodyPr>
-          <a:lstStyle/>
-          <a:p>
-            <a:pPr algn="l">
-              <a:defRPr sz="1500" b="0">
-                <a:solidFill>
-                  <a:srgbClr val="222222"/>
-                </a:solidFill>
-                <a:latin typeface="BIZ UDPGothic"/>
-              </a:defRPr>
-            </a:pPr>
-            <a:r>
-              <a:t>1. 休み明けの補正は 1 件からの逆算。同じデータでは検証できない</a:t>
-            </a:r>
-          </a:p>
-          <a:p>
-            <a:pPr algn="l">
-              <a:defRPr sz="1500" b="0">
-                <a:solidFill>
-                  <a:srgbClr val="222222"/>
-                </a:solidFill>
-                <a:latin typeface="BIZ UDPGothic"/>
-              </a:defRPr>
-            </a:pPr>
-            <a:r>
-              <a:t>2. 室温ログが 0.5℃ 刻み。到達時刻の特定に幅が出る（平均誤差 3.7 分と同程度）</a:t>
-            </a:r>
-          </a:p>
-          <a:p>
-            <a:pPr algn="l">
-              <a:defRPr sz="1500" b="0">
-                <a:solidFill>
-                  <a:srgbClr val="222222"/>
-                </a:solidFill>
-                <a:latin typeface="BIZ UDPGothic"/>
-              </a:defRPr>
-            </a:pPr>
-            <a:r>
-              <a:t>3. 同じ 2 週間に対するバックテスト。前向きの運用で確かめるのはこれから</a:t>
-            </a:r>
-          </a:p>
-          <a:p>
-            <a:pPr algn="l">
-              <a:defRPr sz="1500" b="0">
-                <a:solidFill>
-                  <a:srgbClr val="222222"/>
-                </a:solidFill>
-                <a:latin typeface="BIZ UDPGothic"/>
-              </a:defRPr>
-            </a:pPr>
-            <a:r>
-              <a:t>4. 未達をどこまで許すかは技術では決まらない。安全側の余裕の幅は現場と合意して決める</a:t>
-            </a:r>
-          </a:p>
-        </p:txBody>
-      </p:sp>
-      <p:sp>
-        <p:nvSpPr>
-          <p:cNvPr id="8" name="TextBox 7"/>
-          <p:cNvSpPr txBox="1"/>
-          <p:nvPr/>
-        </p:nvSpPr>
-        <p:spPr>
-          <a:xfrm>
-            <a:off x="571485" y="3098722"/>
-            <a:ext cx="6349841" cy="330191"/>
-          </a:xfrm>
-          <a:prstGeom prst="rect">
-            <a:avLst/>
-          </a:prstGeom>
-          <a:noFill/>
-        </p:spPr>
-        <p:txBody>
-          <a:bodyPr wrap="square" lIns="0" rIns="0" tIns="0" bIns="0">
-            <a:spAutoFit/>
-          </a:bodyPr>
-          <a:lstStyle/>
-          <a:p>
-            <a:pPr algn="l">
-              <a:defRPr sz="1800" b="1">
-                <a:solidFill>
-                  <a:srgbClr val="111111"/>
-                </a:solidFill>
-                <a:latin typeface="BIZ UDPGothic"/>
-              </a:defRPr>
-            </a:pPr>
-            <a:r>
-              <a:t>■ 今後</a:t>
-            </a:r>
-          </a:p>
-        </p:txBody>
-      </p:sp>
-      <p:sp>
-        <p:nvSpPr>
-          <p:cNvPr id="9" name="TextBox 8"/>
-          <p:cNvSpPr txBox="1"/>
-          <p:nvPr/>
-        </p:nvSpPr>
-        <p:spPr>
-          <a:xfrm>
-            <a:off x="825479" y="3428914"/>
-            <a:ext cx="10794730" cy="1269968"/>
-          </a:xfrm>
-          <a:prstGeom prst="rect">
-            <a:avLst/>
-          </a:prstGeom>
-          <a:noFill/>
-        </p:spPr>
-        <p:txBody>
-          <a:bodyPr wrap="square" lIns="0" rIns="0" tIns="0" bIns="0">
-            <a:spAutoFit/>
-          </a:bodyPr>
-          <a:lstStyle/>
-          <a:p>
-            <a:pPr algn="l">
-              <a:defRPr sz="1500" b="0">
-                <a:solidFill>
-                  <a:srgbClr val="222222"/>
-                </a:solidFill>
-                <a:latin typeface="BIZ UDPGothic"/>
-              </a:defRPr>
-            </a:pPr>
-            <a:r>
-              <a:t>・暖房期、他フロア・他棟：損失の向きは同じ。係数を取り直せば枠組みは流用できる</a:t>
-            </a:r>
-          </a:p>
-          <a:p>
-            <a:pPr algn="l">
-              <a:defRPr sz="1500" b="0">
-                <a:solidFill>
-                  <a:srgbClr val="222222"/>
-                </a:solidFill>
-                <a:latin typeface="BIZ UDPGothic"/>
-              </a:defRPr>
-            </a:pPr>
-            <a:r>
-              <a:t>・外気湿度：精度向上がわずかで今回は見送った。データが増えれば再評価する</a:t>
-            </a:r>
-          </a:p>
-          <a:p>
-            <a:pPr algn="l">
-              <a:defRPr sz="1500" b="0">
-                <a:solidFill>
-                  <a:srgbClr val="222222"/>
-                </a:solidFill>
-                <a:latin typeface="BIZ UDPGothic"/>
-              </a:defRPr>
-            </a:pPr>
-            <a:r>
-              <a:t>・再学習：係数はファイル経由で画面へ渡す構造。学習し直せば画面が自動で追随する</a:t>
-            </a:r>
-          </a:p>
-        </p:txBody>
-      </p:sp>
-      <p:sp>
-        <p:nvSpPr>
-          <p:cNvPr id="10" name="Rounded Rectangle 9"/>
+              <a:t>7. 課題と今後の展望</a:t>
+            </a:r>
+          </a:p>
+        </p:txBody>
+      </p:sp>
+      <p:sp>
+        <p:nvSpPr>
+          <p:cNvPr id="5" name="Rounded Rectangle 4"/>
           <p:cNvSpPr/>
           <p:nvPr/>
         </p:nvSpPr>
         <p:spPr>
           <a:xfrm>
-            <a:off x="698482" y="4825879"/>
-            <a:ext cx="10794730" cy="1269968"/>
+            <a:off x="10731231" y="139700"/>
+            <a:ext cx="533386" cy="304800"/>
           </a:xfrm>
           <a:prstGeom prst="roundRect">
             <a:avLst/>
           </a:prstGeom>
           <a:solidFill>
-            <a:srgbClr val="EDF5FB"/>
+            <a:srgbClr val="24588E"/>
           </a:solidFill>
-          <a:ln w="22860">
+          <a:ln>
             <a:solidFill>
-              <a:srgbClr val="7BA4C7"/>
+              <a:srgbClr val="5E8DBE"/>
             </a:solidFill>
           </a:ln>
-          <a:effectLst/>
         </p:spPr>
         <p:style>
           <a:lnRef idx="1">
@@ -7569,20 +7414,30 @@
           <a:bodyPr rtlCol="0" anchor="ctr"/>
           <a:lstStyle/>
           <a:p>
-            <a:pPr algn="ctr"/>
-          </a:p>
-        </p:txBody>
-      </p:sp>
-      <p:sp>
-        <p:nvSpPr>
-          <p:cNvPr id="11" name="TextBox 10"/>
+            <a:pPr algn="ctr">
+              <a:defRPr sz="1000" b="1" i="1">
+                <a:solidFill>
+                  <a:srgbClr val="FFFFFF"/>
+                </a:solidFill>
+                <a:latin typeface="BIZ UDPGothic"/>
+              </a:defRPr>
+            </a:pPr>
+            <a:r>
+              <a:t>IUO</a:t>
+            </a:r>
+          </a:p>
+        </p:txBody>
+      </p:sp>
+      <p:sp>
+        <p:nvSpPr>
+          <p:cNvPr id="6" name="TextBox 5"/>
           <p:cNvSpPr txBox="1"/>
           <p:nvPr/>
         </p:nvSpPr>
         <p:spPr>
           <a:xfrm>
-            <a:off x="952476" y="5054473"/>
-            <a:ext cx="10413739" cy="965175"/>
+            <a:off x="11366215" y="50800"/>
+            <a:ext cx="634984" cy="482600"/>
           </a:xfrm>
           <a:prstGeom prst="rect">
             <a:avLst/>
@@ -7590,47 +7445,185 @@
           <a:noFill/>
         </p:spPr>
         <p:txBody>
-          <a:bodyPr wrap="square" lIns="0" rIns="0" tIns="0" bIns="0">
+          <a:bodyPr wrap="none">
             <a:spAutoFit/>
           </a:bodyPr>
           <a:lstStyle/>
           <a:p>
-            <a:pPr algn="l">
-              <a:defRPr sz="1500" b="0">
-                <a:solidFill>
-                  <a:srgbClr val="111111"/>
-                </a:solidFill>
-                <a:latin typeface="BIZ UDPGothic"/>
-              </a:defRPr>
-            </a:pPr>
-            <a:r>
-              <a:t>この方式は「予測を当てる」よりも「外したときに安全側に倒れる」ことを優先している</a:t>
-            </a:r>
-          </a:p>
-          <a:p>
-            <a:pPr algn="l">
-              <a:defRPr sz="1500" b="0">
-                <a:solidFill>
-                  <a:srgbClr val="111111"/>
-                </a:solidFill>
-                <a:latin typeface="BIZ UDPGothic"/>
-              </a:defRPr>
-            </a:pPr>
-            <a:r>
-              <a:t>精度を上げる余地は残るが、いま現場で使えるのは、限界を画面に出して担当者が判断できる形のほう。</a:t>
-            </a:r>
-          </a:p>
-          <a:p>
-            <a:pPr algn="l">
-              <a:defRPr sz="1500" b="0">
-                <a:solidFill>
-                  <a:srgbClr val="111111"/>
-                </a:solidFill>
-                <a:latin typeface="BIZ UDPGothic"/>
-              </a:defRPr>
-            </a:pPr>
-            <a:r>
-              <a:t>実データで前向きに運用しながら、余裕の幅を詰めていくのが次の段階。</a:t>
+            <a:pPr algn="ctr">
+              <a:defRPr sz="1800" b="1">
+                <a:solidFill>
+                  <a:srgbClr val="FFFFFF"/>
+                </a:solidFill>
+                <a:latin typeface="BIZ UDPGothic"/>
+              </a:defRPr>
+            </a:pPr>
+            <a:r>
+              <a:t>8</a:t>
+            </a:r>
+          </a:p>
+        </p:txBody>
+      </p:sp>
+      <p:sp>
+        <p:nvSpPr>
+          <p:cNvPr id="7" name="TextBox 6"/>
+          <p:cNvSpPr txBox="1"/>
+          <p:nvPr/>
+        </p:nvSpPr>
+        <p:spPr>
+          <a:xfrm>
+            <a:off x="507987" y="889000"/>
+            <a:ext cx="11175720" cy="5334000"/>
+          </a:xfrm>
+          <a:prstGeom prst="rect">
+            <a:avLst/>
+          </a:prstGeom>
+          <a:noFill/>
+        </p:spPr>
+        <p:txBody>
+          <a:bodyPr wrap="square">
+            <a:spAutoFit/>
+          </a:bodyPr>
+          <a:lstStyle/>
+          <a:p>
+            <a:pPr>
+              <a:defRPr sz="1600" b="1">
+                <a:solidFill>
+                  <a:srgbClr val="0B3968"/>
+                </a:solidFill>
+                <a:latin typeface="BIZ UDPGothic"/>
+              </a:defRPr>
+            </a:pPr>
+            <a:r>
+              <a:t>■ まとめ</a:t>
+            </a:r>
+          </a:p>
+          <a:p>
+            <a:pPr>
+              <a:spcAft>
+                <a:spcPts val="400"/>
+              </a:spcAft>
+              <a:defRPr sz="1300">
+                <a:solidFill>
+                  <a:srgbClr val="222222"/>
+                </a:solidFill>
+                <a:latin typeface="BIZ UDPGothic"/>
+              </a:defRPr>
+            </a:pPr>
+            <a:r>
+              <a:t>  ・過去のデータから外気温と室温を下げるのに必要な時間の関係を推測するモデルを作成し、それを用いて起動時間の決定、削減される電力量の推定までを行うことが可能になった</a:t>
+            </a:r>
+          </a:p>
+          <a:p>
+            <a:pPr>
+              <a:spcAft>
+                <a:spcPts val="400"/>
+              </a:spcAft>
+              <a:defRPr sz="1300">
+                <a:solidFill>
+                  <a:srgbClr val="222222"/>
+                </a:solidFill>
+                <a:latin typeface="BIZ UDPGothic"/>
+              </a:defRPr>
+            </a:pPr>
+            <a:r>
+              <a:t>  ・BM向けに明日の熱源起動時刻を決定する際の、判断材料となるような可視化アプリの作成を行った</a:t>
+            </a:r>
+          </a:p>
+          <a:p>
+            <a:pPr>
+              <a:spcBef>
+                <a:spcPts val="1400"/>
+              </a:spcBef>
+              <a:defRPr sz="1600" b="1">
+                <a:solidFill>
+                  <a:srgbClr val="0B3968"/>
+                </a:solidFill>
+                <a:latin typeface="BIZ UDPGothic"/>
+              </a:defRPr>
+            </a:pPr>
+            <a:r>
+              <a:t>■ 課題</a:t>
+            </a:r>
+          </a:p>
+          <a:p>
+            <a:pPr>
+              <a:spcAft>
+                <a:spcPts val="400"/>
+              </a:spcAft>
+              <a:defRPr sz="1300">
+                <a:solidFill>
+                  <a:srgbClr val="222222"/>
+                </a:solidFill>
+                <a:latin typeface="BIZ UDPGothic"/>
+              </a:defRPr>
+            </a:pPr>
+            <a:r>
+              <a:t>    1.  モデルの精度向上</a:t>
+            </a:r>
+          </a:p>
+          <a:p>
+            <a:pPr>
+              <a:spcAft>
+                <a:spcPts val="400"/>
+              </a:spcAft>
+              <a:defRPr sz="1300">
+                <a:solidFill>
+                  <a:srgbClr val="222222"/>
+                </a:solidFill>
+                <a:latin typeface="BIZ UDPGothic"/>
+              </a:defRPr>
+            </a:pPr>
+            <a:r>
+              <a:t>    2.  暖房期への対応</a:t>
+            </a:r>
+          </a:p>
+          <a:p>
+            <a:pPr>
+              <a:spcBef>
+                <a:spcPts val="1400"/>
+              </a:spcBef>
+              <a:defRPr sz="1600" b="1">
+                <a:solidFill>
+                  <a:srgbClr val="0B3968"/>
+                </a:solidFill>
+                <a:latin typeface="BIZ UDPGothic"/>
+              </a:defRPr>
+            </a:pPr>
+            <a:r>
+              <a:t>■ 今後の展望</a:t>
+            </a:r>
+          </a:p>
+          <a:p>
+            <a:pPr>
+              <a:spcAft>
+                <a:spcPts val="400"/>
+              </a:spcAft>
+              <a:defRPr sz="1300">
+                <a:solidFill>
+                  <a:srgbClr val="222222"/>
+                </a:solidFill>
+                <a:latin typeface="BIZ UDPGothic"/>
+              </a:defRPr>
+            </a:pPr>
+            <a:r>
+              <a:t>    1.  データ読み取り→モデル再学習のサイクルの実装</a:t>
+            </a:r>
+          </a:p>
+          <a:p>
+            <a:pPr>
+              <a:spcAft>
+                <a:spcPts val="400"/>
+              </a:spcAft>
+              <a:defRPr sz="1300">
+                <a:solidFill>
+                  <a:srgbClr val="222222"/>
+                </a:solidFill>
+                <a:latin typeface="BIZ UDPGothic"/>
+              </a:defRPr>
+            </a:pPr>
+            <a:r>
+              <a:t>    2.  冬季のデータをもとに暖房運転時の予測モデルの作成</a:t>
             </a:r>
           </a:p>
         </p:txBody>
@@ -7662,7 +7655,50 @@
         <p:spPr>
           <a:xfrm>
             <a:off x="0" y="0"/>
-            <a:ext cx="12191695" cy="584185"/>
+            <a:ext cx="12191695" cy="6858000"/>
+          </a:xfrm>
+          <a:prstGeom prst="rect">
+            <a:avLst/>
+          </a:prstGeom>
+          <a:solidFill>
+            <a:srgbClr val="FFFFFF"/>
+          </a:solidFill>
+          <a:ln>
+            <a:noFill/>
+          </a:ln>
+        </p:spPr>
+        <p:style>
+          <a:lnRef idx="1">
+            <a:schemeClr val="accent1"/>
+          </a:lnRef>
+          <a:fillRef idx="3">
+            <a:schemeClr val="accent1"/>
+          </a:fillRef>
+          <a:effectRef idx="2">
+            <a:schemeClr val="accent1"/>
+          </a:effectRef>
+          <a:fontRef idx="minor">
+            <a:schemeClr val="lt1"/>
+          </a:fontRef>
+        </p:style>
+        <p:txBody>
+          <a:bodyPr rtlCol="0" anchor="ctr"/>
+          <a:lstStyle/>
+          <a:p>
+            <a:pPr algn="ctr"/>
+          </a:p>
+        </p:txBody>
+      </p:sp>
+      <p:sp>
+        <p:nvSpPr>
+          <p:cNvPr id="3" name="Rectangle 2"/>
+          <p:cNvSpPr/>
+          <p:nvPr/>
+        </p:nvSpPr>
+        <p:spPr>
+          <a:xfrm>
+            <a:off x="0" y="0"/>
+            <a:ext cx="12191695" cy="584200"/>
           </a:xfrm>
           <a:prstGeom prst="rect">
             <a:avLst/>
@@ -7673,7 +7709,6 @@
           <a:ln>
             <a:noFill/>
           </a:ln>
-          <a:effectLst/>
         </p:spPr>
         <p:style>
           <a:lnRef idx="1">
@@ -7699,14 +7734,14 @@
       </p:sp>
       <p:sp>
         <p:nvSpPr>
-          <p:cNvPr id="3" name="TextBox 2"/>
+          <p:cNvPr id="4" name="TextBox 3"/>
           <p:cNvSpPr txBox="1"/>
           <p:nvPr/>
         </p:nvSpPr>
         <p:spPr>
           <a:xfrm>
-            <a:off x="304792" y="101597"/>
-            <a:ext cx="9905752" cy="406389"/>
+            <a:off x="304792" y="50800"/>
+            <a:ext cx="10159745" cy="482600"/>
           </a:xfrm>
           <a:prstGeom prst="rect">
             <a:avLst/>
@@ -7714,13 +7749,13 @@
           <a:noFill/>
         </p:spPr>
         <p:txBody>
-          <a:bodyPr wrap="square" lIns="0" rIns="0" tIns="0" bIns="0">
+          <a:bodyPr wrap="none">
             <a:spAutoFit/>
           </a:bodyPr>
           <a:lstStyle/>
           <a:p>
-            <a:pPr algn="l">
-              <a:defRPr sz="2000" b="1">
+            <a:pPr>
+              <a:defRPr sz="1800" b="1">
                 <a:solidFill>
                   <a:srgbClr val="FFFFFF"/>
                 </a:solidFill>
@@ -7728,21 +7763,76 @@
               </a:defRPr>
             </a:pPr>
             <a:r>
-              <a:t>8. まとめと所感</a:t>
-            </a:r>
-          </a:p>
-        </p:txBody>
-      </p:sp>
-      <p:sp>
-        <p:nvSpPr>
-          <p:cNvPr id="4" name="TextBox 3"/>
+              <a:t>8. 所感</a:t>
+            </a:r>
+          </a:p>
+        </p:txBody>
+      </p:sp>
+      <p:sp>
+        <p:nvSpPr>
+          <p:cNvPr id="5" name="Rounded Rectangle 4"/>
+          <p:cNvSpPr/>
+          <p:nvPr/>
+        </p:nvSpPr>
+        <p:spPr>
+          <a:xfrm>
+            <a:off x="10731231" y="139700"/>
+            <a:ext cx="533386" cy="304800"/>
+          </a:xfrm>
+          <a:prstGeom prst="roundRect">
+            <a:avLst/>
+          </a:prstGeom>
+          <a:solidFill>
+            <a:srgbClr val="24588E"/>
+          </a:solidFill>
+          <a:ln>
+            <a:solidFill>
+              <a:srgbClr val="5E8DBE"/>
+            </a:solidFill>
+          </a:ln>
+        </p:spPr>
+        <p:style>
+          <a:lnRef idx="1">
+            <a:schemeClr val="accent1"/>
+          </a:lnRef>
+          <a:fillRef idx="3">
+            <a:schemeClr val="accent1"/>
+          </a:fillRef>
+          <a:effectRef idx="2">
+            <a:schemeClr val="accent1"/>
+          </a:effectRef>
+          <a:fontRef idx="minor">
+            <a:schemeClr val="lt1"/>
+          </a:fontRef>
+        </p:style>
+        <p:txBody>
+          <a:bodyPr rtlCol="0" anchor="ctr"/>
+          <a:lstStyle/>
+          <a:p>
+            <a:pPr algn="ctr">
+              <a:defRPr sz="1000" b="1" i="1">
+                <a:solidFill>
+                  <a:srgbClr val="FFFFFF"/>
+                </a:solidFill>
+                <a:latin typeface="BIZ UDPGothic"/>
+              </a:defRPr>
+            </a:pPr>
+            <a:r>
+              <a:t>IUO</a:t>
+            </a:r>
+          </a:p>
+        </p:txBody>
+      </p:sp>
+      <p:sp>
+        <p:nvSpPr>
+          <p:cNvPr id="6" name="TextBox 5"/>
           <p:cNvSpPr txBox="1"/>
           <p:nvPr/>
         </p:nvSpPr>
         <p:spPr>
           <a:xfrm>
-            <a:off x="11302717" y="101597"/>
-            <a:ext cx="698482" cy="406389"/>
+            <a:off x="11366215" y="50800"/>
+            <a:ext cx="634984" cy="482600"/>
           </a:xfrm>
           <a:prstGeom prst="rect">
             <a:avLst/>
@@ -7750,13 +7840,13 @@
           <a:noFill/>
         </p:spPr>
         <p:txBody>
-          <a:bodyPr wrap="square" lIns="0" rIns="0" tIns="0" bIns="0">
+          <a:bodyPr wrap="none">
             <a:spAutoFit/>
           </a:bodyPr>
           <a:lstStyle/>
           <a:p>
             <a:pPr algn="ctr">
-              <a:defRPr sz="2000" b="1">
+              <a:defRPr sz="1800" b="1">
                 <a:solidFill>
                   <a:srgbClr val="FFFFFF"/>
                 </a:solidFill>
@@ -7771,14 +7861,14 @@
       </p:sp>
       <p:sp>
         <p:nvSpPr>
-          <p:cNvPr id="5" name="TextBox 4"/>
+          <p:cNvPr id="7" name="TextBox 6"/>
           <p:cNvSpPr txBox="1"/>
           <p:nvPr/>
         </p:nvSpPr>
         <p:spPr>
           <a:xfrm>
-            <a:off x="7873803" y="6629234"/>
-            <a:ext cx="4013099" cy="203194"/>
+            <a:off x="444488" y="889000"/>
+            <a:ext cx="5333866" cy="5334000"/>
           </a:xfrm>
           <a:prstGeom prst="rect">
             <a:avLst/>
@@ -7786,306 +7876,177 @@
           <a:noFill/>
         </p:spPr>
         <p:txBody>
-          <a:bodyPr wrap="square" lIns="0" rIns="0" tIns="0" bIns="0">
+          <a:bodyPr wrap="square">
             <a:spAutoFit/>
           </a:bodyPr>
           <a:lstStyle/>
           <a:p>
-            <a:pPr algn="r">
-              <a:defRPr sz="900" b="0">
-                <a:solidFill>
-                  <a:srgbClr val="AAAAAA"/>
-                </a:solidFill>
-                <a:latin typeface="BIZ UDPGothic"/>
-              </a:defRPr>
-            </a:pPr>
-            <a:r>
-              <a:t>© Panasonic Corporation</a:t>
-            </a:r>
-          </a:p>
-        </p:txBody>
-      </p:sp>
-      <p:sp>
-        <p:nvSpPr>
-          <p:cNvPr id="6" name="TextBox 5"/>
-          <p:cNvSpPr txBox="1"/>
+            <a:pPr>
+              <a:defRPr sz="1600" b="1">
+                <a:solidFill>
+                  <a:srgbClr val="0B3968"/>
+                </a:solidFill>
+                <a:latin typeface="BIZ UDPGothic"/>
+              </a:defRPr>
+            </a:pPr>
+            <a:r>
+              <a:t>■ 実習を通して</a:t>
+            </a:r>
+          </a:p>
+          <a:p>
+            <a:pPr>
+              <a:spcAft>
+                <a:spcPts val="400"/>
+              </a:spcAft>
+              <a:defRPr sz="1200">
+                <a:solidFill>
+                  <a:srgbClr val="222222"/>
+                </a:solidFill>
+                <a:latin typeface="BIZ UDPGothic"/>
+              </a:defRPr>
+            </a:pPr>
+            <a:r>
+              <a:t>  ・お客様目線でのアプリケーション開発では、相手のニーズを想定しながら進める必要があり、難しさを感じた</a:t>
+            </a:r>
+          </a:p>
+          <a:p>
+            <a:pPr>
+              <a:spcAft>
+                <a:spcPts val="400"/>
+              </a:spcAft>
+              <a:defRPr sz="1200">
+                <a:solidFill>
+                  <a:srgbClr val="222222"/>
+                </a:solidFill>
+                <a:latin typeface="BIZ UDPGothic"/>
+              </a:defRPr>
+            </a:pPr>
+            <a:r>
+              <a:t>  ・実際のデータやその現場を見に行くことで、社会貢献ができるという意識を感じることができた</a:t>
+            </a:r>
+          </a:p>
+          <a:p>
+            <a:pPr>
+              <a:spcBef>
+                <a:spcPts val="1400"/>
+              </a:spcBef>
+              <a:defRPr sz="1600" b="1">
+                <a:solidFill>
+                  <a:srgbClr val="0B3968"/>
+                </a:solidFill>
+                <a:latin typeface="BIZ UDPGothic"/>
+              </a:defRPr>
+            </a:pPr>
+            <a:r>
+              <a:t>■ インターンシップを通して</a:t>
+            </a:r>
+          </a:p>
+          <a:p>
+            <a:pPr>
+              <a:spcAft>
+                <a:spcPts val="400"/>
+              </a:spcAft>
+              <a:defRPr sz="1200">
+                <a:solidFill>
+                  <a:srgbClr val="222222"/>
+                </a:solidFill>
+                <a:latin typeface="BIZ UDPGothic"/>
+              </a:defRPr>
+            </a:pPr>
+            <a:r>
+              <a:t>  ・実際の会社の肌で感じることができた。</a:t>
+            </a:r>
+          </a:p>
+          <a:p>
+            <a:pPr>
+              <a:spcAft>
+                <a:spcPts val="400"/>
+              </a:spcAft>
+              <a:defRPr sz="1200">
+                <a:solidFill>
+                  <a:srgbClr val="222222"/>
+                </a:solidFill>
+                <a:latin typeface="BIZ UDPGothic"/>
+              </a:defRPr>
+            </a:pPr>
+            <a:r>
+              <a:t>  ・デスクワークにとどまらず、実験住宅の見学やセキュリティ関連のご紹介など、幅広い体験ができ、大変充実した2週間を過ごすことができました</a:t>
+            </a:r>
+          </a:p>
+        </p:txBody>
+      </p:sp>
+      <p:pic>
+        <p:nvPicPr>
+          <p:cNvPr id="8" name="Picture 7" descr="onsite_photo_panasonic.png"/>
+          <p:cNvPicPr>
+            <a:picLocks noChangeAspect="1"/>
+          </p:cNvPicPr>
           <p:nvPr/>
-        </p:nvSpPr>
-        <p:spPr>
-          <a:xfrm>
-            <a:off x="571485" y="990575"/>
-            <a:ext cx="6349841" cy="330191"/>
+        </p:nvPicPr>
+        <p:blipFill>
+          <a:blip r:embed="rId3"/>
+          <a:stretch>
+            <a:fillRect/>
+          </a:stretch>
+        </p:blipFill>
+        <p:spPr>
+          <a:xfrm>
+            <a:off x="6730831" y="889000"/>
+            <a:ext cx="2730431" cy="2540000"/>
           </a:xfrm>
           <a:prstGeom prst="rect">
             <a:avLst/>
           </a:prstGeom>
-          <a:noFill/>
-        </p:spPr>
-        <p:txBody>
-          <a:bodyPr wrap="square" lIns="0" rIns="0" tIns="0" bIns="0">
-            <a:spAutoFit/>
-          </a:bodyPr>
-          <a:lstStyle/>
-          <a:p>
-            <a:pPr algn="l">
-              <a:defRPr sz="1800" b="1">
-                <a:solidFill>
-                  <a:srgbClr val="111111"/>
-                </a:solidFill>
-                <a:latin typeface="BIZ UDPGothic"/>
-              </a:defRPr>
-            </a:pPr>
-            <a:r>
-              <a:t>■ まとめ</a:t>
-            </a:r>
-          </a:p>
-        </p:txBody>
-      </p:sp>
-      <p:sp>
-        <p:nvSpPr>
-          <p:cNvPr id="7" name="TextBox 6"/>
-          <p:cNvSpPr txBox="1"/>
+        </p:spPr>
+      </p:pic>
+      <p:pic>
+        <p:nvPicPr>
+          <p:cNvPr id="9" name="Picture 8" descr="onsite_photo_building.png"/>
+          <p:cNvPicPr>
+            <a:picLocks noChangeAspect="1"/>
+          </p:cNvPicPr>
           <p:nvPr/>
-        </p:nvSpPr>
-        <p:spPr>
-          <a:xfrm>
-            <a:off x="825479" y="1320766"/>
-            <a:ext cx="10794730" cy="1269968"/>
+        </p:nvPicPr>
+        <p:blipFill>
+          <a:blip r:embed="rId4"/>
+          <a:stretch>
+            <a:fillRect/>
+          </a:stretch>
+        </p:blipFill>
+        <p:spPr>
+          <a:xfrm>
+            <a:off x="5460863" y="3048000"/>
+            <a:ext cx="2285942" cy="2730500"/>
           </a:xfrm>
           <a:prstGeom prst="rect">
             <a:avLst/>
           </a:prstGeom>
-          <a:noFill/>
-        </p:spPr>
-        <p:txBody>
-          <a:bodyPr wrap="square" lIns="0" rIns="0" tIns="0" bIns="0">
-            <a:spAutoFit/>
-          </a:bodyPr>
-          <a:lstStyle/>
-          <a:p>
-            <a:pPr algn="l">
-              <a:defRPr sz="1600" b="0">
-                <a:solidFill>
-                  <a:srgbClr val="222222"/>
-                </a:solidFill>
-                <a:latin typeface="BIZ UDPGothic"/>
-              </a:defRPr>
-            </a:pPr>
-            <a:r>
-              <a:t>1. 現行運用では毎朝 1 時間以上冷やしすぎていた</a:t>
-            </a:r>
-          </a:p>
-          <a:p>
-            <a:pPr algn="l">
-              <a:defRPr sz="1600" b="0">
-                <a:solidFill>
-                  <a:srgbClr val="222222"/>
-                </a:solidFill>
-                <a:latin typeface="BIZ UDPGothic"/>
-              </a:defRPr>
-            </a:pPr>
-            <a:r>
-              <a:t>2. 前日に分かる気温予報から予冷時間を読み、内訳を分けて安全側に積む</a:t>
-            </a:r>
-          </a:p>
-          <a:p>
-            <a:pPr algn="l">
-              <a:defRPr sz="1600" b="0">
-                <a:solidFill>
-                  <a:srgbClr val="222222"/>
-                </a:solidFill>
-                <a:latin typeface="BIZ UDPGothic"/>
-              </a:defRPr>
-            </a:pPr>
-            <a:r>
-              <a:t>3. 実データで 到達率 100 %、始業前電力 約 36 % 削減</a:t>
-            </a:r>
-          </a:p>
-        </p:txBody>
-      </p:sp>
-      <p:sp>
-        <p:nvSpPr>
-          <p:cNvPr id="8" name="TextBox 7"/>
-          <p:cNvSpPr txBox="1"/>
+        </p:spPr>
+      </p:pic>
+      <p:pic>
+        <p:nvPicPr>
+          <p:cNvPr id="10" name="Picture 9" descr="onsite_photo_living.png"/>
+          <p:cNvPicPr>
+            <a:picLocks noChangeAspect="1"/>
+          </p:cNvPicPr>
           <p:nvPr/>
-        </p:nvSpPr>
-        <p:spPr>
-          <a:xfrm>
-            <a:off x="571485" y="2844728"/>
-            <a:ext cx="6349841" cy="330191"/>
+        </p:nvPicPr>
+        <p:blipFill>
+          <a:blip r:embed="rId5"/>
+          <a:stretch>
+            <a:fillRect/>
+          </a:stretch>
+        </p:blipFill>
+        <p:spPr>
+          <a:xfrm>
+            <a:off x="7429314" y="3746500"/>
+            <a:ext cx="2984425" cy="2095500"/>
           </a:xfrm>
           <a:prstGeom prst="rect">
             <a:avLst/>
           </a:prstGeom>
-          <a:noFill/>
-        </p:spPr>
-        <p:txBody>
-          <a:bodyPr wrap="square" lIns="0" rIns="0" tIns="0" bIns="0">
-            <a:spAutoFit/>
-          </a:bodyPr>
-          <a:lstStyle/>
-          <a:p>
-            <a:pPr algn="l">
-              <a:defRPr sz="1800" b="1">
-                <a:solidFill>
-                  <a:srgbClr val="111111"/>
-                </a:solidFill>
-                <a:latin typeface="BIZ UDPGothic"/>
-              </a:defRPr>
-            </a:pPr>
-            <a:r>
-              <a:t>■ 所感</a:t>
-            </a:r>
-          </a:p>
-        </p:txBody>
-      </p:sp>
-      <p:sp>
-        <p:nvSpPr>
-          <p:cNvPr id="9" name="TextBox 8"/>
-          <p:cNvSpPr txBox="1"/>
-          <p:nvPr/>
-        </p:nvSpPr>
-        <p:spPr>
-          <a:xfrm>
-            <a:off x="825479" y="3174920"/>
-            <a:ext cx="10794730" cy="1650958"/>
-          </a:xfrm>
-          <a:prstGeom prst="rect">
-            <a:avLst/>
-          </a:prstGeom>
-          <a:noFill/>
-        </p:spPr>
-        <p:txBody>
-          <a:bodyPr wrap="square" lIns="0" rIns="0" tIns="0" bIns="0">
-            <a:spAutoFit/>
-          </a:bodyPr>
-          <a:lstStyle/>
-          <a:p>
-            <a:pPr algn="l">
-              <a:defRPr sz="1500" b="0">
-                <a:solidFill>
-                  <a:srgbClr val="222222"/>
-                </a:solidFill>
-                <a:latin typeface="BIZ UDPGothic"/>
-              </a:defRPr>
-            </a:pPr>
-            <a:r>
-              <a:t>・予測の精度より先に、「いつ・誰が・何を知った状態で決めるか」が設計を決めた</a:t>
-            </a:r>
-          </a:p>
-          <a:p>
-            <a:pPr algn="l">
-              <a:defRPr sz="1500" b="0">
-                <a:solidFill>
-                  <a:srgbClr val="222222"/>
-                </a:solidFill>
-                <a:latin typeface="BIZ UDPGothic"/>
-              </a:defRPr>
-            </a:pPr>
-            <a:r>
-              <a:t>・未達と冷やしすぎで損失が違う以上、平均誤差だけでは運用の基準を設計できない</a:t>
-            </a:r>
-          </a:p>
-          <a:p>
-            <a:pPr algn="l">
-              <a:defRPr sz="1500" b="0">
-                <a:solidFill>
-                  <a:srgbClr val="222222"/>
-                </a:solidFill>
-                <a:latin typeface="BIZ UDPGothic"/>
-              </a:defRPr>
-            </a:pPr>
-            <a:r>
-              <a:t>・使う人が最も避けたいことを知って、推奨値だけでなく根拠と限界を画面に出す設計になった</a:t>
-            </a:r>
-          </a:p>
-          <a:p>
-            <a:pPr algn="l">
-              <a:defRPr sz="1500" b="0">
-                <a:solidFill>
-                  <a:srgbClr val="222222"/>
-                </a:solidFill>
-                <a:latin typeface="BIZ UDPGothic"/>
-              </a:defRPr>
-            </a:pPr>
-            <a:r>
-              <a:t>・実験住宅の見学など、机の外で設備に触れる機会もいただいた</a:t>
-            </a:r>
-          </a:p>
-        </p:txBody>
-      </p:sp>
-      <p:sp>
-        <p:nvSpPr>
-          <p:cNvPr id="10" name="TextBox 9"/>
-          <p:cNvSpPr txBox="1"/>
-          <p:nvPr/>
-        </p:nvSpPr>
-        <p:spPr>
-          <a:xfrm>
-            <a:off x="571485" y="5460863"/>
-            <a:ext cx="11048723" cy="330191"/>
-          </a:xfrm>
-          <a:prstGeom prst="rect">
-            <a:avLst/>
-          </a:prstGeom>
-          <a:noFill/>
-        </p:spPr>
-        <p:txBody>
-          <a:bodyPr wrap="square" lIns="0" rIns="0" tIns="0" bIns="0">
-            <a:spAutoFit/>
-          </a:bodyPr>
-          <a:lstStyle/>
-          <a:p>
-            <a:pPr algn="ctr">
-              <a:defRPr sz="1600" b="0">
-                <a:solidFill>
-                  <a:srgbClr val="222222"/>
-                </a:solidFill>
-                <a:latin typeface="BIZ UDPGothic"/>
-              </a:defRPr>
-            </a:pPr>
-            <a:r>
-              <a:t>ご指導いただいたメンターの皆様、関係者の皆様に心より御礼申し上げます。</a:t>
-            </a:r>
-          </a:p>
-        </p:txBody>
-      </p:sp>
-      <p:sp>
-        <p:nvSpPr>
-          <p:cNvPr id="11" name="TextBox 10"/>
-          <p:cNvSpPr txBox="1"/>
-          <p:nvPr/>
-        </p:nvSpPr>
-        <p:spPr>
-          <a:xfrm>
-            <a:off x="571485" y="5867253"/>
-            <a:ext cx="11048723" cy="355591"/>
-          </a:xfrm>
-          <a:prstGeom prst="rect">
-            <a:avLst/>
-          </a:prstGeom>
-          <a:noFill/>
-        </p:spPr>
-        <p:txBody>
-          <a:bodyPr wrap="square" lIns="0" rIns="0" tIns="0" bIns="0">
-            <a:spAutoFit/>
-          </a:bodyPr>
-          <a:lstStyle/>
-          <a:p>
-            <a:pPr algn="ctr">
-              <a:defRPr sz="1800" b="1">
-                <a:solidFill>
-                  <a:srgbClr val="111111"/>
-                </a:solidFill>
-                <a:latin typeface="BIZ UDPGothic"/>
-              </a:defRPr>
-            </a:pPr>
-            <a:r>
-              <a:t>ご清聴ありがとうございました。</a:t>
-            </a:r>
-          </a:p>
-        </p:txBody>
-      </p:sp>
+        </p:spPr>
+      </p:pic>
     </p:spTree>
   </p:cSld>
   <p:clrMapOvr>
@@ -8412,4 +8373,324 @@
   </a:objectDefaults>
   <a:extraClrSchemeLst/>
 </a:theme>
+</file>
+
+<file path=ppt/theme/theme2.xml><?xml version="1.0" encoding="utf-8"?>
+<a:theme xmlns:a="http://schemas.openxmlformats.org/drawingml/2006/main" name="Office Theme">
+  <a:themeElements>
+    <a:clrScheme name="Office">
+      <a:dk1>
+        <a:sysClr val="windowText" lastClr="000000"/>
+      </a:dk1>
+      <a:lt1>
+        <a:sysClr val="window" lastClr="FFFFFF"/>
+      </a:lt1>
+      <a:dk2>
+        <a:srgbClr val="1F497D"/>
+      </a:dk2>
+      <a:lt2>
+        <a:srgbClr val="EEECE1"/>
+      </a:lt2>
+      <a:accent1>
+        <a:srgbClr val="4F81BD"/>
+      </a:accent1>
+      <a:accent2>
+        <a:srgbClr val="C0504D"/>
+      </a:accent2>
+      <a:accent3>
+        <a:srgbClr val="9BBB59"/>
+      </a:accent3>
+      <a:accent4>
+        <a:srgbClr val="8064A2"/>
+      </a:accent4>
+      <a:accent5>
+        <a:srgbClr val="4BACC6"/>
+      </a:accent5>
+      <a:accent6>
+        <a:srgbClr val="F79646"/>
+      </a:accent6>
+      <a:hlink>
+        <a:srgbClr val="0000FF"/>
+      </a:hlink>
+      <a:folHlink>
+        <a:srgbClr val="800080"/>
+      </a:folHlink>
+    </a:clrScheme>
+    <a:fontScheme name="Office">
+      <a:majorFont>
+        <a:latin typeface="Calibri"/>
+        <a:ea typeface=""/>
+        <a:cs typeface=""/>
+        <a:font script="Jpan" typeface="ＭＳ Ｐゴシック"/>
+        <a:font script="Hang" typeface="맑은 고딕"/>
+        <a:font script="Hans" typeface="宋体"/>
+        <a:font script="Hant" typeface="新細明體"/>
+        <a:font script="Arab" typeface="Times New Roman"/>
+        <a:font script="Hebr" typeface="Times New Roman"/>
+        <a:font script="Thai" typeface="Angsana New"/>
+        <a:font script="Ethi" typeface="Nyala"/>
+        <a:font script="Beng" typeface="Vrinda"/>
+        <a:font script="Gujr" typeface="Shruti"/>
+        <a:font script="Khmr" typeface="MoolBoran"/>
+        <a:font script="Knda" typeface="Tunga"/>
+        <a:font script="Guru" typeface="Raavi"/>
+        <a:font script="Cans" typeface="Euphemia"/>
+        <a:font script="Cher" typeface="Plantagenet Cherokee"/>
+        <a:font script="Yiii" typeface="Microsoft Yi Baiti"/>
+        <a:font script="Tibt" typeface="Microsoft Himalaya"/>
+        <a:font script="Thaa" typeface="MV Boli"/>
+        <a:font script="Deva" typeface="Mangal"/>
+        <a:font script="Telu" typeface="Gautami"/>
+        <a:font script="Taml" typeface="Latha"/>
+        <a:font script="Syrc" typeface="Estrangelo Edessa"/>
+        <a:font script="Orya" typeface="Kalinga"/>
+        <a:font script="Mlym" typeface="Kartika"/>
+        <a:font script="Laoo" typeface="DokChampa"/>
+        <a:font script="Sinh" typeface="Iskoola Pota"/>
+        <a:font script="Mong" typeface="Mongolian Baiti"/>
+        <a:font script="Viet" typeface="Times New Roman"/>
+        <a:font script="Uigh" typeface="Microsoft Uighur"/>
+        <a:font script="Geor" typeface="Sylfaen"/>
+      </a:majorFont>
+      <a:minorFont>
+        <a:latin typeface="Calibri"/>
+        <a:ea typeface=""/>
+        <a:cs typeface=""/>
+        <a:font script="Jpan" typeface="ＭＳ Ｐゴシック"/>
+        <a:font script="Hang" typeface="맑은 고딕"/>
+        <a:font script="Hans" typeface="宋体"/>
+        <a:font script="Hant" typeface="新細明體"/>
+        <a:font script="Arab" typeface="Arial"/>
+        <a:font script="Hebr" typeface="Arial"/>
+        <a:font script="Thai" typeface="Cordia New"/>
+        <a:font script="Ethi" typeface="Nyala"/>
+        <a:font script="Beng" typeface="Vrinda"/>
+        <a:font script="Gujr" typeface="Shruti"/>
+        <a:font script="Khmr" typeface="DaunPenh"/>
+        <a:font script="Knda" typeface="Tunga"/>
+        <a:font script="Guru" typeface="Raavi"/>
+        <a:font script="Cans" typeface="Euphemia"/>
+        <a:font script="Cher" typeface="Plantagenet Cherokee"/>
+        <a:font script="Yiii" typeface="Microsoft Yi Baiti"/>
+        <a:font script="Tibt" typeface="Microsoft Himalaya"/>
+        <a:font script="Thaa" typeface="MV Boli"/>
+        <a:font script="Deva" typeface="Mangal"/>
+        <a:font script="Telu" typeface="Gautami"/>
+        <a:font script="Taml" typeface="Latha"/>
+        <a:font script="Syrc" typeface="Estrangelo Edessa"/>
+        <a:font script="Orya" typeface="Kalinga"/>
+        <a:font script="Mlym" typeface="Kartika"/>
+        <a:font script="Laoo" typeface="DokChampa"/>
+        <a:font script="Sinh" typeface="Iskoola Pota"/>
+        <a:font script="Mong" typeface="Mongolian Baiti"/>
+        <a:font script="Viet" typeface="Arial"/>
+        <a:font script="Uigh" typeface="Microsoft Uighur"/>
+        <a:font script="Geor" typeface="Sylfaen"/>
+      </a:minorFont>
+    </a:fontScheme>
+    <a:fmtScheme name="Office">
+      <a:fillStyleLst>
+        <a:solidFill>
+          <a:schemeClr val="phClr"/>
+        </a:solidFill>
+        <a:gradFill rotWithShape="1">
+          <a:gsLst>
+            <a:gs pos="0">
+              <a:schemeClr val="phClr">
+                <a:tint val="50000"/>
+                <a:satMod val="300000"/>
+              </a:schemeClr>
+            </a:gs>
+            <a:gs pos="35000">
+              <a:schemeClr val="phClr">
+                <a:tint val="37000"/>
+                <a:satMod val="300000"/>
+              </a:schemeClr>
+            </a:gs>
+            <a:gs pos="100000">
+              <a:schemeClr val="phClr">
+                <a:tint val="15000"/>
+                <a:satMod val="350000"/>
+              </a:schemeClr>
+            </a:gs>
+          </a:gsLst>
+          <a:lin ang="16200000" scaled="1"/>
+        </a:gradFill>
+        <a:gradFill rotWithShape="1">
+          <a:gsLst>
+            <a:gs pos="0">
+              <a:schemeClr val="phClr">
+                <a:tint val="100000"/>
+                <a:shade val="100000"/>
+                <a:satMod val="130000"/>
+              </a:schemeClr>
+            </a:gs>
+            <a:gs pos="100000">
+              <a:schemeClr val="phClr">
+                <a:tint val="50000"/>
+                <a:shade val="100000"/>
+                <a:satMod val="350000"/>
+              </a:schemeClr>
+            </a:gs>
+          </a:gsLst>
+          <a:lin ang="16200000" scaled="0"/>
+        </a:gradFill>
+      </a:fillStyleLst>
+      <a:lnStyleLst>
+        <a:ln w="9525" cap="flat" cmpd="sng" algn="ctr">
+          <a:solidFill>
+            <a:schemeClr val="phClr">
+              <a:shade val="95000"/>
+              <a:satMod val="105000"/>
+            </a:schemeClr>
+          </a:solidFill>
+          <a:prstDash val="solid"/>
+        </a:ln>
+        <a:ln w="25400" cap="flat" cmpd="sng" algn="ctr">
+          <a:solidFill>
+            <a:schemeClr val="phClr"/>
+          </a:solidFill>
+          <a:prstDash val="solid"/>
+        </a:ln>
+        <a:ln w="38100" cap="flat" cmpd="sng" algn="ctr">
+          <a:solidFill>
+            <a:schemeClr val="phClr"/>
+          </a:solidFill>
+          <a:prstDash val="solid"/>
+        </a:ln>
+      </a:lnStyleLst>
+      <a:effectStyleLst>
+        <a:effectStyle>
+          <a:effectLst>
+            <a:outerShdw blurRad="40000" dist="20000" dir="5400000" rotWithShape="0">
+              <a:srgbClr val="000000">
+                <a:alpha val="38000"/>
+              </a:srgbClr>
+            </a:outerShdw>
+          </a:effectLst>
+        </a:effectStyle>
+        <a:effectStyle>
+          <a:effectLst>
+            <a:outerShdw blurRad="40000" dist="23000" dir="5400000" rotWithShape="0">
+              <a:srgbClr val="000000">
+                <a:alpha val="35000"/>
+              </a:srgbClr>
+            </a:outerShdw>
+          </a:effectLst>
+        </a:effectStyle>
+        <a:effectStyle>
+          <a:effectLst>
+            <a:outerShdw blurRad="40000" dist="23000" dir="5400000" rotWithShape="0">
+              <a:srgbClr val="000000">
+                <a:alpha val="35000"/>
+              </a:srgbClr>
+            </a:outerShdw>
+          </a:effectLst>
+          <a:scene3d>
+            <a:camera prst="orthographicFront">
+              <a:rot lat="0" lon="0" rev="0"/>
+            </a:camera>
+            <a:lightRig rig="threePt" dir="t">
+              <a:rot lat="0" lon="0" rev="1200000"/>
+            </a:lightRig>
+          </a:scene3d>
+          <a:sp3d>
+            <a:bevelT w="63500" h="25400"/>
+          </a:sp3d>
+        </a:effectStyle>
+      </a:effectStyleLst>
+      <a:bgFillStyleLst>
+        <a:solidFill>
+          <a:schemeClr val="phClr"/>
+        </a:solidFill>
+        <a:gradFill rotWithShape="1">
+          <a:gsLst>
+            <a:gs pos="0">
+              <a:schemeClr val="phClr">
+                <a:tint val="40000"/>
+                <a:satMod val="350000"/>
+              </a:schemeClr>
+            </a:gs>
+            <a:gs pos="40000">
+              <a:schemeClr val="phClr">
+                <a:tint val="45000"/>
+                <a:shade val="99000"/>
+                <a:satMod val="350000"/>
+              </a:schemeClr>
+            </a:gs>
+            <a:gs pos="100000">
+              <a:schemeClr val="phClr">
+                <a:shade val="20000"/>
+                <a:satMod val="255000"/>
+              </a:schemeClr>
+            </a:gs>
+          </a:gsLst>
+          <a:path path="circle">
+            <a:fillToRect l="50000" t="-80000" r="50000" b="180000"/>
+          </a:path>
+        </a:gradFill>
+        <a:gradFill rotWithShape="1">
+          <a:gsLst>
+            <a:gs pos="0">
+              <a:schemeClr val="phClr">
+                <a:tint val="80000"/>
+                <a:satMod val="300000"/>
+              </a:schemeClr>
+            </a:gs>
+            <a:gs pos="100000">
+              <a:schemeClr val="phClr">
+                <a:shade val="30000"/>
+                <a:satMod val="200000"/>
+              </a:schemeClr>
+            </a:gs>
+          </a:gsLst>
+          <a:path path="circle">
+            <a:fillToRect l="50000" t="50000" r="50000" b="50000"/>
+          </a:path>
+        </a:gradFill>
+      </a:bgFillStyleLst>
+    </a:fmtScheme>
+  </a:themeElements>
+  <a:objectDefaults>
+    <a:spDef>
+      <a:spPr/>
+      <a:bodyPr/>
+      <a:lstStyle/>
+      <a:style>
+        <a:lnRef idx="1">
+          <a:schemeClr val="accent1"/>
+        </a:lnRef>
+        <a:fillRef idx="3">
+          <a:schemeClr val="accent1"/>
+        </a:fillRef>
+        <a:effectRef idx="2">
+          <a:schemeClr val="accent1"/>
+        </a:effectRef>
+        <a:fontRef idx="minor">
+          <a:schemeClr val="lt1"/>
+        </a:fontRef>
+      </a:style>
+    </a:spDef>
+    <a:lnDef>
+      <a:spPr/>
+      <a:bodyPr/>
+      <a:lstStyle/>
+      <a:style>
+        <a:lnRef idx="2">
+          <a:schemeClr val="accent1"/>
+        </a:lnRef>
+        <a:fillRef idx="0">
+          <a:schemeClr val="accent1"/>
+        </a:fillRef>
+        <a:effectRef idx="1">
+          <a:schemeClr val="accent1"/>
+        </a:effectRef>
+        <a:fontRef idx="minor">
+          <a:schemeClr val="tx1"/>
+        </a:fontRef>
+      </a:style>
+    </a:lnDef>
+  </a:objectDefaults>
+  <a:extraClrSchemeLst/>
+</a:theme>
 </file>
--- a/public/slides/hvac-precooling-slides.pptx
+++ b/public/slides/hvac-precooling-slides.pptx
@@ -1000,7 +1000,7 @@
           <a:lstStyle/>
           <a:p>
             <a:r>
-              <a:t>結論、今回明らかになった課題と今後の展望です。本実習を通じ、過去データから予冷時間を推計し、起動時刻決定と削減電力量の推定を行う仕組みを確立し、BM向けの可視化アプリを完成させることができました。一方で、休み明けの標本数が少ない点や、室温データの分解能に伴うモデル精度の向上、そして暖房期への対応が今後の課題です。今後は、日々の実運用データを自動で取り込んでモデルを再学習するサイクルの構築や、冬季データを用いた暖房予測モデルの構築へと展開していく予定です。</a:t>
+              <a:t>結論として、本実習のまとめと、今回明らかになった課題および今後の展望です。まずまとめとして、翌朝の気象予報から予冷時間を推計し、推奨起動時刻と削減電力量を提示するBM向けの運用支援アプリを構築いたしました。単に推奨時刻を押し付けるのではなく、安全余裕の内訳やトレードオフ曲線を透明に提示することで、現場の担当者が納得と安心感を持って起動を遅らせられるUI設計を確立できました。一方で、本アプリを現場で本格運用していく上での課題と、それに対応する今後の展望が3点あります。1点目は、実績振り返り機能の不足です。前日に決めた後、翌朝実際に何時に到達しどれだけ電力を削減できたかを検証する画面がありません。今後は省エネ実績ダッシュボードを実装し、翌朝の実績を自動可視化することで、運用の安心感と信頼性を高めていきます。2点目は、モデルの陳腐化リスクです。運用データが溜まっても自動再学習する仕組みがなく、季節の推移や設備変化に追従できません。今後は日々のBEMSデータを取り込んで定期的に自動再学習するサイクルを組み込み、アプリが自律的に精度を維持できるようにします。3点目は、対象系統の限定です。現在は7階冷房のみに特化しており、ビル全体を管理できません。今後は他フロアや暖房期を含めたマルチ系統の統合UIへと拡張し、ビル全体の省エネを一括管理できる基盤へと発展させていく予定です。</a:t>
             </a:r>
           </a:p>
         </p:txBody>
@@ -7472,8 +7472,8 @@
         </p:nvSpPr>
         <p:spPr>
           <a:xfrm>
-            <a:off x="507987" y="889000"/>
-            <a:ext cx="11175720" cy="5334000"/>
+            <a:off x="507987" y="825500"/>
+            <a:ext cx="11175720" cy="5461000"/>
           </a:xfrm>
           <a:prstGeom prst="rect">
             <a:avLst/>
@@ -7487,7 +7487,7 @@
           <a:lstStyle/>
           <a:p>
             <a:pPr>
-              <a:defRPr sz="1600" b="1">
+              <a:defRPr sz="1500" b="1">
                 <a:solidFill>
                   <a:srgbClr val="0B3968"/>
                 </a:solidFill>
@@ -7495,15 +7495,15 @@
               </a:defRPr>
             </a:pPr>
             <a:r>
-              <a:t>■ まとめ</a:t>
+              <a:t>■ まとめ（本実習での成果）</a:t>
             </a:r>
           </a:p>
           <a:p>
             <a:pPr>
               <a:spcAft>
-                <a:spcPts val="400"/>
+                <a:spcPts val="300"/>
               </a:spcAft>
-              <a:defRPr sz="1300">
+              <a:defRPr sz="1200">
                 <a:solidFill>
                   <a:srgbClr val="222222"/>
                 </a:solidFill>
@@ -7511,15 +7511,15 @@
               </a:defRPr>
             </a:pPr>
             <a:r>
-              <a:t>  ・過去のデータから外気温と室温を下げるのに必要な時間の関係を推測するモデルを作成し、それを用いて起動時間の決定、削減される電力量の推定までを行うことが可能になった</a:t>
+              <a:t>  ・気象予報から予冷時間を推計し、推奨起動時刻と削減電力量を提示するBM向け運用支援アプリを構築</a:t>
             </a:r>
           </a:p>
           <a:p>
             <a:pPr>
               <a:spcAft>
-                <a:spcPts val="400"/>
+                <a:spcPts val="300"/>
               </a:spcAft>
-              <a:defRPr sz="1300">
+              <a:defRPr sz="1200">
                 <a:solidFill>
                   <a:srgbClr val="222222"/>
                 </a:solidFill>
@@ -7527,15 +7527,15 @@
               </a:defRPr>
             </a:pPr>
             <a:r>
-              <a:t>  ・BM向けに明日の熱源起動時刻を決定する際の、判断材料となるような可視化アプリの作成を行った</a:t>
+              <a:t>  ・単に推奨値を出すだけでなく、安全マージン内訳やトレードオフ曲線を可視化し、BMが納得と安心感を持って判断できるUIを実現</a:t>
             </a:r>
           </a:p>
           <a:p>
             <a:pPr>
               <a:spcBef>
-                <a:spcPts val="1400"/>
+                <a:spcPts val="1000"/>
               </a:spcBef>
-              <a:defRPr sz="1600" b="1">
+              <a:defRPr sz="1500" b="1">
                 <a:solidFill>
                   <a:srgbClr val="0B3968"/>
                 </a:solidFill>
@@ -7543,15 +7543,15 @@
               </a:defRPr>
             </a:pPr>
             <a:r>
-              <a:t>■ 課題</a:t>
+              <a:t>■ 課題（実運用に向けたアプリ側の課題）</a:t>
             </a:r>
           </a:p>
           <a:p>
             <a:pPr>
               <a:spcAft>
-                <a:spcPts val="400"/>
+                <a:spcPts val="300"/>
               </a:spcAft>
-              <a:defRPr sz="1300">
+              <a:defRPr sz="1200">
                 <a:solidFill>
                   <a:srgbClr val="222222"/>
                 </a:solidFill>
@@ -7559,15 +7559,15 @@
               </a:defRPr>
             </a:pPr>
             <a:r>
-              <a:t>    1.  モデルの精度向上</a:t>
+              <a:t>    1. 実績振り返り機能の不足：翌朝「実際に何時に到達し、何kWh削減できたか」を画面上で確認・検証できない</a:t>
             </a:r>
           </a:p>
           <a:p>
             <a:pPr>
               <a:spcAft>
-                <a:spcPts val="400"/>
+                <a:spcPts val="300"/>
               </a:spcAft>
-              <a:defRPr sz="1300">
+              <a:defRPr sz="1200">
                 <a:solidFill>
                   <a:srgbClr val="222222"/>
                 </a:solidFill>
@@ -7575,15 +7575,31 @@
               </a:defRPr>
             </a:pPr>
             <a:r>
-              <a:t>    2.  暖房期への対応</a:t>
+              <a:t>    2. モデルの陳腐化リスク：運用データが蓄積されてもモデルが自動更新されず、季節遷移や経年変化に追従できない</a:t>
+            </a:r>
+          </a:p>
+          <a:p>
+            <a:pPr>
+              <a:spcAft>
+                <a:spcPts val="300"/>
+              </a:spcAft>
+              <a:defRPr sz="1200">
+                <a:solidFill>
+                  <a:srgbClr val="222222"/>
+                </a:solidFill>
+                <a:latin typeface="BIZ UDPGothic"/>
+              </a:defRPr>
+            </a:pPr>
+            <a:r>
+              <a:t>    3. 対象系統の限定（7階冷房のみ）：ビル全体の複数系統や他フロア、暖房期をまとめて1画面で俯瞰・操作できない</a:t>
             </a:r>
           </a:p>
           <a:p>
             <a:pPr>
               <a:spcBef>
-                <a:spcPts val="1400"/>
+                <a:spcPts val="1000"/>
               </a:spcBef>
-              <a:defRPr sz="1600" b="1">
+              <a:defRPr sz="1500" b="1">
                 <a:solidFill>
                   <a:srgbClr val="0B3968"/>
                 </a:solidFill>
@@ -7591,15 +7607,15 @@
               </a:defRPr>
             </a:pPr>
             <a:r>
-              <a:t>■ 今後の展望</a:t>
+              <a:t>■ 今後の展望（課題1〜3に対応）</a:t>
             </a:r>
           </a:p>
           <a:p>
             <a:pPr>
               <a:spcAft>
-                <a:spcPts val="400"/>
+                <a:spcPts val="300"/>
               </a:spcAft>
-              <a:defRPr sz="1300">
+              <a:defRPr sz="1200">
                 <a:solidFill>
                   <a:srgbClr val="222222"/>
                 </a:solidFill>
@@ -7607,15 +7623,15 @@
               </a:defRPr>
             </a:pPr>
             <a:r>
-              <a:t>    1.  データ読み取り→モデル再学習のサイクルの実装</a:t>
+              <a:t>    1. 省エネ実績ダッシュボードの実装：翌朝の実績を取り込んで予報とのズレや削減成果を自動表示し、運用の安心感を向上</a:t>
             </a:r>
           </a:p>
           <a:p>
             <a:pPr>
               <a:spcAft>
-                <a:spcPts val="400"/>
+                <a:spcPts val="300"/>
               </a:spcAft>
-              <a:defRPr sz="1300">
+              <a:defRPr sz="1200">
                 <a:solidFill>
                   <a:srgbClr val="222222"/>
                 </a:solidFill>
@@ -7623,7 +7639,23 @@
               </a:defRPr>
             </a:pPr>
             <a:r>
-              <a:t>    2.  冬季のデータをもとに暖房運転時の予測モデルの作成</a:t>
+              <a:t>    2. 自動データ蓄積・定期再学習サイクルの構築：日々のBEMSデータから定期的にモデルを自動再学習し、精度を自律維持</a:t>
+            </a:r>
+          </a:p>
+          <a:p>
+            <a:pPr>
+              <a:spcAft>
+                <a:spcPts val="300"/>
+              </a:spcAft>
+              <a:defRPr sz="1200">
+                <a:solidFill>
+                  <a:srgbClr val="222222"/>
+                </a:solidFill>
+                <a:latin typeface="BIZ UDPGothic"/>
+              </a:defRPr>
+            </a:pPr>
+            <a:r>
+              <a:t>    3. ビル全体のマルチ系統統合UIへの拡張：フロア切替や暖房期対応など、ビル全体の空調を一括管理できる統合基盤へ発展</a:t>
             </a:r>
           </a:p>
         </p:txBody>

--- a/public/slides/hvac-precooling-slides.pptx
+++ b/public/slides/hvac-precooling-slides.pptx
@@ -650,7 +650,7 @@
           <a:lstStyle/>
           <a:p>
             <a:r>
-              <a:t>背景と目的です。近年、脱炭素社会の実現やESG投資の拡大に伴い、ビル設備の省エネは企業価値に直結する重要課題となっています。当社ではシミュレーション技術を通じた脱炭素化と企業価値向上に取り組んでおり、その具体策の一つとしてオフィスビルの熱源起動時刻の最適化に着目しました。目指すのは、早朝予冷の無駄を削りつつ、始業時の快適性を確実に守ることです。ビルメンテナンス担当者が根拠を持って安全に起動時刻を判断できるよう、予冷時間予測から削減効果の可視化、意思決定までを支援するシステムを構築しました。</a:t>
+              <a:t>背景と目的です。近年、脱炭素社会の実現やESG投資の拡大に伴い、ビル設備の省エネは企業価値に直結する重要課題となっています。当社ではシミュレーション技術を通じた脱炭素化と企業価値向上に取り組んでおり、その具体策の一つとしてオフィスビルの熱源起動時刻の最適化に着目しました。しかし現場の実態としては、始業時の室温未達を恐れるあまり、早朝一律の過剰な予冷運転が行われ、電力が浪費されている現状があります。そこで本実習では、早朝予冷の無駄を削りつつ始業時の快適性を確実に守るため、データに基づく最適起動モデルを構築しました。さらに、気象予報から求めた予冷時間と削減効果を分かりやすく可視化し、現場のBM担当者が納得と安心感を持って翌朝の起動時刻を決められる意思決定支援システムを構築いたしました。</a:t>
             </a:r>
           </a:p>
         </p:txBody>
@@ -4995,8 +4995,8 @@
         </p:nvSpPr>
         <p:spPr>
           <a:xfrm>
-            <a:off x="571485" y="889000"/>
-            <a:ext cx="11048723" cy="5334000"/>
+            <a:off x="571485" y="825500"/>
+            <a:ext cx="7619809" cy="3810000"/>
           </a:xfrm>
           <a:prstGeom prst="rect">
             <a:avLst/>
@@ -5011,7 +5011,7 @@
           <a:p>
             <a:pPr>
               <a:spcAft>
-                <a:spcPts val="600"/>
+                <a:spcPts val="400"/>
               </a:spcAft>
               <a:defRPr sz="1600" b="1">
                 <a:solidFill>
@@ -5026,26 +5026,77 @@
           </a:p>
           <a:p>
             <a:pPr>
+              <a:spcAft>
+                <a:spcPts val="300"/>
+              </a:spcAft>
+              <a:defRPr sz="1200">
+                <a:solidFill>
+                  <a:srgbClr val="222222"/>
+                </a:solidFill>
+                <a:latin typeface="BIZ UDPGothic"/>
+              </a:defRPr>
+            </a:pPr>
+            <a:r>
+              <a:t>  ・近年、気候変動への対応や脱炭素に向け、ESG※1投資が世界的に拡大している</a:t>
+            </a:r>
+          </a:p>
+          <a:p>
+            <a:pPr>
+              <a:spcAft>
+                <a:spcPts val="300"/>
+              </a:spcAft>
+              <a:defRPr sz="1200">
+                <a:solidFill>
+                  <a:srgbClr val="222222"/>
+                </a:solidFill>
+                <a:latin typeface="BIZ UDPGothic"/>
+              </a:defRPr>
+            </a:pPr>
+            <a:r>
+              <a:t>  ・快適性とエネルギーに関してシミュレーション技術で脱炭素化と企業価値向上に貢献する</a:t>
+            </a:r>
+          </a:p>
+          <a:p>
+            <a:pPr>
+              <a:spcAft>
+                <a:spcPts val="300"/>
+              </a:spcAft>
+              <a:defRPr sz="1200">
+                <a:solidFill>
+                  <a:srgbClr val="222222"/>
+                </a:solidFill>
+                <a:latin typeface="BIZ UDPGothic"/>
+              </a:defRPr>
+            </a:pPr>
+            <a:r>
+              <a:t>  ・オフィスビルの熱源起動最適化に着目（※現場では未達を恐れ早朝一律の過剰予冷が発生）</a:t>
+            </a:r>
+          </a:p>
+          <a:p>
+            <a:pPr>
+              <a:spcBef>
+                <a:spcPts val="1200"/>
+              </a:spcBef>
               <a:spcAft>
                 <a:spcPts val="400"/>
               </a:spcAft>
-              <a:defRPr sz="1300">
-                <a:solidFill>
-                  <a:srgbClr val="222222"/>
-                </a:solidFill>
-                <a:latin typeface="BIZ UDPGothic"/>
-              </a:defRPr>
-            </a:pPr>
-            <a:r>
-              <a:t>  ・近年、気候変動への対応やカーボンニュートラルの実現に向け、ESG※1投資が世界的に拡大している</a:t>
+              <a:defRPr sz="1600" b="1">
+                <a:solidFill>
+                  <a:srgbClr val="0B3968"/>
+                </a:solidFill>
+                <a:latin typeface="BIZ UDPGothic"/>
+              </a:defRPr>
+            </a:pPr>
+            <a:r>
+              <a:t>■ 目的</a:t>
             </a:r>
           </a:p>
           <a:p>
             <a:pPr>
               <a:spcAft>
-                <a:spcPts val="400"/>
+                <a:spcPts val="300"/>
               </a:spcAft>
-              <a:defRPr sz="1300">
+              <a:defRPr sz="1200">
                 <a:solidFill>
                   <a:srgbClr val="222222"/>
                 </a:solidFill>
@@ -5053,15 +5104,15 @@
               </a:defRPr>
             </a:pPr>
             <a:r>
-              <a:t>  ・快適性とエネルギーに関してシミュレーション技術で脱炭素化と企業価値向上に貢献する</a:t>
+              <a:t>  ・空調熱源起動時刻をデータに基づいて最適化し、早朝予冷の無駄削減を目指す</a:t>
             </a:r>
           </a:p>
           <a:p>
             <a:pPr>
               <a:spcAft>
-                <a:spcPts val="400"/>
+                <a:spcPts val="300"/>
               </a:spcAft>
-              <a:defRPr sz="1300">
+              <a:defRPr sz="1200">
                 <a:solidFill>
                   <a:srgbClr val="222222"/>
                 </a:solidFill>
@@ -5069,66 +5120,15 @@
               </a:defRPr>
             </a:pPr>
             <a:r>
-              <a:t>  ・その中の一つとして、オフィスビルの熱源起動時刻の最適化を考える。</a:t>
-            </a:r>
-          </a:p>
-          <a:p>
-            <a:pPr>
-              <a:spcBef>
-                <a:spcPts val="1600"/>
-              </a:spcBef>
-              <a:spcAft>
-                <a:spcPts val="600"/>
-              </a:spcAft>
-              <a:defRPr sz="1600" b="1">
-                <a:solidFill>
-                  <a:srgbClr val="0B3968"/>
-                </a:solidFill>
-                <a:latin typeface="BIZ UDPGothic"/>
-              </a:defRPr>
-            </a:pPr>
-            <a:r>
-              <a:t>■ 目的</a:t>
+              <a:t>  ・それらの情報をわかりやすく可視化することで、ビルメンテナンス(BM)が根拠を持って</a:t>
             </a:r>
           </a:p>
           <a:p>
             <a:pPr>
               <a:spcAft>
-                <a:spcPts val="400"/>
+                <a:spcPts val="300"/>
               </a:spcAft>
-              <a:defRPr sz="1300">
-                <a:solidFill>
-                  <a:srgbClr val="222222"/>
-                </a:solidFill>
-                <a:latin typeface="BIZ UDPGothic"/>
-              </a:defRPr>
-            </a:pPr>
-            <a:r>
-              <a:t>  ・空調熱源起動時刻をデータに基づいて最適化し、早朝予冷の無駄削減を目指す</a:t>
-            </a:r>
-          </a:p>
-          <a:p>
-            <a:pPr>
-              <a:spcAft>
-                <a:spcPts val="400"/>
-              </a:spcAft>
-              <a:defRPr sz="1300">
-                <a:solidFill>
-                  <a:srgbClr val="222222"/>
-                </a:solidFill>
-                <a:latin typeface="BIZ UDPGothic"/>
-              </a:defRPr>
-            </a:pPr>
-            <a:r>
-              <a:t>  ・それらの情報をわかりやすく可視化することで、ビルメンテナンス(BM)が根拠を持って</a:t>
-            </a:r>
-          </a:p>
-          <a:p>
-            <a:pPr>
-              <a:spcAft>
-                <a:spcPts val="400"/>
-              </a:spcAft>
-              <a:defRPr sz="1300">
+              <a:defRPr sz="1200">
                 <a:solidFill>
                   <a:srgbClr val="222222"/>
                 </a:solidFill>
@@ -5149,8 +5149,102 @@
         </p:nvSpPr>
         <p:spPr>
           <a:xfrm>
-            <a:off x="2031949" y="4826000"/>
-            <a:ext cx="2158945" cy="762000"/>
+            <a:off x="8508787" y="1143000"/>
+            <a:ext cx="3174920" cy="1079500"/>
+          </a:xfrm>
+          <a:prstGeom prst="roundRect">
+            <a:avLst/>
+          </a:prstGeom>
+          <a:solidFill>
+            <a:srgbClr val="F8FAFC"/>
+          </a:solidFill>
+          <a:ln>
+            <a:solidFill>
+              <a:srgbClr val="CBD5E1"/>
+            </a:solidFill>
+          </a:ln>
+        </p:spPr>
+        <p:style>
+          <a:lnRef idx="1">
+            <a:schemeClr val="accent1"/>
+          </a:lnRef>
+          <a:fillRef idx="3">
+            <a:schemeClr val="accent1"/>
+          </a:fillRef>
+          <a:effectRef idx="2">
+            <a:schemeClr val="accent1"/>
+          </a:effectRef>
+          <a:fontRef idx="minor">
+            <a:schemeClr val="lt1"/>
+          </a:fontRef>
+        </p:style>
+        <p:txBody>
+          <a:bodyPr rtlCol="0" anchor="ctr" wrap="square"/>
+          <a:lstStyle/>
+          <a:p>
+            <a:pPr algn="ctr">
+              <a:defRPr sz="1000" b="1">
+                <a:solidFill>
+                  <a:srgbClr val="475569"/>
+                </a:solidFill>
+                <a:latin typeface="BIZ UDPGothic"/>
+              </a:defRPr>
+            </a:pPr>
+            <a:r>
+              <a:t>※1 ESG投資とは</a:t>
+            </a:r>
+          </a:p>
+          <a:p>
+            <a:pPr>
+              <a:defRPr sz="900">
+                <a:solidFill>
+                  <a:srgbClr val="64748B"/>
+                </a:solidFill>
+                <a:latin typeface="BIZ UDPGothic"/>
+              </a:defRPr>
+            </a:pPr>
+            <a:r>
+              <a:t>E(環境)：気候変動・省エネなど</a:t>
+            </a:r>
+          </a:p>
+          <a:p>
+            <a:pPr>
+              <a:defRPr sz="900">
+                <a:solidFill>
+                  <a:srgbClr val="64748B"/>
+                </a:solidFill>
+                <a:latin typeface="BIZ UDPGothic"/>
+              </a:defRPr>
+            </a:pPr>
+            <a:r>
+              <a:t>S(社会)：快適性・働き方改善など</a:t>
+            </a:r>
+          </a:p>
+          <a:p>
+            <a:pPr>
+              <a:defRPr sz="900">
+                <a:solidFill>
+                  <a:srgbClr val="64748B"/>
+                </a:solidFill>
+                <a:latin typeface="BIZ UDPGothic"/>
+              </a:defRPr>
+            </a:pPr>
+            <a:r>
+              <a:t>G(ガバナンス)：法令遵守・管理規則など</a:t>
+            </a:r>
+          </a:p>
+        </p:txBody>
+      </p:sp>
+      <p:sp>
+        <p:nvSpPr>
+          <p:cNvPr id="9" name="Rounded Rectangle 8"/>
+          <p:cNvSpPr/>
+          <p:nvPr/>
+        </p:nvSpPr>
+        <p:spPr>
+          <a:xfrm>
+            <a:off x="1206469" y="4762500"/>
+            <a:ext cx="2857428" cy="889000"/>
           </a:xfrm>
           <a:prstGeom prst="roundRect">
             <a:avLst/>
@@ -5179,11 +5273,11 @@
           </a:fontRef>
         </p:style>
         <p:txBody>
-          <a:bodyPr rtlCol="0" anchor="ctr"/>
+          <a:bodyPr rtlCol="0" anchor="ctr" wrap="square"/>
           <a:lstStyle/>
           <a:p>
             <a:pPr algn="ctr">
-              <a:defRPr sz="1200" b="1">
+              <a:defRPr sz="1300" b="1">
                 <a:solidFill>
                   <a:srgbClr val="0B3968"/>
                 </a:solidFill>
@@ -5191,26 +5285,34 @@
               </a:defRPr>
             </a:pPr>
             <a:r>
-              <a:t>必要な</a:t>
-            </a:r>
-          </a:p>
-          <a:p>
-            <a:r>
-              <a:t>予冷時間の予測</a:t>
-            </a:r>
-          </a:p>
-        </p:txBody>
-      </p:sp>
-      <p:sp>
-        <p:nvSpPr>
-          <p:cNvPr id="9" name="Rounded Rectangle 8"/>
+              <a:t>必要な予冷時間の予測</a:t>
+            </a:r>
+          </a:p>
+          <a:p>
+            <a:pPr algn="ctr">
+              <a:defRPr sz="1000">
+                <a:solidFill>
+                  <a:srgbClr val="555555"/>
+                </a:solidFill>
+                <a:latin typeface="BIZ UDPGothic"/>
+              </a:defRPr>
+            </a:pPr>
+            <a:r>
+              <a:t>気象予報 × 回帰モデル</a:t>
+            </a:r>
+          </a:p>
+        </p:txBody>
+      </p:sp>
+      <p:sp>
+        <p:nvSpPr>
+          <p:cNvPr id="10" name="Rounded Rectangle 9"/>
           <p:cNvSpPr/>
           <p:nvPr/>
         </p:nvSpPr>
         <p:spPr>
           <a:xfrm>
-            <a:off x="5206869" y="4826000"/>
-            <a:ext cx="2158945" cy="762000"/>
+            <a:off x="4889377" y="4762500"/>
+            <a:ext cx="2857428" cy="889000"/>
           </a:xfrm>
           <a:prstGeom prst="roundRect">
             <a:avLst/>
@@ -5239,11 +5341,11 @@
           </a:fontRef>
         </p:style>
         <p:txBody>
-          <a:bodyPr rtlCol="0" anchor="ctr"/>
+          <a:bodyPr rtlCol="0" anchor="ctr" wrap="square"/>
           <a:lstStyle/>
           <a:p>
             <a:pPr algn="ctr">
-              <a:defRPr sz="1200" b="1">
+              <a:defRPr sz="1300" b="1">
                 <a:solidFill>
                   <a:srgbClr val="0B3968"/>
                 </a:solidFill>
@@ -5251,26 +5353,34 @@
               </a:defRPr>
             </a:pPr>
             <a:r>
-              <a:t>削減効果の</a:t>
-            </a:r>
-          </a:p>
-          <a:p>
-            <a:r>
-              <a:t>可視化</a:t>
-            </a:r>
-          </a:p>
-        </p:txBody>
-      </p:sp>
-      <p:sp>
-        <p:nvSpPr>
-          <p:cNvPr id="10" name="Rounded Rectangle 9"/>
+              <a:t>削減効果の可視化</a:t>
+            </a:r>
+          </a:p>
+          <a:p>
+            <a:pPr algn="ctr">
+              <a:defRPr sz="1000">
+                <a:solidFill>
+                  <a:srgbClr val="555555"/>
+                </a:solidFill>
+                <a:latin typeface="BIZ UDPGothic"/>
+              </a:defRPr>
+            </a:pPr>
+            <a:r>
+              <a:t>トレードオフ曲線・UI</a:t>
+            </a:r>
+          </a:p>
+        </p:txBody>
+      </p:sp>
+      <p:sp>
+        <p:nvSpPr>
+          <p:cNvPr id="11" name="Rounded Rectangle 10"/>
           <p:cNvSpPr/>
           <p:nvPr/>
         </p:nvSpPr>
         <p:spPr>
           <a:xfrm>
-            <a:off x="8381790" y="4826000"/>
-            <a:ext cx="2158945" cy="762000"/>
+            <a:off x="8572285" y="4762500"/>
+            <a:ext cx="2857428" cy="889000"/>
           </a:xfrm>
           <a:prstGeom prst="roundRect">
             <a:avLst/>
@@ -5299,11 +5409,11 @@
           </a:fontRef>
         </p:style>
         <p:txBody>
-          <a:bodyPr rtlCol="0" anchor="ctr"/>
+          <a:bodyPr rtlCol="0" anchor="ctr" wrap="square"/>
           <a:lstStyle/>
           <a:p>
             <a:pPr algn="ctr">
-              <a:defRPr sz="1200" b="1">
+              <a:defRPr sz="1300" b="1">
                 <a:solidFill>
                   <a:srgbClr val="0B3968"/>
                 </a:solidFill>
@@ -5311,12 +5421,20 @@
               </a:defRPr>
             </a:pPr>
             <a:r>
-              <a:t>BM</a:t>
-            </a:r>
-          </a:p>
-          <a:p>
-            <a:r>
-              <a:t>意思決定</a:t>
+              <a:t>BM 意思決定</a:t>
+            </a:r>
+          </a:p>
+          <a:p>
+            <a:pPr algn="ctr">
+              <a:defRPr sz="1000">
+                <a:solidFill>
+                  <a:srgbClr val="555555"/>
+                </a:solidFill>
+                <a:latin typeface="BIZ UDPGothic"/>
+              </a:defRPr>
+            </a:pPr>
+            <a:r>
+              <a:t>安心・納得の起動判断</a:t>
             </a:r>
           </a:p>
         </p:txBody>

--- a/public/slides/hvac-precooling-slides.pptx
+++ b/public/slides/hvac-precooling-slides.pptx
@@ -1070,7 +1070,7 @@
           <a:lstStyle/>
           <a:p>
             <a:r>
-              <a:t>最後に、2週間の実習を通した所感です。今回、現場の担当者がどう判断するかという「お客様目線」での開発に取り組み、単にアルゴリズムを作るだけでなく、相手のニーズを汲み取って安全側マージンや可視化画面を設計することの難しさと重要性を深く学びました。また、実際の設備現場や実験住宅の見学など、机上のプログラミングにとどまらない貴重な体験をさせていただき、自分の技術が脱炭素や社会貢献につながるという強い実感を得ることができました。ご指導いただいたメンターの皆様、関係者の皆様に心より感謝申し上げます。ご清聴ありがとうございました。</a:t>
+              <a:t>最後に、2週間の実習を通した所感です。初日の自己紹介で挙げた「3つの参加理由」に対し、期待を大きく超える充実した学びを得ることができました。まず開発面では、単に予測モデルを作るだけでなく、現場のBM担当者がどうすれば安心して起動を遅らせられるかという「お客様目線」でのUI・安全マージン設計の難しさと重要性を深く学びました。また、大学では扱えない実機データに触れる中で、シミュレーション技術が脱炭素や社会貢献に直結しているという強い手応えを得ることができました。そしてインターンシップ全体を通じ、デスクワークにとどまらず実験住宅やセキュリティ現場の見学など幅広い体験をさせていただき、当社の高い技術力と現場主義の社風を肌で体感いたしました。親身にご指導いただいたメンターの皆様、関係者の皆様に心より感謝申し上げます。2週間、本当にありがとうございました。</a:t>
             </a:r>
           </a:p>
         </p:txBody>
@@ -8017,8 +8017,8 @@
         </p:nvSpPr>
         <p:spPr>
           <a:xfrm>
-            <a:off x="444488" y="889000"/>
-            <a:ext cx="5333866" cy="5334000"/>
+            <a:off x="444488" y="825500"/>
+            <a:ext cx="5079872" cy="5461000"/>
           </a:xfrm>
           <a:prstGeom prst="rect">
             <a:avLst/>
@@ -8032,7 +8032,7 @@
           <a:lstStyle/>
           <a:p>
             <a:pPr>
-              <a:defRPr sz="1600" b="1">
+              <a:defRPr sz="1500" b="1">
                 <a:solidFill>
                   <a:srgbClr val="0B3968"/>
                 </a:solidFill>
@@ -8040,15 +8040,28 @@
               </a:defRPr>
             </a:pPr>
             <a:r>
-              <a:t>■ 実習を通して</a:t>
+              <a:t>■ 実習を通して（技術・開発の学び）</a:t>
+            </a:r>
+          </a:p>
+          <a:p>
+            <a:pPr>
+              <a:defRPr sz="1200" b="1">
+                <a:solidFill>
+                  <a:srgbClr val="00509E"/>
+                </a:solidFill>
+                <a:latin typeface="BIZ UDPGothic"/>
+              </a:defRPr>
+            </a:pPr>
+            <a:r>
+              <a:t>  ・お客様目線での開発</a:t>
             </a:r>
           </a:p>
           <a:p>
             <a:pPr>
               <a:spcAft>
-                <a:spcPts val="400"/>
+                <a:spcPts val="200"/>
               </a:spcAft>
-              <a:defRPr sz="1200">
+              <a:defRPr sz="1100">
                 <a:solidFill>
                   <a:srgbClr val="222222"/>
                 </a:solidFill>
@@ -8056,15 +8069,28 @@
               </a:defRPr>
             </a:pPr>
             <a:r>
-              <a:t>  ・お客様目線でのアプリケーション開発では、相手のニーズを想定しながら進める必要があり、難しさを感じた</a:t>
+              <a:t>    現場のBM担当者が安心できるマージンやUIを追求する難しさと重要性を学んだ</a:t>
+            </a:r>
+          </a:p>
+          <a:p>
+            <a:pPr>
+              <a:defRPr sz="1200" b="1">
+                <a:solidFill>
+                  <a:srgbClr val="00509E"/>
+                </a:solidFill>
+                <a:latin typeface="BIZ UDPGothic"/>
+              </a:defRPr>
+            </a:pPr>
+            <a:r>
+              <a:t>  ・社会貢献の実感</a:t>
             </a:r>
           </a:p>
           <a:p>
             <a:pPr>
               <a:spcAft>
-                <a:spcPts val="400"/>
+                <a:spcPts val="200"/>
               </a:spcAft>
-              <a:defRPr sz="1200">
+              <a:defRPr sz="1100">
                 <a:solidFill>
                   <a:srgbClr val="222222"/>
                 </a:solidFill>
@@ -8072,15 +8098,15 @@
               </a:defRPr>
             </a:pPr>
             <a:r>
-              <a:t>  ・実際のデータやその現場を見に行くことで、社会貢献ができるという意識を感じることができた</a:t>
+              <a:t>    実機・現場データに触れ、技術が脱炭素という社会貢献に直結する手応えを得た</a:t>
             </a:r>
           </a:p>
           <a:p>
             <a:pPr>
               <a:spcBef>
-                <a:spcPts val="1400"/>
+                <a:spcPts val="800"/>
               </a:spcBef>
-              <a:defRPr sz="1600" b="1">
+              <a:defRPr sz="1500" b="1">
                 <a:solidFill>
                   <a:srgbClr val="0B3968"/>
                 </a:solidFill>
@@ -8088,15 +8114,28 @@
               </a:defRPr>
             </a:pPr>
             <a:r>
-              <a:t>■ インターンシップを通して</a:t>
+              <a:t>■ インターンシップを通して（社風・現場体験）</a:t>
+            </a:r>
+          </a:p>
+          <a:p>
+            <a:pPr>
+              <a:defRPr sz="1200" b="1">
+                <a:solidFill>
+                  <a:srgbClr val="00509E"/>
+                </a:solidFill>
+                <a:latin typeface="BIZ UDPGothic"/>
+              </a:defRPr>
+            </a:pPr>
+            <a:r>
+              <a:t>  ・現場主義の社風を実感</a:t>
             </a:r>
           </a:p>
           <a:p>
             <a:pPr>
               <a:spcAft>
-                <a:spcPts val="400"/>
+                <a:spcPts val="200"/>
               </a:spcAft>
-              <a:defRPr sz="1200">
+              <a:defRPr sz="1100">
                 <a:solidFill>
                   <a:srgbClr val="222222"/>
                 </a:solidFill>
@@ -8104,15 +8143,28 @@
               </a:defRPr>
             </a:pPr>
             <a:r>
-              <a:t>  ・実際の会社の肌で感じることができた。</a:t>
+              <a:t>    実験住宅やセキュリティ見学など生活を支える高い技術力を肌で体感できた</a:t>
+            </a:r>
+          </a:p>
+          <a:p>
+            <a:pPr>
+              <a:defRPr sz="1200" b="1">
+                <a:solidFill>
+                  <a:srgbClr val="00509E"/>
+                </a:solidFill>
+                <a:latin typeface="BIZ UDPGothic"/>
+              </a:defRPr>
+            </a:pPr>
+            <a:r>
+              <a:t>  ・感謝</a:t>
             </a:r>
           </a:p>
           <a:p>
             <a:pPr>
               <a:spcAft>
-                <a:spcPts val="400"/>
+                <a:spcPts val="200"/>
               </a:spcAft>
-              <a:defRPr sz="1200">
+              <a:defRPr sz="1100">
                 <a:solidFill>
                   <a:srgbClr val="222222"/>
                 </a:solidFill>
@@ -8120,7 +8172,7 @@
               </a:defRPr>
             </a:pPr>
             <a:r>
-              <a:t>  ・デスクワークにとどまらず、実験住宅の見学やセキュリティ関連のご紹介など、幅広い体験ができ、大変充実した2週間を過ごすことができました</a:t>
+              <a:t>    親身にご指導くださったメンターの皆様に感謝申し上げます。大変充実した2週間となりました</a:t>
             </a:r>
           </a:p>
         </p:txBody>
@@ -8141,17 +8193,53 @@
         </p:blipFill>
         <p:spPr>
           <a:xfrm>
-            <a:off x="6730831" y="889000"/>
-            <a:ext cx="2730431" cy="2540000"/>
+            <a:off x="6730831" y="825500"/>
+            <a:ext cx="2793930" cy="2413000"/>
           </a:xfrm>
           <a:prstGeom prst="rect">
             <a:avLst/>
           </a:prstGeom>
         </p:spPr>
       </p:pic>
+      <p:sp>
+        <p:nvSpPr>
+          <p:cNvPr id="9" name="TextBox 8"/>
+          <p:cNvSpPr txBox="1"/>
+          <p:nvPr/>
+        </p:nvSpPr>
+        <p:spPr>
+          <a:xfrm>
+            <a:off x="6730831" y="3238500"/>
+            <a:ext cx="2793930" cy="317500"/>
+          </a:xfrm>
+          <a:prstGeom prst="rect">
+            <a:avLst/>
+          </a:prstGeom>
+          <a:noFill/>
+        </p:spPr>
+        <p:txBody>
+          <a:bodyPr wrap="none">
+            <a:spAutoFit/>
+          </a:bodyPr>
+          <a:lstStyle/>
+          <a:p>
+            <a:pPr algn="ctr">
+              <a:defRPr sz="900" b="1">
+                <a:solidFill>
+                  <a:srgbClr val="555555"/>
+                </a:solidFill>
+                <a:latin typeface="BIZ UDPGothic"/>
+              </a:defRPr>
+            </a:pPr>
+            <a:r>
+              <a:t>【パナソニック受付にて】</a:t>
+            </a:r>
+          </a:p>
+        </p:txBody>
+      </p:sp>
       <p:pic>
         <p:nvPicPr>
-          <p:cNvPr id="9" name="Picture 8" descr="onsite_photo_building.png"/>
+          <p:cNvPr id="10" name="Picture 9" descr="onsite_photo_building.png"/>
           <p:cNvPicPr>
             <a:picLocks noChangeAspect="1"/>
           </p:cNvPicPr>
@@ -8165,17 +8253,53 @@
         </p:blipFill>
         <p:spPr>
           <a:xfrm>
-            <a:off x="5460863" y="3048000"/>
-            <a:ext cx="2285942" cy="2730500"/>
+            <a:off x="5333866" y="3556000"/>
+            <a:ext cx="2285942" cy="2413000"/>
           </a:xfrm>
           <a:prstGeom prst="rect">
             <a:avLst/>
           </a:prstGeom>
         </p:spPr>
       </p:pic>
+      <p:sp>
+        <p:nvSpPr>
+          <p:cNvPr id="11" name="TextBox 10"/>
+          <p:cNvSpPr txBox="1"/>
+          <p:nvPr/>
+        </p:nvSpPr>
+        <p:spPr>
+          <a:xfrm>
+            <a:off x="5333866" y="5994400"/>
+            <a:ext cx="2285942" cy="317500"/>
+          </a:xfrm>
+          <a:prstGeom prst="rect">
+            <a:avLst/>
+          </a:prstGeom>
+          <a:noFill/>
+        </p:spPr>
+        <p:txBody>
+          <a:bodyPr wrap="none">
+            <a:spAutoFit/>
+          </a:bodyPr>
+          <a:lstStyle/>
+          <a:p>
+            <a:pPr algn="ctr">
+              <a:defRPr sz="900" b="1">
+                <a:solidFill>
+                  <a:srgbClr val="555555"/>
+                </a:solidFill>
+                <a:latin typeface="BIZ UDPGothic"/>
+              </a:defRPr>
+            </a:pPr>
+            <a:r>
+              <a:t>【実験住宅・設備見学】</a:t>
+            </a:r>
+          </a:p>
+        </p:txBody>
+      </p:sp>
       <p:pic>
         <p:nvPicPr>
-          <p:cNvPr id="10" name="Picture 9" descr="onsite_photo_living.png"/>
+          <p:cNvPr id="12" name="Picture 11" descr="onsite_photo_living.png"/>
           <p:cNvPicPr>
             <a:picLocks noChangeAspect="1"/>
           </p:cNvPicPr>
@@ -8189,14 +8313,50 @@
         </p:blipFill>
         <p:spPr>
           <a:xfrm>
-            <a:off x="7429314" y="3746500"/>
-            <a:ext cx="2984425" cy="2095500"/>
+            <a:off x="7810304" y="3810000"/>
+            <a:ext cx="2857428" cy="2159000"/>
           </a:xfrm>
           <a:prstGeom prst="rect">
             <a:avLst/>
           </a:prstGeom>
         </p:spPr>
       </p:pic>
+      <p:sp>
+        <p:nvSpPr>
+          <p:cNvPr id="13" name="TextBox 12"/>
+          <p:cNvSpPr txBox="1"/>
+          <p:nvPr/>
+        </p:nvSpPr>
+        <p:spPr>
+          <a:xfrm>
+            <a:off x="7810304" y="5994400"/>
+            <a:ext cx="2857428" cy="317500"/>
+          </a:xfrm>
+          <a:prstGeom prst="rect">
+            <a:avLst/>
+          </a:prstGeom>
+          <a:noFill/>
+        </p:spPr>
+        <p:txBody>
+          <a:bodyPr wrap="none">
+            <a:spAutoFit/>
+          </a:bodyPr>
+          <a:lstStyle/>
+          <a:p>
+            <a:pPr algn="ctr">
+              <a:defRPr sz="900" b="1">
+                <a:solidFill>
+                  <a:srgbClr val="555555"/>
+                </a:solidFill>
+                <a:latin typeface="BIZ UDPGothic"/>
+              </a:defRPr>
+            </a:pPr>
+            <a:r>
+              <a:t>【スマートハウス空間体験】</a:t>
+            </a:r>
+          </a:p>
+        </p:txBody>
+      </p:sp>
     </p:spTree>
   </p:cSld>
   <p:clrMapOvr>

--- a/public/slides/hvac-precooling-slides.pptx
+++ b/public/slides/hvac-precooling-slides.pptx
@@ -790,7 +790,7 @@
           <a:lstStyle/>
           <a:p>
             <a:r>
-              <a:t>次に、モデル設計にあたって現場の判断材料をどのように求めたかをご説明します。担当者が前日に知りたいのは、「明日の何時に起動すれば、何時に設定温度に到達するか」です。そこで、過去データから予冷時間を推計するモデルを構築しました。式の基本構造は、外気温と設定温度から求めるベース予冷時間に、安全マージンを加える形です。外気温には前日夕方に取得できる天気予報を用い、設定温度は任意に変更可能としています。また、朝は起動をやり直せないため、予報誤差やモデル精度を見込んだ安全マージンを上乗せして確実に間に合わせます。さらに、休み明けは躯体に熱が残って室温が約2℃高いことが分かったため、外気温に+2℃のオフセットをかけて同じモデルに通す工夫を行いました。</a:t>
+              <a:t>次に、モデル設計にあたって現場の判断材料をどのように求めたかをご説明します。担当者が前日に知りたいのは、「明日の何時に起動すれば、何時に設定温度に到達するか」です。予冷時間は本来、冷やす直前の「室温」に大きく左右されますが、起動時刻を決める前日夕方の時点では翌朝の室温は分かりません。そこで、前日に確実に取得できる天気予報の外気温情報から、直接予冷時間を推計するモデル構造といたしました。式の基本構造は、外気温と設定温度から求めるベース予冷時間に、安全マージンを加える形です。また、朝は起動のやり直しがきかないため、予報誤差やモデル精度を見込んだ安全マージンを上乗せして確実に間に合わせます。さらに、休み明けは躯体に熱が残って室温が約2℃高いことが分かったため、外気温に+2℃のオフセットをかけて同じモデルに通す工夫を行いました。</a:t>
             </a:r>
           </a:p>
         </p:txBody>
@@ -860,7 +860,7 @@
           <a:lstStyle/>
           <a:p>
             <a:r>
-              <a:t>開発した最適起動モデルを実データに適用した、バックテスト検証結果です。過去データの実測気温推移からモデルで起動時刻を決定し直したところ、全日で8:00始業前の設定温度到達を達成できました。効果として、まず運転時間は平均で約104分短縮され、最大で1時間40分ほど起動を遅らせることができました。その結果、始業前の消費電力量は平均で約36%削減できることを確認いたしました。</a:t>
+              <a:t>開発した最適起動モデルを実データに適用した、バックテスト検証結果です。過去データの実測気温推移からモデルで予冷時間を推計し、始業8:00から逆算して、確実に間に合う範囲で最も遅い起動時刻を決定し直しました。その結果、全日で8:00始業前の設定温度到達を達成できました。効果として、まず運転時間は平均で約104分短縮され、最大で1時間40分ほど起動を遅らせることができました。その結果、始業前の消費電力量は平均で約36%削減できることを確認いたしました。</a:t>
             </a:r>
           </a:p>
         </p:txBody>
@@ -930,7 +930,7 @@
           <a:lstStyle/>
           <a:p>
             <a:r>
-              <a:t>続いて、現場のビルメンテナンス担当者が実際に使用する可視化アプリです。担当者が夕方に翌日の日付を選ぶだけで、天気予報を自動取得し、推奨起動時刻（例えば07:10など）を算出して提示します。単に推奨時刻を出すだけでなく、二軸のトレードオフ曲線によって「起動を早めると電力を消費し、遅らせると到達リスクが高まる」という関係を可視化しています。これにより、担当者が納得感と安心感を持って翌日の起動時刻を決定できます。また、予報気温が過去データの範囲を超える場合は外挿警告を出し、担当者に判断を委ねる安全設計としています。</a:t>
+              <a:t>続いて、スライド5で実証された高い削減効果を、現場のBM担当者が毎日根拠を持って再現できるように開発した「可視化アプリ」です。担当者が夕方に翌日の日付を選ぶだけで、天気予報を自動取得し、推奨起動時刻（例えば07:10など）を算出して提示します。単に推奨時刻を押し付けるのではなく、二軸のトレードオフ曲線によって「起動を早めると電力を消費し、遅らせると到達リスクが高まる」という関係を可視化しています。これにより、担当者が納得感と安心感を持って翌日の起動時刻を決定できます。また、予報気温が過去データの範囲を超える場合は外挿警告を出し、担当者に判断を委ねる安全設計としています。</a:t>
             </a:r>
           </a:p>
         </p:txBody>
@@ -6293,6 +6293,19 @@
           </a:p>
           <a:p>
             <a:pPr>
+              <a:defRPr sz="950">
+                <a:solidFill>
+                  <a:srgbClr val="555555"/>
+                </a:solidFill>
+                <a:latin typeface="BIZ UDPGothic"/>
+              </a:defRPr>
+            </a:pPr>
+            <a:r>
+              <a:t>       （※決定時点では翌朝の室温が不明なため、予報外気温から直接推計）</a:t>
+            </a:r>
+          </a:p>
+          <a:p>
+            <a:pPr>
               <a:defRPr sz="1200" b="1">
                 <a:solidFill>
                   <a:srgbClr val="00509E"/>
@@ -6346,7 +6359,7 @@
           <a:p>
             <a:pPr>
               <a:spcBef>
-                <a:spcPts val="800"/>
+                <a:spcPts val="600"/>
               </a:spcBef>
               <a:defRPr sz="1500" b="1">
                 <a:solidFill>
@@ -6663,8 +6676,8 @@
         </p:nvSpPr>
         <p:spPr>
           <a:xfrm>
-            <a:off x="444488" y="762000"/>
-            <a:ext cx="11302717" cy="762000"/>
+            <a:off x="444488" y="698500"/>
+            <a:ext cx="11302717" cy="889000"/>
           </a:xfrm>
           <a:prstGeom prst="rect">
             <a:avLst/>
@@ -6691,7 +6704,7 @@
           </a:p>
           <a:p>
             <a:pPr>
-              <a:defRPr sz="1300">
+              <a:defRPr sz="1200">
                 <a:solidFill>
                   <a:srgbClr val="222222"/>
                 </a:solidFill>
@@ -6700,6 +6713,19 @@
             </a:pPr>
             <a:r>
               <a:t>  ・作成した予測モデルを用い、実際の過去データの気温推移から必要な予冷時間を推測、起動時間を決定した</a:t>
+            </a:r>
+          </a:p>
+          <a:p>
+            <a:pPr>
+              <a:defRPr sz="1000">
+                <a:solidFill>
+                  <a:srgbClr val="555555"/>
+                </a:solidFill>
+                <a:latin typeface="BIZ UDPGothic"/>
+              </a:defRPr>
+            </a:pPr>
+            <a:r>
+              <a:t>     （※始業8:00から予冷時間を逆算し、確実に到達できる最も遅い起動時刻を算出）</a:t>
             </a:r>
           </a:p>
         </p:txBody>

--- a/public/slides/hvac-precooling-slides.pptx
+++ b/public/slides/hvac-precooling-slides.pptx
@@ -650,7 +650,7 @@
           <a:lstStyle/>
           <a:p>
             <a:r>
-              <a:t>背景と目的です。近年、脱炭素社会の実現やESG投資の拡大に伴い、ビル設備の省エネは企業価値に直結する重要課題となっています。当社ではシミュレーション技術を通じた脱炭素化と企業価値向上に取り組んでおり、その具体策の一つとしてオフィスビルの熱源起動時刻の最適化に着目しました。しかし現場の実態としては、始業時の室温未達を恐れるあまり、早朝一律の過剰な予冷運転が行われ、電力が浪費されている現状があります。そこで本実習では、早朝予冷の無駄を削りつつ始業時の快適性を確実に守るため、データに基づく最適起動モデルを構築しました。さらに、気象予報から求めた予冷時間と削減効果を分かりやすく可視化し、現場のBM担当者が納得と安心感を持って翌朝の起動時刻を決められる意思決定支援システムを構築いたしました。</a:t>
+              <a:t>目的と背景です。まず本実習の目的として、空調熱源の起動時刻をデータに基づいて最適化し、早朝予冷の無駄削減を目指しました。具体的には、ビルメンテナンス担当者が納得と安心感を持って安全に起動時刻を判断できるよう、スライドのフロー図に示す「必要な予冷時間の予測」「削減効果の可視化」「BMの意思決定支援」という3ステップのシステムを構築いたしました。この取り組みの背景には、2つの大きな要因があります。1つ目は社会的要請です。近年、気候変動対応や脱炭素化に伴いESG投資が世界的に拡大しており、当社でもシミュレーション技術を通じた脱炭素化と企業価値向上に注力しています。そして2つ目が現場の実態です。実際のビル運用現場では、始業時の室温未達クレームを恐れるあまり、早朝一律の過剰な予冷運転が行われ、電力が浪費されている現状がありました。そこで、この現場の課題を解決し、脱炭素へ貢献するために本システムの開発に取り組みました。</a:t>
             </a:r>
           </a:p>
         </p:txBody>
@@ -4995,8 +4995,8 @@
         </p:nvSpPr>
         <p:spPr>
           <a:xfrm>
-            <a:off x="571485" y="825500"/>
-            <a:ext cx="7619809" cy="3810000"/>
+            <a:off x="571485" y="762000"/>
+            <a:ext cx="11048723" cy="1016000"/>
           </a:xfrm>
           <a:prstGeom prst="rect">
             <a:avLst/>
@@ -5011,9 +5011,284 @@
           <a:p>
             <a:pPr>
               <a:spcAft>
+                <a:spcPts val="200"/>
+              </a:spcAft>
+              <a:defRPr sz="1500" b="1">
+                <a:solidFill>
+                  <a:srgbClr val="0B3968"/>
+                </a:solidFill>
+                <a:latin typeface="BIZ UDPGothic"/>
+              </a:defRPr>
+            </a:pPr>
+            <a:r>
+              <a:t>■ 目的（本実習で目指したこと）</a:t>
+            </a:r>
+          </a:p>
+          <a:p>
+            <a:pPr>
+              <a:spcAft>
+                <a:spcPts val="200"/>
+              </a:spcAft>
+              <a:defRPr sz="1200">
+                <a:solidFill>
+                  <a:srgbClr val="222222"/>
+                </a:solidFill>
+                <a:latin typeface="BIZ UDPGothic"/>
+              </a:defRPr>
+            </a:pPr>
+            <a:r>
+              <a:t>  ・空調熱源起動時刻をデータに基づいて最適化し、早朝予冷の無駄削減を目指す</a:t>
+            </a:r>
+          </a:p>
+          <a:p>
+            <a:pPr>
+              <a:spcAft>
+                <a:spcPts val="200"/>
+              </a:spcAft>
+              <a:defRPr sz="1200">
+                <a:solidFill>
+                  <a:srgbClr val="222222"/>
+                </a:solidFill>
+                <a:latin typeface="BIZ UDPGothic"/>
+              </a:defRPr>
+            </a:pPr>
+            <a:r>
+              <a:t>  ・ビルメンテナンス(BM)が根拠を持って安全に起動時刻を判断できる意思決定支援システムを構築する</a:t>
+            </a:r>
+          </a:p>
+        </p:txBody>
+      </p:sp>
+      <p:sp>
+        <p:nvSpPr>
+          <p:cNvPr id="8" name="Rounded Rectangle 7"/>
+          <p:cNvSpPr/>
+          <p:nvPr/>
+        </p:nvSpPr>
+        <p:spPr>
+          <a:xfrm>
+            <a:off x="1206469" y="1841500"/>
+            <a:ext cx="2857428" cy="838200"/>
+          </a:xfrm>
+          <a:prstGeom prst="roundRect">
+            <a:avLst/>
+          </a:prstGeom>
+          <a:solidFill>
+            <a:srgbClr val="EDF5FB"/>
+          </a:solidFill>
+          <a:ln>
+            <a:solidFill>
+              <a:srgbClr val="7BA4C7"/>
+            </a:solidFill>
+          </a:ln>
+        </p:spPr>
+        <p:style>
+          <a:lnRef idx="1">
+            <a:schemeClr val="accent1"/>
+          </a:lnRef>
+          <a:fillRef idx="3">
+            <a:schemeClr val="accent1"/>
+          </a:fillRef>
+          <a:effectRef idx="2">
+            <a:schemeClr val="accent1"/>
+          </a:effectRef>
+          <a:fontRef idx="minor">
+            <a:schemeClr val="lt1"/>
+          </a:fontRef>
+        </p:style>
+        <p:txBody>
+          <a:bodyPr rtlCol="0" anchor="ctr" wrap="square"/>
+          <a:lstStyle/>
+          <a:p>
+            <a:pPr algn="ctr">
+              <a:defRPr sz="1300" b="1">
+                <a:solidFill>
+                  <a:srgbClr val="0B3968"/>
+                </a:solidFill>
+                <a:latin typeface="BIZ UDPGothic"/>
+              </a:defRPr>
+            </a:pPr>
+            <a:r>
+              <a:t>必要な予冷時間の予測</a:t>
+            </a:r>
+          </a:p>
+          <a:p>
+            <a:pPr algn="ctr">
+              <a:defRPr sz="1000">
+                <a:solidFill>
+                  <a:srgbClr val="555555"/>
+                </a:solidFill>
+                <a:latin typeface="BIZ UDPGothic"/>
+              </a:defRPr>
+            </a:pPr>
+            <a:r>
+              <a:t>気象予報 × 回帰モデル</a:t>
+            </a:r>
+          </a:p>
+        </p:txBody>
+      </p:sp>
+      <p:sp>
+        <p:nvSpPr>
+          <p:cNvPr id="9" name="Rounded Rectangle 8"/>
+          <p:cNvSpPr/>
+          <p:nvPr/>
+        </p:nvSpPr>
+        <p:spPr>
+          <a:xfrm>
+            <a:off x="4889377" y="1841500"/>
+            <a:ext cx="2857428" cy="838200"/>
+          </a:xfrm>
+          <a:prstGeom prst="roundRect">
+            <a:avLst/>
+          </a:prstGeom>
+          <a:solidFill>
+            <a:srgbClr val="EDF5FB"/>
+          </a:solidFill>
+          <a:ln>
+            <a:solidFill>
+              <a:srgbClr val="7BA4C7"/>
+            </a:solidFill>
+          </a:ln>
+        </p:spPr>
+        <p:style>
+          <a:lnRef idx="1">
+            <a:schemeClr val="accent1"/>
+          </a:lnRef>
+          <a:fillRef idx="3">
+            <a:schemeClr val="accent1"/>
+          </a:fillRef>
+          <a:effectRef idx="2">
+            <a:schemeClr val="accent1"/>
+          </a:effectRef>
+          <a:fontRef idx="minor">
+            <a:schemeClr val="lt1"/>
+          </a:fontRef>
+        </p:style>
+        <p:txBody>
+          <a:bodyPr rtlCol="0" anchor="ctr" wrap="square"/>
+          <a:lstStyle/>
+          <a:p>
+            <a:pPr algn="ctr">
+              <a:defRPr sz="1300" b="1">
+                <a:solidFill>
+                  <a:srgbClr val="0B3968"/>
+                </a:solidFill>
+                <a:latin typeface="BIZ UDPGothic"/>
+              </a:defRPr>
+            </a:pPr>
+            <a:r>
+              <a:t>削減効果の可視化</a:t>
+            </a:r>
+          </a:p>
+          <a:p>
+            <a:pPr algn="ctr">
+              <a:defRPr sz="1000">
+                <a:solidFill>
+                  <a:srgbClr val="555555"/>
+                </a:solidFill>
+                <a:latin typeface="BIZ UDPGothic"/>
+              </a:defRPr>
+            </a:pPr>
+            <a:r>
+              <a:t>トレードオフ曲線・UI</a:t>
+            </a:r>
+          </a:p>
+        </p:txBody>
+      </p:sp>
+      <p:sp>
+        <p:nvSpPr>
+          <p:cNvPr id="10" name="Rounded Rectangle 9"/>
+          <p:cNvSpPr/>
+          <p:nvPr/>
+        </p:nvSpPr>
+        <p:spPr>
+          <a:xfrm>
+            <a:off x="8572285" y="1841500"/>
+            <a:ext cx="2857428" cy="838200"/>
+          </a:xfrm>
+          <a:prstGeom prst="roundRect">
+            <a:avLst/>
+          </a:prstGeom>
+          <a:solidFill>
+            <a:srgbClr val="EDF5FB"/>
+          </a:solidFill>
+          <a:ln>
+            <a:solidFill>
+              <a:srgbClr val="7BA4C7"/>
+            </a:solidFill>
+          </a:ln>
+        </p:spPr>
+        <p:style>
+          <a:lnRef idx="1">
+            <a:schemeClr val="accent1"/>
+          </a:lnRef>
+          <a:fillRef idx="3">
+            <a:schemeClr val="accent1"/>
+          </a:fillRef>
+          <a:effectRef idx="2">
+            <a:schemeClr val="accent1"/>
+          </a:effectRef>
+          <a:fontRef idx="minor">
+            <a:schemeClr val="lt1"/>
+          </a:fontRef>
+        </p:style>
+        <p:txBody>
+          <a:bodyPr rtlCol="0" anchor="ctr" wrap="square"/>
+          <a:lstStyle/>
+          <a:p>
+            <a:pPr algn="ctr">
+              <a:defRPr sz="1300" b="1">
+                <a:solidFill>
+                  <a:srgbClr val="0B3968"/>
+                </a:solidFill>
+                <a:latin typeface="BIZ UDPGothic"/>
+              </a:defRPr>
+            </a:pPr>
+            <a:r>
+              <a:t>BM 意思決定</a:t>
+            </a:r>
+          </a:p>
+          <a:p>
+            <a:pPr algn="ctr">
+              <a:defRPr sz="1000">
+                <a:solidFill>
+                  <a:srgbClr val="555555"/>
+                </a:solidFill>
+                <a:latin typeface="BIZ UDPGothic"/>
+              </a:defRPr>
+            </a:pPr>
+            <a:r>
+              <a:t>安心・納得の起動判断</a:t>
+            </a:r>
+          </a:p>
+        </p:txBody>
+      </p:sp>
+      <p:sp>
+        <p:nvSpPr>
+          <p:cNvPr id="11" name="TextBox 10"/>
+          <p:cNvSpPr txBox="1"/>
+          <p:nvPr/>
+        </p:nvSpPr>
+        <p:spPr>
+          <a:xfrm>
+            <a:off x="571485" y="3175000"/>
+            <a:ext cx="7619809" cy="2794000"/>
+          </a:xfrm>
+          <a:prstGeom prst="rect">
+            <a:avLst/>
+          </a:prstGeom>
+          <a:noFill/>
+        </p:spPr>
+        <p:txBody>
+          <a:bodyPr wrap="square">
+            <a:spAutoFit/>
+          </a:bodyPr>
+          <a:lstStyle/>
+          <a:p>
+            <a:pPr>
+              <a:spcAft>
                 <a:spcPts val="400"/>
               </a:spcAft>
-              <a:defRPr sz="1600" b="1">
+              <a:defRPr sz="1500" b="1">
                 <a:solidFill>
                   <a:srgbClr val="0B3968"/>
                 </a:solidFill>
@@ -5021,7 +5296,7 @@
               </a:defRPr>
             </a:pPr>
             <a:r>
-              <a:t>■ 背景</a:t>
+              <a:t>■ 背景（なぜ今、熱源起動の最適化なのか）</a:t>
             </a:r>
           </a:p>
           <a:p>
@@ -5029,7 +5304,7 @@
               <a:spcAft>
                 <a:spcPts val="300"/>
               </a:spcAft>
-              <a:defRPr sz="1200">
+              <a:defRPr sz="1150">
                 <a:solidFill>
                   <a:srgbClr val="222222"/>
                 </a:solidFill>
@@ -5037,7 +5312,7 @@
               </a:defRPr>
             </a:pPr>
             <a:r>
-              <a:t>  ・近年、気候変動への対応や脱炭素に向け、ESG※1投資が世界的に拡大している</a:t>
+              <a:t>  ・【社会的要請】気候変動対応や脱炭素化に向け、ESG※1投資が世界的に拡大</a:t>
             </a:r>
           </a:p>
           <a:p>
@@ -5045,7 +5320,7 @@
               <a:spcAft>
                 <a:spcPts val="300"/>
               </a:spcAft>
-              <a:defRPr sz="1200">
+              <a:defRPr sz="1150">
                 <a:solidFill>
                   <a:srgbClr val="222222"/>
                 </a:solidFill>
@@ -5053,7 +5328,7 @@
               </a:defRPr>
             </a:pPr>
             <a:r>
-              <a:t>  ・快適性とエネルギーに関してシミュレーション技術で脱炭素化と企業価値向上に貢献する</a:t>
+              <a:t>  ・快適性とエネルギーに関してシミュレーション技術で脱炭素化と企業価値向上へ貢献</a:t>
             </a:r>
           </a:p>
           <a:p>
@@ -5061,7 +5336,7 @@
               <a:spcAft>
                 <a:spcPts val="300"/>
               </a:spcAft>
-              <a:defRPr sz="1200">
+              <a:defRPr sz="1150">
                 <a:solidFill>
                   <a:srgbClr val="222222"/>
                 </a:solidFill>
@@ -5069,88 +5344,21 @@
               </a:defRPr>
             </a:pPr>
             <a:r>
-              <a:t>  ・オフィスビルの熱源起動最適化に着目（※現場では未達を恐れ早朝一律の過剰予冷が発生）</a:t>
-            </a:r>
-          </a:p>
-          <a:p>
-            <a:pPr>
-              <a:spcBef>
-                <a:spcPts val="1200"/>
-              </a:spcBef>
-              <a:spcAft>
-                <a:spcPts val="400"/>
-              </a:spcAft>
-              <a:defRPr sz="1600" b="1">
-                <a:solidFill>
-                  <a:srgbClr val="0B3968"/>
-                </a:solidFill>
-                <a:latin typeface="BIZ UDPGothic"/>
-              </a:defRPr>
-            </a:pPr>
-            <a:r>
-              <a:t>■ 目的</a:t>
-            </a:r>
-          </a:p>
-          <a:p>
-            <a:pPr>
-              <a:spcAft>
-                <a:spcPts val="300"/>
-              </a:spcAft>
-              <a:defRPr sz="1200">
-                <a:solidFill>
-                  <a:srgbClr val="222222"/>
-                </a:solidFill>
-                <a:latin typeface="BIZ UDPGothic"/>
-              </a:defRPr>
-            </a:pPr>
-            <a:r>
-              <a:t>  ・空調熱源起動時刻をデータに基づいて最適化し、早朝予冷の無駄削減を目指す</a:t>
-            </a:r>
-          </a:p>
-          <a:p>
-            <a:pPr>
-              <a:spcAft>
-                <a:spcPts val="300"/>
-              </a:spcAft>
-              <a:defRPr sz="1200">
-                <a:solidFill>
-                  <a:srgbClr val="222222"/>
-                </a:solidFill>
-                <a:latin typeface="BIZ UDPGothic"/>
-              </a:defRPr>
-            </a:pPr>
-            <a:r>
-              <a:t>  ・それらの情報をわかりやすく可視化することで、ビルメンテナンス(BM)が根拠を持って</a:t>
-            </a:r>
-          </a:p>
-          <a:p>
-            <a:pPr>
-              <a:spcAft>
-                <a:spcPts val="300"/>
-              </a:spcAft>
-              <a:defRPr sz="1200">
-                <a:solidFill>
-                  <a:srgbClr val="222222"/>
-                </a:solidFill>
-                <a:latin typeface="BIZ UDPGothic"/>
-              </a:defRPr>
-            </a:pPr>
-            <a:r>
-              <a:t>     安全に起動時刻を判断できる意思決定支援システムを構築する</a:t>
-            </a:r>
-          </a:p>
-        </p:txBody>
-      </p:sp>
-      <p:sp>
-        <p:nvSpPr>
-          <p:cNvPr id="8" name="Rounded Rectangle 7"/>
+              <a:t>  ・【現場の実態】始業時の室温未達を恐れ、早朝一律の過剰予冷が発生し電力が浪費されている</a:t>
+            </a:r>
+          </a:p>
+        </p:txBody>
+      </p:sp>
+      <p:sp>
+        <p:nvSpPr>
+          <p:cNvPr id="12" name="Rounded Rectangle 11"/>
           <p:cNvSpPr/>
           <p:nvPr/>
         </p:nvSpPr>
         <p:spPr>
           <a:xfrm>
-            <a:off x="8508787" y="1143000"/>
-            <a:ext cx="3174920" cy="1079500"/>
+            <a:off x="8508787" y="3365500"/>
+            <a:ext cx="3174920" cy="1206500"/>
           </a:xfrm>
           <a:prstGeom prst="roundRect">
             <a:avLst/>
@@ -5231,210 +5439,6 @@
             </a:pPr>
             <a:r>
               <a:t>G(ガバナンス)：法令遵守・管理規則など</a:t>
-            </a:r>
-          </a:p>
-        </p:txBody>
-      </p:sp>
-      <p:sp>
-        <p:nvSpPr>
-          <p:cNvPr id="9" name="Rounded Rectangle 8"/>
-          <p:cNvSpPr/>
-          <p:nvPr/>
-        </p:nvSpPr>
-        <p:spPr>
-          <a:xfrm>
-            <a:off x="1206469" y="4762500"/>
-            <a:ext cx="2857428" cy="889000"/>
-          </a:xfrm>
-          <a:prstGeom prst="roundRect">
-            <a:avLst/>
-          </a:prstGeom>
-          <a:solidFill>
-            <a:srgbClr val="EDF5FB"/>
-          </a:solidFill>
-          <a:ln>
-            <a:solidFill>
-              <a:srgbClr val="7BA4C7"/>
-            </a:solidFill>
-          </a:ln>
-        </p:spPr>
-        <p:style>
-          <a:lnRef idx="1">
-            <a:schemeClr val="accent1"/>
-          </a:lnRef>
-          <a:fillRef idx="3">
-            <a:schemeClr val="accent1"/>
-          </a:fillRef>
-          <a:effectRef idx="2">
-            <a:schemeClr val="accent1"/>
-          </a:effectRef>
-          <a:fontRef idx="minor">
-            <a:schemeClr val="lt1"/>
-          </a:fontRef>
-        </p:style>
-        <p:txBody>
-          <a:bodyPr rtlCol="0" anchor="ctr" wrap="square"/>
-          <a:lstStyle/>
-          <a:p>
-            <a:pPr algn="ctr">
-              <a:defRPr sz="1300" b="1">
-                <a:solidFill>
-                  <a:srgbClr val="0B3968"/>
-                </a:solidFill>
-                <a:latin typeface="BIZ UDPGothic"/>
-              </a:defRPr>
-            </a:pPr>
-            <a:r>
-              <a:t>必要な予冷時間の予測</a:t>
-            </a:r>
-          </a:p>
-          <a:p>
-            <a:pPr algn="ctr">
-              <a:defRPr sz="1000">
-                <a:solidFill>
-                  <a:srgbClr val="555555"/>
-                </a:solidFill>
-                <a:latin typeface="BIZ UDPGothic"/>
-              </a:defRPr>
-            </a:pPr>
-            <a:r>
-              <a:t>気象予報 × 回帰モデル</a:t>
-            </a:r>
-          </a:p>
-        </p:txBody>
-      </p:sp>
-      <p:sp>
-        <p:nvSpPr>
-          <p:cNvPr id="10" name="Rounded Rectangle 9"/>
-          <p:cNvSpPr/>
-          <p:nvPr/>
-        </p:nvSpPr>
-        <p:spPr>
-          <a:xfrm>
-            <a:off x="4889377" y="4762500"/>
-            <a:ext cx="2857428" cy="889000"/>
-          </a:xfrm>
-          <a:prstGeom prst="roundRect">
-            <a:avLst/>
-          </a:prstGeom>
-          <a:solidFill>
-            <a:srgbClr val="EDF5FB"/>
-          </a:solidFill>
-          <a:ln>
-            <a:solidFill>
-              <a:srgbClr val="7BA4C7"/>
-            </a:solidFill>
-          </a:ln>
-        </p:spPr>
-        <p:style>
-          <a:lnRef idx="1">
-            <a:schemeClr val="accent1"/>
-          </a:lnRef>
-          <a:fillRef idx="3">
-            <a:schemeClr val="accent1"/>
-          </a:fillRef>
-          <a:effectRef idx="2">
-            <a:schemeClr val="accent1"/>
-          </a:effectRef>
-          <a:fontRef idx="minor">
-            <a:schemeClr val="lt1"/>
-          </a:fontRef>
-        </p:style>
-        <p:txBody>
-          <a:bodyPr rtlCol="0" anchor="ctr" wrap="square"/>
-          <a:lstStyle/>
-          <a:p>
-            <a:pPr algn="ctr">
-              <a:defRPr sz="1300" b="1">
-                <a:solidFill>
-                  <a:srgbClr val="0B3968"/>
-                </a:solidFill>
-                <a:latin typeface="BIZ UDPGothic"/>
-              </a:defRPr>
-            </a:pPr>
-            <a:r>
-              <a:t>削減効果の可視化</a:t>
-            </a:r>
-          </a:p>
-          <a:p>
-            <a:pPr algn="ctr">
-              <a:defRPr sz="1000">
-                <a:solidFill>
-                  <a:srgbClr val="555555"/>
-                </a:solidFill>
-                <a:latin typeface="BIZ UDPGothic"/>
-              </a:defRPr>
-            </a:pPr>
-            <a:r>
-              <a:t>トレードオフ曲線・UI</a:t>
-            </a:r>
-          </a:p>
-        </p:txBody>
-      </p:sp>
-      <p:sp>
-        <p:nvSpPr>
-          <p:cNvPr id="11" name="Rounded Rectangle 10"/>
-          <p:cNvSpPr/>
-          <p:nvPr/>
-        </p:nvSpPr>
-        <p:spPr>
-          <a:xfrm>
-            <a:off x="8572285" y="4762500"/>
-            <a:ext cx="2857428" cy="889000"/>
-          </a:xfrm>
-          <a:prstGeom prst="roundRect">
-            <a:avLst/>
-          </a:prstGeom>
-          <a:solidFill>
-            <a:srgbClr val="EDF5FB"/>
-          </a:solidFill>
-          <a:ln>
-            <a:solidFill>
-              <a:srgbClr val="7BA4C7"/>
-            </a:solidFill>
-          </a:ln>
-        </p:spPr>
-        <p:style>
-          <a:lnRef idx="1">
-            <a:schemeClr val="accent1"/>
-          </a:lnRef>
-          <a:fillRef idx="3">
-            <a:schemeClr val="accent1"/>
-          </a:fillRef>
-          <a:effectRef idx="2">
-            <a:schemeClr val="accent1"/>
-          </a:effectRef>
-          <a:fontRef idx="minor">
-            <a:schemeClr val="lt1"/>
-          </a:fontRef>
-        </p:style>
-        <p:txBody>
-          <a:bodyPr rtlCol="0" anchor="ctr" wrap="square"/>
-          <a:lstStyle/>
-          <a:p>
-            <a:pPr algn="ctr">
-              <a:defRPr sz="1300" b="1">
-                <a:solidFill>
-                  <a:srgbClr val="0B3968"/>
-                </a:solidFill>
-                <a:latin typeface="BIZ UDPGothic"/>
-              </a:defRPr>
-            </a:pPr>
-            <a:r>
-              <a:t>BM 意思決定</a:t>
-            </a:r>
-          </a:p>
-          <a:p>
-            <a:pPr algn="ctr">
-              <a:defRPr sz="1000">
-                <a:solidFill>
-                  <a:srgbClr val="555555"/>
-                </a:solidFill>
-                <a:latin typeface="BIZ UDPGothic"/>
-              </a:defRPr>
-            </a:pPr>
-            <a:r>
-              <a:t>安心・納得の起動判断</a:t>
             </a:r>
           </a:p>
         </p:txBody>

--- a/public/slides/hvac-precooling-slides.pptx
+++ b/public/slides/hvac-precooling-slides.pptx
@@ -580,7 +580,7 @@
           <a:lstStyle/>
           <a:p>
             <a:r>
-              <a:t>まず初めに、自己紹介をさせていただきます。私は北海道大学大学院情報科学専攻で、遺伝子ネットワークモデルの制御や投薬順序の最適化に関する研究を行っています。趣味は鉄道旅行です。今回のインターンシップには、「大学では扱えない実機・現場の実データに触れたい」「お客様目線でのシステム開発を学びたい」「関西の活気ある雰囲気を感じたい」という3つの理由から参加いたしました。</a:t>
+              <a:t>まず初めに、自己紹介をさせていただきます。私は北海道大学大学院情報科学専攻で、遺伝子ネットワークモデルの制御や投薬順序の最適化に関する研究を行っています。趣味は鉄道旅行です。今回のインターンシップには、「大学では扱えない実機設備や現場データに触れたい」「お客様目線でのシステム開発を学びたい」「関西の活気ある雰囲気を感じたい」という3つの理由から参加いたしました。</a:t>
             </a:r>
           </a:p>
         </p:txBody>
@@ -860,7 +860,7 @@
           <a:lstStyle/>
           <a:p>
             <a:r>
-              <a:t>開発した最適起動モデルを実データに適用した、バックテスト検証結果です。過去データの実測気温推移からモデルで予冷時間を推計し、始業8:00から逆算して、確実に間に合う範囲で最も遅い起動時刻を決定し直しました。その結果、全日で8:00始業前の設定温度到達を達成できました。効果として、まず運転時間は平均で約104分短縮され、最大で1時間40分ほど起動を遅らせることができました。その結果、始業前の消費電力量は平均で約36%削減できることを確認いたしました。</a:t>
+              <a:t>開発した最適起動モデルを過去の運用実績データに適用した、バックテスト検証結果です。過去データの実測気温推移からモデルで予冷時間を推計し、始業8:00から逆算して、確実に間に合う範囲で最も遅い起動時刻を決定し直しました。その結果、全日で8:00始業前の設定温度到達を達成できました。効果として、まず運転時間は平均で約104分短縮され、最大で1時間40分ほど起動を遅らせることができました。その結果、始業前の消費電力量は平均で約36%削減できることを確認いたしました。</a:t>
             </a:r>
           </a:p>
         </p:txBody>
@@ -1070,7 +1070,7 @@
           <a:lstStyle/>
           <a:p>
             <a:r>
-              <a:t>最後に、2週間の実習を通した所感です。初日の自己紹介で挙げた「3つの参加理由」に対し、期待を大きく超える充実した学びを得ることができました。まず開発面では、単に予測モデルを作るだけでなく、現場のBM担当者がどうすれば安心して起動を遅らせられるかという「お客様目線」でのUI・安全マージン設計の難しさと重要性を深く学びました。また、大学では扱えない実機データに触れる中で、シミュレーション技術が脱炭素や社会貢献に直結しているという強い手応えを得ることができました。そしてインターンシップ全体を通じ、デスクワークにとどまらず実験住宅やセキュリティ現場の見学など幅広い体験をさせていただき、当社の高い技術力と現場主義の社風を肌で体感いたしました。親身にご指導いただいたメンターの皆様、関係者の皆様に心より感謝申し上げます。2週間、本当にありがとうございました。</a:t>
+              <a:t>最後に、2週間の実習を通した所感です。初日の自己紹介で挙げた「3つの参加理由」に対し、期待を大きく超える充実した学びを得ることができました。まず開発面では、単に予測モデルを作るだけでなく、現場のBM担当者がどうすれば安心して起動を遅らせられるかという「お客様目線」でのUI・安全マージン設計の難しさと重要性を深く学びました。また、大学では扱えない実機設備や現場データに触れる中で、シミュレーション技術が脱炭素や社会貢献に直結しているという強い手応えを得ることができました。そしてインターンシップ全体を通じ、デスクワークにとどまらず実験住宅やセキュリティ現場の見学など幅広い体験をさせていただき、当社の高い技術力と現場主義の社風を肌で体感いたしました。親身にご指導いただいたメンターの皆様、関係者の皆様に心より感謝申し上げます。2週間、本当にありがとうございました。</a:t>
             </a:r>
           </a:p>
         </p:txBody>
@@ -4591,7 +4591,7 @@
               </a:defRPr>
             </a:pPr>
             <a:r>
-              <a:t>   ① 大学では扱えない実データに触れる</a:t>
+              <a:t>   ① 大学では扱えない実機設備・データに触れる</a:t>
             </a:r>
           </a:p>
           <a:p>
@@ -6703,7 +6703,7 @@
               </a:defRPr>
             </a:pPr>
             <a:r>
-              <a:t>■ 実データでの検証</a:t>
+              <a:t>■ 運用実績データでの検証</a:t>
             </a:r>
           </a:p>
           <a:p>
@@ -6716,7 +6716,7 @@
               </a:defRPr>
             </a:pPr>
             <a:r>
-              <a:t>  ・作成した予測モデルを用い、実際の過去データの気温推移から必要な予冷時間を推測、起動時間を決定した</a:t>
+              <a:t>  ・作成した予測モデルを用い、過去の気温推移から必要な予冷時間を予測、起動時間を決定した</a:t>
             </a:r>
           </a:p>
           <a:p>
